--- a/documentation/презентация_PetDiary.pptx
+++ b/documentation/презентация_PetDiary.pptx
@@ -8,14 +8,14 @@
     <p:sldId id="268" r:id="rId2"/>
     <p:sldId id="257" r:id="rId3"/>
     <p:sldId id="258" r:id="rId4"/>
-    <p:sldId id="259" r:id="rId5"/>
-    <p:sldId id="260" r:id="rId6"/>
-    <p:sldId id="261" r:id="rId7"/>
-    <p:sldId id="262" r:id="rId8"/>
-    <p:sldId id="263" r:id="rId9"/>
-    <p:sldId id="264" r:id="rId10"/>
-    <p:sldId id="265" r:id="rId11"/>
-    <p:sldId id="266" r:id="rId12"/>
+    <p:sldId id="269" r:id="rId5"/>
+    <p:sldId id="259" r:id="rId6"/>
+    <p:sldId id="260" r:id="rId7"/>
+    <p:sldId id="261" r:id="rId8"/>
+    <p:sldId id="262" r:id="rId9"/>
+    <p:sldId id="263" r:id="rId10"/>
+    <p:sldId id="264" r:id="rId11"/>
+    <p:sldId id="265" r:id="rId12"/>
     <p:sldId id="267" r:id="rId13"/>
   </p:sldIdLst>
   <p:sldSz cx="12192000" cy="6858000"/>
@@ -115,6 +115,11 @@
       </a:defRPr>
     </a:lvl9pPr>
   </p:defaultTextStyle>
+  <p:extLst>
+    <p:ext uri="{EFAFB233-063F-42B5-8137-9DF3F51BA10A}">
+      <p15:sldGuideLst xmlns:p15="http://schemas.microsoft.com/office/powerpoint/2012/main"/>
+    </p:ext>
+  </p:extLst>
 </p:presentation>
 </file>
 
@@ -3346,8 +3351,8 @@
         </p:nvSpPr>
         <p:spPr>
           <a:xfrm>
-            <a:off x="2214751" y="3186153"/>
-            <a:ext cx="8147507" cy="1077218"/>
+            <a:off x="1416186" y="3189774"/>
+            <a:ext cx="9359626" cy="1077218"/>
           </a:xfrm>
           <a:prstGeom prst="rect">
             <a:avLst/>
@@ -3399,8 +3404,8 @@
         </p:nvSpPr>
         <p:spPr>
           <a:xfrm>
-            <a:off x="1275348" y="236764"/>
-            <a:ext cx="9641304" cy="1015663"/>
+            <a:off x="645695" y="228676"/>
+            <a:ext cx="11429999" cy="1154162"/>
           </a:xfrm>
           <a:prstGeom prst="rect">
             <a:avLst/>
@@ -3415,9 +3420,9 @@
           <a:p>
             <a:pPr algn="ctr"/>
             <a:r>
-              <a:rPr lang="ru-RU" sz="2000" dirty="0">
-                <a:latin typeface="Times New Roman" panose="02020603050405020304" pitchFamily="18" charset="0"/>
-                <a:cs typeface="Times New Roman" panose="02020603050405020304" pitchFamily="18" charset="0"/>
+              <a:rPr lang="ru-RU" sz="2300" dirty="0">
+                <a:latin typeface="Arial" panose="020B0604020202020204" pitchFamily="34" charset="0"/>
+                <a:cs typeface="Arial" panose="020B0604020202020204" pitchFamily="34" charset="0"/>
               </a:rPr>
               <a:t>МИНОБРНАУКИ РОССИИ ФЕДЕРАЛЬНОЕ ГОСУДАРСТВЕННОЕ БЮДЖЕТНОЕ ОБРАЗОВАТЕЛЬНОЕ УЧРЕЖДЕНИЕ ВЫСШЕГО ОБРАЗОВАНИЯ «ВОРОНЕЖСКИЙ ГОСУДАРСТВЕННЫЙ УНИВЕРСИТЕТ» (ФГБОУ ВО «ВГУ») </a:t>
             </a:r>
@@ -3438,8 +3443,8 @@
         </p:nvSpPr>
         <p:spPr>
           <a:xfrm>
-            <a:off x="3240505" y="1905506"/>
-            <a:ext cx="6096000" cy="707886"/>
+            <a:off x="1074822" y="1789943"/>
+            <a:ext cx="10571746" cy="800219"/>
           </a:xfrm>
           <a:prstGeom prst="rect">
             <a:avLst/>
@@ -3454,11 +3459,25 @@
           <a:p>
             <a:pPr algn="ctr"/>
             <a:r>
-              <a:rPr lang="ru-RU" sz="2000" dirty="0">
-                <a:latin typeface="Times New Roman" panose="02020603050405020304" pitchFamily="18" charset="0"/>
-                <a:cs typeface="Times New Roman" panose="02020603050405020304" pitchFamily="18" charset="0"/>
+              <a:rPr lang="ru-RU" sz="2300" dirty="0">
+                <a:latin typeface="Arial" panose="020B0604020202020204" pitchFamily="34" charset="0"/>
+                <a:cs typeface="Arial" panose="020B0604020202020204" pitchFamily="34" charset="0"/>
               </a:rPr>
-              <a:t>Факультет компьютерных наук Кафедра программирования и информационных технологий </a:t>
+              <a:t>Факультет компьютерных наук </a:t>
+            </a:r>
+            <a:endParaRPr lang="en-US" sz="2300" dirty="0">
+              <a:latin typeface="Arial" panose="020B0604020202020204" pitchFamily="34" charset="0"/>
+              <a:cs typeface="Arial" panose="020B0604020202020204" pitchFamily="34" charset="0"/>
+            </a:endParaRPr>
+          </a:p>
+          <a:p>
+            <a:pPr algn="ctr"/>
+            <a:r>
+              <a:rPr lang="ru-RU" sz="2300" dirty="0">
+                <a:latin typeface="Arial" panose="020B0604020202020204" pitchFamily="34" charset="0"/>
+                <a:cs typeface="Arial" panose="020B0604020202020204" pitchFamily="34" charset="0"/>
+              </a:rPr>
+              <a:t>Кафедра программирования и информационных технологий </a:t>
             </a:r>
           </a:p>
         </p:txBody>
@@ -3477,8 +3496,8 @@
         </p:nvSpPr>
         <p:spPr>
           <a:xfrm>
-            <a:off x="7411452" y="5974905"/>
-            <a:ext cx="4908883" cy="646331"/>
+            <a:off x="6360695" y="5828259"/>
+            <a:ext cx="5999746" cy="800219"/>
           </a:xfrm>
           <a:prstGeom prst="rect">
             <a:avLst/>
@@ -3492,32 +3511,32 @@
           <a:lstStyle/>
           <a:p>
             <a:r>
-              <a:rPr lang="ru-RU" dirty="0">
-                <a:latin typeface="Times New Roman" panose="02020603050405020304" pitchFamily="18" charset="0"/>
-                <a:cs typeface="Times New Roman" panose="02020603050405020304" pitchFamily="18" charset="0"/>
+              <a:rPr lang="ru-RU" sz="2300" dirty="0">
+                <a:latin typeface="Arial" panose="020B0604020202020204" pitchFamily="34" charset="0"/>
+                <a:cs typeface="Arial" panose="020B0604020202020204" pitchFamily="34" charset="0"/>
               </a:rPr>
               <a:t>Научный руководитель: </a:t>
             </a:r>
             <a:r>
-              <a:rPr lang="en-US" dirty="0">
-                <a:latin typeface="Times New Roman" panose="02020603050405020304" pitchFamily="18" charset="0"/>
-                <a:cs typeface="Times New Roman" panose="02020603050405020304" pitchFamily="18" charset="0"/>
+              <a:rPr lang="en-US" sz="2300" dirty="0">
+                <a:latin typeface="Arial" panose="020B0604020202020204" pitchFamily="34" charset="0"/>
+                <a:cs typeface="Arial" panose="020B0604020202020204" pitchFamily="34" charset="0"/>
               </a:rPr>
               <a:t> </a:t>
             </a:r>
             <a:r>
-              <a:rPr lang="ru-RU" dirty="0">
-                <a:latin typeface="Times New Roman" panose="02020603050405020304" pitchFamily="18" charset="0"/>
-                <a:cs typeface="Times New Roman" panose="02020603050405020304" pitchFamily="18" charset="0"/>
+              <a:rPr lang="ru-RU" sz="2300" dirty="0">
+                <a:latin typeface="Arial" panose="020B0604020202020204" pitchFamily="34" charset="0"/>
+                <a:cs typeface="Arial" panose="020B0604020202020204" pitchFamily="34" charset="0"/>
               </a:rPr>
               <a:t>асс. Ушаков В.А. </a:t>
             </a:r>
           </a:p>
           <a:p>
             <a:r>
-              <a:rPr lang="ru-RU" dirty="0">
-                <a:latin typeface="Times New Roman" panose="02020603050405020304" pitchFamily="18" charset="0"/>
-                <a:cs typeface="Times New Roman" panose="02020603050405020304" pitchFamily="18" charset="0"/>
+              <a:rPr lang="ru-RU" sz="2300" dirty="0">
+                <a:latin typeface="Arial" panose="020B0604020202020204" pitchFamily="34" charset="0"/>
+                <a:cs typeface="Arial" panose="020B0604020202020204" pitchFamily="34" charset="0"/>
               </a:rPr>
               <a:t>Выполнила: ст.3 курса Аверкиева  Е.А.</a:t>
             </a:r>
@@ -3556,10 +3575,10 @@
       </p:grpSpPr>
       <p:sp>
         <p:nvSpPr>
-          <p:cNvPr id="3" name="Google Shape;183;p13">
-            <a:extLst>
-              <a:ext uri="{FF2B5EF4-FFF2-40B4-BE49-F238E27FC236}">
-                <a16:creationId xmlns:a16="http://schemas.microsoft.com/office/drawing/2014/main" id="{0548F77D-024B-F6C5-4264-2526BDDCA981}"/>
+          <p:cNvPr id="3" name="Google Shape;172;p12">
+            <a:extLst>
+              <a:ext uri="{FF2B5EF4-FFF2-40B4-BE49-F238E27FC236}">
+                <a16:creationId xmlns:a16="http://schemas.microsoft.com/office/drawing/2014/main" id="{66581FA5-FBC4-7261-DDCD-22E60DECE331}"/>
               </a:ext>
             </a:extLst>
           </p:cNvPr>
@@ -3616,10 +3635,10 @@
       </p:sp>
       <p:sp>
         <p:nvSpPr>
-          <p:cNvPr id="4" name="Google Shape;184;p13">
-            <a:extLst>
-              <a:ext uri="{FF2B5EF4-FFF2-40B4-BE49-F238E27FC236}">
-                <a16:creationId xmlns:a16="http://schemas.microsoft.com/office/drawing/2014/main" id="{6FB9703A-FF9A-000F-1549-2A26868FCA42}"/>
+          <p:cNvPr id="4" name="Google Shape;173;p12">
+            <a:extLst>
+              <a:ext uri="{FF2B5EF4-FFF2-40B4-BE49-F238E27FC236}">
+                <a16:creationId xmlns:a16="http://schemas.microsoft.com/office/drawing/2014/main" id="{F1D3D133-B7E7-1344-25DB-1B80C37CA510}"/>
               </a:ext>
             </a:extLst>
           </p:cNvPr>
@@ -3681,27 +3700,35 @@
             </a:pPr>
             <a:r>
               <a:rPr lang="ru-RU"/>
-              <a:t>Заключение</a:t>
-            </a:r>
-          </a:p>
-        </p:txBody>
-      </p:sp>
-      <p:sp>
-        <p:nvSpPr>
-          <p:cNvPr id="5" name="Google Shape;185;p13">
-            <a:extLst>
-              <a:ext uri="{FF2B5EF4-FFF2-40B4-BE49-F238E27FC236}">
-                <a16:creationId xmlns:a16="http://schemas.microsoft.com/office/drawing/2014/main" id="{B5A52987-F053-1AC8-8F26-53A6D1B36963}"/>
-              </a:ext>
-            </a:extLst>
-          </p:cNvPr>
-          <p:cNvSpPr txBox="1"/>
+              <a:t>Основные экраны</a:t>
+            </a:r>
+          </a:p>
+        </p:txBody>
+      </p:sp>
+      <p:pic>
+        <p:nvPicPr>
+          <p:cNvPr id="5" name="Google Shape;174;p12">
+            <a:extLst>
+              <a:ext uri="{FF2B5EF4-FFF2-40B4-BE49-F238E27FC236}">
+                <a16:creationId xmlns:a16="http://schemas.microsoft.com/office/drawing/2014/main" id="{072A6B84-E6E2-65AA-BD4B-8C5AF8213191}"/>
+              </a:ext>
+            </a:extLst>
+          </p:cNvPr>
+          <p:cNvPicPr preferRelativeResize="0"/>
           <p:nvPr/>
-        </p:nvSpPr>
+        </p:nvPicPr>
+        <p:blipFill>
+          <a:blip r:embed="rId2">
+            <a:alphaModFix/>
+          </a:blip>
+          <a:stretch>
+            <a:fillRect/>
+          </a:stretch>
+        </p:blipFill>
         <p:spPr>
           <a:xfrm>
-            <a:off x="838200" y="1679512"/>
-            <a:ext cx="10582469" cy="2492990"/>
+            <a:off x="675922" y="1074028"/>
+            <a:ext cx="2228350" cy="4894085"/>
           </a:xfrm>
           <a:prstGeom prst="rect">
             <a:avLst/>
@@ -3711,90 +3738,113 @@
             <a:noFill/>
           </a:ln>
         </p:spPr>
-        <p:txBody>
-          <a:bodyPr spcFirstLastPara="1" wrap="square" lIns="91425" tIns="45700" rIns="91425" bIns="45700" anchor="t" anchorCtr="0">
-            <a:spAutoFit/>
-          </a:bodyPr>
-          <a:lstStyle/>
-          <a:p>
-            <a:pPr marL="0" marR="0" lvl="0" indent="0" algn="just" rtl="0">
-              <a:spcBef>
-                <a:spcPts val="0"/>
-              </a:spcBef>
-              <a:spcAft>
-                <a:spcPts val="0"/>
-              </a:spcAft>
-              <a:buNone/>
-            </a:pPr>
-            <a:r>
-              <a:rPr lang="ru-RU" sz="2300" b="0" i="0">
-                <a:latin typeface="Arial"/>
-                <a:ea typeface="Arial"/>
-                <a:cs typeface="Arial"/>
-                <a:sym typeface="Arial"/>
-              </a:rPr>
-              <a:t>	В результате выполнения работы было разработано мобильное приложение «Pet Diary», которое полностью соответствует поставленным целям и задачам.</a:t>
-            </a:r>
-            <a:r>
-              <a:rPr lang="ru-RU" sz="1800">
-                <a:latin typeface="Times New Roman"/>
-                <a:ea typeface="Times New Roman"/>
-                <a:cs typeface="Times New Roman"/>
-                <a:sym typeface="Times New Roman"/>
-              </a:rPr>
-              <a:t> </a:t>
-            </a:r>
-            <a:endParaRPr/>
-          </a:p>
-          <a:p>
-            <a:pPr marL="0" marR="0" lvl="0" indent="0" algn="just" rtl="0">
-              <a:spcBef>
-                <a:spcPts val="0"/>
-              </a:spcBef>
-              <a:spcAft>
-                <a:spcPts val="0"/>
-              </a:spcAft>
-              <a:buNone/>
-            </a:pPr>
-            <a:endParaRPr sz="1800">
-              <a:latin typeface="Times New Roman"/>
-              <a:ea typeface="Times New Roman"/>
-              <a:cs typeface="Times New Roman"/>
-              <a:sym typeface="Times New Roman"/>
-            </a:endParaRPr>
-          </a:p>
-          <a:p>
-            <a:pPr marL="0" marR="0" lvl="0" indent="0" algn="just" rtl="0">
-              <a:spcBef>
-                <a:spcPts val="0"/>
-              </a:spcBef>
-              <a:spcAft>
-                <a:spcPts val="0"/>
-              </a:spcAft>
-              <a:buNone/>
-            </a:pPr>
-            <a:r>
-              <a:rPr lang="ru-RU" sz="2300" b="0" i="0">
-                <a:latin typeface="Arial"/>
-                <a:ea typeface="Arial"/>
-                <a:cs typeface="Arial"/>
-                <a:sym typeface="Arial"/>
-              </a:rPr>
-              <a:t>	Приложение позволяет пользователям создавать детальные профили своих питомцев, планировать связанные с ними события с напоминаниями и быстро находить необходимые зоо-услуги на карте.</a:t>
-            </a:r>
-            <a:endParaRPr sz="2300">
-              <a:latin typeface="Arial"/>
-              <a:ea typeface="Arial"/>
-              <a:cs typeface="Arial"/>
-              <a:sym typeface="Arial"/>
-            </a:endParaRPr>
-          </a:p>
-        </p:txBody>
-      </p:sp>
+      </p:pic>
+      <p:pic>
+        <p:nvPicPr>
+          <p:cNvPr id="6" name="Google Shape;175;p12">
+            <a:extLst>
+              <a:ext uri="{FF2B5EF4-FFF2-40B4-BE49-F238E27FC236}">
+                <a16:creationId xmlns:a16="http://schemas.microsoft.com/office/drawing/2014/main" id="{21C9AB45-6B29-EE2C-2521-D95B0CD50314}"/>
+              </a:ext>
+            </a:extLst>
+          </p:cNvPr>
+          <p:cNvPicPr preferRelativeResize="0"/>
+          <p:nvPr/>
+        </p:nvPicPr>
+        <p:blipFill>
+          <a:blip r:embed="rId3">
+            <a:alphaModFix/>
+          </a:blip>
+          <a:stretch>
+            <a:fillRect/>
+          </a:stretch>
+        </p:blipFill>
+        <p:spPr>
+          <a:xfrm>
+            <a:off x="6382263" y="1074066"/>
+            <a:ext cx="2228325" cy="4894020"/>
+          </a:xfrm>
+          <a:prstGeom prst="rect">
+            <a:avLst/>
+          </a:prstGeom>
+          <a:noFill/>
+          <a:ln>
+            <a:noFill/>
+          </a:ln>
+        </p:spPr>
+      </p:pic>
+      <p:pic>
+        <p:nvPicPr>
+          <p:cNvPr id="7" name="Google Shape;176;p12">
+            <a:extLst>
+              <a:ext uri="{FF2B5EF4-FFF2-40B4-BE49-F238E27FC236}">
+                <a16:creationId xmlns:a16="http://schemas.microsoft.com/office/drawing/2014/main" id="{B073929A-11CC-6D1F-1168-32C361AF6DCF}"/>
+              </a:ext>
+            </a:extLst>
+          </p:cNvPr>
+          <p:cNvPicPr preferRelativeResize="0"/>
+          <p:nvPr/>
+        </p:nvPicPr>
+        <p:blipFill>
+          <a:blip r:embed="rId4">
+            <a:alphaModFix/>
+          </a:blip>
+          <a:stretch>
+            <a:fillRect/>
+          </a:stretch>
+        </p:blipFill>
+        <p:spPr>
+          <a:xfrm>
+            <a:off x="9125447" y="1074028"/>
+            <a:ext cx="2228351" cy="4894085"/>
+          </a:xfrm>
+          <a:prstGeom prst="rect">
+            <a:avLst/>
+          </a:prstGeom>
+          <a:noFill/>
+          <a:ln>
+            <a:noFill/>
+          </a:ln>
+        </p:spPr>
+      </p:pic>
+      <p:pic>
+        <p:nvPicPr>
+          <p:cNvPr id="8" name="Google Shape;177;p12">
+            <a:extLst>
+              <a:ext uri="{FF2B5EF4-FFF2-40B4-BE49-F238E27FC236}">
+                <a16:creationId xmlns:a16="http://schemas.microsoft.com/office/drawing/2014/main" id="{1914963E-834B-0398-F23E-D74E38A8B1C5}"/>
+              </a:ext>
+            </a:extLst>
+          </p:cNvPr>
+          <p:cNvPicPr preferRelativeResize="0"/>
+          <p:nvPr/>
+        </p:nvPicPr>
+        <p:blipFill>
+          <a:blip r:embed="rId5">
+            <a:alphaModFix/>
+          </a:blip>
+          <a:stretch>
+            <a:fillRect/>
+          </a:stretch>
+        </p:blipFill>
+        <p:spPr>
+          <a:xfrm>
+            <a:off x="3581397" y="1074070"/>
+            <a:ext cx="2228325" cy="4894029"/>
+          </a:xfrm>
+          <a:prstGeom prst="rect">
+            <a:avLst/>
+          </a:prstGeom>
+          <a:noFill/>
+          <a:ln>
+            <a:noFill/>
+          </a:ln>
+        </p:spPr>
+      </p:pic>
     </p:spTree>
     <p:extLst>
       <p:ext uri="{BB962C8B-B14F-4D97-AF65-F5344CB8AC3E}">
-        <p14:creationId xmlns:p14="http://schemas.microsoft.com/office/powerpoint/2010/main" val="2351513384"/>
+        <p14:creationId xmlns:p14="http://schemas.microsoft.com/office/powerpoint/2010/main" val="2440161351"/>
       </p:ext>
     </p:extLst>
   </p:cSld>
@@ -3823,10 +3873,10 @@
       </p:grpSpPr>
       <p:sp>
         <p:nvSpPr>
-          <p:cNvPr id="3" name="Google Shape;191;p14">
-            <a:extLst>
-              <a:ext uri="{FF2B5EF4-FFF2-40B4-BE49-F238E27FC236}">
-                <a16:creationId xmlns:a16="http://schemas.microsoft.com/office/drawing/2014/main" id="{B8E77588-E6CD-64A0-8D5A-1531133045E1}"/>
+          <p:cNvPr id="3" name="Google Shape;183;p13">
+            <a:extLst>
+              <a:ext uri="{FF2B5EF4-FFF2-40B4-BE49-F238E27FC236}">
+                <a16:creationId xmlns:a16="http://schemas.microsoft.com/office/drawing/2014/main" id="{0548F77D-024B-F6C5-4264-2526BDDCA981}"/>
               </a:ext>
             </a:extLst>
           </p:cNvPr>
@@ -3883,10 +3933,10 @@
       </p:sp>
       <p:sp>
         <p:nvSpPr>
-          <p:cNvPr id="4" name="Google Shape;192;p14">
-            <a:extLst>
-              <a:ext uri="{FF2B5EF4-FFF2-40B4-BE49-F238E27FC236}">
-                <a16:creationId xmlns:a16="http://schemas.microsoft.com/office/drawing/2014/main" id="{DED96E9C-F1AE-10D7-5F82-D42BE963F0B6}"/>
+          <p:cNvPr id="4" name="Google Shape;184;p13">
+            <a:extLst>
+              <a:ext uri="{FF2B5EF4-FFF2-40B4-BE49-F238E27FC236}">
+                <a16:creationId xmlns:a16="http://schemas.microsoft.com/office/drawing/2014/main" id="{6FB9703A-FF9A-000F-1549-2A26868FCA42}"/>
               </a:ext>
             </a:extLst>
           </p:cNvPr>
@@ -3948,17 +3998,335 @@
             </a:pPr>
             <a:r>
               <a:rPr lang="ru-RU"/>
-              <a:t>Планы развития</a:t>
-            </a:r>
-          </a:p>
-        </p:txBody>
-      </p:sp>
-      <p:sp>
-        <p:nvSpPr>
-          <p:cNvPr id="5" name="Google Shape;193;p14">
-            <a:extLst>
-              <a:ext uri="{FF2B5EF4-FFF2-40B4-BE49-F238E27FC236}">
-                <a16:creationId xmlns:a16="http://schemas.microsoft.com/office/drawing/2014/main" id="{DF943BE8-760F-6DEF-6EAA-72C3A9C9C222}"/>
+              <a:t>Заключение</a:t>
+            </a:r>
+          </a:p>
+        </p:txBody>
+      </p:sp>
+      <p:sp>
+        <p:nvSpPr>
+          <p:cNvPr id="5" name="Google Shape;185;p13">
+            <a:extLst>
+              <a:ext uri="{FF2B5EF4-FFF2-40B4-BE49-F238E27FC236}">
+                <a16:creationId xmlns:a16="http://schemas.microsoft.com/office/drawing/2014/main" id="{B5A52987-F053-1AC8-8F26-53A6D1B36963}"/>
+              </a:ext>
+            </a:extLst>
+          </p:cNvPr>
+          <p:cNvSpPr txBox="1"/>
+          <p:nvPr/>
+        </p:nvSpPr>
+        <p:spPr>
+          <a:xfrm>
+            <a:off x="838200" y="1679512"/>
+            <a:ext cx="10582469" cy="1785064"/>
+          </a:xfrm>
+          <a:prstGeom prst="rect">
+            <a:avLst/>
+          </a:prstGeom>
+          <a:noFill/>
+          <a:ln>
+            <a:noFill/>
+          </a:ln>
+        </p:spPr>
+        <p:txBody>
+          <a:bodyPr spcFirstLastPara="1" wrap="square" lIns="91425" tIns="45700" rIns="91425" bIns="45700" anchor="t" anchorCtr="0">
+            <a:spAutoFit/>
+          </a:bodyPr>
+          <a:lstStyle/>
+          <a:p>
+            <a:pPr marL="0" marR="0" lvl="0" indent="0" algn="just" rtl="0">
+              <a:spcBef>
+                <a:spcPts val="0"/>
+              </a:spcBef>
+              <a:spcAft>
+                <a:spcPts val="0"/>
+              </a:spcAft>
+              <a:buNone/>
+            </a:pPr>
+            <a:r>
+              <a:rPr lang="ru-RU" sz="2300" b="0" i="0" dirty="0">
+                <a:latin typeface="Arial"/>
+                <a:ea typeface="Arial"/>
+                <a:cs typeface="Arial"/>
+                <a:sym typeface="Arial"/>
+              </a:rPr>
+              <a:t>	В результате выполнения работы было разработано мобильное приложение «</a:t>
+            </a:r>
+            <a:r>
+              <a:rPr lang="ru-RU" sz="2300" b="0" i="0" dirty="0" err="1">
+                <a:latin typeface="Arial"/>
+                <a:ea typeface="Arial"/>
+                <a:cs typeface="Arial"/>
+                <a:sym typeface="Arial"/>
+              </a:rPr>
+              <a:t>Pet</a:t>
+            </a:r>
+            <a:r>
+              <a:rPr lang="ru-RU" sz="2300" b="0" i="0" dirty="0">
+                <a:latin typeface="Arial"/>
+                <a:ea typeface="Arial"/>
+                <a:cs typeface="Arial"/>
+                <a:sym typeface="Arial"/>
+              </a:rPr>
+              <a:t> </a:t>
+            </a:r>
+            <a:r>
+              <a:rPr lang="ru-RU" sz="2300" b="0" i="0" dirty="0" err="1">
+                <a:latin typeface="Arial"/>
+                <a:ea typeface="Arial"/>
+                <a:cs typeface="Arial"/>
+                <a:sym typeface="Arial"/>
+              </a:rPr>
+              <a:t>Diary</a:t>
+            </a:r>
+            <a:r>
+              <a:rPr lang="ru-RU" sz="2300" b="0" i="0" dirty="0">
+                <a:latin typeface="Arial"/>
+                <a:ea typeface="Arial"/>
+                <a:cs typeface="Arial"/>
+                <a:sym typeface="Arial"/>
+              </a:rPr>
+              <a:t>», которое полностью соответствует поставленным целям и задачам.</a:t>
+            </a:r>
+            <a:r>
+              <a:rPr lang="ru-RU" sz="1800" dirty="0">
+                <a:latin typeface="Times New Roman"/>
+                <a:ea typeface="Times New Roman"/>
+                <a:cs typeface="Times New Roman"/>
+                <a:sym typeface="Times New Roman"/>
+              </a:rPr>
+              <a:t> </a:t>
+            </a:r>
+            <a:endParaRPr dirty="0"/>
+          </a:p>
+          <a:p>
+            <a:pPr marL="0" marR="0" lvl="0" indent="0" algn="just" rtl="0">
+              <a:spcBef>
+                <a:spcPts val="0"/>
+              </a:spcBef>
+              <a:spcAft>
+                <a:spcPts val="0"/>
+              </a:spcAft>
+              <a:buNone/>
+            </a:pPr>
+            <a:endParaRPr sz="1800" dirty="0">
+              <a:latin typeface="Times New Roman"/>
+              <a:ea typeface="Times New Roman"/>
+              <a:cs typeface="Times New Roman"/>
+              <a:sym typeface="Times New Roman"/>
+            </a:endParaRPr>
+          </a:p>
+          <a:p>
+            <a:pPr marL="0" marR="0" lvl="0" indent="0" algn="just" rtl="0">
+              <a:spcBef>
+                <a:spcPts val="0"/>
+              </a:spcBef>
+              <a:spcAft>
+                <a:spcPts val="0"/>
+              </a:spcAft>
+              <a:buNone/>
+            </a:pPr>
+            <a:r>
+              <a:rPr lang="ru-RU" sz="2300" b="0" i="0" dirty="0">
+                <a:latin typeface="Arial"/>
+                <a:ea typeface="Arial"/>
+                <a:cs typeface="Arial"/>
+                <a:sym typeface="Arial"/>
+              </a:rPr>
+              <a:t>	</a:t>
+            </a:r>
+            <a:endParaRPr sz="2300" dirty="0">
+              <a:latin typeface="Arial"/>
+              <a:ea typeface="Arial"/>
+              <a:cs typeface="Arial"/>
+              <a:sym typeface="Arial"/>
+            </a:endParaRPr>
+          </a:p>
+        </p:txBody>
+      </p:sp>
+      <p:sp>
+        <p:nvSpPr>
+          <p:cNvPr id="2" name="Google Shape;89;p6">
+            <a:extLst>
+              <a:ext uri="{FF2B5EF4-FFF2-40B4-BE49-F238E27FC236}">
+                <a16:creationId xmlns:a16="http://schemas.microsoft.com/office/drawing/2014/main" id="{BAF7F9CB-01CD-E97D-E0D8-A0048D83CB0B}"/>
+              </a:ext>
+            </a:extLst>
+          </p:cNvPr>
+          <p:cNvSpPr txBox="1"/>
+          <p:nvPr/>
+        </p:nvSpPr>
+        <p:spPr>
+          <a:xfrm>
+            <a:off x="1407166" y="3379653"/>
+            <a:ext cx="10078800" cy="499327"/>
+          </a:xfrm>
+          <a:prstGeom prst="rect">
+            <a:avLst/>
+          </a:prstGeom>
+          <a:noFill/>
+          <a:ln>
+            <a:noFill/>
+          </a:ln>
+        </p:spPr>
+        <p:txBody>
+          <a:bodyPr spcFirstLastPara="1" wrap="square" lIns="91425" tIns="45700" rIns="91425" bIns="45700" anchor="t" anchorCtr="0">
+            <a:spAutoFit/>
+          </a:bodyPr>
+          <a:lstStyle/>
+          <a:p>
+            <a:pPr marL="0" marR="0" lvl="0" indent="0" algn="l" rtl="0">
+              <a:lnSpc>
+                <a:spcPct val="115000"/>
+              </a:lnSpc>
+              <a:spcBef>
+                <a:spcPts val="0"/>
+              </a:spcBef>
+              <a:spcAft>
+                <a:spcPts val="0"/>
+              </a:spcAft>
+              <a:buNone/>
+            </a:pPr>
+            <a:r>
+              <a:rPr lang="ru-RU" sz="2300" dirty="0">
+                <a:latin typeface="Arial" panose="020B0604020202020204" pitchFamily="34" charset="0"/>
+                <a:ea typeface="Courier New" panose="02070309020205020404" pitchFamily="49" charset="0"/>
+                <a:cs typeface="Arial" panose="020B0604020202020204" pitchFamily="34" charset="0"/>
+              </a:rPr>
+              <a:t>Был проанализирован</a:t>
+            </a:r>
+            <a:r>
+              <a:rPr lang="ru-RU" sz="2300" dirty="0">
+                <a:effectLst/>
+                <a:latin typeface="Arial" panose="020B0604020202020204" pitchFamily="34" charset="0"/>
+                <a:ea typeface="Courier New" panose="02070309020205020404" pitchFamily="49" charset="0"/>
+                <a:cs typeface="Arial" panose="020B0604020202020204" pitchFamily="34" charset="0"/>
+              </a:rPr>
+              <a:t> рынок мобильных приложений для владельцев;</a:t>
+            </a:r>
+            <a:endParaRPr sz="2300" dirty="0">
+              <a:latin typeface="Arial" panose="020B0604020202020204" pitchFamily="34" charset="0"/>
+              <a:cs typeface="Arial" panose="020B0604020202020204" pitchFamily="34" charset="0"/>
+            </a:endParaRPr>
+          </a:p>
+        </p:txBody>
+      </p:sp>
+      <p:sp>
+        <p:nvSpPr>
+          <p:cNvPr id="6" name="Google Shape;90;p6">
+            <a:extLst>
+              <a:ext uri="{FF2B5EF4-FFF2-40B4-BE49-F238E27FC236}">
+                <a16:creationId xmlns:a16="http://schemas.microsoft.com/office/drawing/2014/main" id="{267B54EA-DA71-F7E2-659B-3F31E732820C}"/>
+              </a:ext>
+            </a:extLst>
+          </p:cNvPr>
+          <p:cNvSpPr txBox="1"/>
+          <p:nvPr/>
+        </p:nvSpPr>
+        <p:spPr>
+          <a:xfrm>
+            <a:off x="1332466" y="5211058"/>
+            <a:ext cx="5918566" cy="446236"/>
+          </a:xfrm>
+          <a:prstGeom prst="rect">
+            <a:avLst/>
+          </a:prstGeom>
+          <a:noFill/>
+          <a:ln>
+            <a:noFill/>
+          </a:ln>
+        </p:spPr>
+        <p:txBody>
+          <a:bodyPr spcFirstLastPara="1" wrap="square" lIns="91425" tIns="45700" rIns="91425" bIns="45700" anchor="t" anchorCtr="0">
+            <a:spAutoFit/>
+          </a:bodyPr>
+          <a:lstStyle/>
+          <a:p>
+            <a:pPr marL="0" marR="0" lvl="0" indent="0" algn="l" rtl="0">
+              <a:spcBef>
+                <a:spcPts val="0"/>
+              </a:spcBef>
+              <a:spcAft>
+                <a:spcPts val="0"/>
+              </a:spcAft>
+              <a:buNone/>
+            </a:pPr>
+            <a:r>
+              <a:rPr lang="ru-RU" sz="2300" dirty="0">
+                <a:latin typeface="Arial"/>
+                <a:cs typeface="Arial"/>
+                <a:sym typeface="Arial"/>
+              </a:rPr>
+              <a:t>Реализованы основные функции.</a:t>
+            </a:r>
+            <a:endParaRPr dirty="0"/>
+          </a:p>
+        </p:txBody>
+      </p:sp>
+      <p:sp>
+        <p:nvSpPr>
+          <p:cNvPr id="7" name="Google Shape;91;p6">
+            <a:extLst>
+              <a:ext uri="{FF2B5EF4-FFF2-40B4-BE49-F238E27FC236}">
+                <a16:creationId xmlns:a16="http://schemas.microsoft.com/office/drawing/2014/main" id="{52A25696-11A1-719E-93AF-95256F81C654}"/>
+              </a:ext>
+            </a:extLst>
+          </p:cNvPr>
+          <p:cNvSpPr txBox="1"/>
+          <p:nvPr/>
+        </p:nvSpPr>
+        <p:spPr>
+          <a:xfrm>
+            <a:off x="1407166" y="4303644"/>
+            <a:ext cx="8234139" cy="446236"/>
+          </a:xfrm>
+          <a:prstGeom prst="rect">
+            <a:avLst/>
+          </a:prstGeom>
+          <a:noFill/>
+          <a:ln>
+            <a:noFill/>
+          </a:ln>
+        </p:spPr>
+        <p:txBody>
+          <a:bodyPr spcFirstLastPara="1" wrap="square" lIns="91425" tIns="45700" rIns="91425" bIns="45700" anchor="t" anchorCtr="0">
+            <a:spAutoFit/>
+          </a:bodyPr>
+          <a:lstStyle/>
+          <a:p>
+            <a:pPr marL="0" marR="0" lvl="0" indent="0" algn="l" rtl="0">
+              <a:spcBef>
+                <a:spcPts val="0"/>
+              </a:spcBef>
+              <a:spcAft>
+                <a:spcPts val="0"/>
+              </a:spcAft>
+              <a:buNone/>
+            </a:pPr>
+            <a:r>
+              <a:rPr lang="ru-RU" sz="2300" b="0" i="0" u="none" strike="noStrike" cap="none" dirty="0">
+                <a:latin typeface="Arial"/>
+                <a:ea typeface="Arial"/>
+                <a:cs typeface="Arial"/>
+                <a:sym typeface="Arial"/>
+              </a:rPr>
+              <a:t>Спроектирована архитектура приложения и база данных;</a:t>
+            </a:r>
+            <a:endParaRPr sz="2300" b="0" i="0" u="none" strike="noStrike" cap="none" dirty="0">
+              <a:latin typeface="Arial"/>
+              <a:ea typeface="Arial"/>
+              <a:cs typeface="Arial"/>
+              <a:sym typeface="Arial"/>
+            </a:endParaRPr>
+          </a:p>
+        </p:txBody>
+      </p:sp>
+      <p:sp>
+        <p:nvSpPr>
+          <p:cNvPr id="8" name="Google Shape;126;p8">
+            <a:extLst>
+              <a:ext uri="{FF2B5EF4-FFF2-40B4-BE49-F238E27FC236}">
+                <a16:creationId xmlns:a16="http://schemas.microsoft.com/office/drawing/2014/main" id="{A60A00FA-7686-76FC-2B57-EEB1C5000A31}"/>
               </a:ext>
             </a:extLst>
           </p:cNvPr>
@@ -3967,8 +4335,8 @@
         </p:nvSpPr>
         <p:spPr>
           <a:xfrm flipH="1">
-            <a:off x="906686" y="1605592"/>
-            <a:ext cx="235080" cy="235080"/>
+            <a:off x="951090" y="3586504"/>
+            <a:ext cx="154500" cy="158400"/>
           </a:xfrm>
           <a:prstGeom prst="ellipse">
             <a:avLst/>
@@ -4008,10 +4376,10 @@
       </p:sp>
       <p:sp>
         <p:nvSpPr>
-          <p:cNvPr id="6" name="Google Shape;194;p14">
-            <a:extLst>
-              <a:ext uri="{FF2B5EF4-FFF2-40B4-BE49-F238E27FC236}">
-                <a16:creationId xmlns:a16="http://schemas.microsoft.com/office/drawing/2014/main" id="{5542DEB2-9E1C-A948-8A1A-C1EFA52718DB}"/>
+          <p:cNvPr id="9" name="Google Shape;126;p8">
+            <a:extLst>
+              <a:ext uri="{FF2B5EF4-FFF2-40B4-BE49-F238E27FC236}">
+                <a16:creationId xmlns:a16="http://schemas.microsoft.com/office/drawing/2014/main" id="{363F81E7-2197-C370-6ABE-AEA7C0A4897B}"/>
               </a:ext>
             </a:extLst>
           </p:cNvPr>
@@ -4020,8 +4388,8 @@
         </p:nvSpPr>
         <p:spPr>
           <a:xfrm flipH="1">
-            <a:off x="906686" y="2470646"/>
-            <a:ext cx="235080" cy="235080"/>
+            <a:off x="951090" y="4447562"/>
+            <a:ext cx="154500" cy="158400"/>
           </a:xfrm>
           <a:prstGeom prst="ellipse">
             <a:avLst/>
@@ -4061,10 +4429,10 @@
       </p:sp>
       <p:sp>
         <p:nvSpPr>
-          <p:cNvPr id="7" name="Google Shape;195;p14">
-            <a:extLst>
-              <a:ext uri="{FF2B5EF4-FFF2-40B4-BE49-F238E27FC236}">
-                <a16:creationId xmlns:a16="http://schemas.microsoft.com/office/drawing/2014/main" id="{7419E88B-B5CE-1086-35CC-E2A88E585B65}"/>
+          <p:cNvPr id="10" name="Google Shape;126;p8">
+            <a:extLst>
+              <a:ext uri="{FF2B5EF4-FFF2-40B4-BE49-F238E27FC236}">
+                <a16:creationId xmlns:a16="http://schemas.microsoft.com/office/drawing/2014/main" id="{3BD8A43C-FC8B-4CEC-F50F-EDDDBE2F6A03}"/>
               </a:ext>
             </a:extLst>
           </p:cNvPr>
@@ -4073,8 +4441,8 @@
         </p:nvSpPr>
         <p:spPr>
           <a:xfrm flipH="1">
-            <a:off x="906686" y="3298037"/>
-            <a:ext cx="235080" cy="235080"/>
+            <a:off x="951090" y="5273866"/>
+            <a:ext cx="154500" cy="158400"/>
           </a:xfrm>
           <a:prstGeom prst="ellipse">
             <a:avLst/>
@@ -4112,295 +4480,10 @@
           </a:p>
         </p:txBody>
       </p:sp>
-      <p:sp>
-        <p:nvSpPr>
-          <p:cNvPr id="8" name="Google Shape;196;p14">
-            <a:extLst>
-              <a:ext uri="{FF2B5EF4-FFF2-40B4-BE49-F238E27FC236}">
-                <a16:creationId xmlns:a16="http://schemas.microsoft.com/office/drawing/2014/main" id="{28539F37-7889-4956-1CC5-E738C2C39D51}"/>
-              </a:ext>
-            </a:extLst>
-          </p:cNvPr>
-          <p:cNvSpPr txBox="1"/>
-          <p:nvPr/>
-        </p:nvSpPr>
-        <p:spPr>
-          <a:xfrm>
-            <a:off x="1309141" y="1509633"/>
-            <a:ext cx="10078800" cy="499327"/>
-          </a:xfrm>
-          <a:prstGeom prst="rect">
-            <a:avLst/>
-          </a:prstGeom>
-          <a:noFill/>
-          <a:ln>
-            <a:noFill/>
-          </a:ln>
-        </p:spPr>
-        <p:txBody>
-          <a:bodyPr spcFirstLastPara="1" wrap="square" lIns="91425" tIns="45700" rIns="91425" bIns="45700" anchor="t" anchorCtr="0">
-            <a:spAutoFit/>
-          </a:bodyPr>
-          <a:lstStyle/>
-          <a:p>
-            <a:pPr marL="0" marR="0" lvl="0" indent="0" algn="l" rtl="0">
-              <a:lnSpc>
-                <a:spcPct val="115000"/>
-              </a:lnSpc>
-              <a:spcBef>
-                <a:spcPts val="0"/>
-              </a:spcBef>
-              <a:spcAft>
-                <a:spcPts val="0"/>
-              </a:spcAft>
-              <a:buNone/>
-            </a:pPr>
-            <a:r>
-              <a:rPr lang="ru-RU" sz="2300">
-                <a:latin typeface="Arial"/>
-                <a:ea typeface="Arial"/>
-                <a:cs typeface="Arial"/>
-                <a:sym typeface="Arial"/>
-              </a:rPr>
-              <a:t>Поддержка нескольких питомцев одном </a:t>
-            </a:r>
-            <a:r>
-              <a:rPr lang="ru-RU" sz="2300"/>
-              <a:t>аккаунте</a:t>
-            </a:r>
-            <a:endParaRPr/>
-          </a:p>
-        </p:txBody>
-      </p:sp>
-      <p:sp>
-        <p:nvSpPr>
-          <p:cNvPr id="9" name="Google Shape;197;p14">
-            <a:extLst>
-              <a:ext uri="{FF2B5EF4-FFF2-40B4-BE49-F238E27FC236}">
-                <a16:creationId xmlns:a16="http://schemas.microsoft.com/office/drawing/2014/main" id="{620DCFD7-E7B3-737B-E74D-8012495289BB}"/>
-              </a:ext>
-            </a:extLst>
-          </p:cNvPr>
-          <p:cNvSpPr txBox="1"/>
-          <p:nvPr/>
-        </p:nvSpPr>
-        <p:spPr>
-          <a:xfrm>
-            <a:off x="1309141" y="3213890"/>
-            <a:ext cx="10153454" cy="446276"/>
-          </a:xfrm>
-          <a:prstGeom prst="rect">
-            <a:avLst/>
-          </a:prstGeom>
-          <a:noFill/>
-          <a:ln>
-            <a:noFill/>
-          </a:ln>
-        </p:spPr>
-        <p:txBody>
-          <a:bodyPr spcFirstLastPara="1" wrap="square" lIns="91425" tIns="45700" rIns="91425" bIns="45700" anchor="t" anchorCtr="0">
-            <a:spAutoFit/>
-          </a:bodyPr>
-          <a:lstStyle/>
-          <a:p>
-            <a:pPr marL="0" marR="0" lvl="0" indent="0" algn="l" rtl="0">
-              <a:spcBef>
-                <a:spcPts val="0"/>
-              </a:spcBef>
-              <a:spcAft>
-                <a:spcPts val="0"/>
-              </a:spcAft>
-              <a:buNone/>
-            </a:pPr>
-            <a:r>
-              <a:rPr lang="ru-RU" sz="2300">
-                <a:latin typeface="Arial"/>
-                <a:ea typeface="Arial"/>
-                <a:cs typeface="Arial"/>
-                <a:sym typeface="Arial"/>
-              </a:rPr>
-              <a:t>Реализация расширенного трекера здоровья</a:t>
-            </a:r>
-            <a:endParaRPr/>
-          </a:p>
-        </p:txBody>
-      </p:sp>
-      <p:sp>
-        <p:nvSpPr>
-          <p:cNvPr id="10" name="Google Shape;198;p14">
-            <a:extLst>
-              <a:ext uri="{FF2B5EF4-FFF2-40B4-BE49-F238E27FC236}">
-                <a16:creationId xmlns:a16="http://schemas.microsoft.com/office/drawing/2014/main" id="{928F9C74-20BE-BDAE-A7E4-DE2CC03EE62E}"/>
-              </a:ext>
-            </a:extLst>
-          </p:cNvPr>
-          <p:cNvSpPr txBox="1"/>
-          <p:nvPr/>
-        </p:nvSpPr>
-        <p:spPr>
-          <a:xfrm>
-            <a:off x="1309141" y="3975416"/>
-            <a:ext cx="9976173" cy="446276"/>
-          </a:xfrm>
-          <a:prstGeom prst="rect">
-            <a:avLst/>
-          </a:prstGeom>
-          <a:noFill/>
-          <a:ln>
-            <a:noFill/>
-          </a:ln>
-        </p:spPr>
-        <p:txBody>
-          <a:bodyPr spcFirstLastPara="1" wrap="square" lIns="91425" tIns="45700" rIns="91425" bIns="45700" anchor="t" anchorCtr="0">
-            <a:spAutoFit/>
-          </a:bodyPr>
-          <a:lstStyle/>
-          <a:p>
-            <a:pPr marL="0" marR="0" lvl="0" indent="0" algn="l" rtl="0">
-              <a:spcBef>
-                <a:spcPts val="0"/>
-              </a:spcBef>
-              <a:spcAft>
-                <a:spcPts val="0"/>
-              </a:spcAft>
-              <a:buNone/>
-            </a:pPr>
-            <a:r>
-              <a:rPr lang="ru-RU" sz="2300" b="0">
-                <a:latin typeface="Arial"/>
-                <a:ea typeface="Arial"/>
-                <a:cs typeface="Arial"/>
-                <a:sym typeface="Arial"/>
-              </a:rPr>
-              <a:t>Трекинг прогулок, построение маршрутов и навигация</a:t>
-            </a:r>
-            <a:endParaRPr sz="2300">
-              <a:latin typeface="Arial"/>
-              <a:ea typeface="Arial"/>
-              <a:cs typeface="Arial"/>
-              <a:sym typeface="Arial"/>
-            </a:endParaRPr>
-          </a:p>
-        </p:txBody>
-      </p:sp>
-      <p:sp>
-        <p:nvSpPr>
-          <p:cNvPr id="11" name="Google Shape;199;p14">
-            <a:extLst>
-              <a:ext uri="{FF2B5EF4-FFF2-40B4-BE49-F238E27FC236}">
-                <a16:creationId xmlns:a16="http://schemas.microsoft.com/office/drawing/2014/main" id="{AA5E5213-AF36-6E01-378D-8924B2F353D4}"/>
-              </a:ext>
-            </a:extLst>
-          </p:cNvPr>
-          <p:cNvSpPr/>
-          <p:nvPr/>
-        </p:nvSpPr>
-        <p:spPr>
-          <a:xfrm flipH="1">
-            <a:off x="915532" y="4081014"/>
-            <a:ext cx="235080" cy="235080"/>
-          </a:xfrm>
-          <a:prstGeom prst="ellipse">
-            <a:avLst/>
-          </a:prstGeom>
-          <a:solidFill>
-            <a:schemeClr val="tx1"/>
-          </a:solidFill>
-          <a:ln>
-            <a:noFill/>
-          </a:ln>
-          <a:effectLst>
-            <a:outerShdw blurRad="203040" dist="75967" dir="5448874" sx="102000" sy="102000" algn="ctr" rotWithShape="0">
-              <a:srgbClr val="BFBFBF">
-                <a:alpha val="50980"/>
-              </a:srgbClr>
-            </a:outerShdw>
-          </a:effectLst>
-        </p:spPr>
-        <p:txBody>
-          <a:bodyPr spcFirstLastPara="1" wrap="square" lIns="91425" tIns="91425" rIns="91425" bIns="91425" anchor="ctr" anchorCtr="0">
-            <a:noAutofit/>
-          </a:bodyPr>
-          <a:lstStyle/>
-          <a:p>
-            <a:pPr marL="0" lvl="0" indent="0" algn="l" rtl="0">
-              <a:spcBef>
-                <a:spcPts val="0"/>
-              </a:spcBef>
-              <a:spcAft>
-                <a:spcPts val="0"/>
-              </a:spcAft>
-              <a:buNone/>
-            </a:pPr>
-            <a:endParaRPr/>
-          </a:p>
-        </p:txBody>
-      </p:sp>
-      <p:sp>
-        <p:nvSpPr>
-          <p:cNvPr id="12" name="Google Shape;200;p14">
-            <a:extLst>
-              <a:ext uri="{FF2B5EF4-FFF2-40B4-BE49-F238E27FC236}">
-                <a16:creationId xmlns:a16="http://schemas.microsoft.com/office/drawing/2014/main" id="{4C78EA80-FAB4-BC21-3C2E-21BEC2D077DB}"/>
-              </a:ext>
-            </a:extLst>
-          </p:cNvPr>
-          <p:cNvSpPr txBox="1"/>
-          <p:nvPr/>
-        </p:nvSpPr>
-        <p:spPr>
-          <a:xfrm>
-            <a:off x="1309141" y="2314817"/>
-            <a:ext cx="10078810" cy="499327"/>
-          </a:xfrm>
-          <a:prstGeom prst="rect">
-            <a:avLst/>
-          </a:prstGeom>
-          <a:noFill/>
-          <a:ln>
-            <a:noFill/>
-          </a:ln>
-        </p:spPr>
-        <p:txBody>
-          <a:bodyPr spcFirstLastPara="1" wrap="square" lIns="91425" tIns="45700" rIns="91425" bIns="45700" anchor="t" anchorCtr="0">
-            <a:spAutoFit/>
-          </a:bodyPr>
-          <a:lstStyle/>
-          <a:p>
-            <a:pPr marL="0" marR="0" lvl="0" indent="0" algn="l" rtl="0">
-              <a:lnSpc>
-                <a:spcPct val="115000"/>
-              </a:lnSpc>
-              <a:spcBef>
-                <a:spcPts val="0"/>
-              </a:spcBef>
-              <a:spcAft>
-                <a:spcPts val="0"/>
-              </a:spcAft>
-              <a:buNone/>
-            </a:pPr>
-            <a:r>
-              <a:rPr lang="ru-RU" sz="2300">
-                <a:latin typeface="Arial"/>
-                <a:ea typeface="Arial"/>
-                <a:cs typeface="Arial"/>
-                <a:sym typeface="Arial"/>
-              </a:rPr>
-              <a:t>Расширение видов питомцев</a:t>
-            </a:r>
-            <a:endParaRPr sz="2300">
-              <a:latin typeface="Arial"/>
-              <a:ea typeface="Arial"/>
-              <a:cs typeface="Arial"/>
-              <a:sym typeface="Arial"/>
-            </a:endParaRPr>
-          </a:p>
-        </p:txBody>
-      </p:sp>
     </p:spTree>
     <p:extLst>
       <p:ext uri="{BB962C8B-B14F-4D97-AF65-F5344CB8AC3E}">
-        <p14:creationId xmlns:p14="http://schemas.microsoft.com/office/powerpoint/2010/main" val="168253730"/>
+        <p14:creationId xmlns:p14="http://schemas.microsoft.com/office/powerpoint/2010/main" val="2351513384"/>
       </p:ext>
     </p:extLst>
   </p:cSld>
@@ -4441,7 +4524,7 @@
         </p:nvSpPr>
         <p:spPr>
           <a:xfrm>
-            <a:off x="3047999" y="3248344"/>
+            <a:off x="2045368" y="2725830"/>
             <a:ext cx="8101263" cy="923330"/>
           </a:xfrm>
           <a:prstGeom prst="rect">
@@ -4638,7 +4721,7 @@
         </p:nvSpPr>
         <p:spPr>
           <a:xfrm>
-            <a:off x="1665395" y="1575791"/>
+            <a:off x="1679706" y="1423226"/>
             <a:ext cx="10182000" cy="1154400"/>
           </a:xfrm>
           <a:prstGeom prst="rect">
@@ -4835,14 +4918,14 @@
               <a:buNone/>
             </a:pPr>
             <a:r>
-              <a:rPr lang="ru-RU" sz="2300">
+              <a:rPr lang="ru-RU" sz="2300" dirty="0">
                 <a:highlight>
                   <a:srgbClr val="FFFFFF"/>
                 </a:highlight>
               </a:rPr>
               <a:t>Рост числа домашних питомцев</a:t>
             </a:r>
-            <a:endParaRPr sz="2300"/>
+            <a:endParaRPr sz="2300" dirty="0"/>
           </a:p>
         </p:txBody>
       </p:sp>
@@ -4900,10 +4983,10 @@
       </p:sp>
       <p:sp>
         <p:nvSpPr>
-          <p:cNvPr id="9" name="Google Shape;77;p5">
-            <a:extLst>
-              <a:ext uri="{FF2B5EF4-FFF2-40B4-BE49-F238E27FC236}">
-                <a16:creationId xmlns:a16="http://schemas.microsoft.com/office/drawing/2014/main" id="{D46F1CAC-248F-A591-73A7-71C2A9747E00}"/>
+          <p:cNvPr id="2" name="Google Shape;126;p8">
+            <a:extLst>
+              <a:ext uri="{FF2B5EF4-FFF2-40B4-BE49-F238E27FC236}">
+                <a16:creationId xmlns:a16="http://schemas.microsoft.com/office/drawing/2014/main" id="{218E7D53-F081-E7DE-366F-FF7FE49E9B77}"/>
               </a:ext>
             </a:extLst>
           </p:cNvPr>
@@ -4912,8 +4995,8 @@
         </p:nvSpPr>
         <p:spPr>
           <a:xfrm flipH="1">
-            <a:off x="1665390" y="4911402"/>
-            <a:ext cx="235200" cy="235200"/>
+            <a:off x="1679706" y="4446794"/>
+            <a:ext cx="154500" cy="158400"/>
           </a:xfrm>
           <a:prstGeom prst="ellipse">
             <a:avLst/>
@@ -4953,10 +5036,10 @@
       </p:sp>
       <p:sp>
         <p:nvSpPr>
-          <p:cNvPr id="10" name="Google Shape;78;p5">
-            <a:extLst>
-              <a:ext uri="{FF2B5EF4-FFF2-40B4-BE49-F238E27FC236}">
-                <a16:creationId xmlns:a16="http://schemas.microsoft.com/office/drawing/2014/main" id="{F7962D81-413A-52C2-B2A6-65A2B7D2CD8D}"/>
+          <p:cNvPr id="11" name="Google Shape;126;p8">
+            <a:extLst>
+              <a:ext uri="{FF2B5EF4-FFF2-40B4-BE49-F238E27FC236}">
+                <a16:creationId xmlns:a16="http://schemas.microsoft.com/office/drawing/2014/main" id="{FE1FCF10-1351-055C-3ED4-74AD1F583F3B}"/>
               </a:ext>
             </a:extLst>
           </p:cNvPr>
@@ -4965,8 +5048,8 @@
         </p:nvSpPr>
         <p:spPr>
           <a:xfrm flipH="1">
-            <a:off x="1665390" y="4411322"/>
-            <a:ext cx="235200" cy="235200"/>
+            <a:off x="1679706" y="4970654"/>
+            <a:ext cx="154500" cy="158400"/>
           </a:xfrm>
           <a:prstGeom prst="ellipse">
             <a:avLst/>
@@ -5000,7 +5083,7 @@
               </a:spcAft>
               <a:buNone/>
             </a:pPr>
-            <a:endParaRPr dirty="0"/>
+            <a:endParaRPr/>
           </a:p>
         </p:txBody>
       </p:sp>
@@ -5047,14 +5130,10 @@
             <a:spLocks noGrp="1"/>
           </p:cNvSpPr>
           <p:nvPr>
-            <p:ph type="sldNum" idx="12"/>
+            <p:ph type="sldNum" sz="quarter" idx="12"/>
           </p:nvPr>
         </p:nvSpPr>
         <p:spPr>
-          <a:xfrm>
-            <a:off x="8610600" y="6356350"/>
-            <a:ext cx="2743200" cy="365125"/>
-          </a:xfrm>
           <a:prstGeom prst="rect">
             <a:avLst/>
           </a:prstGeom>
@@ -5086,7 +5165,7 @@
               </a:rPr>
               <a:t>3</a:t>
             </a:fld>
-            <a:endParaRPr>
+            <a:endParaRPr dirty="0">
               <a:solidFill>
                 <a:schemeClr val="tx1"/>
               </a:solidFill>
@@ -5161,17 +5240,242 @@
             </a:pPr>
             <a:r>
               <a:rPr lang="ru-RU" dirty="0"/>
-              <a:t>Задачи:</a:t>
-            </a:r>
-          </a:p>
-        </p:txBody>
-      </p:sp>
-      <p:sp>
-        <p:nvSpPr>
-          <p:cNvPr id="5" name="Google Shape;86;p6">
-            <a:extLst>
-              <a:ext uri="{FF2B5EF4-FFF2-40B4-BE49-F238E27FC236}">
-                <a16:creationId xmlns:a16="http://schemas.microsoft.com/office/drawing/2014/main" id="{291A3CF5-FBBE-78F7-E57A-35048385FADF}"/>
+              <a:t>Постановка задачи:</a:t>
+            </a:r>
+          </a:p>
+        </p:txBody>
+      </p:sp>
+      <p:sp>
+        <p:nvSpPr>
+          <p:cNvPr id="8" name="Google Shape;89;p6">
+            <a:extLst>
+              <a:ext uri="{FF2B5EF4-FFF2-40B4-BE49-F238E27FC236}">
+                <a16:creationId xmlns:a16="http://schemas.microsoft.com/office/drawing/2014/main" id="{7481854B-8972-06A3-7D42-A41281888A36}"/>
+              </a:ext>
+            </a:extLst>
+          </p:cNvPr>
+          <p:cNvSpPr txBox="1"/>
+          <p:nvPr/>
+        </p:nvSpPr>
+        <p:spPr>
+          <a:xfrm>
+            <a:off x="1407166" y="1647103"/>
+            <a:ext cx="10078800" cy="906362"/>
+          </a:xfrm>
+          <a:prstGeom prst="rect">
+            <a:avLst/>
+          </a:prstGeom>
+          <a:noFill/>
+          <a:ln>
+            <a:noFill/>
+          </a:ln>
+        </p:spPr>
+        <p:txBody>
+          <a:bodyPr spcFirstLastPara="1" wrap="square" lIns="91425" tIns="45700" rIns="91425" bIns="45700" anchor="t" anchorCtr="0">
+            <a:spAutoFit/>
+          </a:bodyPr>
+          <a:lstStyle/>
+          <a:p>
+            <a:pPr marL="0" marR="0" lvl="0" indent="0" algn="l" rtl="0">
+              <a:lnSpc>
+                <a:spcPct val="115000"/>
+              </a:lnSpc>
+              <a:spcBef>
+                <a:spcPts val="0"/>
+              </a:spcBef>
+              <a:spcAft>
+                <a:spcPts val="0"/>
+              </a:spcAft>
+              <a:buNone/>
+            </a:pPr>
+            <a:r>
+              <a:rPr lang="ru-RU" sz="2300" dirty="0">
+                <a:latin typeface="Arial" panose="020B0604020202020204" pitchFamily="34" charset="0"/>
+                <a:cs typeface="Arial" panose="020B0604020202020204" pitchFamily="34" charset="0"/>
+              </a:rPr>
+              <a:t>Анализ рынка мобильных приложений  для владельцев домашних питомцев;</a:t>
+            </a:r>
+            <a:endParaRPr sz="2300" dirty="0">
+              <a:latin typeface="Arial" panose="020B0604020202020204" pitchFamily="34" charset="0"/>
+              <a:cs typeface="Arial" panose="020B0604020202020204" pitchFamily="34" charset="0"/>
+            </a:endParaRPr>
+          </a:p>
+        </p:txBody>
+      </p:sp>
+      <p:sp>
+        <p:nvSpPr>
+          <p:cNvPr id="9" name="Google Shape;90;p6">
+            <a:extLst>
+              <a:ext uri="{FF2B5EF4-FFF2-40B4-BE49-F238E27FC236}">
+                <a16:creationId xmlns:a16="http://schemas.microsoft.com/office/drawing/2014/main" id="{EA260A50-C7D4-D6C2-6090-3A7ED5539B7F}"/>
+              </a:ext>
+            </a:extLst>
+          </p:cNvPr>
+          <p:cNvSpPr txBox="1"/>
+          <p:nvPr/>
+        </p:nvSpPr>
+        <p:spPr>
+          <a:xfrm>
+            <a:off x="1407166" y="2741504"/>
+            <a:ext cx="10153500" cy="446236"/>
+          </a:xfrm>
+          <a:prstGeom prst="rect">
+            <a:avLst/>
+          </a:prstGeom>
+          <a:noFill/>
+          <a:ln>
+            <a:noFill/>
+          </a:ln>
+        </p:spPr>
+        <p:txBody>
+          <a:bodyPr spcFirstLastPara="1" wrap="square" lIns="91425" tIns="45700" rIns="91425" bIns="45700" anchor="t" anchorCtr="0">
+            <a:spAutoFit/>
+          </a:bodyPr>
+          <a:lstStyle/>
+          <a:p>
+            <a:pPr marL="0" marR="0" lvl="0" indent="0" algn="l" rtl="0">
+              <a:spcBef>
+                <a:spcPts val="0"/>
+              </a:spcBef>
+              <a:spcAft>
+                <a:spcPts val="0"/>
+              </a:spcAft>
+              <a:buNone/>
+            </a:pPr>
+            <a:r>
+              <a:rPr lang="ru-RU" sz="2300" dirty="0">
+                <a:latin typeface="Arial"/>
+                <a:cs typeface="Arial"/>
+                <a:sym typeface="Arial"/>
+              </a:rPr>
+              <a:t>Выбор средств разработки;</a:t>
+            </a:r>
+            <a:endParaRPr dirty="0"/>
+          </a:p>
+        </p:txBody>
+      </p:sp>
+      <p:sp>
+        <p:nvSpPr>
+          <p:cNvPr id="10" name="Google Shape;91;p6">
+            <a:extLst>
+              <a:ext uri="{FF2B5EF4-FFF2-40B4-BE49-F238E27FC236}">
+                <a16:creationId xmlns:a16="http://schemas.microsoft.com/office/drawing/2014/main" id="{A87A776B-CBE0-3D19-F850-5FFDA172C5EC}"/>
+              </a:ext>
+            </a:extLst>
+          </p:cNvPr>
+          <p:cNvSpPr txBox="1"/>
+          <p:nvPr/>
+        </p:nvSpPr>
+        <p:spPr>
+          <a:xfrm>
+            <a:off x="1264710" y="3665488"/>
+            <a:ext cx="9976200" cy="446236"/>
+          </a:xfrm>
+          <a:prstGeom prst="rect">
+            <a:avLst/>
+          </a:prstGeom>
+          <a:noFill/>
+          <a:ln>
+            <a:noFill/>
+          </a:ln>
+        </p:spPr>
+        <p:txBody>
+          <a:bodyPr spcFirstLastPara="1" wrap="square" lIns="91425" tIns="45700" rIns="91425" bIns="45700" anchor="t" anchorCtr="0">
+            <a:spAutoFit/>
+          </a:bodyPr>
+          <a:lstStyle/>
+          <a:p>
+            <a:pPr marL="0" marR="0" lvl="0" indent="0" algn="l" rtl="0">
+              <a:spcBef>
+                <a:spcPts val="0"/>
+              </a:spcBef>
+              <a:spcAft>
+                <a:spcPts val="0"/>
+              </a:spcAft>
+              <a:buNone/>
+            </a:pPr>
+            <a:r>
+              <a:rPr lang="ru-RU" sz="2300" b="0" i="0" u="none" strike="noStrike" cap="none" dirty="0">
+                <a:latin typeface="Arial"/>
+                <a:ea typeface="Arial"/>
+                <a:cs typeface="Arial"/>
+                <a:sym typeface="Arial"/>
+              </a:rPr>
+              <a:t>Проектирование архитектуры приложения и базы данных;</a:t>
+            </a:r>
+            <a:endParaRPr sz="2300" b="0" i="0" u="none" strike="noStrike" cap="none" dirty="0">
+              <a:latin typeface="Arial"/>
+              <a:ea typeface="Arial"/>
+              <a:cs typeface="Arial"/>
+              <a:sym typeface="Arial"/>
+            </a:endParaRPr>
+          </a:p>
+        </p:txBody>
+      </p:sp>
+      <p:sp>
+        <p:nvSpPr>
+          <p:cNvPr id="11" name="Google Shape;92;p6">
+            <a:extLst>
+              <a:ext uri="{FF2B5EF4-FFF2-40B4-BE49-F238E27FC236}">
+                <a16:creationId xmlns:a16="http://schemas.microsoft.com/office/drawing/2014/main" id="{227AEE10-EA7A-1A40-D0A4-518CB831D037}"/>
+              </a:ext>
+            </a:extLst>
+          </p:cNvPr>
+          <p:cNvSpPr txBox="1"/>
+          <p:nvPr/>
+        </p:nvSpPr>
+        <p:spPr>
+          <a:xfrm>
+            <a:off x="1407166" y="4501454"/>
+            <a:ext cx="9976200" cy="446400"/>
+          </a:xfrm>
+          <a:prstGeom prst="rect">
+            <a:avLst/>
+          </a:prstGeom>
+          <a:noFill/>
+          <a:ln>
+            <a:noFill/>
+          </a:ln>
+        </p:spPr>
+        <p:txBody>
+          <a:bodyPr spcFirstLastPara="1" wrap="square" lIns="91425" tIns="45700" rIns="91425" bIns="45700" anchor="t" anchorCtr="0">
+            <a:spAutoFit/>
+          </a:bodyPr>
+          <a:lstStyle/>
+          <a:p>
+            <a:pPr marL="0" marR="0" lvl="0" indent="0" algn="l" rtl="0">
+              <a:spcBef>
+                <a:spcPts val="0"/>
+              </a:spcBef>
+              <a:spcAft>
+                <a:spcPts val="0"/>
+              </a:spcAft>
+              <a:buNone/>
+            </a:pPr>
+            <a:r>
+              <a:rPr lang="ru-RU" sz="2300" b="0" i="0" u="none" strike="noStrike" cap="none" dirty="0">
+                <a:latin typeface="Arial"/>
+                <a:ea typeface="Arial"/>
+                <a:cs typeface="Arial"/>
+                <a:sym typeface="Arial"/>
+              </a:rPr>
+              <a:t>Реализация функций разрабатываемой.</a:t>
+            </a:r>
+            <a:endParaRPr sz="2300" dirty="0">
+              <a:latin typeface="Arial"/>
+              <a:ea typeface="Arial"/>
+              <a:cs typeface="Arial"/>
+              <a:sym typeface="Arial"/>
+            </a:endParaRPr>
+          </a:p>
+        </p:txBody>
+      </p:sp>
+      <p:sp>
+        <p:nvSpPr>
+          <p:cNvPr id="2" name="Google Shape;126;p8">
+            <a:extLst>
+              <a:ext uri="{FF2B5EF4-FFF2-40B4-BE49-F238E27FC236}">
+                <a16:creationId xmlns:a16="http://schemas.microsoft.com/office/drawing/2014/main" id="{460910CE-71EA-ED77-D3DF-6C6561686AFF}"/>
               </a:ext>
             </a:extLst>
           </p:cNvPr>
@@ -5180,8 +5484,8 @@
         </p:nvSpPr>
         <p:spPr>
           <a:xfrm flipH="1">
-            <a:off x="906566" y="1655942"/>
-            <a:ext cx="235200" cy="235200"/>
+            <a:off x="951090" y="1853954"/>
+            <a:ext cx="154500" cy="158400"/>
           </a:xfrm>
           <a:prstGeom prst="ellipse">
             <a:avLst/>
@@ -5221,10 +5525,10 @@
       </p:sp>
       <p:sp>
         <p:nvSpPr>
-          <p:cNvPr id="6" name="Google Shape;87;p6">
-            <a:extLst>
-              <a:ext uri="{FF2B5EF4-FFF2-40B4-BE49-F238E27FC236}">
-                <a16:creationId xmlns:a16="http://schemas.microsoft.com/office/drawing/2014/main" id="{C3896B3F-1EF6-DAB6-4175-7450C28608F3}"/>
+          <p:cNvPr id="13" name="Google Shape;126;p8">
+            <a:extLst>
+              <a:ext uri="{FF2B5EF4-FFF2-40B4-BE49-F238E27FC236}">
+                <a16:creationId xmlns:a16="http://schemas.microsoft.com/office/drawing/2014/main" id="{27BCA3B0-D217-F0BB-4760-DBB6B7EED88A}"/>
               </a:ext>
             </a:extLst>
           </p:cNvPr>
@@ -5233,8 +5537,8 @@
         </p:nvSpPr>
         <p:spPr>
           <a:xfrm flipH="1">
-            <a:off x="906566" y="2520996"/>
-            <a:ext cx="235200" cy="235200"/>
+            <a:off x="951090" y="2874087"/>
+            <a:ext cx="154500" cy="158400"/>
           </a:xfrm>
           <a:prstGeom prst="ellipse">
             <a:avLst/>
@@ -5274,10 +5578,10 @@
       </p:sp>
       <p:sp>
         <p:nvSpPr>
-          <p:cNvPr id="7" name="Google Shape;88;p6">
-            <a:extLst>
-              <a:ext uri="{FF2B5EF4-FFF2-40B4-BE49-F238E27FC236}">
-                <a16:creationId xmlns:a16="http://schemas.microsoft.com/office/drawing/2014/main" id="{88C53151-7F28-3A0C-2990-3F52584B46AA}"/>
+          <p:cNvPr id="14" name="Google Shape;126;p8">
+            <a:extLst>
+              <a:ext uri="{FF2B5EF4-FFF2-40B4-BE49-F238E27FC236}">
+                <a16:creationId xmlns:a16="http://schemas.microsoft.com/office/drawing/2014/main" id="{907757A5-CED7-DCA4-B8B2-12A5779DAED1}"/>
               </a:ext>
             </a:extLst>
           </p:cNvPr>
@@ -5286,8 +5590,8 @@
         </p:nvSpPr>
         <p:spPr>
           <a:xfrm flipH="1">
-            <a:off x="906566" y="3488062"/>
-            <a:ext cx="235200" cy="235200"/>
+            <a:off x="951090" y="3803238"/>
+            <a:ext cx="154500" cy="158400"/>
           </a:xfrm>
           <a:prstGeom prst="ellipse">
             <a:avLst/>
@@ -5327,244 +5631,10 @@
       </p:sp>
       <p:sp>
         <p:nvSpPr>
-          <p:cNvPr id="8" name="Google Shape;89;p6">
-            <a:extLst>
-              <a:ext uri="{FF2B5EF4-FFF2-40B4-BE49-F238E27FC236}">
-                <a16:creationId xmlns:a16="http://schemas.microsoft.com/office/drawing/2014/main" id="{7481854B-8972-06A3-7D42-A41281888A36}"/>
-              </a:ext>
-            </a:extLst>
-          </p:cNvPr>
-          <p:cNvSpPr txBox="1"/>
-          <p:nvPr/>
-        </p:nvSpPr>
-        <p:spPr>
-          <a:xfrm>
-            <a:off x="1407166" y="1518767"/>
-            <a:ext cx="10078800" cy="906362"/>
-          </a:xfrm>
-          <a:prstGeom prst="rect">
-            <a:avLst/>
-          </a:prstGeom>
-          <a:noFill/>
-          <a:ln>
-            <a:noFill/>
-          </a:ln>
-        </p:spPr>
-        <p:txBody>
-          <a:bodyPr spcFirstLastPara="1" wrap="square" lIns="91425" tIns="45700" rIns="91425" bIns="45700" anchor="t" anchorCtr="0">
-            <a:spAutoFit/>
-          </a:bodyPr>
-          <a:lstStyle/>
-          <a:p>
-            <a:pPr marL="0" marR="0" lvl="0" indent="0" algn="l" rtl="0">
-              <a:lnSpc>
-                <a:spcPct val="115000"/>
-              </a:lnSpc>
-              <a:spcBef>
-                <a:spcPts val="0"/>
-              </a:spcBef>
-              <a:spcAft>
-                <a:spcPts val="0"/>
-              </a:spcAft>
-              <a:buNone/>
-            </a:pPr>
-            <a:r>
-              <a:rPr lang="ru-RU" sz="2300" b="0" i="0" u="none" strike="noStrike" cap="none" dirty="0">
-                <a:latin typeface="Arial"/>
-                <a:ea typeface="Arial"/>
-                <a:cs typeface="Arial"/>
-                <a:sym typeface="Arial"/>
-              </a:rPr>
-              <a:t>Реализовать пользовательский интерфейс для интуитивного взаимодействия с приложением;</a:t>
-            </a:r>
-            <a:endParaRPr dirty="0"/>
-          </a:p>
-        </p:txBody>
-      </p:sp>
-      <p:sp>
-        <p:nvSpPr>
-          <p:cNvPr id="9" name="Google Shape;90;p6">
-            <a:extLst>
-              <a:ext uri="{FF2B5EF4-FFF2-40B4-BE49-F238E27FC236}">
-                <a16:creationId xmlns:a16="http://schemas.microsoft.com/office/drawing/2014/main" id="{EA260A50-C7D4-D6C2-6090-3A7ED5539B7F}"/>
-              </a:ext>
-            </a:extLst>
-          </p:cNvPr>
-          <p:cNvSpPr txBox="1"/>
-          <p:nvPr/>
-        </p:nvSpPr>
-        <p:spPr>
-          <a:xfrm>
-            <a:off x="1407166" y="2417392"/>
-            <a:ext cx="10153500" cy="800400"/>
-          </a:xfrm>
-          <a:prstGeom prst="rect">
-            <a:avLst/>
-          </a:prstGeom>
-          <a:noFill/>
-          <a:ln>
-            <a:noFill/>
-          </a:ln>
-        </p:spPr>
-        <p:txBody>
-          <a:bodyPr spcFirstLastPara="1" wrap="square" lIns="91425" tIns="45700" rIns="91425" bIns="45700" anchor="t" anchorCtr="0">
-            <a:spAutoFit/>
-          </a:bodyPr>
-          <a:lstStyle/>
-          <a:p>
-            <a:pPr marL="0" marR="0" lvl="0" indent="0" algn="l" rtl="0">
-              <a:spcBef>
-                <a:spcPts val="0"/>
-              </a:spcBef>
-              <a:spcAft>
-                <a:spcPts val="0"/>
-              </a:spcAft>
-              <a:buNone/>
-            </a:pPr>
-            <a:r>
-              <a:rPr lang="ru-RU" sz="2300" b="0" i="0" u="none" strike="noStrike" cap="none" dirty="0">
-                <a:latin typeface="Arial"/>
-                <a:ea typeface="Arial"/>
-                <a:cs typeface="Arial"/>
-                <a:sym typeface="Arial"/>
-              </a:rPr>
-              <a:t>Реализовать функционал событий с возможностью привязки напоминаний</a:t>
-            </a:r>
-            <a:r>
-              <a:rPr lang="ru-RU" sz="2300" dirty="0">
-                <a:latin typeface="Arial"/>
-                <a:ea typeface="Arial"/>
-                <a:cs typeface="Arial"/>
-                <a:sym typeface="Arial"/>
-              </a:rPr>
-              <a:t>;</a:t>
-            </a:r>
-            <a:endParaRPr dirty="0"/>
-          </a:p>
-        </p:txBody>
-      </p:sp>
-      <p:sp>
-        <p:nvSpPr>
-          <p:cNvPr id="10" name="Google Shape;91;p6">
-            <a:extLst>
-              <a:ext uri="{FF2B5EF4-FFF2-40B4-BE49-F238E27FC236}">
-                <a16:creationId xmlns:a16="http://schemas.microsoft.com/office/drawing/2014/main" id="{A87A776B-CBE0-3D19-F850-5FFDA172C5EC}"/>
-              </a:ext>
-            </a:extLst>
-          </p:cNvPr>
-          <p:cNvSpPr txBox="1"/>
-          <p:nvPr/>
-        </p:nvSpPr>
-        <p:spPr>
-          <a:xfrm>
-            <a:off x="1407166" y="3348506"/>
-            <a:ext cx="9976200" cy="800400"/>
-          </a:xfrm>
-          <a:prstGeom prst="rect">
-            <a:avLst/>
-          </a:prstGeom>
-          <a:noFill/>
-          <a:ln>
-            <a:noFill/>
-          </a:ln>
-        </p:spPr>
-        <p:txBody>
-          <a:bodyPr spcFirstLastPara="1" wrap="square" lIns="91425" tIns="45700" rIns="91425" bIns="45700" anchor="t" anchorCtr="0">
-            <a:spAutoFit/>
-          </a:bodyPr>
-          <a:lstStyle/>
-          <a:p>
-            <a:pPr marL="0" marR="0" lvl="0" indent="0" algn="l" rtl="0">
-              <a:spcBef>
-                <a:spcPts val="0"/>
-              </a:spcBef>
-              <a:spcAft>
-                <a:spcPts val="0"/>
-              </a:spcAft>
-              <a:buNone/>
-            </a:pPr>
-            <a:r>
-              <a:rPr lang="ru-RU" sz="2300" b="0" i="0" u="none" strike="noStrike" cap="none" dirty="0">
-                <a:latin typeface="Arial"/>
-                <a:ea typeface="Arial"/>
-                <a:cs typeface="Arial"/>
-                <a:sym typeface="Arial"/>
-              </a:rPr>
-              <a:t>Интегрировать картографический сервис и реализовать модуль для поиска и отображения на карте ветеринарных клиник и зоомагазинов;</a:t>
-            </a:r>
-            <a:endParaRPr sz="2300" b="0" i="0" u="none" strike="noStrike" cap="none" dirty="0">
-              <a:latin typeface="Arial"/>
-              <a:ea typeface="Arial"/>
-              <a:cs typeface="Arial"/>
-              <a:sym typeface="Arial"/>
-            </a:endParaRPr>
-          </a:p>
-        </p:txBody>
-      </p:sp>
-      <p:sp>
-        <p:nvSpPr>
-          <p:cNvPr id="11" name="Google Shape;92;p6">
-            <a:extLst>
-              <a:ext uri="{FF2B5EF4-FFF2-40B4-BE49-F238E27FC236}">
-                <a16:creationId xmlns:a16="http://schemas.microsoft.com/office/drawing/2014/main" id="{227AEE10-EA7A-1A40-D0A4-518CB831D037}"/>
-              </a:ext>
-            </a:extLst>
-          </p:cNvPr>
-          <p:cNvSpPr txBox="1"/>
-          <p:nvPr/>
-        </p:nvSpPr>
-        <p:spPr>
-          <a:xfrm>
-            <a:off x="1407166" y="4373118"/>
-            <a:ext cx="9976200" cy="446400"/>
-          </a:xfrm>
-          <a:prstGeom prst="rect">
-            <a:avLst/>
-          </a:prstGeom>
-          <a:noFill/>
-          <a:ln>
-            <a:noFill/>
-          </a:ln>
-        </p:spPr>
-        <p:txBody>
-          <a:bodyPr spcFirstLastPara="1" wrap="square" lIns="91425" tIns="45700" rIns="91425" bIns="45700" anchor="t" anchorCtr="0">
-            <a:spAutoFit/>
-          </a:bodyPr>
-          <a:lstStyle/>
-          <a:p>
-            <a:pPr marL="0" marR="0" lvl="0" indent="0" algn="l" rtl="0">
-              <a:spcBef>
-                <a:spcPts val="0"/>
-              </a:spcBef>
-              <a:spcAft>
-                <a:spcPts val="0"/>
-              </a:spcAft>
-              <a:buNone/>
-            </a:pPr>
-            <a:r>
-              <a:rPr lang="ru-RU" sz="2300" b="0" i="0" u="none" strike="noStrike" cap="none" dirty="0">
-                <a:latin typeface="Arial"/>
-                <a:ea typeface="Arial"/>
-                <a:cs typeface="Arial"/>
-                <a:sym typeface="Arial"/>
-              </a:rPr>
-              <a:t>Реализовать систему аутентификации.</a:t>
-            </a:r>
-            <a:endParaRPr sz="2300" dirty="0">
-              <a:latin typeface="Arial"/>
-              <a:ea typeface="Arial"/>
-              <a:cs typeface="Arial"/>
-              <a:sym typeface="Arial"/>
-            </a:endParaRPr>
-          </a:p>
-        </p:txBody>
-      </p:sp>
-      <p:sp>
-        <p:nvSpPr>
-          <p:cNvPr id="12" name="Google Shape;93;p6">
-            <a:extLst>
-              <a:ext uri="{FF2B5EF4-FFF2-40B4-BE49-F238E27FC236}">
-                <a16:creationId xmlns:a16="http://schemas.microsoft.com/office/drawing/2014/main" id="{C959043B-CEEF-1B14-CF7D-B0AA090222D2}"/>
+          <p:cNvPr id="15" name="Google Shape;126;p8">
+            <a:extLst>
+              <a:ext uri="{FF2B5EF4-FFF2-40B4-BE49-F238E27FC236}">
+                <a16:creationId xmlns:a16="http://schemas.microsoft.com/office/drawing/2014/main" id="{7A51F893-497B-6D5D-A68E-4BDEC9E91797}"/>
               </a:ext>
             </a:extLst>
           </p:cNvPr>
@@ -5573,8 +5643,8 @@
         </p:nvSpPr>
         <p:spPr>
           <a:xfrm flipH="1">
-            <a:off x="906566" y="4455130"/>
-            <a:ext cx="235200" cy="235200"/>
+            <a:off x="953063" y="4645454"/>
+            <a:ext cx="154500" cy="158400"/>
           </a:xfrm>
           <a:prstGeom prst="ellipse">
             <a:avLst/>
@@ -5644,10 +5714,121 @@
       </p:grpSpPr>
       <p:sp>
         <p:nvSpPr>
-          <p:cNvPr id="2" name="Google Shape;99;p7">
-            <a:extLst>
-              <a:ext uri="{FF2B5EF4-FFF2-40B4-BE49-F238E27FC236}">
-                <a16:creationId xmlns:a16="http://schemas.microsoft.com/office/drawing/2014/main" id="{6F39D71D-830B-BF38-8573-0CF2A0A6C6C4}"/>
+          <p:cNvPr id="2" name="Google Shape;101;p7">
+            <a:extLst>
+              <a:ext uri="{FF2B5EF4-FFF2-40B4-BE49-F238E27FC236}">
+                <a16:creationId xmlns:a16="http://schemas.microsoft.com/office/drawing/2014/main" id="{889FED40-C1BC-90F8-F68C-3780EFEDC7B6}"/>
+              </a:ext>
+            </a:extLst>
+          </p:cNvPr>
+          <p:cNvSpPr txBox="1">
+            <a:spLocks/>
+          </p:cNvSpPr>
+          <p:nvPr/>
+        </p:nvSpPr>
+        <p:spPr>
+          <a:xfrm>
+            <a:off x="1033072" y="365126"/>
+            <a:ext cx="8202600" cy="697800"/>
+          </a:xfrm>
+          <a:prstGeom prst="rect">
+            <a:avLst/>
+          </a:prstGeom>
+          <a:noFill/>
+          <a:ln>
+            <a:noFill/>
+          </a:ln>
+        </p:spPr>
+        <p:txBody>
+          <a:bodyPr spcFirstLastPara="1" wrap="square" lIns="91425" tIns="45700" rIns="91425" bIns="45700" anchor="ctr" anchorCtr="0">
+            <a:normAutofit/>
+          </a:bodyPr>
+          <a:lstStyle>
+            <a:lvl1pPr algn="l" defTabSz="914400" rtl="0" eaLnBrk="1" latinLnBrk="0" hangingPunct="1">
+              <a:lnSpc>
+                <a:spcPct val="90000"/>
+              </a:lnSpc>
+              <a:spcBef>
+                <a:spcPct val="0"/>
+              </a:spcBef>
+              <a:buNone/>
+              <a:defRPr sz="4400" kern="1200">
+                <a:solidFill>
+                  <a:schemeClr val="tx1"/>
+                </a:solidFill>
+                <a:latin typeface="+mj-lt"/>
+                <a:ea typeface="+mj-ea"/>
+                <a:cs typeface="+mj-cs"/>
+              </a:defRPr>
+            </a:lvl1pPr>
+          </a:lstStyle>
+          <a:p>
+            <a:pPr>
+              <a:lnSpc>
+                <a:spcPct val="70000"/>
+              </a:lnSpc>
+              <a:spcBef>
+                <a:spcPts val="0"/>
+              </a:spcBef>
+              <a:buClr>
+                <a:srgbClr val="00497A"/>
+              </a:buClr>
+              <a:buSzPts val="3200"/>
+              <a:buFont typeface="Arial"/>
+              <a:buNone/>
+            </a:pPr>
+            <a:r>
+              <a:rPr lang="en-US" dirty="0"/>
+              <a:t>ER</a:t>
+            </a:r>
+            <a:r>
+              <a:rPr lang="ru-RU" dirty="0"/>
+              <a:t>-диаграмма</a:t>
+            </a:r>
+          </a:p>
+        </p:txBody>
+      </p:sp>
+      <p:pic>
+        <p:nvPicPr>
+          <p:cNvPr id="4" name="Рисунок 3" descr="Изображение выглядит как текст, диаграмма, число, Параллельный&#10;&#10;Автоматически созданное описание">
+            <a:extLst>
+              <a:ext uri="{FF2B5EF4-FFF2-40B4-BE49-F238E27FC236}">
+                <a16:creationId xmlns:a16="http://schemas.microsoft.com/office/drawing/2014/main" id="{7B9EF08C-7B9D-0A14-BD37-BC007267794E}"/>
+              </a:ext>
+            </a:extLst>
+          </p:cNvPr>
+          <p:cNvPicPr>
+            <a:picLocks noChangeAspect="1"/>
+          </p:cNvPicPr>
+          <p:nvPr/>
+        </p:nvPicPr>
+        <p:blipFill>
+          <a:blip r:embed="rId2">
+            <a:extLst>
+              <a:ext uri="{28A0092B-C50C-407E-A947-70E740481C1C}">
+                <a14:useLocalDpi xmlns:a14="http://schemas.microsoft.com/office/drawing/2010/main" val="0"/>
+              </a:ext>
+            </a:extLst>
+          </a:blip>
+          <a:srcRect l="8144" t="4589"/>
+          <a:stretch/>
+        </p:blipFill>
+        <p:spPr>
+          <a:xfrm>
+            <a:off x="2956328" y="1058978"/>
+            <a:ext cx="5598367" cy="5433896"/>
+          </a:xfrm>
+          <a:prstGeom prst="rect">
+            <a:avLst/>
+          </a:prstGeom>
+        </p:spPr>
+      </p:pic>
+      <p:sp>
+        <p:nvSpPr>
+          <p:cNvPr id="5" name="Google Shape;84;p6">
+            <a:extLst>
+              <a:ext uri="{FF2B5EF4-FFF2-40B4-BE49-F238E27FC236}">
+                <a16:creationId xmlns:a16="http://schemas.microsoft.com/office/drawing/2014/main" id="{AB101A6C-D296-01A5-C673-0800072376AA}"/>
               </a:ext>
             </a:extLst>
           </p:cNvPr>
@@ -5655,17 +5836,21 @@
             <a:spLocks noGrp="1"/>
           </p:cNvSpPr>
           <p:nvPr>
-            <p:ph type="sldNum" idx="12"/>
+            <p:ph type="sldNum" sz="quarter" idx="12"/>
           </p:nvPr>
         </p:nvSpPr>
         <p:spPr>
           <a:xfrm>
-            <a:off x="9235672" y="6331241"/>
-            <a:ext cx="2743200" cy="365100"/>
+            <a:off x="8610600" y="6356350"/>
+            <a:ext cx="2743200" cy="365125"/>
           </a:xfrm>
           <a:prstGeom prst="rect">
             <a:avLst/>
           </a:prstGeom>
+          <a:noFill/>
+          <a:ln>
+            <a:noFill/>
+          </a:ln>
         </p:spPr>
         <p:txBody>
           <a:bodyPr spcFirstLastPara="1" wrap="square" lIns="91425" tIns="45700" rIns="91425" bIns="45700" anchor="ctr" anchorCtr="0">
@@ -5680,10 +5865,6 @@
               <a:spcAft>
                 <a:spcPts val="0"/>
               </a:spcAft>
-              <a:buClr>
-                <a:srgbClr val="000000"/>
-              </a:buClr>
-              <a:buFont typeface="Arial"/>
               <a:buNone/>
             </a:pPr>
             <a:fld id="{00000000-1234-1234-1234-123412341234}" type="slidenum">
@@ -5702,118 +5883,10 @@
           </a:p>
         </p:txBody>
       </p:sp>
-      <p:sp>
-        <p:nvSpPr>
-          <p:cNvPr id="4" name="Google Shape;101;p7">
-            <a:extLst>
-              <a:ext uri="{FF2B5EF4-FFF2-40B4-BE49-F238E27FC236}">
-                <a16:creationId xmlns:a16="http://schemas.microsoft.com/office/drawing/2014/main" id="{05C491F7-BF31-B606-E8A3-37B348313FB3}"/>
-              </a:ext>
-            </a:extLst>
-          </p:cNvPr>
-          <p:cNvSpPr txBox="1">
-            <a:spLocks/>
-          </p:cNvSpPr>
-          <p:nvPr/>
-        </p:nvSpPr>
-        <p:spPr>
-          <a:xfrm>
-            <a:off x="1033072" y="365126"/>
-            <a:ext cx="8202600" cy="697800"/>
-          </a:xfrm>
-          <a:prstGeom prst="rect">
-            <a:avLst/>
-          </a:prstGeom>
-          <a:noFill/>
-          <a:ln>
-            <a:noFill/>
-          </a:ln>
-        </p:spPr>
-        <p:txBody>
-          <a:bodyPr spcFirstLastPara="1" wrap="square" lIns="91425" tIns="45700" rIns="91425" bIns="45700" anchor="ctr" anchorCtr="0">
-            <a:normAutofit/>
-          </a:bodyPr>
-          <a:lstStyle>
-            <a:lvl1pPr algn="l" defTabSz="914400" rtl="0" eaLnBrk="1" latinLnBrk="0" hangingPunct="1">
-              <a:lnSpc>
-                <a:spcPct val="90000"/>
-              </a:lnSpc>
-              <a:spcBef>
-                <a:spcPct val="0"/>
-              </a:spcBef>
-              <a:buNone/>
-              <a:defRPr sz="4400" kern="1200">
-                <a:solidFill>
-                  <a:schemeClr val="tx1"/>
-                </a:solidFill>
-                <a:latin typeface="+mj-lt"/>
-                <a:ea typeface="+mj-ea"/>
-                <a:cs typeface="+mj-cs"/>
-              </a:defRPr>
-            </a:lvl1pPr>
-          </a:lstStyle>
-          <a:p>
-            <a:pPr>
-              <a:lnSpc>
-                <a:spcPct val="70000"/>
-              </a:lnSpc>
-              <a:spcBef>
-                <a:spcPts val="0"/>
-              </a:spcBef>
-              <a:buClr>
-                <a:srgbClr val="00497A"/>
-              </a:buClr>
-              <a:buSzPts val="3200"/>
-              <a:buFont typeface="Arial"/>
-              <a:buNone/>
-            </a:pPr>
-            <a:r>
-              <a:rPr lang="ru-RU" dirty="0"/>
-              <a:t>Диаграмма прецедентов</a:t>
-            </a:r>
-          </a:p>
-        </p:txBody>
-      </p:sp>
-      <p:pic>
-        <p:nvPicPr>
-          <p:cNvPr id="6" name="Рисунок 5" descr="Изображение выглядит как диаграмма, текст, рисунок, зарисовка&#10;&#10;Автоматически созданное описание">
-            <a:extLst>
-              <a:ext uri="{FF2B5EF4-FFF2-40B4-BE49-F238E27FC236}">
-                <a16:creationId xmlns:a16="http://schemas.microsoft.com/office/drawing/2014/main" id="{9D22C038-5AA0-AC7A-32CB-3142363856EC}"/>
-              </a:ext>
-            </a:extLst>
-          </p:cNvPr>
-          <p:cNvPicPr>
-            <a:picLocks noChangeAspect="1"/>
-          </p:cNvPicPr>
-          <p:nvPr/>
-        </p:nvPicPr>
-        <p:blipFill>
-          <a:blip r:embed="rId2">
-            <a:extLst>
-              <a:ext uri="{28A0092B-C50C-407E-A947-70E740481C1C}">
-                <a14:useLocalDpi xmlns:a14="http://schemas.microsoft.com/office/drawing/2010/main" val="0"/>
-              </a:ext>
-            </a:extLst>
-          </a:blip>
-          <a:stretch>
-            <a:fillRect/>
-          </a:stretch>
-        </p:blipFill>
-        <p:spPr>
-          <a:xfrm>
-            <a:off x="663534" y="1088046"/>
-            <a:ext cx="11199865" cy="5404827"/>
-          </a:xfrm>
-          <a:prstGeom prst="rect">
-            <a:avLst/>
-          </a:prstGeom>
-        </p:spPr>
-      </p:pic>
     </p:spTree>
     <p:extLst>
       <p:ext uri="{BB962C8B-B14F-4D97-AF65-F5344CB8AC3E}">
-        <p14:creationId xmlns:p14="http://schemas.microsoft.com/office/powerpoint/2010/main" val="561711780"/>
+        <p14:creationId xmlns:p14="http://schemas.microsoft.com/office/powerpoint/2010/main" val="960810450"/>
       </p:ext>
     </p:extLst>
   </p:cSld>
@@ -5842,70 +5915,10 @@
       </p:grpSpPr>
       <p:sp>
         <p:nvSpPr>
-          <p:cNvPr id="3" name="Google Shape;108;p8">
-            <a:extLst>
-              <a:ext uri="{FF2B5EF4-FFF2-40B4-BE49-F238E27FC236}">
-                <a16:creationId xmlns:a16="http://schemas.microsoft.com/office/drawing/2014/main" id="{E63C679E-32E0-54D9-7F2C-24A67562AB71}"/>
-              </a:ext>
-            </a:extLst>
-          </p:cNvPr>
-          <p:cNvSpPr txBox="1">
-            <a:spLocks noGrp="1"/>
-          </p:cNvSpPr>
-          <p:nvPr>
-            <p:ph type="sldNum" idx="12"/>
-          </p:nvPr>
-        </p:nvSpPr>
-        <p:spPr>
-          <a:xfrm>
-            <a:off x="8610600" y="6039364"/>
-            <a:ext cx="3144520" cy="430800"/>
-          </a:xfrm>
-          <a:prstGeom prst="rect">
-            <a:avLst/>
-          </a:prstGeom>
-          <a:noFill/>
-          <a:ln>
-            <a:noFill/>
-          </a:ln>
-        </p:spPr>
-        <p:txBody>
-          <a:bodyPr spcFirstLastPara="1" wrap="square" lIns="91425" tIns="45700" rIns="91425" bIns="45700" anchor="ctr" anchorCtr="0">
-            <a:noAutofit/>
-          </a:bodyPr>
-          <a:lstStyle/>
-          <a:p>
-            <a:pPr marL="0" lvl="0" indent="0" algn="r" rtl="0">
-              <a:spcBef>
-                <a:spcPts val="0"/>
-              </a:spcBef>
-              <a:spcAft>
-                <a:spcPts val="0"/>
-              </a:spcAft>
-              <a:buNone/>
-            </a:pPr>
-            <a:fld id="{00000000-1234-1234-1234-123412341234}" type="slidenum">
-              <a:rPr lang="ru-RU">
-                <a:solidFill>
-                  <a:schemeClr val="tx1"/>
-                </a:solidFill>
-              </a:rPr>
-              <a:t>5</a:t>
-            </a:fld>
-            <a:endParaRPr>
-              <a:solidFill>
-                <a:schemeClr val="tx1"/>
-              </a:solidFill>
-            </a:endParaRPr>
-          </a:p>
-        </p:txBody>
-      </p:sp>
-      <p:sp>
-        <p:nvSpPr>
-          <p:cNvPr id="4" name="Google Shape;109;p8">
-            <a:extLst>
-              <a:ext uri="{FF2B5EF4-FFF2-40B4-BE49-F238E27FC236}">
-                <a16:creationId xmlns:a16="http://schemas.microsoft.com/office/drawing/2014/main" id="{F4709B77-D597-B99C-BCFD-ADBF0853D766}"/>
+          <p:cNvPr id="4" name="Google Shape;101;p7">
+            <a:extLst>
+              <a:ext uri="{FF2B5EF4-FFF2-40B4-BE49-F238E27FC236}">
+                <a16:creationId xmlns:a16="http://schemas.microsoft.com/office/drawing/2014/main" id="{05C491F7-BF31-B606-E8A3-37B348313FB3}"/>
               </a:ext>
             </a:extLst>
           </p:cNvPr>
@@ -5917,7 +5930,7 @@
         <p:spPr>
           <a:xfrm>
             <a:off x="1033072" y="365126"/>
-            <a:ext cx="8202474" cy="697717"/>
+            <a:ext cx="8202600" cy="697800"/>
           </a:xfrm>
           <a:prstGeom prst="rect">
             <a:avLst/>
@@ -5966,1282 +5979,112 @@
               <a:buNone/>
             </a:pPr>
             <a:r>
-              <a:rPr lang="ru-RU"/>
-              <a:t>Технический стек</a:t>
-            </a:r>
-          </a:p>
-        </p:txBody>
-      </p:sp>
-      <p:sp>
-        <p:nvSpPr>
-          <p:cNvPr id="5" name="Google Shape;110;p8">
-            <a:extLst>
-              <a:ext uri="{FF2B5EF4-FFF2-40B4-BE49-F238E27FC236}">
-                <a16:creationId xmlns:a16="http://schemas.microsoft.com/office/drawing/2014/main" id="{5FF5F6F1-8CC7-03F9-B85C-E450AEDB4A6C}"/>
-              </a:ext>
-            </a:extLst>
-          </p:cNvPr>
-          <p:cNvSpPr/>
+              <a:rPr lang="ru-RU" dirty="0"/>
+              <a:t>Диаграмма прецедентов</a:t>
+            </a:r>
+          </a:p>
+        </p:txBody>
+      </p:sp>
+      <p:pic>
+        <p:nvPicPr>
+          <p:cNvPr id="6" name="Рисунок 5" descr="Изображение выглядит как диаграмма, текст, рисунок, зарисовка&#10;&#10;Автоматически созданное описание">
+            <a:extLst>
+              <a:ext uri="{FF2B5EF4-FFF2-40B4-BE49-F238E27FC236}">
+                <a16:creationId xmlns:a16="http://schemas.microsoft.com/office/drawing/2014/main" id="{9D22C038-5AA0-AC7A-32CB-3142363856EC}"/>
+              </a:ext>
+            </a:extLst>
+          </p:cNvPr>
+          <p:cNvPicPr>
+            <a:picLocks noChangeAspect="1"/>
+          </p:cNvPicPr>
           <p:nvPr/>
-        </p:nvSpPr>
-        <p:spPr>
-          <a:xfrm flipH="1">
-            <a:off x="915532" y="1186436"/>
-            <a:ext cx="235080" cy="235080"/>
-          </a:xfrm>
-          <a:prstGeom prst="ellipse">
+        </p:nvPicPr>
+        <p:blipFill>
+          <a:blip r:embed="rId2">
+            <a:extLst>
+              <a:ext uri="{28A0092B-C50C-407E-A947-70E740481C1C}">
+                <a14:useLocalDpi xmlns:a14="http://schemas.microsoft.com/office/drawing/2010/main" val="0"/>
+              </a:ext>
+            </a:extLst>
+          </a:blip>
+          <a:stretch>
+            <a:fillRect/>
+          </a:stretch>
+        </p:blipFill>
+        <p:spPr>
+          <a:xfrm>
+            <a:off x="663534" y="1088046"/>
+            <a:ext cx="11199865" cy="5404827"/>
+          </a:xfrm>
+          <a:prstGeom prst="rect">
             <a:avLst/>
           </a:prstGeom>
-          <a:solidFill>
-            <a:schemeClr val="tx1"/>
-          </a:solidFill>
-          <a:ln>
-            <a:noFill/>
-          </a:ln>
-          <a:effectLst>
-            <a:outerShdw blurRad="203040" dist="75967" dir="5448874" sx="102000" sy="102000" algn="ctr" rotWithShape="0">
-              <a:srgbClr val="BFBFBF">
-                <a:alpha val="50980"/>
-              </a:srgbClr>
-            </a:outerShdw>
-          </a:effectLst>
-        </p:spPr>
-        <p:txBody>
-          <a:bodyPr spcFirstLastPara="1" wrap="square" lIns="91425" tIns="91425" rIns="91425" bIns="91425" anchor="ctr" anchorCtr="0">
+        </p:spPr>
+      </p:pic>
+      <p:sp>
+        <p:nvSpPr>
+          <p:cNvPr id="2" name="Google Shape;99;p7">
+            <a:extLst>
+              <a:ext uri="{FF2B5EF4-FFF2-40B4-BE49-F238E27FC236}">
+                <a16:creationId xmlns:a16="http://schemas.microsoft.com/office/drawing/2014/main" id="{6F39D71D-830B-BF38-8573-0CF2A0A6C6C4}"/>
+              </a:ext>
+            </a:extLst>
+          </p:cNvPr>
+          <p:cNvSpPr txBox="1">
+            <a:spLocks noGrp="1"/>
+          </p:cNvSpPr>
+          <p:nvPr>
+            <p:ph type="sldNum" idx="12"/>
+          </p:nvPr>
+        </p:nvSpPr>
+        <p:spPr>
+          <a:xfrm>
+            <a:off x="8785266" y="6310323"/>
+            <a:ext cx="2743200" cy="365100"/>
+          </a:xfrm>
+          <a:prstGeom prst="rect">
+            <a:avLst/>
+          </a:prstGeom>
+        </p:spPr>
+        <p:txBody>
+          <a:bodyPr spcFirstLastPara="1" wrap="square" lIns="91425" tIns="45700" rIns="91425" bIns="45700" anchor="ctr" anchorCtr="0">
             <a:noAutofit/>
           </a:bodyPr>
           <a:lstStyle/>
           <a:p>
-            <a:pPr marL="0" lvl="0" indent="0" algn="l" rtl="0">
+            <a:pPr marL="0" lvl="0" indent="0" algn="r" rtl="0">
               <a:spcBef>
                 <a:spcPts val="0"/>
               </a:spcBef>
               <a:spcAft>
                 <a:spcPts val="0"/>
               </a:spcAft>
+              <a:buClr>
+                <a:srgbClr val="000000"/>
+              </a:buClr>
+              <a:buFont typeface="Arial"/>
               <a:buNone/>
             </a:pPr>
-            <a:endParaRPr/>
-          </a:p>
-        </p:txBody>
-      </p:sp>
-      <p:sp>
-        <p:nvSpPr>
-          <p:cNvPr id="6" name="Google Shape;111;p8">
-            <a:extLst>
-              <a:ext uri="{FF2B5EF4-FFF2-40B4-BE49-F238E27FC236}">
-                <a16:creationId xmlns:a16="http://schemas.microsoft.com/office/drawing/2014/main" id="{46ED400C-1E5C-C2FC-D96A-DF24A1E9F059}"/>
-              </a:ext>
-            </a:extLst>
-          </p:cNvPr>
-          <p:cNvSpPr/>
-          <p:nvPr/>
-        </p:nvSpPr>
-        <p:spPr>
-          <a:xfrm flipH="1">
-            <a:off x="915412" y="2500482"/>
-            <a:ext cx="235200" cy="235200"/>
-          </a:xfrm>
-          <a:prstGeom prst="ellipse">
-            <a:avLst/>
-          </a:prstGeom>
-          <a:solidFill>
-            <a:schemeClr val="tx1"/>
-          </a:solidFill>
-          <a:ln>
-            <a:noFill/>
-          </a:ln>
-          <a:effectLst>
-            <a:outerShdw blurRad="203040" dist="75967" dir="5448874" sx="102000" sy="102000" algn="ctr" rotWithShape="0">
-              <a:srgbClr val="BFBFBF">
-                <a:alpha val="50980"/>
-              </a:srgbClr>
-            </a:outerShdw>
-          </a:effectLst>
-        </p:spPr>
-        <p:txBody>
-          <a:bodyPr spcFirstLastPara="1" wrap="square" lIns="91425" tIns="91425" rIns="91425" bIns="91425" anchor="ctr" anchorCtr="0">
-            <a:noAutofit/>
-          </a:bodyPr>
-          <a:lstStyle/>
-          <a:p>
-            <a:pPr marL="0" lvl="0" indent="0" algn="l" rtl="0">
-              <a:spcBef>
-                <a:spcPts val="0"/>
-              </a:spcBef>
-              <a:spcAft>
-                <a:spcPts val="0"/>
-              </a:spcAft>
-              <a:buNone/>
-            </a:pPr>
-            <a:endParaRPr/>
-          </a:p>
-        </p:txBody>
-      </p:sp>
-      <p:sp>
-        <p:nvSpPr>
-          <p:cNvPr id="7" name="Google Shape;112;p8">
-            <a:extLst>
-              <a:ext uri="{FF2B5EF4-FFF2-40B4-BE49-F238E27FC236}">
-                <a16:creationId xmlns:a16="http://schemas.microsoft.com/office/drawing/2014/main" id="{07EAAB4D-A618-8989-0CF6-2C1E8AC8C3C7}"/>
-              </a:ext>
-            </a:extLst>
-          </p:cNvPr>
-          <p:cNvSpPr/>
-          <p:nvPr/>
-        </p:nvSpPr>
-        <p:spPr>
-          <a:xfrm flipH="1">
-            <a:off x="903940" y="4361006"/>
-            <a:ext cx="235200" cy="235200"/>
-          </a:xfrm>
-          <a:prstGeom prst="ellipse">
-            <a:avLst/>
-          </a:prstGeom>
-          <a:solidFill>
-            <a:schemeClr val="tx1"/>
-          </a:solidFill>
-          <a:ln>
-            <a:noFill/>
-          </a:ln>
-          <a:effectLst>
-            <a:outerShdw blurRad="203040" dist="75967" dir="5448874" sx="102000" sy="102000" algn="ctr" rotWithShape="0">
-              <a:srgbClr val="BFBFBF">
-                <a:alpha val="50980"/>
-              </a:srgbClr>
-            </a:outerShdw>
-          </a:effectLst>
-        </p:spPr>
-        <p:txBody>
-          <a:bodyPr spcFirstLastPara="1" wrap="square" lIns="91425" tIns="91425" rIns="91425" bIns="91425" anchor="ctr" anchorCtr="0">
-            <a:noAutofit/>
-          </a:bodyPr>
-          <a:lstStyle/>
-          <a:p>
-            <a:pPr marL="0" lvl="0" indent="0" algn="l" rtl="0">
-              <a:spcBef>
-                <a:spcPts val="0"/>
-              </a:spcBef>
-              <a:spcAft>
-                <a:spcPts val="0"/>
-              </a:spcAft>
-              <a:buNone/>
-            </a:pPr>
-            <a:endParaRPr/>
-          </a:p>
-        </p:txBody>
-      </p:sp>
-      <p:sp>
-        <p:nvSpPr>
-          <p:cNvPr id="8" name="Google Shape;113;p8">
-            <a:extLst>
-              <a:ext uri="{FF2B5EF4-FFF2-40B4-BE49-F238E27FC236}">
-                <a16:creationId xmlns:a16="http://schemas.microsoft.com/office/drawing/2014/main" id="{70A06B85-2CE4-B04E-2604-80085EAD16DB}"/>
-              </a:ext>
-            </a:extLst>
-          </p:cNvPr>
-          <p:cNvSpPr/>
-          <p:nvPr/>
-        </p:nvSpPr>
-        <p:spPr>
-          <a:xfrm flipH="1">
-            <a:off x="915412" y="5608413"/>
-            <a:ext cx="235200" cy="235200"/>
-          </a:xfrm>
-          <a:prstGeom prst="ellipse">
-            <a:avLst/>
-          </a:prstGeom>
-          <a:solidFill>
-            <a:schemeClr val="tx1"/>
-          </a:solidFill>
-          <a:ln>
-            <a:noFill/>
-          </a:ln>
-          <a:effectLst>
-            <a:outerShdw blurRad="203040" dist="75967" dir="5448874" sx="102000" sy="102000" algn="ctr" rotWithShape="0">
-              <a:srgbClr val="BFBFBF">
-                <a:alpha val="50980"/>
-              </a:srgbClr>
-            </a:outerShdw>
-          </a:effectLst>
-        </p:spPr>
-        <p:txBody>
-          <a:bodyPr spcFirstLastPara="1" wrap="square" lIns="91425" tIns="91425" rIns="91425" bIns="91425" anchor="ctr" anchorCtr="0">
-            <a:noAutofit/>
-          </a:bodyPr>
-          <a:lstStyle/>
-          <a:p>
-            <a:pPr marL="0" lvl="0" indent="0" algn="l" rtl="0">
-              <a:spcBef>
-                <a:spcPts val="0"/>
-              </a:spcBef>
-              <a:spcAft>
-                <a:spcPts val="0"/>
-              </a:spcAft>
-              <a:buNone/>
-            </a:pPr>
-            <a:endParaRPr/>
-          </a:p>
-        </p:txBody>
-      </p:sp>
-      <p:sp>
-        <p:nvSpPr>
-          <p:cNvPr id="9" name="Google Shape;114;p8">
-            <a:extLst>
-              <a:ext uri="{FF2B5EF4-FFF2-40B4-BE49-F238E27FC236}">
-                <a16:creationId xmlns:a16="http://schemas.microsoft.com/office/drawing/2014/main" id="{FFD0DE75-AC77-EF47-2933-28889524DB68}"/>
-              </a:ext>
-            </a:extLst>
-          </p:cNvPr>
-          <p:cNvSpPr txBox="1"/>
-          <p:nvPr/>
-        </p:nvSpPr>
-        <p:spPr>
-          <a:xfrm>
-            <a:off x="1318532" y="1075784"/>
-            <a:ext cx="6098720" cy="481630"/>
-          </a:xfrm>
-          <a:prstGeom prst="rect">
-            <a:avLst/>
-          </a:prstGeom>
-          <a:noFill/>
-          <a:ln>
-            <a:noFill/>
-          </a:ln>
-        </p:spPr>
-        <p:txBody>
-          <a:bodyPr spcFirstLastPara="1" wrap="square" lIns="91425" tIns="45700" rIns="91425" bIns="45700" anchor="t" anchorCtr="0">
-            <a:spAutoFit/>
-          </a:bodyPr>
-          <a:lstStyle/>
-          <a:p>
-            <a:pPr marL="0" marR="0" lvl="0" indent="0" algn="l" rtl="0">
-              <a:lnSpc>
-                <a:spcPct val="115000"/>
-              </a:lnSpc>
-              <a:spcBef>
-                <a:spcPts val="0"/>
-              </a:spcBef>
-              <a:spcAft>
-                <a:spcPts val="0"/>
-              </a:spcAft>
-              <a:buNone/>
-            </a:pPr>
-            <a:r>
-              <a:rPr lang="ru-RU" sz="2200" b="1">
-                <a:latin typeface="Arial"/>
-                <a:ea typeface="Arial"/>
-                <a:cs typeface="Arial"/>
-                <a:sym typeface="Arial"/>
+            <a:fld id="{00000000-1234-1234-1234-123412341234}" type="slidenum">
+              <a:rPr lang="ru-RU">
+                <a:solidFill>
+                  <a:schemeClr val="tx1"/>
+                </a:solidFill>
               </a:rPr>
-              <a:t>Язык разработки:</a:t>
-            </a:r>
-            <a:r>
-              <a:rPr lang="ru-RU" sz="2200">
-                <a:latin typeface="Arial"/>
-                <a:ea typeface="Arial"/>
-                <a:cs typeface="Arial"/>
-                <a:sym typeface="Arial"/>
-              </a:rPr>
-              <a:t> Kotlin </a:t>
-            </a:r>
-            <a:endParaRPr/>
-          </a:p>
-        </p:txBody>
-      </p:sp>
-      <p:sp>
-        <p:nvSpPr>
-          <p:cNvPr id="10" name="Google Shape;115;p8">
-            <a:extLst>
-              <a:ext uri="{FF2B5EF4-FFF2-40B4-BE49-F238E27FC236}">
-                <a16:creationId xmlns:a16="http://schemas.microsoft.com/office/drawing/2014/main" id="{760FEB38-65E8-3021-4FBD-9F80A06F62B4}"/>
-              </a:ext>
-            </a:extLst>
-          </p:cNvPr>
-          <p:cNvSpPr txBox="1"/>
-          <p:nvPr/>
-        </p:nvSpPr>
-        <p:spPr>
-          <a:xfrm>
-            <a:off x="1297363" y="1521424"/>
-            <a:ext cx="6098720" cy="430887"/>
-          </a:xfrm>
-          <a:prstGeom prst="rect">
-            <a:avLst/>
-          </a:prstGeom>
-          <a:noFill/>
-          <a:ln>
-            <a:noFill/>
-          </a:ln>
-        </p:spPr>
-        <p:txBody>
-          <a:bodyPr spcFirstLastPara="1" wrap="square" lIns="91425" tIns="45700" rIns="91425" bIns="45700" anchor="t" anchorCtr="0">
-            <a:spAutoFit/>
-          </a:bodyPr>
-          <a:lstStyle/>
-          <a:p>
-            <a:pPr marL="0" marR="0" lvl="0" indent="0" algn="l" rtl="0">
-              <a:spcBef>
-                <a:spcPts val="0"/>
-              </a:spcBef>
-              <a:spcAft>
-                <a:spcPts val="0"/>
-              </a:spcAft>
-              <a:buNone/>
-            </a:pPr>
-            <a:r>
-              <a:rPr lang="ru-RU" sz="2200" b="1">
-                <a:latin typeface="Arial"/>
-                <a:ea typeface="Arial"/>
-                <a:cs typeface="Arial"/>
-                <a:sym typeface="Arial"/>
-              </a:rPr>
-              <a:t>Среда разработки:</a:t>
-            </a:r>
-            <a:r>
-              <a:rPr lang="ru-RU" sz="2200">
-                <a:latin typeface="Arial"/>
-                <a:ea typeface="Arial"/>
-                <a:cs typeface="Arial"/>
-                <a:sym typeface="Arial"/>
-              </a:rPr>
-              <a:t> Android Studio</a:t>
-            </a:r>
-            <a:endParaRPr/>
-          </a:p>
-        </p:txBody>
-      </p:sp>
-      <p:sp>
-        <p:nvSpPr>
-          <p:cNvPr id="11" name="Google Shape;116;p8">
-            <a:extLst>
-              <a:ext uri="{FF2B5EF4-FFF2-40B4-BE49-F238E27FC236}">
-                <a16:creationId xmlns:a16="http://schemas.microsoft.com/office/drawing/2014/main" id="{1CAFB16B-0CD0-0D7C-01C1-447023178E23}"/>
-              </a:ext>
-            </a:extLst>
-          </p:cNvPr>
-          <p:cNvSpPr txBox="1"/>
-          <p:nvPr/>
-        </p:nvSpPr>
-        <p:spPr>
-          <a:xfrm>
-            <a:off x="1297363" y="1988952"/>
-            <a:ext cx="6098700" cy="481630"/>
-          </a:xfrm>
-          <a:prstGeom prst="rect">
-            <a:avLst/>
-          </a:prstGeom>
-          <a:noFill/>
-          <a:ln>
-            <a:noFill/>
-          </a:ln>
-        </p:spPr>
-        <p:txBody>
-          <a:bodyPr spcFirstLastPara="1" wrap="square" lIns="91425" tIns="45700" rIns="91425" bIns="45700" anchor="t" anchorCtr="0">
-            <a:spAutoFit/>
-          </a:bodyPr>
-          <a:lstStyle/>
-          <a:p>
-            <a:pPr marL="0" marR="0" lvl="0" indent="0" algn="l" rtl="0">
-              <a:lnSpc>
-                <a:spcPct val="115000"/>
-              </a:lnSpc>
-              <a:spcBef>
-                <a:spcPts val="0"/>
-              </a:spcBef>
-              <a:spcAft>
-                <a:spcPts val="0"/>
-              </a:spcAft>
-              <a:buNone/>
-            </a:pPr>
-            <a:r>
-              <a:rPr lang="ru-RU" sz="2200" b="1">
-                <a:latin typeface="Arial"/>
-                <a:ea typeface="Arial"/>
-                <a:cs typeface="Arial"/>
-                <a:sym typeface="Arial"/>
-              </a:rPr>
-              <a:t>Архитектура:</a:t>
-            </a:r>
-            <a:r>
-              <a:rPr lang="ru-RU" sz="2200">
-                <a:latin typeface="Arial"/>
-                <a:ea typeface="Arial"/>
-                <a:cs typeface="Arial"/>
-                <a:sym typeface="Arial"/>
-              </a:rPr>
-              <a:t> MVVM</a:t>
-            </a:r>
-            <a:endParaRPr/>
-          </a:p>
-        </p:txBody>
-      </p:sp>
-      <p:sp>
-        <p:nvSpPr>
-          <p:cNvPr id="12" name="Google Shape;117;p8">
-            <a:extLst>
-              <a:ext uri="{FF2B5EF4-FFF2-40B4-BE49-F238E27FC236}">
-                <a16:creationId xmlns:a16="http://schemas.microsoft.com/office/drawing/2014/main" id="{7FC2FCE7-1C8F-2C5C-FA69-381C3F9FB751}"/>
-              </a:ext>
-            </a:extLst>
-          </p:cNvPr>
-          <p:cNvSpPr txBox="1"/>
-          <p:nvPr/>
-        </p:nvSpPr>
-        <p:spPr>
-          <a:xfrm>
-            <a:off x="1297363" y="2377919"/>
-            <a:ext cx="6098700" cy="481630"/>
-          </a:xfrm>
-          <a:prstGeom prst="rect">
-            <a:avLst/>
-          </a:prstGeom>
-          <a:noFill/>
-          <a:ln>
-            <a:noFill/>
-          </a:ln>
-        </p:spPr>
-        <p:txBody>
-          <a:bodyPr spcFirstLastPara="1" wrap="square" lIns="91425" tIns="45700" rIns="91425" bIns="45700" anchor="t" anchorCtr="0">
-            <a:spAutoFit/>
-          </a:bodyPr>
-          <a:lstStyle/>
-          <a:p>
-            <a:pPr marL="0" marR="0" lvl="0" indent="0" algn="l" rtl="0">
-              <a:lnSpc>
-                <a:spcPct val="115000"/>
-              </a:lnSpc>
-              <a:spcBef>
-                <a:spcPts val="0"/>
-              </a:spcBef>
-              <a:spcAft>
-                <a:spcPts val="0"/>
-              </a:spcAft>
-              <a:buNone/>
-            </a:pPr>
-            <a:r>
-              <a:rPr lang="ru-RU" sz="2200" b="1">
-                <a:latin typeface="Arial"/>
-                <a:ea typeface="Arial"/>
-                <a:cs typeface="Arial"/>
-                <a:sym typeface="Arial"/>
-              </a:rPr>
-              <a:t>Бэкенд и данные:</a:t>
-            </a:r>
-            <a:endParaRPr sz="2200">
-              <a:latin typeface="Arial"/>
-              <a:ea typeface="Arial"/>
-              <a:cs typeface="Arial"/>
-              <a:sym typeface="Arial"/>
+              <a:t>5</a:t>
+            </a:fld>
+            <a:endParaRPr dirty="0">
+              <a:solidFill>
+                <a:schemeClr val="tx1"/>
+              </a:solidFill>
             </a:endParaRPr>
-          </a:p>
-        </p:txBody>
-      </p:sp>
-      <p:sp>
-        <p:nvSpPr>
-          <p:cNvPr id="13" name="Google Shape;118;p8">
-            <a:extLst>
-              <a:ext uri="{FF2B5EF4-FFF2-40B4-BE49-F238E27FC236}">
-                <a16:creationId xmlns:a16="http://schemas.microsoft.com/office/drawing/2014/main" id="{A8A127A9-4A26-D403-539B-075BCCC2072E}"/>
-              </a:ext>
-            </a:extLst>
-          </p:cNvPr>
-          <p:cNvSpPr txBox="1"/>
-          <p:nvPr/>
-        </p:nvSpPr>
-        <p:spPr>
-          <a:xfrm>
-            <a:off x="1880398" y="2771355"/>
-            <a:ext cx="9396000" cy="481630"/>
-          </a:xfrm>
-          <a:prstGeom prst="rect">
-            <a:avLst/>
-          </a:prstGeom>
-          <a:noFill/>
-          <a:ln>
-            <a:noFill/>
-          </a:ln>
-        </p:spPr>
-        <p:txBody>
-          <a:bodyPr spcFirstLastPara="1" wrap="square" lIns="91425" tIns="45700" rIns="91425" bIns="45700" anchor="t" anchorCtr="0">
-            <a:spAutoFit/>
-          </a:bodyPr>
-          <a:lstStyle/>
-          <a:p>
-            <a:pPr marL="457200" marR="0" lvl="1" indent="0" algn="just" rtl="0">
-              <a:lnSpc>
-                <a:spcPct val="115000"/>
-              </a:lnSpc>
-              <a:spcBef>
-                <a:spcPts val="0"/>
-              </a:spcBef>
-              <a:spcAft>
-                <a:spcPts val="0"/>
-              </a:spcAft>
-              <a:buNone/>
-            </a:pPr>
-            <a:r>
-              <a:rPr lang="ru-RU" sz="2200" dirty="0"/>
-              <a:t>Spring Boot</a:t>
-            </a:r>
-            <a:endParaRPr dirty="0"/>
-          </a:p>
-        </p:txBody>
-      </p:sp>
-      <p:sp>
-        <p:nvSpPr>
-          <p:cNvPr id="14" name="Google Shape;119;p8">
-            <a:extLst>
-              <a:ext uri="{FF2B5EF4-FFF2-40B4-BE49-F238E27FC236}">
-                <a16:creationId xmlns:a16="http://schemas.microsoft.com/office/drawing/2014/main" id="{D95A8893-F7B3-E576-C607-E8CEE072C854}"/>
-              </a:ext>
-            </a:extLst>
-          </p:cNvPr>
-          <p:cNvSpPr txBox="1"/>
-          <p:nvPr/>
-        </p:nvSpPr>
-        <p:spPr>
-          <a:xfrm>
-            <a:off x="1880398" y="3240220"/>
-            <a:ext cx="8121600" cy="481630"/>
-          </a:xfrm>
-          <a:prstGeom prst="rect">
-            <a:avLst/>
-          </a:prstGeom>
-          <a:noFill/>
-          <a:ln>
-            <a:noFill/>
-          </a:ln>
-        </p:spPr>
-        <p:txBody>
-          <a:bodyPr spcFirstLastPara="1" wrap="square" lIns="91425" tIns="45700" rIns="91425" bIns="45700" anchor="t" anchorCtr="0">
-            <a:spAutoFit/>
-          </a:bodyPr>
-          <a:lstStyle/>
-          <a:p>
-            <a:pPr marL="457200" marR="0" lvl="1" indent="0" algn="just" rtl="0">
-              <a:lnSpc>
-                <a:spcPct val="115000"/>
-              </a:lnSpc>
-              <a:spcBef>
-                <a:spcPts val="0"/>
-              </a:spcBef>
-              <a:spcAft>
-                <a:spcPts val="0"/>
-              </a:spcAft>
-              <a:buNone/>
-            </a:pPr>
-            <a:r>
-              <a:rPr lang="ru-RU" sz="2200"/>
-              <a:t>PostgreSQL - </a:t>
-            </a:r>
-            <a:r>
-              <a:rPr lang="ru-RU" sz="2200" b="0" i="0" u="none" strike="noStrike" cap="none">
-                <a:latin typeface="Arial"/>
-                <a:ea typeface="Arial"/>
-                <a:cs typeface="Arial"/>
-                <a:sym typeface="Arial"/>
-              </a:rPr>
-              <a:t>база данных</a:t>
-            </a:r>
-            <a:endParaRPr/>
-          </a:p>
-        </p:txBody>
-      </p:sp>
-      <p:sp>
-        <p:nvSpPr>
-          <p:cNvPr id="15" name="Google Shape;120;p8">
-            <a:extLst>
-              <a:ext uri="{FF2B5EF4-FFF2-40B4-BE49-F238E27FC236}">
-                <a16:creationId xmlns:a16="http://schemas.microsoft.com/office/drawing/2014/main" id="{ADB6C602-199D-FA43-AF1B-A8974F2D2985}"/>
-              </a:ext>
-            </a:extLst>
-          </p:cNvPr>
-          <p:cNvSpPr txBox="1"/>
-          <p:nvPr/>
-        </p:nvSpPr>
-        <p:spPr>
-          <a:xfrm>
-            <a:off x="2314635" y="3708006"/>
-            <a:ext cx="8527500" cy="430800"/>
-          </a:xfrm>
-          <a:prstGeom prst="rect">
-            <a:avLst/>
-          </a:prstGeom>
-          <a:noFill/>
-          <a:ln>
-            <a:noFill/>
-          </a:ln>
-        </p:spPr>
-        <p:txBody>
-          <a:bodyPr spcFirstLastPara="1" wrap="square" lIns="91425" tIns="45700" rIns="91425" bIns="45700" anchor="t" anchorCtr="0">
-            <a:spAutoFit/>
-          </a:bodyPr>
-          <a:lstStyle/>
-          <a:p>
-            <a:pPr marL="0" marR="0" lvl="0" indent="0" algn="just" rtl="0">
-              <a:spcBef>
-                <a:spcPts val="0"/>
-              </a:spcBef>
-              <a:spcAft>
-                <a:spcPts val="0"/>
-              </a:spcAft>
-              <a:buNone/>
-            </a:pPr>
-            <a:r>
-              <a:rPr lang="ru-RU" sz="2200">
-                <a:latin typeface="Arial"/>
-                <a:ea typeface="Arial"/>
-                <a:cs typeface="Arial"/>
-                <a:sym typeface="Arial"/>
-              </a:rPr>
-              <a:t>SharedPreferences – для локального хранения</a:t>
-            </a:r>
-            <a:endParaRPr sz="2200">
-              <a:latin typeface="Arial"/>
-              <a:ea typeface="Arial"/>
-              <a:cs typeface="Arial"/>
-              <a:sym typeface="Arial"/>
-            </a:endParaRPr>
-          </a:p>
-        </p:txBody>
-      </p:sp>
-      <p:sp>
-        <p:nvSpPr>
-          <p:cNvPr id="16" name="Google Shape;121;p8">
-            <a:extLst>
-              <a:ext uri="{FF2B5EF4-FFF2-40B4-BE49-F238E27FC236}">
-                <a16:creationId xmlns:a16="http://schemas.microsoft.com/office/drawing/2014/main" id="{792EC11D-272F-791F-1237-55D826F240EE}"/>
-              </a:ext>
-            </a:extLst>
-          </p:cNvPr>
-          <p:cNvSpPr txBox="1"/>
-          <p:nvPr/>
-        </p:nvSpPr>
-        <p:spPr>
-          <a:xfrm>
-            <a:off x="1318532" y="4260035"/>
-            <a:ext cx="6098700" cy="481630"/>
-          </a:xfrm>
-          <a:prstGeom prst="rect">
-            <a:avLst/>
-          </a:prstGeom>
-          <a:noFill/>
-          <a:ln>
-            <a:noFill/>
-          </a:ln>
-        </p:spPr>
-        <p:txBody>
-          <a:bodyPr spcFirstLastPara="1" wrap="square" lIns="91425" tIns="45700" rIns="91425" bIns="45700" anchor="t" anchorCtr="0">
-            <a:spAutoFit/>
-          </a:bodyPr>
-          <a:lstStyle/>
-          <a:p>
-            <a:pPr marL="0" marR="0" lvl="0" indent="0" algn="just" rtl="0">
-              <a:lnSpc>
-                <a:spcPct val="115000"/>
-              </a:lnSpc>
-              <a:spcBef>
-                <a:spcPts val="0"/>
-              </a:spcBef>
-              <a:spcAft>
-                <a:spcPts val="0"/>
-              </a:spcAft>
-              <a:buNone/>
-            </a:pPr>
-            <a:r>
-              <a:rPr lang="ru-RU" sz="2200" b="1">
-                <a:latin typeface="Arial"/>
-                <a:ea typeface="Arial"/>
-                <a:cs typeface="Arial"/>
-                <a:sym typeface="Arial"/>
-              </a:rPr>
-              <a:t>Внешние API:</a:t>
-            </a:r>
-            <a:endParaRPr sz="2200">
-              <a:latin typeface="Arial"/>
-              <a:ea typeface="Arial"/>
-              <a:cs typeface="Arial"/>
-              <a:sym typeface="Arial"/>
-            </a:endParaRPr>
-          </a:p>
-        </p:txBody>
-      </p:sp>
-      <p:sp>
-        <p:nvSpPr>
-          <p:cNvPr id="17" name="Google Shape;122;p8">
-            <a:extLst>
-              <a:ext uri="{FF2B5EF4-FFF2-40B4-BE49-F238E27FC236}">
-                <a16:creationId xmlns:a16="http://schemas.microsoft.com/office/drawing/2014/main" id="{BD051E4B-1262-43E1-F06D-329E04B75B52}"/>
-              </a:ext>
-            </a:extLst>
-          </p:cNvPr>
-          <p:cNvSpPr txBox="1"/>
-          <p:nvPr/>
-        </p:nvSpPr>
-        <p:spPr>
-          <a:xfrm>
-            <a:off x="1891604" y="4653471"/>
-            <a:ext cx="6670200" cy="481630"/>
-          </a:xfrm>
-          <a:prstGeom prst="rect">
-            <a:avLst/>
-          </a:prstGeom>
-          <a:noFill/>
-          <a:ln>
-            <a:noFill/>
-          </a:ln>
-        </p:spPr>
-        <p:txBody>
-          <a:bodyPr spcFirstLastPara="1" wrap="square" lIns="91425" tIns="45700" rIns="91425" bIns="45700" anchor="t" anchorCtr="0">
-            <a:spAutoFit/>
-          </a:bodyPr>
-          <a:lstStyle/>
-          <a:p>
-            <a:pPr marL="457200" marR="0" lvl="1" indent="0" algn="just" rtl="0">
-              <a:lnSpc>
-                <a:spcPct val="115000"/>
-              </a:lnSpc>
-              <a:spcBef>
-                <a:spcPts val="0"/>
-              </a:spcBef>
-              <a:spcAft>
-                <a:spcPts val="0"/>
-              </a:spcAft>
-              <a:buNone/>
-            </a:pPr>
-            <a:r>
-              <a:rPr lang="ru-RU" sz="2200" b="0" i="0" u="none" strike="noStrike" cap="none">
-                <a:latin typeface="Arial"/>
-                <a:ea typeface="Arial"/>
-                <a:cs typeface="Arial"/>
-                <a:sym typeface="Arial"/>
-              </a:rPr>
-              <a:t>Яндекс.Карты API (MapKit)</a:t>
-            </a:r>
-            <a:endParaRPr/>
-          </a:p>
-        </p:txBody>
-      </p:sp>
-      <p:sp>
-        <p:nvSpPr>
-          <p:cNvPr id="18" name="Google Shape;123;p8">
-            <a:extLst>
-              <a:ext uri="{FF2B5EF4-FFF2-40B4-BE49-F238E27FC236}">
-                <a16:creationId xmlns:a16="http://schemas.microsoft.com/office/drawing/2014/main" id="{ED206EE4-8026-DE57-70ED-2362FE43D04A}"/>
-              </a:ext>
-            </a:extLst>
-          </p:cNvPr>
-          <p:cNvSpPr txBox="1"/>
-          <p:nvPr/>
-        </p:nvSpPr>
-        <p:spPr>
-          <a:xfrm>
-            <a:off x="1297363" y="5521772"/>
-            <a:ext cx="9151800" cy="430800"/>
-          </a:xfrm>
-          <a:prstGeom prst="rect">
-            <a:avLst/>
-          </a:prstGeom>
-          <a:noFill/>
-          <a:ln>
-            <a:noFill/>
-          </a:ln>
-        </p:spPr>
-        <p:txBody>
-          <a:bodyPr spcFirstLastPara="1" wrap="square" lIns="91425" tIns="45700" rIns="91425" bIns="45700" anchor="t" anchorCtr="0">
-            <a:spAutoFit/>
-          </a:bodyPr>
-          <a:lstStyle/>
-          <a:p>
-            <a:pPr marL="0" marR="0" lvl="0" indent="0" algn="l" rtl="0">
-              <a:spcBef>
-                <a:spcPts val="0"/>
-              </a:spcBef>
-              <a:spcAft>
-                <a:spcPts val="0"/>
-              </a:spcAft>
-              <a:buNone/>
-            </a:pPr>
-            <a:r>
-              <a:rPr lang="ru-RU" sz="2200" b="1">
-                <a:latin typeface="Arial"/>
-                <a:ea typeface="Arial"/>
-                <a:cs typeface="Arial"/>
-                <a:sym typeface="Arial"/>
-              </a:rPr>
-              <a:t>Системные сервисы:</a:t>
-            </a:r>
-            <a:r>
-              <a:rPr lang="ru-RU" sz="2200">
-                <a:latin typeface="Arial"/>
-                <a:ea typeface="Arial"/>
-                <a:cs typeface="Arial"/>
-                <a:sym typeface="Arial"/>
-              </a:rPr>
-              <a:t> AlarmManager и NotificationManager </a:t>
-            </a:r>
-            <a:endParaRPr sz="2200">
-              <a:latin typeface="Arial"/>
-              <a:ea typeface="Arial"/>
-              <a:cs typeface="Arial"/>
-              <a:sym typeface="Arial"/>
-            </a:endParaRPr>
-          </a:p>
-        </p:txBody>
-      </p:sp>
-      <p:sp>
-        <p:nvSpPr>
-          <p:cNvPr id="19" name="Google Shape;124;p8">
-            <a:extLst>
-              <a:ext uri="{FF2B5EF4-FFF2-40B4-BE49-F238E27FC236}">
-                <a16:creationId xmlns:a16="http://schemas.microsoft.com/office/drawing/2014/main" id="{43629682-57BD-E3C0-182E-CFDB73F57A32}"/>
-              </a:ext>
-            </a:extLst>
-          </p:cNvPr>
-          <p:cNvSpPr/>
-          <p:nvPr/>
-        </p:nvSpPr>
-        <p:spPr>
-          <a:xfrm flipH="1">
-            <a:off x="915532" y="1609566"/>
-            <a:ext cx="235080" cy="235080"/>
-          </a:xfrm>
-          <a:prstGeom prst="ellipse">
-            <a:avLst/>
-          </a:prstGeom>
-          <a:solidFill>
-            <a:schemeClr val="tx1"/>
-          </a:solidFill>
-          <a:ln>
-            <a:noFill/>
-          </a:ln>
-          <a:effectLst>
-            <a:outerShdw blurRad="203040" dist="75967" dir="5448874" sx="102000" sy="102000" algn="ctr" rotWithShape="0">
-              <a:srgbClr val="BFBFBF">
-                <a:alpha val="50980"/>
-              </a:srgbClr>
-            </a:outerShdw>
-          </a:effectLst>
-        </p:spPr>
-        <p:txBody>
-          <a:bodyPr spcFirstLastPara="1" wrap="square" lIns="91425" tIns="91425" rIns="91425" bIns="91425" anchor="ctr" anchorCtr="0">
-            <a:noAutofit/>
-          </a:bodyPr>
-          <a:lstStyle/>
-          <a:p>
-            <a:pPr marL="0" lvl="0" indent="0" algn="l" rtl="0">
-              <a:spcBef>
-                <a:spcPts val="0"/>
-              </a:spcBef>
-              <a:spcAft>
-                <a:spcPts val="0"/>
-              </a:spcAft>
-              <a:buNone/>
-            </a:pPr>
-            <a:endParaRPr/>
-          </a:p>
-        </p:txBody>
-      </p:sp>
-      <p:sp>
-        <p:nvSpPr>
-          <p:cNvPr id="20" name="Google Shape;125;p8">
-            <a:extLst>
-              <a:ext uri="{FF2B5EF4-FFF2-40B4-BE49-F238E27FC236}">
-                <a16:creationId xmlns:a16="http://schemas.microsoft.com/office/drawing/2014/main" id="{9AF6E427-22B1-6D76-DBDA-656E1E09542F}"/>
-              </a:ext>
-            </a:extLst>
-          </p:cNvPr>
-          <p:cNvSpPr/>
-          <p:nvPr/>
-        </p:nvSpPr>
-        <p:spPr>
-          <a:xfrm flipH="1">
-            <a:off x="915412" y="2101635"/>
-            <a:ext cx="235200" cy="235200"/>
-          </a:xfrm>
-          <a:prstGeom prst="ellipse">
-            <a:avLst/>
-          </a:prstGeom>
-          <a:solidFill>
-            <a:schemeClr val="tx1"/>
-          </a:solidFill>
-          <a:ln>
-            <a:noFill/>
-          </a:ln>
-          <a:effectLst>
-            <a:outerShdw blurRad="203040" dist="75967" dir="5448874" sx="102000" sy="102000" algn="ctr" rotWithShape="0">
-              <a:srgbClr val="BFBFBF">
-                <a:alpha val="50980"/>
-              </a:srgbClr>
-            </a:outerShdw>
-          </a:effectLst>
-        </p:spPr>
-        <p:txBody>
-          <a:bodyPr spcFirstLastPara="1" wrap="square" lIns="91425" tIns="91425" rIns="91425" bIns="91425" anchor="ctr" anchorCtr="0">
-            <a:noAutofit/>
-          </a:bodyPr>
-          <a:lstStyle/>
-          <a:p>
-            <a:pPr marL="0" lvl="0" indent="0" algn="l" rtl="0">
-              <a:spcBef>
-                <a:spcPts val="0"/>
-              </a:spcBef>
-              <a:spcAft>
-                <a:spcPts val="0"/>
-              </a:spcAft>
-              <a:buNone/>
-            </a:pPr>
-            <a:endParaRPr/>
-          </a:p>
-        </p:txBody>
-      </p:sp>
-      <p:sp>
-        <p:nvSpPr>
-          <p:cNvPr id="21" name="Google Shape;126;p8">
-            <a:extLst>
-              <a:ext uri="{FF2B5EF4-FFF2-40B4-BE49-F238E27FC236}">
-                <a16:creationId xmlns:a16="http://schemas.microsoft.com/office/drawing/2014/main" id="{30100F95-0BA7-7364-D468-C2DBF6D95E4D}"/>
-              </a:ext>
-            </a:extLst>
-          </p:cNvPr>
-          <p:cNvSpPr/>
-          <p:nvPr/>
-        </p:nvSpPr>
-        <p:spPr>
-          <a:xfrm flipH="1">
-            <a:off x="2042757" y="2948130"/>
-            <a:ext cx="154500" cy="158400"/>
-          </a:xfrm>
-          <a:prstGeom prst="ellipse">
-            <a:avLst/>
-          </a:prstGeom>
-          <a:solidFill>
-            <a:schemeClr val="tx1"/>
-          </a:solidFill>
-          <a:ln>
-            <a:noFill/>
-          </a:ln>
-          <a:effectLst>
-            <a:outerShdw blurRad="203040" dist="75967" dir="5448874" sx="102000" sy="102000" algn="ctr" rotWithShape="0">
-              <a:srgbClr val="BFBFBF">
-                <a:alpha val="50980"/>
-              </a:srgbClr>
-            </a:outerShdw>
-          </a:effectLst>
-        </p:spPr>
-        <p:txBody>
-          <a:bodyPr spcFirstLastPara="1" wrap="square" lIns="91425" tIns="91425" rIns="91425" bIns="91425" anchor="ctr" anchorCtr="0">
-            <a:noAutofit/>
-          </a:bodyPr>
-          <a:lstStyle/>
-          <a:p>
-            <a:pPr marL="0" lvl="0" indent="0" algn="l" rtl="0">
-              <a:spcBef>
-                <a:spcPts val="0"/>
-              </a:spcBef>
-              <a:spcAft>
-                <a:spcPts val="0"/>
-              </a:spcAft>
-              <a:buNone/>
-            </a:pPr>
-            <a:endParaRPr/>
-          </a:p>
-        </p:txBody>
-      </p:sp>
-      <p:sp>
-        <p:nvSpPr>
-          <p:cNvPr id="22" name="Google Shape;127;p8">
-            <a:extLst>
-              <a:ext uri="{FF2B5EF4-FFF2-40B4-BE49-F238E27FC236}">
-                <a16:creationId xmlns:a16="http://schemas.microsoft.com/office/drawing/2014/main" id="{53F0D775-1BFF-3FF7-FB31-98845CE905CA}"/>
-              </a:ext>
-            </a:extLst>
-          </p:cNvPr>
-          <p:cNvSpPr/>
-          <p:nvPr/>
-        </p:nvSpPr>
-        <p:spPr>
-          <a:xfrm flipH="1">
-            <a:off x="2047927" y="3407571"/>
-            <a:ext cx="154500" cy="158400"/>
-          </a:xfrm>
-          <a:prstGeom prst="ellipse">
-            <a:avLst/>
-          </a:prstGeom>
-          <a:solidFill>
-            <a:schemeClr val="tx1"/>
-          </a:solidFill>
-          <a:ln>
-            <a:noFill/>
-          </a:ln>
-          <a:effectLst>
-            <a:outerShdw blurRad="203040" dist="75967" dir="5448874" sx="102000" sy="102000" algn="ctr" rotWithShape="0">
-              <a:srgbClr val="BFBFBF">
-                <a:alpha val="50980"/>
-              </a:srgbClr>
-            </a:outerShdw>
-          </a:effectLst>
-        </p:spPr>
-        <p:txBody>
-          <a:bodyPr spcFirstLastPara="1" wrap="square" lIns="91425" tIns="91425" rIns="91425" bIns="91425" anchor="ctr" anchorCtr="0">
-            <a:noAutofit/>
-          </a:bodyPr>
-          <a:lstStyle/>
-          <a:p>
-            <a:pPr marL="0" lvl="0" indent="0" algn="l" rtl="0">
-              <a:spcBef>
-                <a:spcPts val="0"/>
-              </a:spcBef>
-              <a:spcAft>
-                <a:spcPts val="0"/>
-              </a:spcAft>
-              <a:buNone/>
-            </a:pPr>
-            <a:endParaRPr/>
-          </a:p>
-        </p:txBody>
-      </p:sp>
-      <p:sp>
-        <p:nvSpPr>
-          <p:cNvPr id="23" name="Google Shape;128;p8">
-            <a:extLst>
-              <a:ext uri="{FF2B5EF4-FFF2-40B4-BE49-F238E27FC236}">
-                <a16:creationId xmlns:a16="http://schemas.microsoft.com/office/drawing/2014/main" id="{CA3E1C5E-B94E-AB74-CCE1-3E32FCF50C75}"/>
-              </a:ext>
-            </a:extLst>
-          </p:cNvPr>
-          <p:cNvSpPr/>
-          <p:nvPr/>
-        </p:nvSpPr>
-        <p:spPr>
-          <a:xfrm flipH="1">
-            <a:off x="2047927" y="3838040"/>
-            <a:ext cx="154500" cy="158400"/>
-          </a:xfrm>
-          <a:prstGeom prst="ellipse">
-            <a:avLst/>
-          </a:prstGeom>
-          <a:solidFill>
-            <a:schemeClr val="tx1"/>
-          </a:solidFill>
-          <a:ln>
-            <a:noFill/>
-          </a:ln>
-          <a:effectLst>
-            <a:outerShdw blurRad="203040" dist="75967" dir="5448874" sx="102000" sy="102000" algn="ctr" rotWithShape="0">
-              <a:srgbClr val="BFBFBF">
-                <a:alpha val="50980"/>
-              </a:srgbClr>
-            </a:outerShdw>
-          </a:effectLst>
-        </p:spPr>
-        <p:txBody>
-          <a:bodyPr spcFirstLastPara="1" wrap="square" lIns="91425" tIns="91425" rIns="91425" bIns="91425" anchor="ctr" anchorCtr="0">
-            <a:noAutofit/>
-          </a:bodyPr>
-          <a:lstStyle/>
-          <a:p>
-            <a:pPr marL="0" lvl="0" indent="0" algn="l" rtl="0">
-              <a:spcBef>
-                <a:spcPts val="0"/>
-              </a:spcBef>
-              <a:spcAft>
-                <a:spcPts val="0"/>
-              </a:spcAft>
-              <a:buNone/>
-            </a:pPr>
-            <a:endParaRPr/>
-          </a:p>
-        </p:txBody>
-      </p:sp>
-      <p:sp>
-        <p:nvSpPr>
-          <p:cNvPr id="24" name="Google Shape;129;p8">
-            <a:extLst>
-              <a:ext uri="{FF2B5EF4-FFF2-40B4-BE49-F238E27FC236}">
-                <a16:creationId xmlns:a16="http://schemas.microsoft.com/office/drawing/2014/main" id="{0D0446B2-89EB-48D7-CAD2-AA5ACEA06C0D}"/>
-              </a:ext>
-            </a:extLst>
-          </p:cNvPr>
-          <p:cNvSpPr/>
-          <p:nvPr/>
-        </p:nvSpPr>
-        <p:spPr>
-          <a:xfrm flipH="1">
-            <a:off x="2042757" y="4808387"/>
-            <a:ext cx="154500" cy="158400"/>
-          </a:xfrm>
-          <a:prstGeom prst="ellipse">
-            <a:avLst/>
-          </a:prstGeom>
-          <a:solidFill>
-            <a:schemeClr val="tx1"/>
-          </a:solidFill>
-          <a:ln>
-            <a:noFill/>
-          </a:ln>
-          <a:effectLst>
-            <a:outerShdw blurRad="203040" dist="75967" dir="5448874" sx="102000" sy="102000" algn="ctr" rotWithShape="0">
-              <a:srgbClr val="BFBFBF">
-                <a:alpha val="50980"/>
-              </a:srgbClr>
-            </a:outerShdw>
-          </a:effectLst>
-        </p:spPr>
-        <p:txBody>
-          <a:bodyPr spcFirstLastPara="1" wrap="square" lIns="91425" tIns="91425" rIns="91425" bIns="91425" anchor="ctr" anchorCtr="0">
-            <a:noAutofit/>
-          </a:bodyPr>
-          <a:lstStyle/>
-          <a:p>
-            <a:pPr marL="0" lvl="0" indent="0" algn="l" rtl="0">
-              <a:spcBef>
-                <a:spcPts val="0"/>
-              </a:spcBef>
-              <a:spcAft>
-                <a:spcPts val="0"/>
-              </a:spcAft>
-              <a:buNone/>
-            </a:pPr>
-            <a:endParaRPr/>
-          </a:p>
-        </p:txBody>
-      </p:sp>
-      <p:sp>
-        <p:nvSpPr>
-          <p:cNvPr id="25" name="Google Shape;130;p8">
-            <a:extLst>
-              <a:ext uri="{FF2B5EF4-FFF2-40B4-BE49-F238E27FC236}">
-                <a16:creationId xmlns:a16="http://schemas.microsoft.com/office/drawing/2014/main" id="{931C45CD-4171-6F09-95AA-B8E16EAEDD99}"/>
-              </a:ext>
-            </a:extLst>
-          </p:cNvPr>
-          <p:cNvSpPr txBox="1"/>
-          <p:nvPr/>
-        </p:nvSpPr>
-        <p:spPr>
-          <a:xfrm>
-            <a:off x="2042873" y="5084255"/>
-            <a:ext cx="6670200" cy="481630"/>
-          </a:xfrm>
-          <a:prstGeom prst="rect">
-            <a:avLst/>
-          </a:prstGeom>
-          <a:noFill/>
-          <a:ln>
-            <a:noFill/>
-          </a:ln>
-        </p:spPr>
-        <p:txBody>
-          <a:bodyPr spcFirstLastPara="1" wrap="square" lIns="91425" tIns="45700" rIns="91425" bIns="45700" anchor="t" anchorCtr="0">
-            <a:spAutoFit/>
-          </a:bodyPr>
-          <a:lstStyle/>
-          <a:p>
-            <a:pPr marL="0" marR="0" lvl="1" indent="0" algn="just" rtl="0">
-              <a:lnSpc>
-                <a:spcPct val="115000"/>
-              </a:lnSpc>
-              <a:spcBef>
-                <a:spcPts val="0"/>
-              </a:spcBef>
-              <a:spcAft>
-                <a:spcPts val="0"/>
-              </a:spcAft>
-              <a:buNone/>
-            </a:pPr>
-            <a:r>
-              <a:rPr lang="ru-RU" sz="2200"/>
-              <a:t>    </a:t>
-            </a:r>
-            <a:r>
-              <a:rPr lang="ru-RU" sz="2200" b="0" i="0" u="none" strike="noStrike" cap="none">
-                <a:latin typeface="Arial"/>
-                <a:ea typeface="Arial"/>
-                <a:cs typeface="Arial"/>
-                <a:sym typeface="Arial"/>
-              </a:rPr>
-              <a:t>Яндекс.</a:t>
-            </a:r>
-            <a:r>
-              <a:rPr lang="ru-RU" sz="2200"/>
-              <a:t>Диск</a:t>
-            </a:r>
-            <a:r>
-              <a:rPr lang="ru-RU" sz="2200" b="0" i="0" u="none" strike="noStrike" cap="none">
-                <a:latin typeface="Arial"/>
-                <a:ea typeface="Arial"/>
-                <a:cs typeface="Arial"/>
-                <a:sym typeface="Arial"/>
-              </a:rPr>
-              <a:t> </a:t>
-            </a:r>
-            <a:r>
-              <a:rPr lang="ru-RU" sz="2200"/>
-              <a:t>REST API</a:t>
-            </a:r>
-            <a:endParaRPr/>
-          </a:p>
-        </p:txBody>
-      </p:sp>
-      <p:sp>
-        <p:nvSpPr>
-          <p:cNvPr id="26" name="Google Shape;131;p8">
-            <a:extLst>
-              <a:ext uri="{FF2B5EF4-FFF2-40B4-BE49-F238E27FC236}">
-                <a16:creationId xmlns:a16="http://schemas.microsoft.com/office/drawing/2014/main" id="{B5BA69F0-7CB2-4E9B-AA32-06139778808A}"/>
-              </a:ext>
-            </a:extLst>
-          </p:cNvPr>
-          <p:cNvSpPr/>
-          <p:nvPr/>
-        </p:nvSpPr>
-        <p:spPr>
-          <a:xfrm flipH="1">
-            <a:off x="2042820" y="5220287"/>
-            <a:ext cx="154500" cy="158400"/>
-          </a:xfrm>
-          <a:prstGeom prst="ellipse">
-            <a:avLst/>
-          </a:prstGeom>
-          <a:solidFill>
-            <a:schemeClr val="tx1"/>
-          </a:solidFill>
-          <a:ln>
-            <a:noFill/>
-          </a:ln>
-          <a:effectLst>
-            <a:outerShdw blurRad="203040" dist="75967" dir="5448874" sx="102000" sy="102000" algn="ctr" rotWithShape="0">
-              <a:srgbClr val="BFBFBF">
-                <a:alpha val="50980"/>
-              </a:srgbClr>
-            </a:outerShdw>
-          </a:effectLst>
-        </p:spPr>
-        <p:txBody>
-          <a:bodyPr spcFirstLastPara="1" wrap="square" lIns="91425" tIns="91425" rIns="91425" bIns="91425" anchor="ctr" anchorCtr="0">
-            <a:noAutofit/>
-          </a:bodyPr>
-          <a:lstStyle/>
-          <a:p>
-            <a:pPr marL="0" lvl="0" indent="0" algn="l" rtl="0">
-              <a:spcBef>
-                <a:spcPts val="0"/>
-              </a:spcBef>
-              <a:spcAft>
-                <a:spcPts val="0"/>
-              </a:spcAft>
-              <a:buNone/>
-            </a:pPr>
-            <a:endParaRPr/>
           </a:p>
         </p:txBody>
       </p:sp>
     </p:spTree>
     <p:extLst>
       <p:ext uri="{BB962C8B-B14F-4D97-AF65-F5344CB8AC3E}">
-        <p14:creationId xmlns:p14="http://schemas.microsoft.com/office/powerpoint/2010/main" val="1894482553"/>
+        <p14:creationId xmlns:p14="http://schemas.microsoft.com/office/powerpoint/2010/main" val="561711780"/>
       </p:ext>
     </p:extLst>
   </p:cSld>
@@ -7270,10 +6113,10 @@
       </p:grpSpPr>
       <p:sp>
         <p:nvSpPr>
-          <p:cNvPr id="3" name="Google Shape;137;p9">
-            <a:extLst>
-              <a:ext uri="{FF2B5EF4-FFF2-40B4-BE49-F238E27FC236}">
-                <a16:creationId xmlns:a16="http://schemas.microsoft.com/office/drawing/2014/main" id="{9ABB6F61-0E2E-4D1C-7802-6B8325BD45DB}"/>
+          <p:cNvPr id="3" name="Google Shape;108;p8">
+            <a:extLst>
+              <a:ext uri="{FF2B5EF4-FFF2-40B4-BE49-F238E27FC236}">
+                <a16:creationId xmlns:a16="http://schemas.microsoft.com/office/drawing/2014/main" id="{E63C679E-32E0-54D9-7F2C-24A67562AB71}"/>
               </a:ext>
             </a:extLst>
           </p:cNvPr>
@@ -7286,8 +6129,8 @@
         </p:nvSpPr>
         <p:spPr>
           <a:xfrm>
-            <a:off x="8610600" y="6356350"/>
-            <a:ext cx="2743200" cy="365100"/>
+            <a:off x="8131878" y="6277474"/>
+            <a:ext cx="3144520" cy="430800"/>
           </a:xfrm>
           <a:prstGeom prst="rect">
             <a:avLst/>
@@ -7320,7 +6163,7 @@
               </a:rPr>
               <a:t>6</a:t>
             </a:fld>
-            <a:endParaRPr>
+            <a:endParaRPr dirty="0">
               <a:solidFill>
                 <a:schemeClr val="tx1"/>
               </a:solidFill>
@@ -7330,10 +6173,10 @@
       </p:sp>
       <p:sp>
         <p:nvSpPr>
-          <p:cNvPr id="4" name="Google Shape;138;p9">
-            <a:extLst>
-              <a:ext uri="{FF2B5EF4-FFF2-40B4-BE49-F238E27FC236}">
-                <a16:creationId xmlns:a16="http://schemas.microsoft.com/office/drawing/2014/main" id="{5841E619-3D1B-DC7F-EB0F-322E4EC054D7}"/>
+          <p:cNvPr id="4" name="Google Shape;109;p8">
+            <a:extLst>
+              <a:ext uri="{FF2B5EF4-FFF2-40B4-BE49-F238E27FC236}">
+                <a16:creationId xmlns:a16="http://schemas.microsoft.com/office/drawing/2014/main" id="{F4709B77-D597-B99C-BCFD-ADBF0853D766}"/>
               </a:ext>
             </a:extLst>
           </p:cNvPr>
@@ -7345,7 +6188,7 @@
         <p:spPr>
           <a:xfrm>
             <a:off x="1033072" y="365126"/>
-            <a:ext cx="8202600" cy="697800"/>
+            <a:ext cx="8202474" cy="697717"/>
           </a:xfrm>
           <a:prstGeom prst="rect">
             <a:avLst/>
@@ -7395,35 +6238,27 @@
             </a:pPr>
             <a:r>
               <a:rPr lang="ru-RU"/>
-              <a:t>Архитектура</a:t>
-            </a:r>
-          </a:p>
-        </p:txBody>
-      </p:sp>
-      <p:pic>
-        <p:nvPicPr>
-          <p:cNvPr id="5" name="Google Shape;139;p9">
-            <a:extLst>
-              <a:ext uri="{FF2B5EF4-FFF2-40B4-BE49-F238E27FC236}">
-                <a16:creationId xmlns:a16="http://schemas.microsoft.com/office/drawing/2014/main" id="{4D5EB15E-099E-4AED-8CBF-1A50AAFF011D}"/>
-              </a:ext>
-            </a:extLst>
-          </p:cNvPr>
-          <p:cNvPicPr preferRelativeResize="0"/>
+              <a:t>Технический стек</a:t>
+            </a:r>
+          </a:p>
+        </p:txBody>
+      </p:sp>
+      <p:sp>
+        <p:nvSpPr>
+          <p:cNvPr id="9" name="Google Shape;114;p8">
+            <a:extLst>
+              <a:ext uri="{FF2B5EF4-FFF2-40B4-BE49-F238E27FC236}">
+                <a16:creationId xmlns:a16="http://schemas.microsoft.com/office/drawing/2014/main" id="{FFD0DE75-AC77-EF47-2933-28889524DB68}"/>
+              </a:ext>
+            </a:extLst>
+          </p:cNvPr>
+          <p:cNvSpPr txBox="1"/>
           <p:nvPr/>
-        </p:nvPicPr>
-        <p:blipFill>
-          <a:blip r:embed="rId2">
-            <a:alphaModFix/>
-          </a:blip>
-          <a:stretch>
-            <a:fillRect/>
-          </a:stretch>
-        </p:blipFill>
+        </p:nvSpPr>
         <p:spPr>
           <a:xfrm>
-            <a:off x="3188800" y="951275"/>
-            <a:ext cx="6046875" cy="5635026"/>
+            <a:off x="1318532" y="1075784"/>
+            <a:ext cx="6098720" cy="481630"/>
           </a:xfrm>
           <a:prstGeom prst="rect">
             <a:avLst/>
@@ -7433,11 +6268,1251 @@
             <a:noFill/>
           </a:ln>
         </p:spPr>
-      </p:pic>
+        <p:txBody>
+          <a:bodyPr spcFirstLastPara="1" wrap="square" lIns="91425" tIns="45700" rIns="91425" bIns="45700" anchor="t" anchorCtr="0">
+            <a:spAutoFit/>
+          </a:bodyPr>
+          <a:lstStyle/>
+          <a:p>
+            <a:pPr marL="0" marR="0" lvl="0" indent="0" algn="l" rtl="0">
+              <a:lnSpc>
+                <a:spcPct val="115000"/>
+              </a:lnSpc>
+              <a:spcBef>
+                <a:spcPts val="0"/>
+              </a:spcBef>
+              <a:spcAft>
+                <a:spcPts val="0"/>
+              </a:spcAft>
+              <a:buNone/>
+            </a:pPr>
+            <a:r>
+              <a:rPr lang="ru-RU" sz="2200" b="1">
+                <a:latin typeface="Arial"/>
+                <a:ea typeface="Arial"/>
+                <a:cs typeface="Arial"/>
+                <a:sym typeface="Arial"/>
+              </a:rPr>
+              <a:t>Язык разработки:</a:t>
+            </a:r>
+            <a:r>
+              <a:rPr lang="ru-RU" sz="2200">
+                <a:latin typeface="Arial"/>
+                <a:ea typeface="Arial"/>
+                <a:cs typeface="Arial"/>
+                <a:sym typeface="Arial"/>
+              </a:rPr>
+              <a:t> Kotlin </a:t>
+            </a:r>
+            <a:endParaRPr/>
+          </a:p>
+        </p:txBody>
+      </p:sp>
+      <p:sp>
+        <p:nvSpPr>
+          <p:cNvPr id="10" name="Google Shape;115;p8">
+            <a:extLst>
+              <a:ext uri="{FF2B5EF4-FFF2-40B4-BE49-F238E27FC236}">
+                <a16:creationId xmlns:a16="http://schemas.microsoft.com/office/drawing/2014/main" id="{760FEB38-65E8-3021-4FBD-9F80A06F62B4}"/>
+              </a:ext>
+            </a:extLst>
+          </p:cNvPr>
+          <p:cNvSpPr txBox="1"/>
+          <p:nvPr/>
+        </p:nvSpPr>
+        <p:spPr>
+          <a:xfrm>
+            <a:off x="1297363" y="1521424"/>
+            <a:ext cx="6098720" cy="430887"/>
+          </a:xfrm>
+          <a:prstGeom prst="rect">
+            <a:avLst/>
+          </a:prstGeom>
+          <a:noFill/>
+          <a:ln>
+            <a:noFill/>
+          </a:ln>
+        </p:spPr>
+        <p:txBody>
+          <a:bodyPr spcFirstLastPara="1" wrap="square" lIns="91425" tIns="45700" rIns="91425" bIns="45700" anchor="t" anchorCtr="0">
+            <a:spAutoFit/>
+          </a:bodyPr>
+          <a:lstStyle/>
+          <a:p>
+            <a:pPr marL="0" marR="0" lvl="0" indent="0" algn="l" rtl="0">
+              <a:spcBef>
+                <a:spcPts val="0"/>
+              </a:spcBef>
+              <a:spcAft>
+                <a:spcPts val="0"/>
+              </a:spcAft>
+              <a:buNone/>
+            </a:pPr>
+            <a:r>
+              <a:rPr lang="ru-RU" sz="2200" b="1">
+                <a:latin typeface="Arial"/>
+                <a:ea typeface="Arial"/>
+                <a:cs typeface="Arial"/>
+                <a:sym typeface="Arial"/>
+              </a:rPr>
+              <a:t>Среда разработки:</a:t>
+            </a:r>
+            <a:r>
+              <a:rPr lang="ru-RU" sz="2200">
+                <a:latin typeface="Arial"/>
+                <a:ea typeface="Arial"/>
+                <a:cs typeface="Arial"/>
+                <a:sym typeface="Arial"/>
+              </a:rPr>
+              <a:t> Android Studio</a:t>
+            </a:r>
+            <a:endParaRPr/>
+          </a:p>
+        </p:txBody>
+      </p:sp>
+      <p:sp>
+        <p:nvSpPr>
+          <p:cNvPr id="11" name="Google Shape;116;p8">
+            <a:extLst>
+              <a:ext uri="{FF2B5EF4-FFF2-40B4-BE49-F238E27FC236}">
+                <a16:creationId xmlns:a16="http://schemas.microsoft.com/office/drawing/2014/main" id="{1CAFB16B-0CD0-0D7C-01C1-447023178E23}"/>
+              </a:ext>
+            </a:extLst>
+          </p:cNvPr>
+          <p:cNvSpPr txBox="1"/>
+          <p:nvPr/>
+        </p:nvSpPr>
+        <p:spPr>
+          <a:xfrm>
+            <a:off x="1297363" y="1988952"/>
+            <a:ext cx="6098700" cy="481630"/>
+          </a:xfrm>
+          <a:prstGeom prst="rect">
+            <a:avLst/>
+          </a:prstGeom>
+          <a:noFill/>
+          <a:ln>
+            <a:noFill/>
+          </a:ln>
+        </p:spPr>
+        <p:txBody>
+          <a:bodyPr spcFirstLastPara="1" wrap="square" lIns="91425" tIns="45700" rIns="91425" bIns="45700" anchor="t" anchorCtr="0">
+            <a:spAutoFit/>
+          </a:bodyPr>
+          <a:lstStyle/>
+          <a:p>
+            <a:pPr marL="0" marR="0" lvl="0" indent="0" algn="l" rtl="0">
+              <a:lnSpc>
+                <a:spcPct val="115000"/>
+              </a:lnSpc>
+              <a:spcBef>
+                <a:spcPts val="0"/>
+              </a:spcBef>
+              <a:spcAft>
+                <a:spcPts val="0"/>
+              </a:spcAft>
+              <a:buNone/>
+            </a:pPr>
+            <a:r>
+              <a:rPr lang="ru-RU" sz="2200" b="1">
+                <a:latin typeface="Arial"/>
+                <a:ea typeface="Arial"/>
+                <a:cs typeface="Arial"/>
+                <a:sym typeface="Arial"/>
+              </a:rPr>
+              <a:t>Архитектура:</a:t>
+            </a:r>
+            <a:r>
+              <a:rPr lang="ru-RU" sz="2200">
+                <a:latin typeface="Arial"/>
+                <a:ea typeface="Arial"/>
+                <a:cs typeface="Arial"/>
+                <a:sym typeface="Arial"/>
+              </a:rPr>
+              <a:t> MVVM</a:t>
+            </a:r>
+            <a:endParaRPr/>
+          </a:p>
+        </p:txBody>
+      </p:sp>
+      <p:sp>
+        <p:nvSpPr>
+          <p:cNvPr id="12" name="Google Shape;117;p8">
+            <a:extLst>
+              <a:ext uri="{FF2B5EF4-FFF2-40B4-BE49-F238E27FC236}">
+                <a16:creationId xmlns:a16="http://schemas.microsoft.com/office/drawing/2014/main" id="{7FC2FCE7-1C8F-2C5C-FA69-381C3F9FB751}"/>
+              </a:ext>
+            </a:extLst>
+          </p:cNvPr>
+          <p:cNvSpPr txBox="1"/>
+          <p:nvPr/>
+        </p:nvSpPr>
+        <p:spPr>
+          <a:xfrm>
+            <a:off x="1297363" y="2377919"/>
+            <a:ext cx="6098700" cy="481630"/>
+          </a:xfrm>
+          <a:prstGeom prst="rect">
+            <a:avLst/>
+          </a:prstGeom>
+          <a:noFill/>
+          <a:ln>
+            <a:noFill/>
+          </a:ln>
+        </p:spPr>
+        <p:txBody>
+          <a:bodyPr spcFirstLastPara="1" wrap="square" lIns="91425" tIns="45700" rIns="91425" bIns="45700" anchor="t" anchorCtr="0">
+            <a:spAutoFit/>
+          </a:bodyPr>
+          <a:lstStyle/>
+          <a:p>
+            <a:pPr marL="0" marR="0" lvl="0" indent="0" algn="l" rtl="0">
+              <a:lnSpc>
+                <a:spcPct val="115000"/>
+              </a:lnSpc>
+              <a:spcBef>
+                <a:spcPts val="0"/>
+              </a:spcBef>
+              <a:spcAft>
+                <a:spcPts val="0"/>
+              </a:spcAft>
+              <a:buNone/>
+            </a:pPr>
+            <a:r>
+              <a:rPr lang="ru-RU" sz="2200" b="1">
+                <a:latin typeface="Arial"/>
+                <a:ea typeface="Arial"/>
+                <a:cs typeface="Arial"/>
+                <a:sym typeface="Arial"/>
+              </a:rPr>
+              <a:t>Бэкенд и данные:</a:t>
+            </a:r>
+            <a:endParaRPr sz="2200">
+              <a:latin typeface="Arial"/>
+              <a:ea typeface="Arial"/>
+              <a:cs typeface="Arial"/>
+              <a:sym typeface="Arial"/>
+            </a:endParaRPr>
+          </a:p>
+        </p:txBody>
+      </p:sp>
+      <p:sp>
+        <p:nvSpPr>
+          <p:cNvPr id="13" name="Google Shape;118;p8">
+            <a:extLst>
+              <a:ext uri="{FF2B5EF4-FFF2-40B4-BE49-F238E27FC236}">
+                <a16:creationId xmlns:a16="http://schemas.microsoft.com/office/drawing/2014/main" id="{A8A127A9-4A26-D403-539B-075BCCC2072E}"/>
+              </a:ext>
+            </a:extLst>
+          </p:cNvPr>
+          <p:cNvSpPr txBox="1"/>
+          <p:nvPr/>
+        </p:nvSpPr>
+        <p:spPr>
+          <a:xfrm>
+            <a:off x="1880398" y="2771355"/>
+            <a:ext cx="9396000" cy="481630"/>
+          </a:xfrm>
+          <a:prstGeom prst="rect">
+            <a:avLst/>
+          </a:prstGeom>
+          <a:noFill/>
+          <a:ln>
+            <a:noFill/>
+          </a:ln>
+        </p:spPr>
+        <p:txBody>
+          <a:bodyPr spcFirstLastPara="1" wrap="square" lIns="91425" tIns="45700" rIns="91425" bIns="45700" anchor="t" anchorCtr="0">
+            <a:spAutoFit/>
+          </a:bodyPr>
+          <a:lstStyle/>
+          <a:p>
+            <a:pPr marL="457200" marR="0" lvl="1" indent="0" algn="just" rtl="0">
+              <a:lnSpc>
+                <a:spcPct val="115000"/>
+              </a:lnSpc>
+              <a:spcBef>
+                <a:spcPts val="0"/>
+              </a:spcBef>
+              <a:spcAft>
+                <a:spcPts val="0"/>
+              </a:spcAft>
+              <a:buNone/>
+            </a:pPr>
+            <a:r>
+              <a:rPr lang="ru-RU" sz="2200" dirty="0"/>
+              <a:t>Spring Boot</a:t>
+            </a:r>
+            <a:endParaRPr dirty="0"/>
+          </a:p>
+        </p:txBody>
+      </p:sp>
+      <p:sp>
+        <p:nvSpPr>
+          <p:cNvPr id="14" name="Google Shape;119;p8">
+            <a:extLst>
+              <a:ext uri="{FF2B5EF4-FFF2-40B4-BE49-F238E27FC236}">
+                <a16:creationId xmlns:a16="http://schemas.microsoft.com/office/drawing/2014/main" id="{D95A8893-F7B3-E576-C607-E8CEE072C854}"/>
+              </a:ext>
+            </a:extLst>
+          </p:cNvPr>
+          <p:cNvSpPr txBox="1"/>
+          <p:nvPr/>
+        </p:nvSpPr>
+        <p:spPr>
+          <a:xfrm>
+            <a:off x="1880398" y="3240220"/>
+            <a:ext cx="8121600" cy="481630"/>
+          </a:xfrm>
+          <a:prstGeom prst="rect">
+            <a:avLst/>
+          </a:prstGeom>
+          <a:noFill/>
+          <a:ln>
+            <a:noFill/>
+          </a:ln>
+        </p:spPr>
+        <p:txBody>
+          <a:bodyPr spcFirstLastPara="1" wrap="square" lIns="91425" tIns="45700" rIns="91425" bIns="45700" anchor="t" anchorCtr="0">
+            <a:spAutoFit/>
+          </a:bodyPr>
+          <a:lstStyle/>
+          <a:p>
+            <a:pPr marL="457200" marR="0" lvl="1" indent="0" algn="just" rtl="0">
+              <a:lnSpc>
+                <a:spcPct val="115000"/>
+              </a:lnSpc>
+              <a:spcBef>
+                <a:spcPts val="0"/>
+              </a:spcBef>
+              <a:spcAft>
+                <a:spcPts val="0"/>
+              </a:spcAft>
+              <a:buNone/>
+            </a:pPr>
+            <a:r>
+              <a:rPr lang="ru-RU" sz="2200"/>
+              <a:t>PostgreSQL - </a:t>
+            </a:r>
+            <a:r>
+              <a:rPr lang="ru-RU" sz="2200" b="0" i="0" u="none" strike="noStrike" cap="none">
+                <a:latin typeface="Arial"/>
+                <a:ea typeface="Arial"/>
+                <a:cs typeface="Arial"/>
+                <a:sym typeface="Arial"/>
+              </a:rPr>
+              <a:t>база данных</a:t>
+            </a:r>
+            <a:endParaRPr/>
+          </a:p>
+        </p:txBody>
+      </p:sp>
+      <p:sp>
+        <p:nvSpPr>
+          <p:cNvPr id="15" name="Google Shape;120;p8">
+            <a:extLst>
+              <a:ext uri="{FF2B5EF4-FFF2-40B4-BE49-F238E27FC236}">
+                <a16:creationId xmlns:a16="http://schemas.microsoft.com/office/drawing/2014/main" id="{ADB6C602-199D-FA43-AF1B-A8974F2D2985}"/>
+              </a:ext>
+            </a:extLst>
+          </p:cNvPr>
+          <p:cNvSpPr txBox="1"/>
+          <p:nvPr/>
+        </p:nvSpPr>
+        <p:spPr>
+          <a:xfrm>
+            <a:off x="2314635" y="3708006"/>
+            <a:ext cx="8527500" cy="430800"/>
+          </a:xfrm>
+          <a:prstGeom prst="rect">
+            <a:avLst/>
+          </a:prstGeom>
+          <a:noFill/>
+          <a:ln>
+            <a:noFill/>
+          </a:ln>
+        </p:spPr>
+        <p:txBody>
+          <a:bodyPr spcFirstLastPara="1" wrap="square" lIns="91425" tIns="45700" rIns="91425" bIns="45700" anchor="t" anchorCtr="0">
+            <a:spAutoFit/>
+          </a:bodyPr>
+          <a:lstStyle/>
+          <a:p>
+            <a:pPr marL="0" marR="0" lvl="0" indent="0" algn="just" rtl="0">
+              <a:spcBef>
+                <a:spcPts val="0"/>
+              </a:spcBef>
+              <a:spcAft>
+                <a:spcPts val="0"/>
+              </a:spcAft>
+              <a:buNone/>
+            </a:pPr>
+            <a:r>
+              <a:rPr lang="ru-RU" sz="2200">
+                <a:latin typeface="Arial"/>
+                <a:ea typeface="Arial"/>
+                <a:cs typeface="Arial"/>
+                <a:sym typeface="Arial"/>
+              </a:rPr>
+              <a:t>SharedPreferences – для локального хранения</a:t>
+            </a:r>
+            <a:endParaRPr sz="2200">
+              <a:latin typeface="Arial"/>
+              <a:ea typeface="Arial"/>
+              <a:cs typeface="Arial"/>
+              <a:sym typeface="Arial"/>
+            </a:endParaRPr>
+          </a:p>
+        </p:txBody>
+      </p:sp>
+      <p:sp>
+        <p:nvSpPr>
+          <p:cNvPr id="16" name="Google Shape;121;p8">
+            <a:extLst>
+              <a:ext uri="{FF2B5EF4-FFF2-40B4-BE49-F238E27FC236}">
+                <a16:creationId xmlns:a16="http://schemas.microsoft.com/office/drawing/2014/main" id="{792EC11D-272F-791F-1237-55D826F240EE}"/>
+              </a:ext>
+            </a:extLst>
+          </p:cNvPr>
+          <p:cNvSpPr txBox="1"/>
+          <p:nvPr/>
+        </p:nvSpPr>
+        <p:spPr>
+          <a:xfrm>
+            <a:off x="1318532" y="4260035"/>
+            <a:ext cx="6098700" cy="481630"/>
+          </a:xfrm>
+          <a:prstGeom prst="rect">
+            <a:avLst/>
+          </a:prstGeom>
+          <a:noFill/>
+          <a:ln>
+            <a:noFill/>
+          </a:ln>
+        </p:spPr>
+        <p:txBody>
+          <a:bodyPr spcFirstLastPara="1" wrap="square" lIns="91425" tIns="45700" rIns="91425" bIns="45700" anchor="t" anchorCtr="0">
+            <a:spAutoFit/>
+          </a:bodyPr>
+          <a:lstStyle/>
+          <a:p>
+            <a:pPr marL="0" marR="0" lvl="0" indent="0" algn="just" rtl="0">
+              <a:lnSpc>
+                <a:spcPct val="115000"/>
+              </a:lnSpc>
+              <a:spcBef>
+                <a:spcPts val="0"/>
+              </a:spcBef>
+              <a:spcAft>
+                <a:spcPts val="0"/>
+              </a:spcAft>
+              <a:buNone/>
+            </a:pPr>
+            <a:r>
+              <a:rPr lang="ru-RU" sz="2200" b="1">
+                <a:latin typeface="Arial"/>
+                <a:ea typeface="Arial"/>
+                <a:cs typeface="Arial"/>
+                <a:sym typeface="Arial"/>
+              </a:rPr>
+              <a:t>Внешние API:</a:t>
+            </a:r>
+            <a:endParaRPr sz="2200">
+              <a:latin typeface="Arial"/>
+              <a:ea typeface="Arial"/>
+              <a:cs typeface="Arial"/>
+              <a:sym typeface="Arial"/>
+            </a:endParaRPr>
+          </a:p>
+        </p:txBody>
+      </p:sp>
+      <p:sp>
+        <p:nvSpPr>
+          <p:cNvPr id="17" name="Google Shape;122;p8">
+            <a:extLst>
+              <a:ext uri="{FF2B5EF4-FFF2-40B4-BE49-F238E27FC236}">
+                <a16:creationId xmlns:a16="http://schemas.microsoft.com/office/drawing/2014/main" id="{BD051E4B-1262-43E1-F06D-329E04B75B52}"/>
+              </a:ext>
+            </a:extLst>
+          </p:cNvPr>
+          <p:cNvSpPr txBox="1"/>
+          <p:nvPr/>
+        </p:nvSpPr>
+        <p:spPr>
+          <a:xfrm>
+            <a:off x="1891604" y="4653471"/>
+            <a:ext cx="6670200" cy="481630"/>
+          </a:xfrm>
+          <a:prstGeom prst="rect">
+            <a:avLst/>
+          </a:prstGeom>
+          <a:noFill/>
+          <a:ln>
+            <a:noFill/>
+          </a:ln>
+        </p:spPr>
+        <p:txBody>
+          <a:bodyPr spcFirstLastPara="1" wrap="square" lIns="91425" tIns="45700" rIns="91425" bIns="45700" anchor="t" anchorCtr="0">
+            <a:spAutoFit/>
+          </a:bodyPr>
+          <a:lstStyle/>
+          <a:p>
+            <a:pPr marL="457200" marR="0" lvl="1" indent="0" algn="just" rtl="0">
+              <a:lnSpc>
+                <a:spcPct val="115000"/>
+              </a:lnSpc>
+              <a:spcBef>
+                <a:spcPts val="0"/>
+              </a:spcBef>
+              <a:spcAft>
+                <a:spcPts val="0"/>
+              </a:spcAft>
+              <a:buNone/>
+            </a:pPr>
+            <a:r>
+              <a:rPr lang="ru-RU" sz="2200" b="0" i="0" u="none" strike="noStrike" cap="none">
+                <a:latin typeface="Arial"/>
+                <a:ea typeface="Arial"/>
+                <a:cs typeface="Arial"/>
+                <a:sym typeface="Arial"/>
+              </a:rPr>
+              <a:t>Яндекс.Карты API (MapKit)</a:t>
+            </a:r>
+            <a:endParaRPr/>
+          </a:p>
+        </p:txBody>
+      </p:sp>
+      <p:sp>
+        <p:nvSpPr>
+          <p:cNvPr id="18" name="Google Shape;123;p8">
+            <a:extLst>
+              <a:ext uri="{FF2B5EF4-FFF2-40B4-BE49-F238E27FC236}">
+                <a16:creationId xmlns:a16="http://schemas.microsoft.com/office/drawing/2014/main" id="{ED206EE4-8026-DE57-70ED-2362FE43D04A}"/>
+              </a:ext>
+            </a:extLst>
+          </p:cNvPr>
+          <p:cNvSpPr txBox="1"/>
+          <p:nvPr/>
+        </p:nvSpPr>
+        <p:spPr>
+          <a:xfrm>
+            <a:off x="1297363" y="5521772"/>
+            <a:ext cx="9151800" cy="430800"/>
+          </a:xfrm>
+          <a:prstGeom prst="rect">
+            <a:avLst/>
+          </a:prstGeom>
+          <a:noFill/>
+          <a:ln>
+            <a:noFill/>
+          </a:ln>
+        </p:spPr>
+        <p:txBody>
+          <a:bodyPr spcFirstLastPara="1" wrap="square" lIns="91425" tIns="45700" rIns="91425" bIns="45700" anchor="t" anchorCtr="0">
+            <a:spAutoFit/>
+          </a:bodyPr>
+          <a:lstStyle/>
+          <a:p>
+            <a:pPr marL="0" marR="0" lvl="0" indent="0" algn="l" rtl="0">
+              <a:spcBef>
+                <a:spcPts val="0"/>
+              </a:spcBef>
+              <a:spcAft>
+                <a:spcPts val="0"/>
+              </a:spcAft>
+              <a:buNone/>
+            </a:pPr>
+            <a:r>
+              <a:rPr lang="ru-RU" sz="2200" b="1">
+                <a:latin typeface="Arial"/>
+                <a:ea typeface="Arial"/>
+                <a:cs typeface="Arial"/>
+                <a:sym typeface="Arial"/>
+              </a:rPr>
+              <a:t>Системные сервисы:</a:t>
+            </a:r>
+            <a:r>
+              <a:rPr lang="ru-RU" sz="2200">
+                <a:latin typeface="Arial"/>
+                <a:ea typeface="Arial"/>
+                <a:cs typeface="Arial"/>
+                <a:sym typeface="Arial"/>
+              </a:rPr>
+              <a:t> AlarmManager и NotificationManager </a:t>
+            </a:r>
+            <a:endParaRPr sz="2200">
+              <a:latin typeface="Arial"/>
+              <a:ea typeface="Arial"/>
+              <a:cs typeface="Arial"/>
+              <a:sym typeface="Arial"/>
+            </a:endParaRPr>
+          </a:p>
+        </p:txBody>
+      </p:sp>
+      <p:sp>
+        <p:nvSpPr>
+          <p:cNvPr id="21" name="Google Shape;126;p8">
+            <a:extLst>
+              <a:ext uri="{FF2B5EF4-FFF2-40B4-BE49-F238E27FC236}">
+                <a16:creationId xmlns:a16="http://schemas.microsoft.com/office/drawing/2014/main" id="{30100F95-0BA7-7364-D468-C2DBF6D95E4D}"/>
+              </a:ext>
+            </a:extLst>
+          </p:cNvPr>
+          <p:cNvSpPr/>
+          <p:nvPr/>
+        </p:nvSpPr>
+        <p:spPr>
+          <a:xfrm flipH="1">
+            <a:off x="2042757" y="2948130"/>
+            <a:ext cx="154500" cy="158400"/>
+          </a:xfrm>
+          <a:prstGeom prst="ellipse">
+            <a:avLst/>
+          </a:prstGeom>
+          <a:solidFill>
+            <a:schemeClr val="tx1"/>
+          </a:solidFill>
+          <a:ln>
+            <a:noFill/>
+          </a:ln>
+          <a:effectLst>
+            <a:outerShdw blurRad="203040" dist="75967" dir="5448874" sx="102000" sy="102000" algn="ctr" rotWithShape="0">
+              <a:srgbClr val="BFBFBF">
+                <a:alpha val="50980"/>
+              </a:srgbClr>
+            </a:outerShdw>
+          </a:effectLst>
+        </p:spPr>
+        <p:txBody>
+          <a:bodyPr spcFirstLastPara="1" wrap="square" lIns="91425" tIns="91425" rIns="91425" bIns="91425" anchor="ctr" anchorCtr="0">
+            <a:noAutofit/>
+          </a:bodyPr>
+          <a:lstStyle/>
+          <a:p>
+            <a:pPr marL="0" lvl="0" indent="0" algn="l" rtl="0">
+              <a:spcBef>
+                <a:spcPts val="0"/>
+              </a:spcBef>
+              <a:spcAft>
+                <a:spcPts val="0"/>
+              </a:spcAft>
+              <a:buNone/>
+            </a:pPr>
+            <a:endParaRPr/>
+          </a:p>
+        </p:txBody>
+      </p:sp>
+      <p:sp>
+        <p:nvSpPr>
+          <p:cNvPr id="22" name="Google Shape;127;p8">
+            <a:extLst>
+              <a:ext uri="{FF2B5EF4-FFF2-40B4-BE49-F238E27FC236}">
+                <a16:creationId xmlns:a16="http://schemas.microsoft.com/office/drawing/2014/main" id="{53F0D775-1BFF-3FF7-FB31-98845CE905CA}"/>
+              </a:ext>
+            </a:extLst>
+          </p:cNvPr>
+          <p:cNvSpPr/>
+          <p:nvPr/>
+        </p:nvSpPr>
+        <p:spPr>
+          <a:xfrm flipH="1">
+            <a:off x="2047927" y="3407571"/>
+            <a:ext cx="154500" cy="158400"/>
+          </a:xfrm>
+          <a:prstGeom prst="ellipse">
+            <a:avLst/>
+          </a:prstGeom>
+          <a:solidFill>
+            <a:schemeClr val="tx1"/>
+          </a:solidFill>
+          <a:ln>
+            <a:noFill/>
+          </a:ln>
+          <a:effectLst>
+            <a:outerShdw blurRad="203040" dist="75967" dir="5448874" sx="102000" sy="102000" algn="ctr" rotWithShape="0">
+              <a:srgbClr val="BFBFBF">
+                <a:alpha val="50980"/>
+              </a:srgbClr>
+            </a:outerShdw>
+          </a:effectLst>
+        </p:spPr>
+        <p:txBody>
+          <a:bodyPr spcFirstLastPara="1" wrap="square" lIns="91425" tIns="91425" rIns="91425" bIns="91425" anchor="ctr" anchorCtr="0">
+            <a:noAutofit/>
+          </a:bodyPr>
+          <a:lstStyle/>
+          <a:p>
+            <a:pPr marL="0" lvl="0" indent="0" algn="l" rtl="0">
+              <a:spcBef>
+                <a:spcPts val="0"/>
+              </a:spcBef>
+              <a:spcAft>
+                <a:spcPts val="0"/>
+              </a:spcAft>
+              <a:buNone/>
+            </a:pPr>
+            <a:endParaRPr/>
+          </a:p>
+        </p:txBody>
+      </p:sp>
+      <p:sp>
+        <p:nvSpPr>
+          <p:cNvPr id="23" name="Google Shape;128;p8">
+            <a:extLst>
+              <a:ext uri="{FF2B5EF4-FFF2-40B4-BE49-F238E27FC236}">
+                <a16:creationId xmlns:a16="http://schemas.microsoft.com/office/drawing/2014/main" id="{CA3E1C5E-B94E-AB74-CCE1-3E32FCF50C75}"/>
+              </a:ext>
+            </a:extLst>
+          </p:cNvPr>
+          <p:cNvSpPr/>
+          <p:nvPr/>
+        </p:nvSpPr>
+        <p:spPr>
+          <a:xfrm flipH="1">
+            <a:off x="2047927" y="3838040"/>
+            <a:ext cx="154500" cy="158400"/>
+          </a:xfrm>
+          <a:prstGeom prst="ellipse">
+            <a:avLst/>
+          </a:prstGeom>
+          <a:solidFill>
+            <a:schemeClr val="tx1"/>
+          </a:solidFill>
+          <a:ln>
+            <a:noFill/>
+          </a:ln>
+          <a:effectLst>
+            <a:outerShdw blurRad="203040" dist="75967" dir="5448874" sx="102000" sy="102000" algn="ctr" rotWithShape="0">
+              <a:srgbClr val="BFBFBF">
+                <a:alpha val="50980"/>
+              </a:srgbClr>
+            </a:outerShdw>
+          </a:effectLst>
+        </p:spPr>
+        <p:txBody>
+          <a:bodyPr spcFirstLastPara="1" wrap="square" lIns="91425" tIns="91425" rIns="91425" bIns="91425" anchor="ctr" anchorCtr="0">
+            <a:noAutofit/>
+          </a:bodyPr>
+          <a:lstStyle/>
+          <a:p>
+            <a:pPr marL="0" lvl="0" indent="0" algn="l" rtl="0">
+              <a:spcBef>
+                <a:spcPts val="0"/>
+              </a:spcBef>
+              <a:spcAft>
+                <a:spcPts val="0"/>
+              </a:spcAft>
+              <a:buNone/>
+            </a:pPr>
+            <a:endParaRPr/>
+          </a:p>
+        </p:txBody>
+      </p:sp>
+      <p:sp>
+        <p:nvSpPr>
+          <p:cNvPr id="24" name="Google Shape;129;p8">
+            <a:extLst>
+              <a:ext uri="{FF2B5EF4-FFF2-40B4-BE49-F238E27FC236}">
+                <a16:creationId xmlns:a16="http://schemas.microsoft.com/office/drawing/2014/main" id="{0D0446B2-89EB-48D7-CAD2-AA5ACEA06C0D}"/>
+              </a:ext>
+            </a:extLst>
+          </p:cNvPr>
+          <p:cNvSpPr/>
+          <p:nvPr/>
+        </p:nvSpPr>
+        <p:spPr>
+          <a:xfrm flipH="1">
+            <a:off x="2042757" y="4808387"/>
+            <a:ext cx="154500" cy="158400"/>
+          </a:xfrm>
+          <a:prstGeom prst="ellipse">
+            <a:avLst/>
+          </a:prstGeom>
+          <a:solidFill>
+            <a:schemeClr val="tx1"/>
+          </a:solidFill>
+          <a:ln>
+            <a:noFill/>
+          </a:ln>
+          <a:effectLst>
+            <a:outerShdw blurRad="203040" dist="75967" dir="5448874" sx="102000" sy="102000" algn="ctr" rotWithShape="0">
+              <a:srgbClr val="BFBFBF">
+                <a:alpha val="50980"/>
+              </a:srgbClr>
+            </a:outerShdw>
+          </a:effectLst>
+        </p:spPr>
+        <p:txBody>
+          <a:bodyPr spcFirstLastPara="1" wrap="square" lIns="91425" tIns="91425" rIns="91425" bIns="91425" anchor="ctr" anchorCtr="0">
+            <a:noAutofit/>
+          </a:bodyPr>
+          <a:lstStyle/>
+          <a:p>
+            <a:pPr marL="0" lvl="0" indent="0" algn="l" rtl="0">
+              <a:spcBef>
+                <a:spcPts val="0"/>
+              </a:spcBef>
+              <a:spcAft>
+                <a:spcPts val="0"/>
+              </a:spcAft>
+              <a:buNone/>
+            </a:pPr>
+            <a:endParaRPr/>
+          </a:p>
+        </p:txBody>
+      </p:sp>
+      <p:sp>
+        <p:nvSpPr>
+          <p:cNvPr id="25" name="Google Shape;130;p8">
+            <a:extLst>
+              <a:ext uri="{FF2B5EF4-FFF2-40B4-BE49-F238E27FC236}">
+                <a16:creationId xmlns:a16="http://schemas.microsoft.com/office/drawing/2014/main" id="{931C45CD-4171-6F09-95AA-B8E16EAEDD99}"/>
+              </a:ext>
+            </a:extLst>
+          </p:cNvPr>
+          <p:cNvSpPr txBox="1"/>
+          <p:nvPr/>
+        </p:nvSpPr>
+        <p:spPr>
+          <a:xfrm>
+            <a:off x="2042873" y="5084255"/>
+            <a:ext cx="6670200" cy="481630"/>
+          </a:xfrm>
+          <a:prstGeom prst="rect">
+            <a:avLst/>
+          </a:prstGeom>
+          <a:noFill/>
+          <a:ln>
+            <a:noFill/>
+          </a:ln>
+        </p:spPr>
+        <p:txBody>
+          <a:bodyPr spcFirstLastPara="1" wrap="square" lIns="91425" tIns="45700" rIns="91425" bIns="45700" anchor="t" anchorCtr="0">
+            <a:spAutoFit/>
+          </a:bodyPr>
+          <a:lstStyle/>
+          <a:p>
+            <a:pPr marL="0" marR="0" lvl="1" indent="0" algn="just" rtl="0">
+              <a:lnSpc>
+                <a:spcPct val="115000"/>
+              </a:lnSpc>
+              <a:spcBef>
+                <a:spcPts val="0"/>
+              </a:spcBef>
+              <a:spcAft>
+                <a:spcPts val="0"/>
+              </a:spcAft>
+              <a:buNone/>
+            </a:pPr>
+            <a:r>
+              <a:rPr lang="ru-RU" sz="2200"/>
+              <a:t>    </a:t>
+            </a:r>
+            <a:r>
+              <a:rPr lang="ru-RU" sz="2200" b="0" i="0" u="none" strike="noStrike" cap="none">
+                <a:latin typeface="Arial"/>
+                <a:ea typeface="Arial"/>
+                <a:cs typeface="Arial"/>
+                <a:sym typeface="Arial"/>
+              </a:rPr>
+              <a:t>Яндекс.</a:t>
+            </a:r>
+            <a:r>
+              <a:rPr lang="ru-RU" sz="2200"/>
+              <a:t>Диск</a:t>
+            </a:r>
+            <a:r>
+              <a:rPr lang="ru-RU" sz="2200" b="0" i="0" u="none" strike="noStrike" cap="none">
+                <a:latin typeface="Arial"/>
+                <a:ea typeface="Arial"/>
+                <a:cs typeface="Arial"/>
+                <a:sym typeface="Arial"/>
+              </a:rPr>
+              <a:t> </a:t>
+            </a:r>
+            <a:r>
+              <a:rPr lang="ru-RU" sz="2200"/>
+              <a:t>REST API</a:t>
+            </a:r>
+            <a:endParaRPr/>
+          </a:p>
+        </p:txBody>
+      </p:sp>
+      <p:sp>
+        <p:nvSpPr>
+          <p:cNvPr id="26" name="Google Shape;131;p8">
+            <a:extLst>
+              <a:ext uri="{FF2B5EF4-FFF2-40B4-BE49-F238E27FC236}">
+                <a16:creationId xmlns:a16="http://schemas.microsoft.com/office/drawing/2014/main" id="{B5BA69F0-7CB2-4E9B-AA32-06139778808A}"/>
+              </a:ext>
+            </a:extLst>
+          </p:cNvPr>
+          <p:cNvSpPr/>
+          <p:nvPr/>
+        </p:nvSpPr>
+        <p:spPr>
+          <a:xfrm flipH="1">
+            <a:off x="2042820" y="5220287"/>
+            <a:ext cx="154500" cy="158400"/>
+          </a:xfrm>
+          <a:prstGeom prst="ellipse">
+            <a:avLst/>
+          </a:prstGeom>
+          <a:solidFill>
+            <a:schemeClr val="tx1"/>
+          </a:solidFill>
+          <a:ln>
+            <a:noFill/>
+          </a:ln>
+          <a:effectLst>
+            <a:outerShdw blurRad="203040" dist="75967" dir="5448874" sx="102000" sy="102000" algn="ctr" rotWithShape="0">
+              <a:srgbClr val="BFBFBF">
+                <a:alpha val="50980"/>
+              </a:srgbClr>
+            </a:outerShdw>
+          </a:effectLst>
+        </p:spPr>
+        <p:txBody>
+          <a:bodyPr spcFirstLastPara="1" wrap="square" lIns="91425" tIns="91425" rIns="91425" bIns="91425" anchor="ctr" anchorCtr="0">
+            <a:noAutofit/>
+          </a:bodyPr>
+          <a:lstStyle/>
+          <a:p>
+            <a:pPr marL="0" lvl="0" indent="0" algn="l" rtl="0">
+              <a:spcBef>
+                <a:spcPts val="0"/>
+              </a:spcBef>
+              <a:spcAft>
+                <a:spcPts val="0"/>
+              </a:spcAft>
+              <a:buNone/>
+            </a:pPr>
+            <a:endParaRPr/>
+          </a:p>
+        </p:txBody>
+      </p:sp>
+      <p:sp>
+        <p:nvSpPr>
+          <p:cNvPr id="2" name="Google Shape;126;p8">
+            <a:extLst>
+              <a:ext uri="{FF2B5EF4-FFF2-40B4-BE49-F238E27FC236}">
+                <a16:creationId xmlns:a16="http://schemas.microsoft.com/office/drawing/2014/main" id="{0788D324-9844-2784-B567-FCAE41E02F3A}"/>
+              </a:ext>
+            </a:extLst>
+          </p:cNvPr>
+          <p:cNvSpPr/>
+          <p:nvPr/>
+        </p:nvSpPr>
+        <p:spPr>
+          <a:xfrm flipH="1">
+            <a:off x="911260" y="1236239"/>
+            <a:ext cx="154500" cy="158400"/>
+          </a:xfrm>
+          <a:prstGeom prst="ellipse">
+            <a:avLst/>
+          </a:prstGeom>
+          <a:solidFill>
+            <a:schemeClr val="tx1"/>
+          </a:solidFill>
+          <a:ln>
+            <a:noFill/>
+          </a:ln>
+          <a:effectLst>
+            <a:outerShdw blurRad="203040" dist="75967" dir="5448874" sx="102000" sy="102000" algn="ctr" rotWithShape="0">
+              <a:srgbClr val="BFBFBF">
+                <a:alpha val="50980"/>
+              </a:srgbClr>
+            </a:outerShdw>
+          </a:effectLst>
+        </p:spPr>
+        <p:txBody>
+          <a:bodyPr spcFirstLastPara="1" wrap="square" lIns="91425" tIns="91425" rIns="91425" bIns="91425" anchor="ctr" anchorCtr="0">
+            <a:noAutofit/>
+          </a:bodyPr>
+          <a:lstStyle/>
+          <a:p>
+            <a:pPr marL="0" lvl="0" indent="0" algn="l" rtl="0">
+              <a:spcBef>
+                <a:spcPts val="0"/>
+              </a:spcBef>
+              <a:spcAft>
+                <a:spcPts val="0"/>
+              </a:spcAft>
+              <a:buNone/>
+            </a:pPr>
+            <a:endParaRPr/>
+          </a:p>
+        </p:txBody>
+      </p:sp>
+      <p:sp>
+        <p:nvSpPr>
+          <p:cNvPr id="27" name="Google Shape;126;p8">
+            <a:extLst>
+              <a:ext uri="{FF2B5EF4-FFF2-40B4-BE49-F238E27FC236}">
+                <a16:creationId xmlns:a16="http://schemas.microsoft.com/office/drawing/2014/main" id="{E8040E52-6C27-0833-F917-5F615310ACE8}"/>
+              </a:ext>
+            </a:extLst>
+          </p:cNvPr>
+          <p:cNvSpPr/>
+          <p:nvPr/>
+        </p:nvSpPr>
+        <p:spPr>
+          <a:xfrm flipH="1">
+            <a:off x="902197" y="1683907"/>
+            <a:ext cx="154500" cy="158400"/>
+          </a:xfrm>
+          <a:prstGeom prst="ellipse">
+            <a:avLst/>
+          </a:prstGeom>
+          <a:solidFill>
+            <a:schemeClr val="tx1"/>
+          </a:solidFill>
+          <a:ln>
+            <a:noFill/>
+          </a:ln>
+          <a:effectLst>
+            <a:outerShdw blurRad="203040" dist="75967" dir="5448874" sx="102000" sy="102000" algn="ctr" rotWithShape="0">
+              <a:srgbClr val="BFBFBF">
+                <a:alpha val="50980"/>
+              </a:srgbClr>
+            </a:outerShdw>
+          </a:effectLst>
+        </p:spPr>
+        <p:txBody>
+          <a:bodyPr spcFirstLastPara="1" wrap="square" lIns="91425" tIns="91425" rIns="91425" bIns="91425" anchor="ctr" anchorCtr="0">
+            <a:noAutofit/>
+          </a:bodyPr>
+          <a:lstStyle/>
+          <a:p>
+            <a:pPr marL="0" lvl="0" indent="0" algn="l" rtl="0">
+              <a:spcBef>
+                <a:spcPts val="0"/>
+              </a:spcBef>
+              <a:spcAft>
+                <a:spcPts val="0"/>
+              </a:spcAft>
+              <a:buNone/>
+            </a:pPr>
+            <a:endParaRPr/>
+          </a:p>
+        </p:txBody>
+      </p:sp>
+      <p:sp>
+        <p:nvSpPr>
+          <p:cNvPr id="28" name="Google Shape;126;p8">
+            <a:extLst>
+              <a:ext uri="{FF2B5EF4-FFF2-40B4-BE49-F238E27FC236}">
+                <a16:creationId xmlns:a16="http://schemas.microsoft.com/office/drawing/2014/main" id="{F04D9C3C-A0D9-4197-3CD1-9D00E71DF1CF}"/>
+              </a:ext>
+            </a:extLst>
+          </p:cNvPr>
+          <p:cNvSpPr/>
+          <p:nvPr/>
+        </p:nvSpPr>
+        <p:spPr>
+          <a:xfrm flipH="1">
+            <a:off x="902197" y="2193404"/>
+            <a:ext cx="154500" cy="158400"/>
+          </a:xfrm>
+          <a:prstGeom prst="ellipse">
+            <a:avLst/>
+          </a:prstGeom>
+          <a:solidFill>
+            <a:schemeClr val="tx1"/>
+          </a:solidFill>
+          <a:ln>
+            <a:noFill/>
+          </a:ln>
+          <a:effectLst>
+            <a:outerShdw blurRad="203040" dist="75967" dir="5448874" sx="102000" sy="102000" algn="ctr" rotWithShape="0">
+              <a:srgbClr val="BFBFBF">
+                <a:alpha val="50980"/>
+              </a:srgbClr>
+            </a:outerShdw>
+          </a:effectLst>
+        </p:spPr>
+        <p:txBody>
+          <a:bodyPr spcFirstLastPara="1" wrap="square" lIns="91425" tIns="91425" rIns="91425" bIns="91425" anchor="ctr" anchorCtr="0">
+            <a:noAutofit/>
+          </a:bodyPr>
+          <a:lstStyle/>
+          <a:p>
+            <a:pPr marL="0" lvl="0" indent="0" algn="l" rtl="0">
+              <a:spcBef>
+                <a:spcPts val="0"/>
+              </a:spcBef>
+              <a:spcAft>
+                <a:spcPts val="0"/>
+              </a:spcAft>
+              <a:buNone/>
+            </a:pPr>
+            <a:endParaRPr/>
+          </a:p>
+        </p:txBody>
+      </p:sp>
+      <p:sp>
+        <p:nvSpPr>
+          <p:cNvPr id="29" name="Google Shape;126;p8">
+            <a:extLst>
+              <a:ext uri="{FF2B5EF4-FFF2-40B4-BE49-F238E27FC236}">
+                <a16:creationId xmlns:a16="http://schemas.microsoft.com/office/drawing/2014/main" id="{13577764-A10A-5150-3324-94AC04FF3F95}"/>
+              </a:ext>
+            </a:extLst>
+          </p:cNvPr>
+          <p:cNvSpPr/>
+          <p:nvPr/>
+        </p:nvSpPr>
+        <p:spPr>
+          <a:xfrm flipH="1">
+            <a:off x="902197" y="2632724"/>
+            <a:ext cx="154500" cy="158400"/>
+          </a:xfrm>
+          <a:prstGeom prst="ellipse">
+            <a:avLst/>
+          </a:prstGeom>
+          <a:solidFill>
+            <a:schemeClr val="tx1"/>
+          </a:solidFill>
+          <a:ln>
+            <a:noFill/>
+          </a:ln>
+          <a:effectLst>
+            <a:outerShdw blurRad="203040" dist="75967" dir="5448874" sx="102000" sy="102000" algn="ctr" rotWithShape="0">
+              <a:srgbClr val="BFBFBF">
+                <a:alpha val="50980"/>
+              </a:srgbClr>
+            </a:outerShdw>
+          </a:effectLst>
+        </p:spPr>
+        <p:txBody>
+          <a:bodyPr spcFirstLastPara="1" wrap="square" lIns="91425" tIns="91425" rIns="91425" bIns="91425" anchor="ctr" anchorCtr="0">
+            <a:noAutofit/>
+          </a:bodyPr>
+          <a:lstStyle/>
+          <a:p>
+            <a:pPr marL="0" lvl="0" indent="0" algn="l" rtl="0">
+              <a:spcBef>
+                <a:spcPts val="0"/>
+              </a:spcBef>
+              <a:spcAft>
+                <a:spcPts val="0"/>
+              </a:spcAft>
+              <a:buNone/>
+            </a:pPr>
+            <a:endParaRPr/>
+          </a:p>
+        </p:txBody>
+      </p:sp>
+      <p:sp>
+        <p:nvSpPr>
+          <p:cNvPr id="30" name="Google Shape;126;p8">
+            <a:extLst>
+              <a:ext uri="{FF2B5EF4-FFF2-40B4-BE49-F238E27FC236}">
+                <a16:creationId xmlns:a16="http://schemas.microsoft.com/office/drawing/2014/main" id="{57A4A18E-5F06-C500-EA15-E28E899050FC}"/>
+              </a:ext>
+            </a:extLst>
+          </p:cNvPr>
+          <p:cNvSpPr/>
+          <p:nvPr/>
+        </p:nvSpPr>
+        <p:spPr>
+          <a:xfrm flipH="1">
+            <a:off x="902197" y="4421650"/>
+            <a:ext cx="154500" cy="158400"/>
+          </a:xfrm>
+          <a:prstGeom prst="ellipse">
+            <a:avLst/>
+          </a:prstGeom>
+          <a:solidFill>
+            <a:schemeClr val="tx1"/>
+          </a:solidFill>
+          <a:ln>
+            <a:noFill/>
+          </a:ln>
+          <a:effectLst>
+            <a:outerShdw blurRad="203040" dist="75967" dir="5448874" sx="102000" sy="102000" algn="ctr" rotWithShape="0">
+              <a:srgbClr val="BFBFBF">
+                <a:alpha val="50980"/>
+              </a:srgbClr>
+            </a:outerShdw>
+          </a:effectLst>
+        </p:spPr>
+        <p:txBody>
+          <a:bodyPr spcFirstLastPara="1" wrap="square" lIns="91425" tIns="91425" rIns="91425" bIns="91425" anchor="ctr" anchorCtr="0">
+            <a:noAutofit/>
+          </a:bodyPr>
+          <a:lstStyle/>
+          <a:p>
+            <a:pPr marL="0" lvl="0" indent="0" algn="l" rtl="0">
+              <a:spcBef>
+                <a:spcPts val="0"/>
+              </a:spcBef>
+              <a:spcAft>
+                <a:spcPts val="0"/>
+              </a:spcAft>
+              <a:buNone/>
+            </a:pPr>
+            <a:endParaRPr/>
+          </a:p>
+        </p:txBody>
+      </p:sp>
+      <p:sp>
+        <p:nvSpPr>
+          <p:cNvPr id="31" name="Google Shape;126;p8">
+            <a:extLst>
+              <a:ext uri="{FF2B5EF4-FFF2-40B4-BE49-F238E27FC236}">
+                <a16:creationId xmlns:a16="http://schemas.microsoft.com/office/drawing/2014/main" id="{B13627A4-A5F7-4C0A-BE95-A2DFAE21A332}"/>
+              </a:ext>
+            </a:extLst>
+          </p:cNvPr>
+          <p:cNvSpPr/>
+          <p:nvPr/>
+        </p:nvSpPr>
+        <p:spPr>
+          <a:xfrm flipH="1">
+            <a:off x="902197" y="5657972"/>
+            <a:ext cx="154500" cy="158400"/>
+          </a:xfrm>
+          <a:prstGeom prst="ellipse">
+            <a:avLst/>
+          </a:prstGeom>
+          <a:solidFill>
+            <a:schemeClr val="tx1"/>
+          </a:solidFill>
+          <a:ln>
+            <a:noFill/>
+          </a:ln>
+          <a:effectLst>
+            <a:outerShdw blurRad="203040" dist="75967" dir="5448874" sx="102000" sy="102000" algn="ctr" rotWithShape="0">
+              <a:srgbClr val="BFBFBF">
+                <a:alpha val="50980"/>
+              </a:srgbClr>
+            </a:outerShdw>
+          </a:effectLst>
+        </p:spPr>
+        <p:txBody>
+          <a:bodyPr spcFirstLastPara="1" wrap="square" lIns="91425" tIns="91425" rIns="91425" bIns="91425" anchor="ctr" anchorCtr="0">
+            <a:noAutofit/>
+          </a:bodyPr>
+          <a:lstStyle/>
+          <a:p>
+            <a:pPr marL="0" lvl="0" indent="0" algn="l" rtl="0">
+              <a:spcBef>
+                <a:spcPts val="0"/>
+              </a:spcBef>
+              <a:spcAft>
+                <a:spcPts val="0"/>
+              </a:spcAft>
+              <a:buNone/>
+            </a:pPr>
+            <a:endParaRPr/>
+          </a:p>
+        </p:txBody>
+      </p:sp>
     </p:spTree>
     <p:extLst>
       <p:ext uri="{BB962C8B-B14F-4D97-AF65-F5344CB8AC3E}">
-        <p14:creationId xmlns:p14="http://schemas.microsoft.com/office/powerpoint/2010/main" val="1493152506"/>
+        <p14:creationId xmlns:p14="http://schemas.microsoft.com/office/powerpoint/2010/main" val="1894482553"/>
       </p:ext>
     </p:extLst>
   </p:cSld>
@@ -7466,10 +7541,10 @@
       </p:grpSpPr>
       <p:sp>
         <p:nvSpPr>
-          <p:cNvPr id="3" name="Google Shape;145;p10">
-            <a:extLst>
-              <a:ext uri="{FF2B5EF4-FFF2-40B4-BE49-F238E27FC236}">
-                <a16:creationId xmlns:a16="http://schemas.microsoft.com/office/drawing/2014/main" id="{82F71AFA-CC28-36CE-4B15-B302E582B9AC}"/>
+          <p:cNvPr id="3" name="Google Shape;137;p9">
+            <a:extLst>
+              <a:ext uri="{FF2B5EF4-FFF2-40B4-BE49-F238E27FC236}">
+                <a16:creationId xmlns:a16="http://schemas.microsoft.com/office/drawing/2014/main" id="{9ABB6F61-0E2E-4D1C-7802-6B8325BD45DB}"/>
               </a:ext>
             </a:extLst>
           </p:cNvPr>
@@ -7483,7 +7558,7 @@
         <p:spPr>
           <a:xfrm>
             <a:off x="8610600" y="6356350"/>
-            <a:ext cx="2743200" cy="365125"/>
+            <a:ext cx="2743200" cy="365100"/>
           </a:xfrm>
           <a:prstGeom prst="rect">
             <a:avLst/>
@@ -7526,10 +7601,10 @@
       </p:sp>
       <p:sp>
         <p:nvSpPr>
-          <p:cNvPr id="4" name="Google Shape;146;p10">
-            <a:extLst>
-              <a:ext uri="{FF2B5EF4-FFF2-40B4-BE49-F238E27FC236}">
-                <a16:creationId xmlns:a16="http://schemas.microsoft.com/office/drawing/2014/main" id="{FD09AF47-20FC-3E82-1015-BF644DE2A633}"/>
+          <p:cNvPr id="4" name="Google Shape;138;p9">
+            <a:extLst>
+              <a:ext uri="{FF2B5EF4-FFF2-40B4-BE49-F238E27FC236}">
+                <a16:creationId xmlns:a16="http://schemas.microsoft.com/office/drawing/2014/main" id="{5841E619-3D1B-DC7F-EB0F-322E4EC054D7}"/>
               </a:ext>
             </a:extLst>
           </p:cNvPr>
@@ -7540,8 +7615,8 @@
         </p:nvSpPr>
         <p:spPr>
           <a:xfrm>
-            <a:off x="838200" y="502515"/>
-            <a:ext cx="8202474" cy="697717"/>
+            <a:off x="1033072" y="365126"/>
+            <a:ext cx="8202600" cy="697800"/>
           </a:xfrm>
           <a:prstGeom prst="rect">
             <a:avLst/>
@@ -7591,216 +7666,35 @@
             </a:pPr>
             <a:r>
               <a:rPr lang="ru-RU"/>
-              <a:t>Дизайн</a:t>
-            </a:r>
-          </a:p>
-        </p:txBody>
-      </p:sp>
-      <p:sp>
-        <p:nvSpPr>
-          <p:cNvPr id="5" name="Google Shape;147;p10">
-            <a:extLst>
-              <a:ext uri="{FF2B5EF4-FFF2-40B4-BE49-F238E27FC236}">
-                <a16:creationId xmlns:a16="http://schemas.microsoft.com/office/drawing/2014/main" id="{84A7DA9D-2B67-A39A-E682-DE8B928B1E6D}"/>
-              </a:ext>
-            </a:extLst>
-          </p:cNvPr>
-          <p:cNvSpPr/>
+              <a:t>Архитектура</a:t>
+            </a:r>
+          </a:p>
+        </p:txBody>
+      </p:sp>
+      <p:pic>
+        <p:nvPicPr>
+          <p:cNvPr id="5" name="Google Shape;139;p9">
+            <a:extLst>
+              <a:ext uri="{FF2B5EF4-FFF2-40B4-BE49-F238E27FC236}">
+                <a16:creationId xmlns:a16="http://schemas.microsoft.com/office/drawing/2014/main" id="{4D5EB15E-099E-4AED-8CBF-1A50AAFF011D}"/>
+              </a:ext>
+            </a:extLst>
+          </p:cNvPr>
+          <p:cNvPicPr preferRelativeResize="0"/>
           <p:nvPr/>
-        </p:nvSpPr>
+        </p:nvPicPr>
+        <p:blipFill>
+          <a:blip r:embed="rId2">
+            <a:alphaModFix/>
+          </a:blip>
+          <a:stretch>
+            <a:fillRect/>
+          </a:stretch>
+        </p:blipFill>
         <p:spPr>
           <a:xfrm>
-            <a:off x="893167" y="2413714"/>
-            <a:ext cx="1239600" cy="325800"/>
-          </a:xfrm>
-          <a:prstGeom prst="roundRect">
-            <a:avLst>
-              <a:gd name="adj" fmla="val 16667"/>
-            </a:avLst>
-          </a:prstGeom>
-          <a:solidFill>
-            <a:srgbClr val="697256"/>
-          </a:solidFill>
-          <a:ln w="10775" cap="flat" cmpd="sng">
-            <a:solidFill>
-              <a:schemeClr val="dk1"/>
-            </a:solidFill>
-            <a:prstDash val="solid"/>
-            <a:round/>
-            <a:headEnd type="none" w="sm" len="sm"/>
-            <a:tailEnd type="none" w="sm" len="sm"/>
-          </a:ln>
-        </p:spPr>
-        <p:txBody>
-          <a:bodyPr spcFirstLastPara="1" wrap="square" lIns="91425" tIns="45700" rIns="91425" bIns="45700" anchor="ctr" anchorCtr="0">
-            <a:noAutofit/>
-          </a:bodyPr>
-          <a:lstStyle/>
-          <a:p>
-            <a:pPr marL="0" lvl="0" indent="0" algn="ctr" rtl="0">
-              <a:spcBef>
-                <a:spcPts val="0"/>
-              </a:spcBef>
-              <a:spcAft>
-                <a:spcPts val="0"/>
-              </a:spcAft>
-              <a:buClr>
-                <a:schemeClr val="dk1"/>
-              </a:buClr>
-              <a:buSzPts val="1100"/>
-              <a:buFont typeface="Arial"/>
-              <a:buNone/>
-            </a:pPr>
-            <a:r>
-              <a:rPr lang="ru-RU" sz="1600"/>
-              <a:t>#697255</a:t>
-            </a:r>
-            <a:endParaRPr sz="1600"/>
-          </a:p>
-        </p:txBody>
-      </p:sp>
-      <p:sp>
-        <p:nvSpPr>
-          <p:cNvPr id="6" name="Google Shape;148;p10">
-            <a:extLst>
-              <a:ext uri="{FF2B5EF4-FFF2-40B4-BE49-F238E27FC236}">
-                <a16:creationId xmlns:a16="http://schemas.microsoft.com/office/drawing/2014/main" id="{BCA500C1-0DB9-67D3-1352-AB1CCC84230B}"/>
-              </a:ext>
-            </a:extLst>
-          </p:cNvPr>
-          <p:cNvSpPr/>
-          <p:nvPr/>
-        </p:nvSpPr>
-        <p:spPr>
-          <a:xfrm>
-            <a:off x="893276" y="3497439"/>
-            <a:ext cx="1239600" cy="270900"/>
-          </a:xfrm>
-          <a:prstGeom prst="roundRect">
-            <a:avLst>
-              <a:gd name="adj" fmla="val 16667"/>
-            </a:avLst>
-          </a:prstGeom>
-          <a:solidFill>
-            <a:srgbClr val="EBEBEB"/>
-          </a:solidFill>
-          <a:ln w="10775" cap="flat" cmpd="sng">
-            <a:solidFill>
-              <a:schemeClr val="dk1"/>
-            </a:solidFill>
-            <a:prstDash val="solid"/>
-            <a:round/>
-            <a:headEnd type="none" w="sm" len="sm"/>
-            <a:tailEnd type="none" w="sm" len="sm"/>
-          </a:ln>
-        </p:spPr>
-        <p:txBody>
-          <a:bodyPr spcFirstLastPara="1" wrap="square" lIns="91425" tIns="45700" rIns="91425" bIns="45700" anchor="ctr" anchorCtr="0">
-            <a:noAutofit/>
-          </a:bodyPr>
-          <a:lstStyle/>
-          <a:p>
-            <a:pPr marL="0" lvl="0" indent="0" algn="ctr" rtl="0">
-              <a:spcBef>
-                <a:spcPts val="0"/>
-              </a:spcBef>
-              <a:spcAft>
-                <a:spcPts val="0"/>
-              </a:spcAft>
-              <a:buClr>
-                <a:schemeClr val="dk1"/>
-              </a:buClr>
-              <a:buSzPts val="1100"/>
-              <a:buFont typeface="Arial"/>
-              <a:buNone/>
-            </a:pPr>
-            <a:r>
-              <a:rPr lang="ru-RU" sz="1600"/>
-              <a:t>#F5F5F5</a:t>
-            </a:r>
-            <a:endParaRPr sz="1600"/>
-          </a:p>
-        </p:txBody>
-      </p:sp>
-      <p:sp>
-        <p:nvSpPr>
-          <p:cNvPr id="7" name="Google Shape;149;p10">
-            <a:extLst>
-              <a:ext uri="{FF2B5EF4-FFF2-40B4-BE49-F238E27FC236}">
-                <a16:creationId xmlns:a16="http://schemas.microsoft.com/office/drawing/2014/main" id="{EAC541E1-1FB3-5126-2054-FE62449A5AA3}"/>
-              </a:ext>
-            </a:extLst>
-          </p:cNvPr>
-          <p:cNvSpPr/>
-          <p:nvPr/>
-        </p:nvSpPr>
-        <p:spPr>
-          <a:xfrm>
-            <a:off x="893275" y="2953839"/>
-            <a:ext cx="1239600" cy="325800"/>
-          </a:xfrm>
-          <a:prstGeom prst="roundRect">
-            <a:avLst>
-              <a:gd name="adj" fmla="val 16667"/>
-            </a:avLst>
-          </a:prstGeom>
-          <a:solidFill>
-            <a:srgbClr val="B56D4B"/>
-          </a:solidFill>
-          <a:ln w="10775" cap="flat" cmpd="sng">
-            <a:solidFill>
-              <a:schemeClr val="dk1"/>
-            </a:solidFill>
-            <a:prstDash val="solid"/>
-            <a:round/>
-            <a:headEnd type="none" w="sm" len="sm"/>
-            <a:tailEnd type="none" w="sm" len="sm"/>
-          </a:ln>
-        </p:spPr>
-        <p:txBody>
-          <a:bodyPr spcFirstLastPara="1" wrap="square" lIns="91425" tIns="45700" rIns="91425" bIns="45700" anchor="ctr" anchorCtr="0">
-            <a:noAutofit/>
-          </a:bodyPr>
-          <a:lstStyle/>
-          <a:p>
-            <a:pPr marL="0" lvl="0" indent="0" algn="ctr" rtl="0">
-              <a:spcBef>
-                <a:spcPts val="0"/>
-              </a:spcBef>
-              <a:spcAft>
-                <a:spcPts val="0"/>
-              </a:spcAft>
-              <a:buClr>
-                <a:schemeClr val="dk1"/>
-              </a:buClr>
-              <a:buSzPts val="1100"/>
-              <a:buFont typeface="Arial"/>
-              <a:buNone/>
-            </a:pPr>
-            <a:r>
-              <a:rPr lang="ru-RU" sz="1600"/>
-              <a:t>#B66D4C</a:t>
-            </a:r>
-            <a:endParaRPr sz="1600"/>
-          </a:p>
-        </p:txBody>
-      </p:sp>
-      <p:sp>
-        <p:nvSpPr>
-          <p:cNvPr id="8" name="Google Shape;150;p10">
-            <a:extLst>
-              <a:ext uri="{FF2B5EF4-FFF2-40B4-BE49-F238E27FC236}">
-                <a16:creationId xmlns:a16="http://schemas.microsoft.com/office/drawing/2014/main" id="{815A3166-37F6-5CE3-BA70-3C2658EC120D}"/>
-              </a:ext>
-            </a:extLst>
-          </p:cNvPr>
-          <p:cNvSpPr txBox="1"/>
-          <p:nvPr/>
-        </p:nvSpPr>
-        <p:spPr>
-          <a:xfrm>
-            <a:off x="838200" y="1493129"/>
-            <a:ext cx="6096000" cy="446400"/>
+            <a:off x="3188800" y="951275"/>
+            <a:ext cx="6046875" cy="5635026"/>
           </a:xfrm>
           <a:prstGeom prst="rect">
             <a:avLst/>
@@ -7810,343 +7704,11 @@
             <a:noFill/>
           </a:ln>
         </p:spPr>
-        <p:txBody>
-          <a:bodyPr spcFirstLastPara="1" wrap="square" lIns="91425" tIns="45700" rIns="91425" bIns="45700" anchor="t" anchorCtr="0">
-            <a:spAutoFit/>
-          </a:bodyPr>
-          <a:lstStyle/>
-          <a:p>
-            <a:pPr marL="0" marR="0" lvl="0" indent="0" algn="l" rtl="0">
-              <a:spcBef>
-                <a:spcPts val="0"/>
-              </a:spcBef>
-              <a:spcAft>
-                <a:spcPts val="0"/>
-              </a:spcAft>
-              <a:buClr>
-                <a:srgbClr val="00497A"/>
-              </a:buClr>
-              <a:buSzPts val="2300"/>
-              <a:buFont typeface="Arial"/>
-              <a:buNone/>
-            </a:pPr>
-            <a:r>
-              <a:rPr lang="ru-RU" sz="2300">
-                <a:latin typeface="Arial"/>
-                <a:ea typeface="Arial"/>
-                <a:cs typeface="Arial"/>
-                <a:sym typeface="Arial"/>
-              </a:rPr>
-              <a:t>Цветовая палитра:</a:t>
-            </a:r>
-            <a:endParaRPr/>
-          </a:p>
-        </p:txBody>
-      </p:sp>
-      <p:sp>
-        <p:nvSpPr>
-          <p:cNvPr id="9" name="Google Shape;151;p10">
-            <a:extLst>
-              <a:ext uri="{FF2B5EF4-FFF2-40B4-BE49-F238E27FC236}">
-                <a16:creationId xmlns:a16="http://schemas.microsoft.com/office/drawing/2014/main" id="{8FF6DC7D-DCF1-1372-BF52-436882392D41}"/>
-              </a:ext>
-            </a:extLst>
-          </p:cNvPr>
-          <p:cNvSpPr/>
-          <p:nvPr/>
-        </p:nvSpPr>
-        <p:spPr>
-          <a:xfrm>
-            <a:off x="893275" y="4041038"/>
-            <a:ext cx="1239600" cy="325800"/>
-          </a:xfrm>
-          <a:prstGeom prst="roundRect">
-            <a:avLst>
-              <a:gd name="adj" fmla="val 16667"/>
-            </a:avLst>
-          </a:prstGeom>
-          <a:solidFill>
-            <a:schemeClr val="lt1"/>
-          </a:solidFill>
-          <a:ln w="10775" cap="flat" cmpd="sng">
-            <a:solidFill>
-              <a:schemeClr val="dk1"/>
-            </a:solidFill>
-            <a:prstDash val="solid"/>
-            <a:round/>
-            <a:headEnd type="none" w="sm" len="sm"/>
-            <a:tailEnd type="none" w="sm" len="sm"/>
-          </a:ln>
-        </p:spPr>
-        <p:txBody>
-          <a:bodyPr spcFirstLastPara="1" wrap="square" lIns="91425" tIns="45700" rIns="91425" bIns="45700" anchor="ctr" anchorCtr="0">
-            <a:noAutofit/>
-          </a:bodyPr>
-          <a:lstStyle/>
-          <a:p>
-            <a:pPr marL="0" lvl="0" indent="0" algn="ctr" rtl="0">
-              <a:spcBef>
-                <a:spcPts val="0"/>
-              </a:spcBef>
-              <a:spcAft>
-                <a:spcPts val="0"/>
-              </a:spcAft>
-              <a:buClr>
-                <a:schemeClr val="dk1"/>
-              </a:buClr>
-              <a:buSzPts val="1100"/>
-              <a:buFont typeface="Arial"/>
-              <a:buNone/>
-            </a:pPr>
-            <a:r>
-              <a:rPr lang="ru-RU" sz="1600"/>
-              <a:t>#FFFFFFF</a:t>
-            </a:r>
-            <a:endParaRPr sz="1600"/>
-          </a:p>
-        </p:txBody>
-      </p:sp>
-      <p:sp>
-        <p:nvSpPr>
-          <p:cNvPr id="10" name="Google Shape;152;p10">
-            <a:extLst>
-              <a:ext uri="{FF2B5EF4-FFF2-40B4-BE49-F238E27FC236}">
-                <a16:creationId xmlns:a16="http://schemas.microsoft.com/office/drawing/2014/main" id="{7298AECE-18CE-6DBB-C40A-B5B8CDBA33E6}"/>
-              </a:ext>
-            </a:extLst>
-          </p:cNvPr>
-          <p:cNvSpPr txBox="1"/>
-          <p:nvPr/>
-        </p:nvSpPr>
-        <p:spPr>
-          <a:xfrm>
-            <a:off x="2290822" y="2326101"/>
-            <a:ext cx="3893100" cy="631425"/>
-          </a:xfrm>
-          <a:prstGeom prst="rect">
-            <a:avLst/>
-          </a:prstGeom>
-          <a:noFill/>
-          <a:ln>
-            <a:noFill/>
-          </a:ln>
-        </p:spPr>
-        <p:txBody>
-          <a:bodyPr spcFirstLastPara="1" wrap="square" lIns="91425" tIns="91425" rIns="91425" bIns="91425" anchor="t" anchorCtr="0">
-            <a:spAutoFit/>
-          </a:bodyPr>
-          <a:lstStyle/>
-          <a:p>
-            <a:pPr marL="0" lvl="0" indent="0" algn="l" rtl="0">
-              <a:lnSpc>
-                <a:spcPct val="90000"/>
-              </a:lnSpc>
-              <a:spcBef>
-                <a:spcPts val="1000"/>
-              </a:spcBef>
-              <a:spcAft>
-                <a:spcPts val="0"/>
-              </a:spcAft>
-              <a:buNone/>
-            </a:pPr>
-            <a:r>
-              <a:rPr lang="ru-RU" sz="2300"/>
-              <a:t>Тростниково-зеленый</a:t>
-            </a:r>
-            <a:endParaRPr/>
-          </a:p>
-        </p:txBody>
-      </p:sp>
-      <p:sp>
-        <p:nvSpPr>
-          <p:cNvPr id="11" name="Google Shape;153;p10">
-            <a:extLst>
-              <a:ext uri="{FF2B5EF4-FFF2-40B4-BE49-F238E27FC236}">
-                <a16:creationId xmlns:a16="http://schemas.microsoft.com/office/drawing/2014/main" id="{C91832CE-B523-C572-E4E0-A729CA4CBFD1}"/>
-              </a:ext>
-            </a:extLst>
-          </p:cNvPr>
-          <p:cNvSpPr txBox="1"/>
-          <p:nvPr/>
-        </p:nvSpPr>
-        <p:spPr>
-          <a:xfrm>
-            <a:off x="2290822" y="3405114"/>
-            <a:ext cx="3000000" cy="631425"/>
-          </a:xfrm>
-          <a:prstGeom prst="rect">
-            <a:avLst/>
-          </a:prstGeom>
-          <a:noFill/>
-          <a:ln>
-            <a:noFill/>
-          </a:ln>
-        </p:spPr>
-        <p:txBody>
-          <a:bodyPr spcFirstLastPara="1" wrap="square" lIns="91425" tIns="91425" rIns="91425" bIns="91425" anchor="t" anchorCtr="0">
-            <a:spAutoFit/>
-          </a:bodyPr>
-          <a:lstStyle/>
-          <a:p>
-            <a:pPr marL="0" lvl="0" indent="0" algn="l" rtl="0">
-              <a:lnSpc>
-                <a:spcPct val="90000"/>
-              </a:lnSpc>
-              <a:spcBef>
-                <a:spcPts val="1000"/>
-              </a:spcBef>
-              <a:spcAft>
-                <a:spcPts val="0"/>
-              </a:spcAft>
-              <a:buNone/>
-            </a:pPr>
-            <a:r>
-              <a:rPr lang="ru-RU" sz="2300"/>
-              <a:t>Дымчато-белый </a:t>
-            </a:r>
-            <a:endParaRPr/>
-          </a:p>
-        </p:txBody>
-      </p:sp>
-      <p:sp>
-        <p:nvSpPr>
-          <p:cNvPr id="12" name="Google Shape;154;p10">
-            <a:extLst>
-              <a:ext uri="{FF2B5EF4-FFF2-40B4-BE49-F238E27FC236}">
-                <a16:creationId xmlns:a16="http://schemas.microsoft.com/office/drawing/2014/main" id="{BFAB5665-8454-45E5-0AC0-AB0F00B148A9}"/>
-              </a:ext>
-            </a:extLst>
-          </p:cNvPr>
-          <p:cNvSpPr txBox="1"/>
-          <p:nvPr/>
-        </p:nvSpPr>
-        <p:spPr>
-          <a:xfrm>
-            <a:off x="2290822" y="2865039"/>
-            <a:ext cx="4367700" cy="631425"/>
-          </a:xfrm>
-          <a:prstGeom prst="rect">
-            <a:avLst/>
-          </a:prstGeom>
-          <a:noFill/>
-          <a:ln>
-            <a:noFill/>
-          </a:ln>
-        </p:spPr>
-        <p:txBody>
-          <a:bodyPr spcFirstLastPara="1" wrap="square" lIns="91425" tIns="91425" rIns="91425" bIns="91425" anchor="t" anchorCtr="0">
-            <a:spAutoFit/>
-          </a:bodyPr>
-          <a:lstStyle/>
-          <a:p>
-            <a:pPr marL="0" lvl="0" indent="0" algn="l" rtl="0">
-              <a:lnSpc>
-                <a:spcPct val="90000"/>
-              </a:lnSpc>
-              <a:spcBef>
-                <a:spcPts val="1000"/>
-              </a:spcBef>
-              <a:spcAft>
-                <a:spcPts val="0"/>
-              </a:spcAft>
-              <a:buNone/>
-            </a:pPr>
-            <a:r>
-              <a:rPr lang="ru-RU" sz="2300"/>
-              <a:t>Коричневый Крайола</a:t>
-            </a:r>
-            <a:endParaRPr/>
-          </a:p>
-        </p:txBody>
-      </p:sp>
-      <p:sp>
-        <p:nvSpPr>
-          <p:cNvPr id="13" name="Google Shape;155;p10">
-            <a:extLst>
-              <a:ext uri="{FF2B5EF4-FFF2-40B4-BE49-F238E27FC236}">
-                <a16:creationId xmlns:a16="http://schemas.microsoft.com/office/drawing/2014/main" id="{782355E7-514B-7C5D-C214-726D8461EFBB}"/>
-              </a:ext>
-            </a:extLst>
-          </p:cNvPr>
-          <p:cNvSpPr txBox="1"/>
-          <p:nvPr/>
-        </p:nvSpPr>
-        <p:spPr>
-          <a:xfrm>
-            <a:off x="2290822" y="3945189"/>
-            <a:ext cx="3000000" cy="631425"/>
-          </a:xfrm>
-          <a:prstGeom prst="rect">
-            <a:avLst/>
-          </a:prstGeom>
-          <a:noFill/>
-          <a:ln>
-            <a:noFill/>
-          </a:ln>
-        </p:spPr>
-        <p:txBody>
-          <a:bodyPr spcFirstLastPara="1" wrap="square" lIns="91425" tIns="91425" rIns="91425" bIns="91425" anchor="t" anchorCtr="0">
-            <a:spAutoFit/>
-          </a:bodyPr>
-          <a:lstStyle/>
-          <a:p>
-            <a:pPr marL="0" lvl="0" indent="0" algn="l" rtl="0">
-              <a:lnSpc>
-                <a:spcPct val="90000"/>
-              </a:lnSpc>
-              <a:spcBef>
-                <a:spcPts val="1000"/>
-              </a:spcBef>
-              <a:spcAft>
-                <a:spcPts val="0"/>
-              </a:spcAft>
-              <a:buNone/>
-            </a:pPr>
-            <a:r>
-              <a:rPr lang="ru-RU" sz="2300"/>
-              <a:t>Белый </a:t>
-            </a:r>
-            <a:endParaRPr/>
-          </a:p>
-        </p:txBody>
-      </p:sp>
-      <p:pic>
-        <p:nvPicPr>
-          <p:cNvPr id="14" name="Google Shape;156;p10">
-            <a:extLst>
-              <a:ext uri="{FF2B5EF4-FFF2-40B4-BE49-F238E27FC236}">
-                <a16:creationId xmlns:a16="http://schemas.microsoft.com/office/drawing/2014/main" id="{65CC09BE-340C-68EB-5561-B108653E24B0}"/>
-              </a:ext>
-            </a:extLst>
-          </p:cNvPr>
-          <p:cNvPicPr preferRelativeResize="0"/>
-          <p:nvPr/>
-        </p:nvPicPr>
-        <p:blipFill rotWithShape="1">
-          <a:blip r:embed="rId2">
-            <a:alphaModFix/>
-          </a:blip>
-          <a:srcRect l="1620" t="-1100" r="-1620" b="1100"/>
-          <a:stretch/>
-        </p:blipFill>
-        <p:spPr>
-          <a:xfrm>
-            <a:off x="6449875" y="416403"/>
-            <a:ext cx="2590800" cy="5690146"/>
-          </a:xfrm>
-          <a:prstGeom prst="rect">
-            <a:avLst/>
-          </a:prstGeom>
-          <a:noFill/>
-          <a:ln>
-            <a:noFill/>
-          </a:ln>
-        </p:spPr>
       </p:pic>
     </p:spTree>
     <p:extLst>
       <p:ext uri="{BB962C8B-B14F-4D97-AF65-F5344CB8AC3E}">
-        <p14:creationId xmlns:p14="http://schemas.microsoft.com/office/powerpoint/2010/main" val="2426244533"/>
+        <p14:creationId xmlns:p14="http://schemas.microsoft.com/office/powerpoint/2010/main" val="1493152506"/>
       </p:ext>
     </p:extLst>
   </p:cSld>
@@ -8175,10 +7737,10 @@
       </p:grpSpPr>
       <p:sp>
         <p:nvSpPr>
-          <p:cNvPr id="3" name="Google Shape;162;p11">
-            <a:extLst>
-              <a:ext uri="{FF2B5EF4-FFF2-40B4-BE49-F238E27FC236}">
-                <a16:creationId xmlns:a16="http://schemas.microsoft.com/office/drawing/2014/main" id="{9614D6CE-1EB8-4B83-B510-E291395A9325}"/>
+          <p:cNvPr id="3" name="Google Shape;145;p10">
+            <a:extLst>
+              <a:ext uri="{FF2B5EF4-FFF2-40B4-BE49-F238E27FC236}">
+                <a16:creationId xmlns:a16="http://schemas.microsoft.com/office/drawing/2014/main" id="{82F71AFA-CC28-36CE-4B15-B302E582B9AC}"/>
               </a:ext>
             </a:extLst>
           </p:cNvPr>
@@ -8191,8 +7753,8 @@
         </p:nvSpPr>
         <p:spPr>
           <a:xfrm>
-            <a:off x="8610600" y="6278880"/>
-            <a:ext cx="3286760" cy="442595"/>
+            <a:off x="8610600" y="6356350"/>
+            <a:ext cx="2743200" cy="365125"/>
           </a:xfrm>
           <a:prstGeom prst="rect">
             <a:avLst/>
@@ -8225,7 +7787,7 @@
               </a:rPr>
               <a:t>8</a:t>
             </a:fld>
-            <a:endParaRPr dirty="0">
+            <a:endParaRPr>
               <a:solidFill>
                 <a:schemeClr val="tx1"/>
               </a:solidFill>
@@ -8235,10 +7797,10 @@
       </p:sp>
       <p:sp>
         <p:nvSpPr>
-          <p:cNvPr id="4" name="Google Shape;163;p11">
-            <a:extLst>
-              <a:ext uri="{FF2B5EF4-FFF2-40B4-BE49-F238E27FC236}">
-                <a16:creationId xmlns:a16="http://schemas.microsoft.com/office/drawing/2014/main" id="{5BFD0370-4ED5-C2DE-6835-069590B1360D}"/>
+          <p:cNvPr id="4" name="Google Shape;146;p10">
+            <a:extLst>
+              <a:ext uri="{FF2B5EF4-FFF2-40B4-BE49-F238E27FC236}">
+                <a16:creationId xmlns:a16="http://schemas.microsoft.com/office/drawing/2014/main" id="{FD09AF47-20FC-3E82-1015-BF644DE2A633}"/>
               </a:ext>
             </a:extLst>
           </p:cNvPr>
@@ -8249,7 +7811,7 @@
         </p:nvSpPr>
         <p:spPr>
           <a:xfrm>
-            <a:off x="1033072" y="365126"/>
+            <a:off x="838200" y="502515"/>
             <a:ext cx="8202474" cy="697717"/>
           </a:xfrm>
           <a:prstGeom prst="rect">
@@ -8300,17 +7862,531 @@
             </a:pPr>
             <a:r>
               <a:rPr lang="ru-RU"/>
-              <a:t>Экраны авторизации</a:t>
-            </a:r>
+              <a:t>Дизайн</a:t>
+            </a:r>
+          </a:p>
+        </p:txBody>
+      </p:sp>
+      <p:sp>
+        <p:nvSpPr>
+          <p:cNvPr id="5" name="Google Shape;147;p10">
+            <a:extLst>
+              <a:ext uri="{FF2B5EF4-FFF2-40B4-BE49-F238E27FC236}">
+                <a16:creationId xmlns:a16="http://schemas.microsoft.com/office/drawing/2014/main" id="{84A7DA9D-2B67-A39A-E682-DE8B928B1E6D}"/>
+              </a:ext>
+            </a:extLst>
+          </p:cNvPr>
+          <p:cNvSpPr/>
+          <p:nvPr/>
+        </p:nvSpPr>
+        <p:spPr>
+          <a:xfrm>
+            <a:off x="893167" y="2413714"/>
+            <a:ext cx="1239600" cy="325800"/>
+          </a:xfrm>
+          <a:prstGeom prst="roundRect">
+            <a:avLst>
+              <a:gd name="adj" fmla="val 16667"/>
+            </a:avLst>
+          </a:prstGeom>
+          <a:solidFill>
+            <a:srgbClr val="697256"/>
+          </a:solidFill>
+          <a:ln w="10775" cap="flat" cmpd="sng">
+            <a:solidFill>
+              <a:schemeClr val="dk1"/>
+            </a:solidFill>
+            <a:prstDash val="solid"/>
+            <a:round/>
+            <a:headEnd type="none" w="sm" len="sm"/>
+            <a:tailEnd type="none" w="sm" len="sm"/>
+          </a:ln>
+        </p:spPr>
+        <p:txBody>
+          <a:bodyPr spcFirstLastPara="1" wrap="square" lIns="91425" tIns="45700" rIns="91425" bIns="45700" anchor="ctr" anchorCtr="0">
+            <a:noAutofit/>
+          </a:bodyPr>
+          <a:lstStyle/>
+          <a:p>
+            <a:pPr marL="0" lvl="0" indent="0" algn="ctr" rtl="0">
+              <a:spcBef>
+                <a:spcPts val="0"/>
+              </a:spcBef>
+              <a:spcAft>
+                <a:spcPts val="0"/>
+              </a:spcAft>
+              <a:buClr>
+                <a:schemeClr val="dk1"/>
+              </a:buClr>
+              <a:buSzPts val="1100"/>
+              <a:buFont typeface="Arial"/>
+              <a:buNone/>
+            </a:pPr>
+            <a:r>
+              <a:rPr lang="ru-RU" sz="1600"/>
+              <a:t>#697255</a:t>
+            </a:r>
+            <a:endParaRPr sz="1600"/>
+          </a:p>
+        </p:txBody>
+      </p:sp>
+      <p:sp>
+        <p:nvSpPr>
+          <p:cNvPr id="6" name="Google Shape;148;p10">
+            <a:extLst>
+              <a:ext uri="{FF2B5EF4-FFF2-40B4-BE49-F238E27FC236}">
+                <a16:creationId xmlns:a16="http://schemas.microsoft.com/office/drawing/2014/main" id="{BCA500C1-0DB9-67D3-1352-AB1CCC84230B}"/>
+              </a:ext>
+            </a:extLst>
+          </p:cNvPr>
+          <p:cNvSpPr/>
+          <p:nvPr/>
+        </p:nvSpPr>
+        <p:spPr>
+          <a:xfrm>
+            <a:off x="893276" y="3497439"/>
+            <a:ext cx="1239600" cy="270900"/>
+          </a:xfrm>
+          <a:prstGeom prst="roundRect">
+            <a:avLst>
+              <a:gd name="adj" fmla="val 16667"/>
+            </a:avLst>
+          </a:prstGeom>
+          <a:solidFill>
+            <a:srgbClr val="EBEBEB"/>
+          </a:solidFill>
+          <a:ln w="10775" cap="flat" cmpd="sng">
+            <a:solidFill>
+              <a:schemeClr val="dk1"/>
+            </a:solidFill>
+            <a:prstDash val="solid"/>
+            <a:round/>
+            <a:headEnd type="none" w="sm" len="sm"/>
+            <a:tailEnd type="none" w="sm" len="sm"/>
+          </a:ln>
+        </p:spPr>
+        <p:txBody>
+          <a:bodyPr spcFirstLastPara="1" wrap="square" lIns="91425" tIns="45700" rIns="91425" bIns="45700" anchor="ctr" anchorCtr="0">
+            <a:noAutofit/>
+          </a:bodyPr>
+          <a:lstStyle/>
+          <a:p>
+            <a:pPr marL="0" lvl="0" indent="0" algn="ctr" rtl="0">
+              <a:spcBef>
+                <a:spcPts val="0"/>
+              </a:spcBef>
+              <a:spcAft>
+                <a:spcPts val="0"/>
+              </a:spcAft>
+              <a:buClr>
+                <a:schemeClr val="dk1"/>
+              </a:buClr>
+              <a:buSzPts val="1100"/>
+              <a:buFont typeface="Arial"/>
+              <a:buNone/>
+            </a:pPr>
+            <a:r>
+              <a:rPr lang="ru-RU" sz="1600"/>
+              <a:t>#F5F5F5</a:t>
+            </a:r>
+            <a:endParaRPr sz="1600"/>
+          </a:p>
+        </p:txBody>
+      </p:sp>
+      <p:sp>
+        <p:nvSpPr>
+          <p:cNvPr id="7" name="Google Shape;149;p10">
+            <a:extLst>
+              <a:ext uri="{FF2B5EF4-FFF2-40B4-BE49-F238E27FC236}">
+                <a16:creationId xmlns:a16="http://schemas.microsoft.com/office/drawing/2014/main" id="{EAC541E1-1FB3-5126-2054-FE62449A5AA3}"/>
+              </a:ext>
+            </a:extLst>
+          </p:cNvPr>
+          <p:cNvSpPr/>
+          <p:nvPr/>
+        </p:nvSpPr>
+        <p:spPr>
+          <a:xfrm>
+            <a:off x="893275" y="2953839"/>
+            <a:ext cx="1239600" cy="325800"/>
+          </a:xfrm>
+          <a:prstGeom prst="roundRect">
+            <a:avLst>
+              <a:gd name="adj" fmla="val 16667"/>
+            </a:avLst>
+          </a:prstGeom>
+          <a:solidFill>
+            <a:srgbClr val="B56D4B"/>
+          </a:solidFill>
+          <a:ln w="10775" cap="flat" cmpd="sng">
+            <a:solidFill>
+              <a:schemeClr val="dk1"/>
+            </a:solidFill>
+            <a:prstDash val="solid"/>
+            <a:round/>
+            <a:headEnd type="none" w="sm" len="sm"/>
+            <a:tailEnd type="none" w="sm" len="sm"/>
+          </a:ln>
+        </p:spPr>
+        <p:txBody>
+          <a:bodyPr spcFirstLastPara="1" wrap="square" lIns="91425" tIns="45700" rIns="91425" bIns="45700" anchor="ctr" anchorCtr="0">
+            <a:noAutofit/>
+          </a:bodyPr>
+          <a:lstStyle/>
+          <a:p>
+            <a:pPr marL="0" lvl="0" indent="0" algn="ctr" rtl="0">
+              <a:spcBef>
+                <a:spcPts val="0"/>
+              </a:spcBef>
+              <a:spcAft>
+                <a:spcPts val="0"/>
+              </a:spcAft>
+              <a:buClr>
+                <a:schemeClr val="dk1"/>
+              </a:buClr>
+              <a:buSzPts val="1100"/>
+              <a:buFont typeface="Arial"/>
+              <a:buNone/>
+            </a:pPr>
+            <a:r>
+              <a:rPr lang="ru-RU" sz="1600"/>
+              <a:t>#B66D4C</a:t>
+            </a:r>
+            <a:endParaRPr sz="1600"/>
+          </a:p>
+        </p:txBody>
+      </p:sp>
+      <p:sp>
+        <p:nvSpPr>
+          <p:cNvPr id="8" name="Google Shape;150;p10">
+            <a:extLst>
+              <a:ext uri="{FF2B5EF4-FFF2-40B4-BE49-F238E27FC236}">
+                <a16:creationId xmlns:a16="http://schemas.microsoft.com/office/drawing/2014/main" id="{815A3166-37F6-5CE3-BA70-3C2658EC120D}"/>
+              </a:ext>
+            </a:extLst>
+          </p:cNvPr>
+          <p:cNvSpPr txBox="1"/>
+          <p:nvPr/>
+        </p:nvSpPr>
+        <p:spPr>
+          <a:xfrm>
+            <a:off x="838200" y="1493129"/>
+            <a:ext cx="6096000" cy="446400"/>
+          </a:xfrm>
+          <a:prstGeom prst="rect">
+            <a:avLst/>
+          </a:prstGeom>
+          <a:noFill/>
+          <a:ln>
+            <a:noFill/>
+          </a:ln>
+        </p:spPr>
+        <p:txBody>
+          <a:bodyPr spcFirstLastPara="1" wrap="square" lIns="91425" tIns="45700" rIns="91425" bIns="45700" anchor="t" anchorCtr="0">
+            <a:spAutoFit/>
+          </a:bodyPr>
+          <a:lstStyle/>
+          <a:p>
+            <a:pPr marL="0" marR="0" lvl="0" indent="0" algn="l" rtl="0">
+              <a:spcBef>
+                <a:spcPts val="0"/>
+              </a:spcBef>
+              <a:spcAft>
+                <a:spcPts val="0"/>
+              </a:spcAft>
+              <a:buClr>
+                <a:srgbClr val="00497A"/>
+              </a:buClr>
+              <a:buSzPts val="2300"/>
+              <a:buFont typeface="Arial"/>
+              <a:buNone/>
+            </a:pPr>
+            <a:r>
+              <a:rPr lang="ru-RU" sz="2300">
+                <a:latin typeface="Arial"/>
+                <a:ea typeface="Arial"/>
+                <a:cs typeface="Arial"/>
+                <a:sym typeface="Arial"/>
+              </a:rPr>
+              <a:t>Цветовая палитра:</a:t>
+            </a:r>
+            <a:endParaRPr/>
+          </a:p>
+        </p:txBody>
+      </p:sp>
+      <p:sp>
+        <p:nvSpPr>
+          <p:cNvPr id="9" name="Google Shape;151;p10">
+            <a:extLst>
+              <a:ext uri="{FF2B5EF4-FFF2-40B4-BE49-F238E27FC236}">
+                <a16:creationId xmlns:a16="http://schemas.microsoft.com/office/drawing/2014/main" id="{8FF6DC7D-DCF1-1372-BF52-436882392D41}"/>
+              </a:ext>
+            </a:extLst>
+          </p:cNvPr>
+          <p:cNvSpPr/>
+          <p:nvPr/>
+        </p:nvSpPr>
+        <p:spPr>
+          <a:xfrm>
+            <a:off x="893167" y="4098001"/>
+            <a:ext cx="1239600" cy="325800"/>
+          </a:xfrm>
+          <a:prstGeom prst="roundRect">
+            <a:avLst>
+              <a:gd name="adj" fmla="val 16667"/>
+            </a:avLst>
+          </a:prstGeom>
+          <a:solidFill>
+            <a:schemeClr val="lt1"/>
+          </a:solidFill>
+          <a:ln w="10775" cap="flat" cmpd="sng">
+            <a:solidFill>
+              <a:schemeClr val="dk1"/>
+            </a:solidFill>
+            <a:prstDash val="solid"/>
+            <a:round/>
+            <a:headEnd type="none" w="sm" len="sm"/>
+            <a:tailEnd type="none" w="sm" len="sm"/>
+          </a:ln>
+        </p:spPr>
+        <p:txBody>
+          <a:bodyPr spcFirstLastPara="1" wrap="square" lIns="91425" tIns="45700" rIns="91425" bIns="45700" anchor="ctr" anchorCtr="0">
+            <a:noAutofit/>
+          </a:bodyPr>
+          <a:lstStyle/>
+          <a:p>
+            <a:pPr marL="0" lvl="0" indent="0" algn="ctr" rtl="0">
+              <a:spcBef>
+                <a:spcPts val="0"/>
+              </a:spcBef>
+              <a:spcAft>
+                <a:spcPts val="0"/>
+              </a:spcAft>
+              <a:buClr>
+                <a:schemeClr val="dk1"/>
+              </a:buClr>
+              <a:buSzPts val="1100"/>
+              <a:buFont typeface="Arial"/>
+              <a:buNone/>
+            </a:pPr>
+            <a:r>
+              <a:rPr lang="ru-RU" sz="1600" dirty="0"/>
+              <a:t>#FFFFFFF</a:t>
+            </a:r>
+            <a:endParaRPr sz="1600" dirty="0"/>
+          </a:p>
+        </p:txBody>
+      </p:sp>
+      <p:sp>
+        <p:nvSpPr>
+          <p:cNvPr id="10" name="Google Shape;152;p10">
+            <a:extLst>
+              <a:ext uri="{FF2B5EF4-FFF2-40B4-BE49-F238E27FC236}">
+                <a16:creationId xmlns:a16="http://schemas.microsoft.com/office/drawing/2014/main" id="{7298AECE-18CE-6DBB-C40A-B5B8CDBA33E6}"/>
+              </a:ext>
+            </a:extLst>
+          </p:cNvPr>
+          <p:cNvSpPr txBox="1"/>
+          <p:nvPr/>
+        </p:nvSpPr>
+        <p:spPr>
+          <a:xfrm>
+            <a:off x="2290822" y="2326101"/>
+            <a:ext cx="3893100" cy="631425"/>
+          </a:xfrm>
+          <a:prstGeom prst="rect">
+            <a:avLst/>
+          </a:prstGeom>
+          <a:noFill/>
+          <a:ln>
+            <a:noFill/>
+          </a:ln>
+        </p:spPr>
+        <p:txBody>
+          <a:bodyPr spcFirstLastPara="1" wrap="square" lIns="91425" tIns="91425" rIns="91425" bIns="91425" anchor="t" anchorCtr="0">
+            <a:spAutoFit/>
+          </a:bodyPr>
+          <a:lstStyle/>
+          <a:p>
+            <a:pPr marL="0" lvl="0" indent="0" algn="l" rtl="0">
+              <a:lnSpc>
+                <a:spcPct val="90000"/>
+              </a:lnSpc>
+              <a:spcBef>
+                <a:spcPts val="1000"/>
+              </a:spcBef>
+              <a:spcAft>
+                <a:spcPts val="0"/>
+              </a:spcAft>
+              <a:buNone/>
+            </a:pPr>
+            <a:r>
+              <a:rPr lang="ru-RU" sz="2300"/>
+              <a:t>Тростниково-зеленый</a:t>
+            </a:r>
+            <a:endParaRPr/>
+          </a:p>
+        </p:txBody>
+      </p:sp>
+      <p:sp>
+        <p:nvSpPr>
+          <p:cNvPr id="11" name="Google Shape;153;p10">
+            <a:extLst>
+              <a:ext uri="{FF2B5EF4-FFF2-40B4-BE49-F238E27FC236}">
+                <a16:creationId xmlns:a16="http://schemas.microsoft.com/office/drawing/2014/main" id="{C91832CE-B523-C572-E4E0-A729CA4CBFD1}"/>
+              </a:ext>
+            </a:extLst>
+          </p:cNvPr>
+          <p:cNvSpPr txBox="1"/>
+          <p:nvPr/>
+        </p:nvSpPr>
+        <p:spPr>
+          <a:xfrm>
+            <a:off x="2290822" y="3405114"/>
+            <a:ext cx="3000000" cy="631425"/>
+          </a:xfrm>
+          <a:prstGeom prst="rect">
+            <a:avLst/>
+          </a:prstGeom>
+          <a:noFill/>
+          <a:ln>
+            <a:noFill/>
+          </a:ln>
+        </p:spPr>
+        <p:txBody>
+          <a:bodyPr spcFirstLastPara="1" wrap="square" lIns="91425" tIns="91425" rIns="91425" bIns="91425" anchor="t" anchorCtr="0">
+            <a:spAutoFit/>
+          </a:bodyPr>
+          <a:lstStyle/>
+          <a:p>
+            <a:pPr marL="0" lvl="0" indent="0" algn="l" rtl="0">
+              <a:lnSpc>
+                <a:spcPct val="90000"/>
+              </a:lnSpc>
+              <a:spcBef>
+                <a:spcPts val="1000"/>
+              </a:spcBef>
+              <a:spcAft>
+                <a:spcPts val="0"/>
+              </a:spcAft>
+              <a:buNone/>
+            </a:pPr>
+            <a:r>
+              <a:rPr lang="ru-RU" sz="2300"/>
+              <a:t>Дымчато-белый </a:t>
+            </a:r>
+            <a:endParaRPr/>
+          </a:p>
+        </p:txBody>
+      </p:sp>
+      <p:sp>
+        <p:nvSpPr>
+          <p:cNvPr id="12" name="Google Shape;154;p10">
+            <a:extLst>
+              <a:ext uri="{FF2B5EF4-FFF2-40B4-BE49-F238E27FC236}">
+                <a16:creationId xmlns:a16="http://schemas.microsoft.com/office/drawing/2014/main" id="{BFAB5665-8454-45E5-0AC0-AB0F00B148A9}"/>
+              </a:ext>
+            </a:extLst>
+          </p:cNvPr>
+          <p:cNvSpPr txBox="1"/>
+          <p:nvPr/>
+        </p:nvSpPr>
+        <p:spPr>
+          <a:xfrm>
+            <a:off x="2290822" y="2865039"/>
+            <a:ext cx="4367700" cy="631425"/>
+          </a:xfrm>
+          <a:prstGeom prst="rect">
+            <a:avLst/>
+          </a:prstGeom>
+          <a:noFill/>
+          <a:ln>
+            <a:noFill/>
+          </a:ln>
+        </p:spPr>
+        <p:txBody>
+          <a:bodyPr spcFirstLastPara="1" wrap="square" lIns="91425" tIns="91425" rIns="91425" bIns="91425" anchor="t" anchorCtr="0">
+            <a:spAutoFit/>
+          </a:bodyPr>
+          <a:lstStyle/>
+          <a:p>
+            <a:pPr marL="0" lvl="0" indent="0" algn="l" rtl="0">
+              <a:lnSpc>
+                <a:spcPct val="90000"/>
+              </a:lnSpc>
+              <a:spcBef>
+                <a:spcPts val="1000"/>
+              </a:spcBef>
+              <a:spcAft>
+                <a:spcPts val="0"/>
+              </a:spcAft>
+              <a:buNone/>
+            </a:pPr>
+            <a:r>
+              <a:rPr lang="ru-RU" sz="2300"/>
+              <a:t>Коричневый Крайола</a:t>
+            </a:r>
+            <a:endParaRPr/>
+          </a:p>
+        </p:txBody>
+      </p:sp>
+      <p:sp>
+        <p:nvSpPr>
+          <p:cNvPr id="13" name="Google Shape;155;p10">
+            <a:extLst>
+              <a:ext uri="{FF2B5EF4-FFF2-40B4-BE49-F238E27FC236}">
+                <a16:creationId xmlns:a16="http://schemas.microsoft.com/office/drawing/2014/main" id="{782355E7-514B-7C5D-C214-726D8461EFBB}"/>
+              </a:ext>
+            </a:extLst>
+          </p:cNvPr>
+          <p:cNvSpPr txBox="1"/>
+          <p:nvPr/>
+        </p:nvSpPr>
+        <p:spPr>
+          <a:xfrm>
+            <a:off x="2290822" y="3945189"/>
+            <a:ext cx="3000000" cy="631425"/>
+          </a:xfrm>
+          <a:prstGeom prst="rect">
+            <a:avLst/>
+          </a:prstGeom>
+          <a:noFill/>
+          <a:ln>
+            <a:noFill/>
+          </a:ln>
+        </p:spPr>
+        <p:txBody>
+          <a:bodyPr spcFirstLastPara="1" wrap="square" lIns="91425" tIns="91425" rIns="91425" bIns="91425" anchor="t" anchorCtr="0">
+            <a:spAutoFit/>
+          </a:bodyPr>
+          <a:lstStyle/>
+          <a:p>
+            <a:pPr marL="0" lvl="0" indent="0" algn="l" rtl="0">
+              <a:lnSpc>
+                <a:spcPct val="90000"/>
+              </a:lnSpc>
+              <a:spcBef>
+                <a:spcPts val="1000"/>
+              </a:spcBef>
+              <a:spcAft>
+                <a:spcPts val="0"/>
+              </a:spcAft>
+              <a:buNone/>
+            </a:pPr>
+            <a:r>
+              <a:rPr lang="ru-RU" sz="2300"/>
+              <a:t>Белый </a:t>
+            </a:r>
+            <a:endParaRPr/>
           </a:p>
         </p:txBody>
       </p:sp>
       <p:pic>
         <p:nvPicPr>
-          <p:cNvPr id="5" name="Google Shape;164;p11" title="l2MCp2JhVvhszM5LwhwN3o6XAui8cZw858wRYOkHY_HYoYyF0tysI2LRUnyuCdDymwdzg-8Hp-oZl7sjSilGOGIq.jpg">
-            <a:extLst>
-              <a:ext uri="{FF2B5EF4-FFF2-40B4-BE49-F238E27FC236}">
-                <a16:creationId xmlns:a16="http://schemas.microsoft.com/office/drawing/2014/main" id="{B356890B-80EB-4B62-EE39-19A16F5D2D3B}"/>
+          <p:cNvPr id="14" name="Google Shape;156;p10">
+            <a:extLst>
+              <a:ext uri="{FF2B5EF4-FFF2-40B4-BE49-F238E27FC236}">
+                <a16:creationId xmlns:a16="http://schemas.microsoft.com/office/drawing/2014/main" id="{65CC09BE-340C-68EB-5561-B108653E24B0}"/>
               </a:ext>
             </a:extLst>
           </p:cNvPr>
@@ -8321,13 +8397,13 @@
           <a:blip r:embed="rId2">
             <a:alphaModFix/>
           </a:blip>
-          <a:srcRect t="30" b="20"/>
+          <a:srcRect l="1620" t="-1100" r="-1620" b="1100"/>
           <a:stretch/>
         </p:blipFill>
         <p:spPr>
           <a:xfrm>
-            <a:off x="4981829" y="1062843"/>
-            <a:ext cx="2228342" cy="4894095"/>
+            <a:off x="6449875" y="416403"/>
+            <a:ext cx="2590800" cy="5690146"/>
           </a:xfrm>
           <a:prstGeom prst="rect">
             <a:avLst/>
@@ -8338,76 +8414,10 @@
           </a:ln>
         </p:spPr>
       </p:pic>
-      <p:pic>
-        <p:nvPicPr>
-          <p:cNvPr id="6" name="Google Shape;165;p11" title="ft4W1qRF7HRIZPJrHq9lrFCG3cG0L90NePlYK3ZMJJTzD3t8PlxbUOgrgB-vOpVvYWlqeIX7K2-nMIv-msGfJ1YO.jpg">
-            <a:extLst>
-              <a:ext uri="{FF2B5EF4-FFF2-40B4-BE49-F238E27FC236}">
-                <a16:creationId xmlns:a16="http://schemas.microsoft.com/office/drawing/2014/main" id="{B939ABB5-B914-7334-4C47-E49C85EDA0F5}"/>
-              </a:ext>
-            </a:extLst>
-          </p:cNvPr>
-          <p:cNvPicPr preferRelativeResize="0"/>
-          <p:nvPr/>
-        </p:nvPicPr>
-        <p:blipFill rotWithShape="1">
-          <a:blip r:embed="rId3">
-            <a:alphaModFix/>
-          </a:blip>
-          <a:srcRect t="30" b="20"/>
-          <a:stretch/>
-        </p:blipFill>
-        <p:spPr>
-          <a:xfrm>
-            <a:off x="1631302" y="1074028"/>
-            <a:ext cx="2228342" cy="4894095"/>
-          </a:xfrm>
-          <a:prstGeom prst="rect">
-            <a:avLst/>
-          </a:prstGeom>
-          <a:noFill/>
-          <a:ln>
-            <a:noFill/>
-          </a:ln>
-        </p:spPr>
-      </p:pic>
-      <p:pic>
-        <p:nvPicPr>
-          <p:cNvPr id="7" name="Google Shape;166;p11" title="yP9sdhc4IzRUHMlvIQWs7uKd7ElFp48hIJXPpyT6Q6P3Biox-amv7FD3KNGLBtdp5850liRymQJHEw6roo6nx7Zk.jpg">
-            <a:extLst>
-              <a:ext uri="{FF2B5EF4-FFF2-40B4-BE49-F238E27FC236}">
-                <a16:creationId xmlns:a16="http://schemas.microsoft.com/office/drawing/2014/main" id="{CEF5D5AA-E4E4-1AD0-B343-6965AF18909C}"/>
-              </a:ext>
-            </a:extLst>
-          </p:cNvPr>
-          <p:cNvPicPr preferRelativeResize="0"/>
-          <p:nvPr/>
-        </p:nvPicPr>
-        <p:blipFill rotWithShape="1">
-          <a:blip r:embed="rId4">
-            <a:alphaModFix/>
-          </a:blip>
-          <a:srcRect t="30" b="20"/>
-          <a:stretch/>
-        </p:blipFill>
-        <p:spPr>
-          <a:xfrm>
-            <a:off x="8330801" y="1074028"/>
-            <a:ext cx="2228342" cy="4894100"/>
-          </a:xfrm>
-          <a:prstGeom prst="rect">
-            <a:avLst/>
-          </a:prstGeom>
-          <a:noFill/>
-          <a:ln>
-            <a:noFill/>
-          </a:ln>
-        </p:spPr>
-      </p:pic>
     </p:spTree>
     <p:extLst>
       <p:ext uri="{BB962C8B-B14F-4D97-AF65-F5344CB8AC3E}">
-        <p14:creationId xmlns:p14="http://schemas.microsoft.com/office/powerpoint/2010/main" val="383897743"/>
+        <p14:creationId xmlns:p14="http://schemas.microsoft.com/office/powerpoint/2010/main" val="2426244533"/>
       </p:ext>
     </p:extLst>
   </p:cSld>
@@ -8436,10 +8446,10 @@
       </p:grpSpPr>
       <p:sp>
         <p:nvSpPr>
-          <p:cNvPr id="3" name="Google Shape;172;p12">
-            <a:extLst>
-              <a:ext uri="{FF2B5EF4-FFF2-40B4-BE49-F238E27FC236}">
-                <a16:creationId xmlns:a16="http://schemas.microsoft.com/office/drawing/2014/main" id="{66581FA5-FBC4-7261-DDCD-22E60DECE331}"/>
+          <p:cNvPr id="3" name="Google Shape;162;p11">
+            <a:extLst>
+              <a:ext uri="{FF2B5EF4-FFF2-40B4-BE49-F238E27FC236}">
+                <a16:creationId xmlns:a16="http://schemas.microsoft.com/office/drawing/2014/main" id="{9614D6CE-1EB8-4B83-B510-E291395A9325}"/>
               </a:ext>
             </a:extLst>
           </p:cNvPr>
@@ -8452,8 +8462,8 @@
         </p:nvSpPr>
         <p:spPr>
           <a:xfrm>
-            <a:off x="8610600" y="6356350"/>
-            <a:ext cx="2743200" cy="365125"/>
+            <a:off x="8088205" y="6271576"/>
+            <a:ext cx="3286760" cy="442595"/>
           </a:xfrm>
           <a:prstGeom prst="rect">
             <a:avLst/>
@@ -8486,7 +8496,7 @@
               </a:rPr>
               <a:t>9</a:t>
             </a:fld>
-            <a:endParaRPr>
+            <a:endParaRPr dirty="0">
               <a:solidFill>
                 <a:schemeClr val="tx1"/>
               </a:solidFill>
@@ -8496,10 +8506,10 @@
       </p:sp>
       <p:sp>
         <p:nvSpPr>
-          <p:cNvPr id="4" name="Google Shape;173;p12">
-            <a:extLst>
-              <a:ext uri="{FF2B5EF4-FFF2-40B4-BE49-F238E27FC236}">
-                <a16:creationId xmlns:a16="http://schemas.microsoft.com/office/drawing/2014/main" id="{F1D3D133-B7E7-1344-25DB-1B80C37CA510}"/>
+          <p:cNvPr id="4" name="Google Shape;163;p11">
+            <a:extLst>
+              <a:ext uri="{FF2B5EF4-FFF2-40B4-BE49-F238E27FC236}">
+                <a16:creationId xmlns:a16="http://schemas.microsoft.com/office/drawing/2014/main" id="{5BFD0370-4ED5-C2DE-6835-069590B1360D}"/>
               </a:ext>
             </a:extLst>
           </p:cNvPr>
@@ -8561,35 +8571,34 @@
             </a:pPr>
             <a:r>
               <a:rPr lang="ru-RU"/>
-              <a:t>Основные экраны</a:t>
+              <a:t>Экраны авторизации</a:t>
             </a:r>
           </a:p>
         </p:txBody>
       </p:sp>
       <p:pic>
         <p:nvPicPr>
-          <p:cNvPr id="5" name="Google Shape;174;p12">
-            <a:extLst>
-              <a:ext uri="{FF2B5EF4-FFF2-40B4-BE49-F238E27FC236}">
-                <a16:creationId xmlns:a16="http://schemas.microsoft.com/office/drawing/2014/main" id="{072A6B84-E6E2-65AA-BD4B-8C5AF8213191}"/>
+          <p:cNvPr id="5" name="Google Shape;164;p11" title="l2MCp2JhVvhszM5LwhwN3o6XAui8cZw858wRYOkHY_HYoYyF0tysI2LRUnyuCdDymwdzg-8Hp-oZl7sjSilGOGIq.jpg">
+            <a:extLst>
+              <a:ext uri="{FF2B5EF4-FFF2-40B4-BE49-F238E27FC236}">
+                <a16:creationId xmlns:a16="http://schemas.microsoft.com/office/drawing/2014/main" id="{B356890B-80EB-4B62-EE39-19A16F5D2D3B}"/>
               </a:ext>
             </a:extLst>
           </p:cNvPr>
           <p:cNvPicPr preferRelativeResize="0"/>
           <p:nvPr/>
         </p:nvPicPr>
-        <p:blipFill>
+        <p:blipFill rotWithShape="1">
           <a:blip r:embed="rId2">
             <a:alphaModFix/>
           </a:blip>
-          <a:stretch>
-            <a:fillRect/>
-          </a:stretch>
+          <a:srcRect t="30" b="20"/>
+          <a:stretch/>
         </p:blipFill>
         <p:spPr>
           <a:xfrm>
-            <a:off x="675922" y="1074028"/>
-            <a:ext cx="2228350" cy="4894085"/>
+            <a:off x="4981829" y="1062843"/>
+            <a:ext cx="2228342" cy="4894095"/>
           </a:xfrm>
           <a:prstGeom prst="rect">
             <a:avLst/>
@@ -8602,28 +8611,27 @@
       </p:pic>
       <p:pic>
         <p:nvPicPr>
-          <p:cNvPr id="6" name="Google Shape;175;p12">
-            <a:extLst>
-              <a:ext uri="{FF2B5EF4-FFF2-40B4-BE49-F238E27FC236}">
-                <a16:creationId xmlns:a16="http://schemas.microsoft.com/office/drawing/2014/main" id="{21C9AB45-6B29-EE2C-2521-D95B0CD50314}"/>
+          <p:cNvPr id="6" name="Google Shape;165;p11" title="ft4W1qRF7HRIZPJrHq9lrFCG3cG0L90NePlYK3ZMJJTzD3t8PlxbUOgrgB-vOpVvYWlqeIX7K2-nMIv-msGfJ1YO.jpg">
+            <a:extLst>
+              <a:ext uri="{FF2B5EF4-FFF2-40B4-BE49-F238E27FC236}">
+                <a16:creationId xmlns:a16="http://schemas.microsoft.com/office/drawing/2014/main" id="{B939ABB5-B914-7334-4C47-E49C85EDA0F5}"/>
               </a:ext>
             </a:extLst>
           </p:cNvPr>
           <p:cNvPicPr preferRelativeResize="0"/>
           <p:nvPr/>
         </p:nvPicPr>
-        <p:blipFill>
+        <p:blipFill rotWithShape="1">
           <a:blip r:embed="rId3">
             <a:alphaModFix/>
           </a:blip>
-          <a:stretch>
-            <a:fillRect/>
-          </a:stretch>
+          <a:srcRect t="30" b="20"/>
+          <a:stretch/>
         </p:blipFill>
         <p:spPr>
           <a:xfrm>
-            <a:off x="6382263" y="1074066"/>
-            <a:ext cx="2228325" cy="4894020"/>
+            <a:off x="1631302" y="1074028"/>
+            <a:ext cx="2228342" cy="4894095"/>
           </a:xfrm>
           <a:prstGeom prst="rect">
             <a:avLst/>
@@ -8636,28 +8644,27 @@
       </p:pic>
       <p:pic>
         <p:nvPicPr>
-          <p:cNvPr id="7" name="Google Shape;176;p12">
-            <a:extLst>
-              <a:ext uri="{FF2B5EF4-FFF2-40B4-BE49-F238E27FC236}">
-                <a16:creationId xmlns:a16="http://schemas.microsoft.com/office/drawing/2014/main" id="{B073929A-11CC-6D1F-1168-32C361AF6DCF}"/>
+          <p:cNvPr id="7" name="Google Shape;166;p11" title="yP9sdhc4IzRUHMlvIQWs7uKd7ElFp48hIJXPpyT6Q6P3Biox-amv7FD3KNGLBtdp5850liRymQJHEw6roo6nx7Zk.jpg">
+            <a:extLst>
+              <a:ext uri="{FF2B5EF4-FFF2-40B4-BE49-F238E27FC236}">
+                <a16:creationId xmlns:a16="http://schemas.microsoft.com/office/drawing/2014/main" id="{CEF5D5AA-E4E4-1AD0-B343-6965AF18909C}"/>
               </a:ext>
             </a:extLst>
           </p:cNvPr>
           <p:cNvPicPr preferRelativeResize="0"/>
           <p:nvPr/>
         </p:nvPicPr>
-        <p:blipFill>
+        <p:blipFill rotWithShape="1">
           <a:blip r:embed="rId4">
             <a:alphaModFix/>
           </a:blip>
-          <a:stretch>
-            <a:fillRect/>
-          </a:stretch>
+          <a:srcRect t="30" b="20"/>
+          <a:stretch/>
         </p:blipFill>
         <p:spPr>
           <a:xfrm>
-            <a:off x="9125447" y="1074028"/>
-            <a:ext cx="2228351" cy="4894085"/>
+            <a:off x="8330801" y="1074028"/>
+            <a:ext cx="2228342" cy="4894100"/>
           </a:xfrm>
           <a:prstGeom prst="rect">
             <a:avLst/>
@@ -8668,44 +8675,10 @@
           </a:ln>
         </p:spPr>
       </p:pic>
-      <p:pic>
-        <p:nvPicPr>
-          <p:cNvPr id="8" name="Google Shape;177;p12">
-            <a:extLst>
-              <a:ext uri="{FF2B5EF4-FFF2-40B4-BE49-F238E27FC236}">
-                <a16:creationId xmlns:a16="http://schemas.microsoft.com/office/drawing/2014/main" id="{1914963E-834B-0398-F23E-D74E38A8B1C5}"/>
-              </a:ext>
-            </a:extLst>
-          </p:cNvPr>
-          <p:cNvPicPr preferRelativeResize="0"/>
-          <p:nvPr/>
-        </p:nvPicPr>
-        <p:blipFill>
-          <a:blip r:embed="rId5">
-            <a:alphaModFix/>
-          </a:blip>
-          <a:stretch>
-            <a:fillRect/>
-          </a:stretch>
-        </p:blipFill>
-        <p:spPr>
-          <a:xfrm>
-            <a:off x="3581397" y="1074070"/>
-            <a:ext cx="2228325" cy="4894029"/>
-          </a:xfrm>
-          <a:prstGeom prst="rect">
-            <a:avLst/>
-          </a:prstGeom>
-          <a:noFill/>
-          <a:ln>
-            <a:noFill/>
-          </a:ln>
-        </p:spPr>
-      </p:pic>
     </p:spTree>
     <p:extLst>
       <p:ext uri="{BB962C8B-B14F-4D97-AF65-F5344CB8AC3E}">
-        <p14:creationId xmlns:p14="http://schemas.microsoft.com/office/powerpoint/2010/main" val="2440161351"/>
+        <p14:creationId xmlns:p14="http://schemas.microsoft.com/office/powerpoint/2010/main" val="383897743"/>
       </p:ext>
     </p:extLst>
   </p:cSld>

--- a/documentation/презентация_PetDiary.pptx
+++ b/documentation/презентация_PetDiary.pptx
@@ -270,7 +270,7 @@
           <a:p>
             <a:fld id="{E6390BFC-4C86-4A7E-9030-5F942040A976}" type="datetimeFigureOut">
               <a:rPr lang="ru-RU" smtClean="0"/>
-              <a:t>06.06.2026</a:t>
+              <a:t>08.06.2026</a:t>
             </a:fld>
             <a:endParaRPr lang="ru-RU"/>
           </a:p>
@@ -468,7 +468,7 @@
           <a:p>
             <a:fld id="{E6390BFC-4C86-4A7E-9030-5F942040A976}" type="datetimeFigureOut">
               <a:rPr lang="ru-RU" smtClean="0"/>
-              <a:t>06.06.2026</a:t>
+              <a:t>08.06.2026</a:t>
             </a:fld>
             <a:endParaRPr lang="ru-RU"/>
           </a:p>
@@ -676,7 +676,7 @@
           <a:p>
             <a:fld id="{E6390BFC-4C86-4A7E-9030-5F942040A976}" type="datetimeFigureOut">
               <a:rPr lang="ru-RU" smtClean="0"/>
-              <a:t>06.06.2026</a:t>
+              <a:t>08.06.2026</a:t>
             </a:fld>
             <a:endParaRPr lang="ru-RU"/>
           </a:p>
@@ -874,7 +874,7 @@
           <a:p>
             <a:fld id="{E6390BFC-4C86-4A7E-9030-5F942040A976}" type="datetimeFigureOut">
               <a:rPr lang="ru-RU" smtClean="0"/>
-              <a:t>06.06.2026</a:t>
+              <a:t>08.06.2026</a:t>
             </a:fld>
             <a:endParaRPr lang="ru-RU"/>
           </a:p>
@@ -1149,7 +1149,7 @@
           <a:p>
             <a:fld id="{E6390BFC-4C86-4A7E-9030-5F942040A976}" type="datetimeFigureOut">
               <a:rPr lang="ru-RU" smtClean="0"/>
-              <a:t>06.06.2026</a:t>
+              <a:t>08.06.2026</a:t>
             </a:fld>
             <a:endParaRPr lang="ru-RU"/>
           </a:p>
@@ -1414,7 +1414,7 @@
           <a:p>
             <a:fld id="{E6390BFC-4C86-4A7E-9030-5F942040A976}" type="datetimeFigureOut">
               <a:rPr lang="ru-RU" smtClean="0"/>
-              <a:t>06.06.2026</a:t>
+              <a:t>08.06.2026</a:t>
             </a:fld>
             <a:endParaRPr lang="ru-RU"/>
           </a:p>
@@ -1826,7 +1826,7 @@
           <a:p>
             <a:fld id="{E6390BFC-4C86-4A7E-9030-5F942040A976}" type="datetimeFigureOut">
               <a:rPr lang="ru-RU" smtClean="0"/>
-              <a:t>06.06.2026</a:t>
+              <a:t>08.06.2026</a:t>
             </a:fld>
             <a:endParaRPr lang="ru-RU"/>
           </a:p>
@@ -1967,7 +1967,7 @@
           <a:p>
             <a:fld id="{E6390BFC-4C86-4A7E-9030-5F942040A976}" type="datetimeFigureOut">
               <a:rPr lang="ru-RU" smtClean="0"/>
-              <a:t>06.06.2026</a:t>
+              <a:t>08.06.2026</a:t>
             </a:fld>
             <a:endParaRPr lang="ru-RU"/>
           </a:p>
@@ -2080,7 +2080,7 @@
           <a:p>
             <a:fld id="{E6390BFC-4C86-4A7E-9030-5F942040A976}" type="datetimeFigureOut">
               <a:rPr lang="ru-RU" smtClean="0"/>
-              <a:t>06.06.2026</a:t>
+              <a:t>08.06.2026</a:t>
             </a:fld>
             <a:endParaRPr lang="ru-RU"/>
           </a:p>
@@ -2391,7 +2391,7 @@
           <a:p>
             <a:fld id="{E6390BFC-4C86-4A7E-9030-5F942040A976}" type="datetimeFigureOut">
               <a:rPr lang="ru-RU" smtClean="0"/>
-              <a:t>06.06.2026</a:t>
+              <a:t>08.06.2026</a:t>
             </a:fld>
             <a:endParaRPr lang="ru-RU"/>
           </a:p>
@@ -2679,7 +2679,7 @@
           <a:p>
             <a:fld id="{E6390BFC-4C86-4A7E-9030-5F942040A976}" type="datetimeFigureOut">
               <a:rPr lang="ru-RU" smtClean="0"/>
-              <a:t>06.06.2026</a:t>
+              <a:t>08.06.2026</a:t>
             </a:fld>
             <a:endParaRPr lang="ru-RU"/>
           </a:p>
@@ -2920,7 +2920,7 @@
           <a:p>
             <a:fld id="{E6390BFC-4C86-4A7E-9030-5F942040A976}" type="datetimeFigureOut">
               <a:rPr lang="ru-RU" smtClean="0"/>
-              <a:t>06.06.2026</a:t>
+              <a:t>08.06.2026</a:t>
             </a:fld>
             <a:endParaRPr lang="ru-RU"/>
           </a:p>
@@ -3538,7 +3538,21 @@
                 <a:latin typeface="Arial" panose="020B0604020202020204" pitchFamily="34" charset="0"/>
                 <a:cs typeface="Arial" panose="020B0604020202020204" pitchFamily="34" charset="0"/>
               </a:rPr>
-              <a:t>Выполнила: ст.3 курса Аверкиева  Е.А.</a:t>
+              <a:t>Выполнила: ст.</a:t>
+            </a:r>
+            <a:r>
+              <a:rPr lang="en-US" sz="2300" dirty="0">
+                <a:latin typeface="Arial" panose="020B0604020202020204" pitchFamily="34" charset="0"/>
+                <a:cs typeface="Arial" panose="020B0604020202020204" pitchFamily="34" charset="0"/>
+              </a:rPr>
+              <a:t> </a:t>
+            </a:r>
+            <a:r>
+              <a:rPr lang="ru-RU" sz="2300" dirty="0">
+                <a:latin typeface="Arial" panose="020B0604020202020204" pitchFamily="34" charset="0"/>
+                <a:cs typeface="Arial" panose="020B0604020202020204" pitchFamily="34" charset="0"/>
+              </a:rPr>
+              <a:t>3 курса Аверкиева  Е.А.</a:t>
             </a:r>
           </a:p>
         </p:txBody>
@@ -3622,6 +3636,8 @@
                 <a:solidFill>
                   <a:schemeClr val="tx1"/>
                 </a:solidFill>
+                <a:latin typeface="Arial" panose="020B0604020202020204" pitchFamily="34" charset="0"/>
+                <a:cs typeface="Arial" panose="020B0604020202020204" pitchFamily="34" charset="0"/>
               </a:rPr>
               <a:t>10</a:t>
             </a:fld>
@@ -3629,6 +3645,8 @@
               <a:solidFill>
                 <a:schemeClr val="tx1"/>
               </a:solidFill>
+              <a:latin typeface="Arial" panose="020B0604020202020204" pitchFamily="34" charset="0"/>
+              <a:cs typeface="Arial" panose="020B0604020202020204" pitchFamily="34" charset="0"/>
             </a:endParaRPr>
           </a:p>
         </p:txBody>
@@ -3699,7 +3717,10 @@
               <a:buNone/>
             </a:pPr>
             <a:r>
-              <a:rPr lang="ru-RU"/>
+              <a:rPr lang="ru-RU">
+                <a:latin typeface="Arial" panose="020B0604020202020204" pitchFamily="34" charset="0"/>
+                <a:cs typeface="Arial" panose="020B0604020202020204" pitchFamily="34" charset="0"/>
+              </a:rPr>
               <a:t>Основные экраны</a:t>
             </a:r>
           </a:p>
@@ -3920,6 +3941,8 @@
                 <a:solidFill>
                   <a:schemeClr val="tx1"/>
                 </a:solidFill>
+                <a:latin typeface="Arial" panose="020B0604020202020204" pitchFamily="34" charset="0"/>
+                <a:cs typeface="Arial" panose="020B0604020202020204" pitchFamily="34" charset="0"/>
               </a:rPr>
               <a:t>11</a:t>
             </a:fld>
@@ -3927,6 +3950,8 @@
               <a:solidFill>
                 <a:schemeClr val="tx1"/>
               </a:solidFill>
+              <a:latin typeface="Arial" panose="020B0604020202020204" pitchFamily="34" charset="0"/>
+              <a:cs typeface="Arial" panose="020B0604020202020204" pitchFamily="34" charset="0"/>
             </a:endParaRPr>
           </a:p>
         </p:txBody>
@@ -3997,7 +4022,10 @@
               <a:buNone/>
             </a:pPr>
             <a:r>
-              <a:rPr lang="ru-RU"/>
+              <a:rPr lang="ru-RU">
+                <a:latin typeface="Arial" panose="020B0604020202020204" pitchFamily="34" charset="0"/>
+                <a:cs typeface="Arial" panose="020B0604020202020204" pitchFamily="34" charset="0"/>
+              </a:rPr>
               <a:t>Заключение</a:t>
             </a:r>
           </a:p>
@@ -4045,59 +4073,62 @@
             </a:pPr>
             <a:r>
               <a:rPr lang="ru-RU" sz="2300" b="0" i="0" dirty="0">
-                <a:latin typeface="Arial"/>
+                <a:latin typeface="Arial" panose="020B0604020202020204" pitchFamily="34" charset="0"/>
                 <a:ea typeface="Arial"/>
-                <a:cs typeface="Arial"/>
+                <a:cs typeface="Arial" panose="020B0604020202020204" pitchFamily="34" charset="0"/>
                 <a:sym typeface="Arial"/>
               </a:rPr>
               <a:t>	В результате выполнения работы было разработано мобильное приложение «</a:t>
             </a:r>
             <a:r>
               <a:rPr lang="ru-RU" sz="2300" b="0" i="0" dirty="0" err="1">
-                <a:latin typeface="Arial"/>
+                <a:latin typeface="Arial" panose="020B0604020202020204" pitchFamily="34" charset="0"/>
                 <a:ea typeface="Arial"/>
-                <a:cs typeface="Arial"/>
+                <a:cs typeface="Arial" panose="020B0604020202020204" pitchFamily="34" charset="0"/>
                 <a:sym typeface="Arial"/>
               </a:rPr>
               <a:t>Pet</a:t>
             </a:r>
             <a:r>
               <a:rPr lang="ru-RU" sz="2300" b="0" i="0" dirty="0">
-                <a:latin typeface="Arial"/>
+                <a:latin typeface="Arial" panose="020B0604020202020204" pitchFamily="34" charset="0"/>
                 <a:ea typeface="Arial"/>
-                <a:cs typeface="Arial"/>
+                <a:cs typeface="Arial" panose="020B0604020202020204" pitchFamily="34" charset="0"/>
                 <a:sym typeface="Arial"/>
               </a:rPr>
               <a:t> </a:t>
             </a:r>
             <a:r>
               <a:rPr lang="ru-RU" sz="2300" b="0" i="0" dirty="0" err="1">
-                <a:latin typeface="Arial"/>
+                <a:latin typeface="Arial" panose="020B0604020202020204" pitchFamily="34" charset="0"/>
                 <a:ea typeface="Arial"/>
-                <a:cs typeface="Arial"/>
+                <a:cs typeface="Arial" panose="020B0604020202020204" pitchFamily="34" charset="0"/>
                 <a:sym typeface="Arial"/>
               </a:rPr>
               <a:t>Diary</a:t>
             </a:r>
             <a:r>
               <a:rPr lang="ru-RU" sz="2300" b="0" i="0" dirty="0">
-                <a:latin typeface="Arial"/>
+                <a:latin typeface="Arial" panose="020B0604020202020204" pitchFamily="34" charset="0"/>
                 <a:ea typeface="Arial"/>
-                <a:cs typeface="Arial"/>
+                <a:cs typeface="Arial" panose="020B0604020202020204" pitchFamily="34" charset="0"/>
                 <a:sym typeface="Arial"/>
               </a:rPr>
               <a:t>», которое полностью соответствует поставленным целям и задачам.</a:t>
             </a:r>
             <a:r>
               <a:rPr lang="ru-RU" sz="1800" dirty="0">
-                <a:latin typeface="Times New Roman"/>
+                <a:latin typeface="Arial" panose="020B0604020202020204" pitchFamily="34" charset="0"/>
                 <a:ea typeface="Times New Roman"/>
-                <a:cs typeface="Times New Roman"/>
+                <a:cs typeface="Arial" panose="020B0604020202020204" pitchFamily="34" charset="0"/>
                 <a:sym typeface="Times New Roman"/>
               </a:rPr>
               <a:t> </a:t>
             </a:r>
-            <a:endParaRPr dirty="0"/>
+            <a:endParaRPr dirty="0">
+              <a:latin typeface="Arial" panose="020B0604020202020204" pitchFamily="34" charset="0"/>
+              <a:cs typeface="Arial" panose="020B0604020202020204" pitchFamily="34" charset="0"/>
+            </a:endParaRPr>
           </a:p>
           <a:p>
             <a:pPr marL="0" marR="0" lvl="0" indent="0" algn="just" rtl="0">
@@ -4110,9 +4141,9 @@
               <a:buNone/>
             </a:pPr>
             <a:endParaRPr sz="1800" dirty="0">
-              <a:latin typeface="Times New Roman"/>
+              <a:latin typeface="Arial" panose="020B0604020202020204" pitchFamily="34" charset="0"/>
               <a:ea typeface="Times New Roman"/>
-              <a:cs typeface="Times New Roman"/>
+              <a:cs typeface="Arial" panose="020B0604020202020204" pitchFamily="34" charset="0"/>
               <a:sym typeface="Times New Roman"/>
             </a:endParaRPr>
           </a:p>
@@ -4128,17 +4159,17 @@
             </a:pPr>
             <a:r>
               <a:rPr lang="ru-RU" sz="2300" b="0" i="0" dirty="0">
-                <a:latin typeface="Arial"/>
+                <a:latin typeface="Arial" panose="020B0604020202020204" pitchFamily="34" charset="0"/>
                 <a:ea typeface="Arial"/>
-                <a:cs typeface="Arial"/>
+                <a:cs typeface="Arial" panose="020B0604020202020204" pitchFamily="34" charset="0"/>
                 <a:sym typeface="Arial"/>
               </a:rPr>
               <a:t>	</a:t>
             </a:r>
             <a:endParaRPr sz="2300" dirty="0">
-              <a:latin typeface="Arial"/>
+              <a:latin typeface="Arial" panose="020B0604020202020204" pitchFamily="34" charset="0"/>
               <a:ea typeface="Arial"/>
-              <a:cs typeface="Arial"/>
+              <a:cs typeface="Arial" panose="020B0604020202020204" pitchFamily="34" charset="0"/>
               <a:sym typeface="Arial"/>
             </a:endParaRPr>
           </a:p>
@@ -4253,13 +4284,16 @@
             </a:pPr>
             <a:r>
               <a:rPr lang="ru-RU" sz="2300" dirty="0">
-                <a:latin typeface="Arial"/>
-                <a:cs typeface="Arial"/>
+                <a:latin typeface="Arial" panose="020B0604020202020204" pitchFamily="34" charset="0"/>
+                <a:cs typeface="Arial" panose="020B0604020202020204" pitchFamily="34" charset="0"/>
                 <a:sym typeface="Arial"/>
               </a:rPr>
               <a:t>Реализованы основные функции.</a:t>
             </a:r>
-            <a:endParaRPr dirty="0"/>
+            <a:endParaRPr dirty="0">
+              <a:latin typeface="Arial" panose="020B0604020202020204" pitchFamily="34" charset="0"/>
+              <a:cs typeface="Arial" panose="020B0604020202020204" pitchFamily="34" charset="0"/>
+            </a:endParaRPr>
           </a:p>
         </p:txBody>
       </p:sp>
@@ -4305,17 +4339,17 @@
             </a:pPr>
             <a:r>
               <a:rPr lang="ru-RU" sz="2300" b="0" i="0" u="none" strike="noStrike" cap="none" dirty="0">
-                <a:latin typeface="Arial"/>
+                <a:latin typeface="Arial" panose="020B0604020202020204" pitchFamily="34" charset="0"/>
                 <a:ea typeface="Arial"/>
-                <a:cs typeface="Arial"/>
+                <a:cs typeface="Arial" panose="020B0604020202020204" pitchFamily="34" charset="0"/>
                 <a:sym typeface="Arial"/>
               </a:rPr>
               <a:t>Спроектирована архитектура приложения и база данных;</a:t>
             </a:r>
             <a:endParaRPr sz="2300" b="0" i="0" u="none" strike="noStrike" cap="none" dirty="0">
-              <a:latin typeface="Arial"/>
+              <a:latin typeface="Arial" panose="020B0604020202020204" pitchFamily="34" charset="0"/>
               <a:ea typeface="Arial"/>
-              <a:cs typeface="Arial"/>
+              <a:cs typeface="Arial" panose="020B0604020202020204" pitchFamily="34" charset="0"/>
               <a:sym typeface="Arial"/>
             </a:endParaRPr>
           </a:p>
@@ -4370,7 +4404,10 @@
               </a:spcAft>
               <a:buNone/>
             </a:pPr>
-            <a:endParaRPr/>
+            <a:endParaRPr>
+              <a:latin typeface="Arial" panose="020B0604020202020204" pitchFamily="34" charset="0"/>
+              <a:cs typeface="Arial" panose="020B0604020202020204" pitchFamily="34" charset="0"/>
+            </a:endParaRPr>
           </a:p>
         </p:txBody>
       </p:sp>
@@ -4423,7 +4460,10 @@
               </a:spcAft>
               <a:buNone/>
             </a:pPr>
-            <a:endParaRPr/>
+            <a:endParaRPr>
+              <a:latin typeface="Arial" panose="020B0604020202020204" pitchFamily="34" charset="0"/>
+              <a:cs typeface="Arial" panose="020B0604020202020204" pitchFamily="34" charset="0"/>
+            </a:endParaRPr>
           </a:p>
         </p:txBody>
       </p:sp>
@@ -4476,7 +4516,10 @@
               </a:spcAft>
               <a:buNone/>
             </a:pPr>
-            <a:endParaRPr/>
+            <a:endParaRPr>
+              <a:latin typeface="Arial" panose="020B0604020202020204" pitchFamily="34" charset="0"/>
+              <a:cs typeface="Arial" panose="020B0604020202020204" pitchFamily="34" charset="0"/>
+            </a:endParaRPr>
           </a:p>
         </p:txBody>
       </p:sp>
@@ -4539,7 +4582,10 @@
           <a:lstStyle/>
           <a:p>
             <a:r>
-              <a:rPr lang="ru-RU" sz="5400" dirty="0"/>
+              <a:rPr lang="ru-RU" sz="5400" dirty="0">
+                <a:latin typeface="Arial" panose="020B0604020202020204" pitchFamily="34" charset="0"/>
+                <a:cs typeface="Arial" panose="020B0604020202020204" pitchFamily="34" charset="0"/>
+              </a:rPr>
               <a:t>Спасибо за внимание!</a:t>
             </a:r>
           </a:p>
@@ -4624,6 +4670,8 @@
                 <a:solidFill>
                   <a:schemeClr val="tx1"/>
                 </a:solidFill>
+                <a:latin typeface="Arial" panose="020B0604020202020204" pitchFamily="34" charset="0"/>
+                <a:cs typeface="Arial" panose="020B0604020202020204" pitchFamily="34" charset="0"/>
               </a:rPr>
               <a:t>2</a:t>
             </a:fld>
@@ -4631,6 +4679,8 @@
               <a:solidFill>
                 <a:schemeClr val="tx1"/>
               </a:solidFill>
+              <a:latin typeface="Arial" panose="020B0604020202020204" pitchFamily="34" charset="0"/>
+              <a:cs typeface="Arial" panose="020B0604020202020204" pitchFamily="34" charset="0"/>
             </a:endParaRPr>
           </a:p>
         </p:txBody>
@@ -4701,7 +4751,10 @@
               <a:buNone/>
             </a:pPr>
             <a:r>
-              <a:rPr lang="ru-RU" dirty="0"/>
+              <a:rPr lang="ru-RU" dirty="0">
+                <a:latin typeface="Arial" panose="020B0604020202020204" pitchFamily="34" charset="0"/>
+                <a:cs typeface="Arial" panose="020B0604020202020204" pitchFamily="34" charset="0"/>
+              </a:rPr>
               <a:t>Постановка цели: </a:t>
             </a:r>
           </a:p>
@@ -4749,57 +4802,60 @@
             </a:pPr>
             <a:r>
               <a:rPr lang="ru-RU" sz="2300" b="0" i="0" u="none" strike="noStrike" cap="none" dirty="0">
-                <a:latin typeface="Arial"/>
+                <a:latin typeface="Arial" panose="020B0604020202020204" pitchFamily="34" charset="0"/>
                 <a:ea typeface="Arial"/>
-                <a:cs typeface="Arial"/>
+                <a:cs typeface="Arial" panose="020B0604020202020204" pitchFamily="34" charset="0"/>
                 <a:sym typeface="Arial"/>
               </a:rPr>
               <a:t>Основной целью проектной работы является разработка мобильного приложения «</a:t>
             </a:r>
             <a:r>
               <a:rPr lang="ru-RU" sz="2300" b="0" i="0" u="none" strike="noStrike" cap="none" dirty="0" err="1">
-                <a:latin typeface="Arial"/>
+                <a:latin typeface="Arial" panose="020B0604020202020204" pitchFamily="34" charset="0"/>
                 <a:ea typeface="Arial"/>
-                <a:cs typeface="Arial"/>
+                <a:cs typeface="Arial" panose="020B0604020202020204" pitchFamily="34" charset="0"/>
                 <a:sym typeface="Arial"/>
               </a:rPr>
               <a:t>Pet</a:t>
             </a:r>
             <a:r>
               <a:rPr lang="ru-RU" sz="2300" b="0" i="0" u="none" strike="noStrike" cap="none" dirty="0">
-                <a:latin typeface="Arial"/>
+                <a:latin typeface="Arial" panose="020B0604020202020204" pitchFamily="34" charset="0"/>
                 <a:ea typeface="Arial"/>
-                <a:cs typeface="Arial"/>
+                <a:cs typeface="Arial" panose="020B0604020202020204" pitchFamily="34" charset="0"/>
                 <a:sym typeface="Arial"/>
               </a:rPr>
               <a:t> </a:t>
             </a:r>
             <a:r>
               <a:rPr lang="ru-RU" sz="2300" b="0" i="0" u="none" strike="noStrike" cap="none" dirty="0" err="1">
-                <a:latin typeface="Arial"/>
+                <a:latin typeface="Arial" panose="020B0604020202020204" pitchFamily="34" charset="0"/>
                 <a:ea typeface="Arial"/>
-                <a:cs typeface="Arial"/>
+                <a:cs typeface="Arial" panose="020B0604020202020204" pitchFamily="34" charset="0"/>
                 <a:sym typeface="Arial"/>
               </a:rPr>
               <a:t>Diary</a:t>
             </a:r>
             <a:r>
               <a:rPr lang="ru-RU" sz="2300" b="0" i="0" u="none" strike="noStrike" cap="none" dirty="0">
-                <a:latin typeface="Arial"/>
+                <a:latin typeface="Arial" panose="020B0604020202020204" pitchFamily="34" charset="0"/>
                 <a:ea typeface="Arial"/>
-                <a:cs typeface="Arial"/>
+                <a:cs typeface="Arial" panose="020B0604020202020204" pitchFamily="34" charset="0"/>
                 <a:sym typeface="Arial"/>
               </a:rPr>
               <a:t>» для учета и планирования событий, связанных с домашними питомцами</a:t>
             </a:r>
             <a:r>
-              <a:rPr lang="ru-RU" sz="2300" dirty="0"/>
+              <a:rPr lang="ru-RU" sz="2300" dirty="0">
+                <a:latin typeface="Arial" panose="020B0604020202020204" pitchFamily="34" charset="0"/>
+                <a:cs typeface="Arial" panose="020B0604020202020204" pitchFamily="34" charset="0"/>
+              </a:rPr>
               <a:t>.</a:t>
             </a:r>
             <a:endParaRPr sz="2300" b="0" i="0" u="none" strike="noStrike" cap="none" dirty="0">
-              <a:latin typeface="Arial"/>
+              <a:latin typeface="Arial" panose="020B0604020202020204" pitchFamily="34" charset="0"/>
               <a:ea typeface="Arial"/>
-              <a:cs typeface="Arial"/>
+              <a:cs typeface="Arial" panose="020B0604020202020204" pitchFamily="34" charset="0"/>
               <a:sym typeface="Arial"/>
             </a:endParaRPr>
           </a:p>
@@ -4871,7 +4927,10 @@
               <a:buNone/>
             </a:pPr>
             <a:r>
-              <a:rPr lang="ru-RU" dirty="0"/>
+              <a:rPr lang="ru-RU" dirty="0">
+                <a:latin typeface="Arial" panose="020B0604020202020204" pitchFamily="34" charset="0"/>
+                <a:cs typeface="Arial" panose="020B0604020202020204" pitchFamily="34" charset="0"/>
+              </a:rPr>
               <a:t>Актуальность проекта:</a:t>
             </a:r>
           </a:p>
@@ -4922,10 +4981,15 @@
                 <a:highlight>
                   <a:srgbClr val="FFFFFF"/>
                 </a:highlight>
+                <a:latin typeface="Arial" panose="020B0604020202020204" pitchFamily="34" charset="0"/>
+                <a:cs typeface="Arial" panose="020B0604020202020204" pitchFamily="34" charset="0"/>
               </a:rPr>
               <a:t>Рост числа домашних питомцев</a:t>
             </a:r>
-            <a:endParaRPr sz="2300" dirty="0"/>
+            <a:endParaRPr sz="2300" dirty="0">
+              <a:latin typeface="Arial" panose="020B0604020202020204" pitchFamily="34" charset="0"/>
+              <a:cs typeface="Arial" panose="020B0604020202020204" pitchFamily="34" charset="0"/>
+            </a:endParaRPr>
           </a:p>
         </p:txBody>
       </p:sp>
@@ -4974,10 +5038,15 @@
                 <a:highlight>
                   <a:srgbClr val="FFFFFF"/>
                 </a:highlight>
+                <a:latin typeface="Arial" panose="020B0604020202020204" pitchFamily="34" charset="0"/>
+                <a:cs typeface="Arial" panose="020B0604020202020204" pitchFamily="34" charset="0"/>
               </a:rPr>
               <a:t>Цифровизация повседневности</a:t>
             </a:r>
-            <a:endParaRPr sz="2300"/>
+            <a:endParaRPr sz="2300">
+              <a:latin typeface="Arial" panose="020B0604020202020204" pitchFamily="34" charset="0"/>
+              <a:cs typeface="Arial" panose="020B0604020202020204" pitchFamily="34" charset="0"/>
+            </a:endParaRPr>
           </a:p>
         </p:txBody>
       </p:sp>
@@ -5030,7 +5099,10 @@
               </a:spcAft>
               <a:buNone/>
             </a:pPr>
-            <a:endParaRPr/>
+            <a:endParaRPr>
+              <a:latin typeface="Arial" panose="020B0604020202020204" pitchFamily="34" charset="0"/>
+              <a:cs typeface="Arial" panose="020B0604020202020204" pitchFamily="34" charset="0"/>
+            </a:endParaRPr>
           </a:p>
         </p:txBody>
       </p:sp>
@@ -5083,7 +5155,10 @@
               </a:spcAft>
               <a:buNone/>
             </a:pPr>
-            <a:endParaRPr/>
+            <a:endParaRPr>
+              <a:latin typeface="Arial" panose="020B0604020202020204" pitchFamily="34" charset="0"/>
+              <a:cs typeface="Arial" panose="020B0604020202020204" pitchFamily="34" charset="0"/>
+            </a:endParaRPr>
           </a:p>
         </p:txBody>
       </p:sp>
@@ -5162,6 +5237,8 @@
                 <a:solidFill>
                   <a:schemeClr val="tx1"/>
                 </a:solidFill>
+                <a:latin typeface="Arial" panose="020B0604020202020204" pitchFamily="34" charset="0"/>
+                <a:cs typeface="Arial" panose="020B0604020202020204" pitchFamily="34" charset="0"/>
               </a:rPr>
               <a:t>3</a:t>
             </a:fld>
@@ -5169,6 +5246,8 @@
               <a:solidFill>
                 <a:schemeClr val="tx1"/>
               </a:solidFill>
+              <a:latin typeface="Arial" panose="020B0604020202020204" pitchFamily="34" charset="0"/>
+              <a:cs typeface="Arial" panose="020B0604020202020204" pitchFamily="34" charset="0"/>
             </a:endParaRPr>
           </a:p>
         </p:txBody>
@@ -5239,7 +5318,10 @@
               <a:buNone/>
             </a:pPr>
             <a:r>
-              <a:rPr lang="ru-RU" dirty="0"/>
+              <a:rPr lang="ru-RU" dirty="0">
+                <a:latin typeface="Arial" panose="020B0604020202020204" pitchFamily="34" charset="0"/>
+                <a:cs typeface="Arial" panose="020B0604020202020204" pitchFamily="34" charset="0"/>
+              </a:rPr>
               <a:t>Постановка задачи:</a:t>
             </a:r>
           </a:p>
@@ -5344,13 +5426,16 @@
             </a:pPr>
             <a:r>
               <a:rPr lang="ru-RU" sz="2300" dirty="0">
-                <a:latin typeface="Arial"/>
-                <a:cs typeface="Arial"/>
+                <a:latin typeface="Arial" panose="020B0604020202020204" pitchFamily="34" charset="0"/>
+                <a:cs typeface="Arial" panose="020B0604020202020204" pitchFamily="34" charset="0"/>
                 <a:sym typeface="Arial"/>
               </a:rPr>
               <a:t>Выбор средств разработки;</a:t>
             </a:r>
-            <a:endParaRPr dirty="0"/>
+            <a:endParaRPr dirty="0">
+              <a:latin typeface="Arial" panose="020B0604020202020204" pitchFamily="34" charset="0"/>
+              <a:cs typeface="Arial" panose="020B0604020202020204" pitchFamily="34" charset="0"/>
+            </a:endParaRPr>
           </a:p>
         </p:txBody>
       </p:sp>
@@ -5396,17 +5481,17 @@
             </a:pPr>
             <a:r>
               <a:rPr lang="ru-RU" sz="2300" b="0" i="0" u="none" strike="noStrike" cap="none" dirty="0">
-                <a:latin typeface="Arial"/>
+                <a:latin typeface="Arial" panose="020B0604020202020204" pitchFamily="34" charset="0"/>
                 <a:ea typeface="Arial"/>
-                <a:cs typeface="Arial"/>
+                <a:cs typeface="Arial" panose="020B0604020202020204" pitchFamily="34" charset="0"/>
                 <a:sym typeface="Arial"/>
               </a:rPr>
               <a:t>Проектирование архитектуры приложения и базы данных;</a:t>
             </a:r>
             <a:endParaRPr sz="2300" b="0" i="0" u="none" strike="noStrike" cap="none" dirty="0">
-              <a:latin typeface="Arial"/>
+              <a:latin typeface="Arial" panose="020B0604020202020204" pitchFamily="34" charset="0"/>
               <a:ea typeface="Arial"/>
-              <a:cs typeface="Arial"/>
+              <a:cs typeface="Arial" panose="020B0604020202020204" pitchFamily="34" charset="0"/>
               <a:sym typeface="Arial"/>
             </a:endParaRPr>
           </a:p>
@@ -5454,17 +5539,17 @@
             </a:pPr>
             <a:r>
               <a:rPr lang="ru-RU" sz="2300" b="0" i="0" u="none" strike="noStrike" cap="none" dirty="0">
-                <a:latin typeface="Arial"/>
+                <a:latin typeface="Arial" panose="020B0604020202020204" pitchFamily="34" charset="0"/>
                 <a:ea typeface="Arial"/>
-                <a:cs typeface="Arial"/>
+                <a:cs typeface="Arial" panose="020B0604020202020204" pitchFamily="34" charset="0"/>
                 <a:sym typeface="Arial"/>
               </a:rPr>
               <a:t>Реализация функций разрабатываемой.</a:t>
             </a:r>
             <a:endParaRPr sz="2300" dirty="0">
-              <a:latin typeface="Arial"/>
+              <a:latin typeface="Arial" panose="020B0604020202020204" pitchFamily="34" charset="0"/>
               <a:ea typeface="Arial"/>
-              <a:cs typeface="Arial"/>
+              <a:cs typeface="Arial" panose="020B0604020202020204" pitchFamily="34" charset="0"/>
               <a:sym typeface="Arial"/>
             </a:endParaRPr>
           </a:p>
@@ -5519,7 +5604,10 @@
               </a:spcAft>
               <a:buNone/>
             </a:pPr>
-            <a:endParaRPr/>
+            <a:endParaRPr>
+              <a:latin typeface="Arial" panose="020B0604020202020204" pitchFamily="34" charset="0"/>
+              <a:cs typeface="Arial" panose="020B0604020202020204" pitchFamily="34" charset="0"/>
+            </a:endParaRPr>
           </a:p>
         </p:txBody>
       </p:sp>
@@ -5572,7 +5660,10 @@
               </a:spcAft>
               <a:buNone/>
             </a:pPr>
-            <a:endParaRPr/>
+            <a:endParaRPr>
+              <a:latin typeface="Arial" panose="020B0604020202020204" pitchFamily="34" charset="0"/>
+              <a:cs typeface="Arial" panose="020B0604020202020204" pitchFamily="34" charset="0"/>
+            </a:endParaRPr>
           </a:p>
         </p:txBody>
       </p:sp>
@@ -5625,7 +5716,10 @@
               </a:spcAft>
               <a:buNone/>
             </a:pPr>
-            <a:endParaRPr/>
+            <a:endParaRPr>
+              <a:latin typeface="Arial" panose="020B0604020202020204" pitchFamily="34" charset="0"/>
+              <a:cs typeface="Arial" panose="020B0604020202020204" pitchFamily="34" charset="0"/>
+            </a:endParaRPr>
           </a:p>
         </p:txBody>
       </p:sp>
@@ -5678,7 +5772,10 @@
               </a:spcAft>
               <a:buNone/>
             </a:pPr>
-            <a:endParaRPr/>
+            <a:endParaRPr>
+              <a:latin typeface="Arial" panose="020B0604020202020204" pitchFamily="34" charset="0"/>
+              <a:cs typeface="Arial" panose="020B0604020202020204" pitchFamily="34" charset="0"/>
+            </a:endParaRPr>
           </a:p>
         </p:txBody>
       </p:sp>
@@ -5778,11 +5875,17 @@
               <a:buNone/>
             </a:pPr>
             <a:r>
-              <a:rPr lang="en-US" dirty="0"/>
+              <a:rPr lang="en-US" dirty="0">
+                <a:latin typeface="Arial" panose="020B0604020202020204" pitchFamily="34" charset="0"/>
+                <a:cs typeface="Arial" panose="020B0604020202020204" pitchFamily="34" charset="0"/>
+              </a:rPr>
               <a:t>ER</a:t>
             </a:r>
             <a:r>
-              <a:rPr lang="ru-RU" dirty="0"/>
+              <a:rPr lang="ru-RU" dirty="0">
+                <a:latin typeface="Arial" panose="020B0604020202020204" pitchFamily="34" charset="0"/>
+                <a:cs typeface="Arial" panose="020B0604020202020204" pitchFamily="34" charset="0"/>
+              </a:rPr>
               <a:t>-диаграмма</a:t>
             </a:r>
           </a:p>
@@ -5872,6 +5975,8 @@
                 <a:solidFill>
                   <a:schemeClr val="tx1"/>
                 </a:solidFill>
+                <a:latin typeface="Arial" panose="020B0604020202020204" pitchFamily="34" charset="0"/>
+                <a:cs typeface="Arial" panose="020B0604020202020204" pitchFamily="34" charset="0"/>
               </a:rPr>
               <a:t>4</a:t>
             </a:fld>
@@ -5879,6 +5984,8 @@
               <a:solidFill>
                 <a:schemeClr val="tx1"/>
               </a:solidFill>
+              <a:latin typeface="Arial" panose="020B0604020202020204" pitchFamily="34" charset="0"/>
+              <a:cs typeface="Arial" panose="020B0604020202020204" pitchFamily="34" charset="0"/>
             </a:endParaRPr>
           </a:p>
         </p:txBody>
@@ -5979,7 +6086,10 @@
               <a:buNone/>
             </a:pPr>
             <a:r>
-              <a:rPr lang="ru-RU" dirty="0"/>
+              <a:rPr lang="ru-RU" dirty="0">
+                <a:latin typeface="Arial" panose="020B0604020202020204" pitchFamily="34" charset="0"/>
+                <a:cs typeface="Arial" panose="020B0604020202020204" pitchFamily="34" charset="0"/>
+              </a:rPr>
               <a:t>Диаграмма прецедентов</a:t>
             </a:r>
           </a:p>
@@ -6160,6 +6270,8 @@
                 <a:solidFill>
                   <a:schemeClr val="tx1"/>
                 </a:solidFill>
+                <a:latin typeface="Arial" panose="020B0604020202020204" pitchFamily="34" charset="0"/>
+                <a:cs typeface="Arial" panose="020B0604020202020204" pitchFamily="34" charset="0"/>
               </a:rPr>
               <a:t>6</a:t>
             </a:fld>
@@ -6167,6 +6279,8 @@
               <a:solidFill>
                 <a:schemeClr val="tx1"/>
               </a:solidFill>
+              <a:latin typeface="Arial" panose="020B0604020202020204" pitchFamily="34" charset="0"/>
+              <a:cs typeface="Arial" panose="020B0604020202020204" pitchFamily="34" charset="0"/>
             </a:endParaRPr>
           </a:p>
         </p:txBody>
@@ -6237,7 +6351,10 @@
               <a:buNone/>
             </a:pPr>
             <a:r>
-              <a:rPr lang="ru-RU"/>
+              <a:rPr lang="ru-RU">
+                <a:latin typeface="Arial" panose="020B0604020202020204" pitchFamily="34" charset="0"/>
+                <a:cs typeface="Arial" panose="020B0604020202020204" pitchFamily="34" charset="0"/>
+              </a:rPr>
               <a:t>Технический стек</a:t>
             </a:r>
           </a:p>
@@ -6288,23 +6405,26 @@
             </a:pPr>
             <a:r>
               <a:rPr lang="ru-RU" sz="2200" b="1">
-                <a:latin typeface="Arial"/>
+                <a:latin typeface="Arial" panose="020B0604020202020204" pitchFamily="34" charset="0"/>
                 <a:ea typeface="Arial"/>
-                <a:cs typeface="Arial"/>
+                <a:cs typeface="Arial" panose="020B0604020202020204" pitchFamily="34" charset="0"/>
                 <a:sym typeface="Arial"/>
               </a:rPr>
               <a:t>Язык разработки:</a:t>
             </a:r>
             <a:r>
               <a:rPr lang="ru-RU" sz="2200">
-                <a:latin typeface="Arial"/>
+                <a:latin typeface="Arial" panose="020B0604020202020204" pitchFamily="34" charset="0"/>
                 <a:ea typeface="Arial"/>
-                <a:cs typeface="Arial"/>
+                <a:cs typeface="Arial" panose="020B0604020202020204" pitchFamily="34" charset="0"/>
                 <a:sym typeface="Arial"/>
               </a:rPr>
               <a:t> Kotlin </a:t>
             </a:r>
-            <a:endParaRPr/>
+            <a:endParaRPr>
+              <a:latin typeface="Arial" panose="020B0604020202020204" pitchFamily="34" charset="0"/>
+              <a:cs typeface="Arial" panose="020B0604020202020204" pitchFamily="34" charset="0"/>
+            </a:endParaRPr>
           </a:p>
         </p:txBody>
       </p:sp>
@@ -6350,23 +6470,26 @@
             </a:pPr>
             <a:r>
               <a:rPr lang="ru-RU" sz="2200" b="1">
-                <a:latin typeface="Arial"/>
+                <a:latin typeface="Arial" panose="020B0604020202020204" pitchFamily="34" charset="0"/>
                 <a:ea typeface="Arial"/>
-                <a:cs typeface="Arial"/>
+                <a:cs typeface="Arial" panose="020B0604020202020204" pitchFamily="34" charset="0"/>
                 <a:sym typeface="Arial"/>
               </a:rPr>
               <a:t>Среда разработки:</a:t>
             </a:r>
             <a:r>
               <a:rPr lang="ru-RU" sz="2200">
-                <a:latin typeface="Arial"/>
+                <a:latin typeface="Arial" panose="020B0604020202020204" pitchFamily="34" charset="0"/>
                 <a:ea typeface="Arial"/>
-                <a:cs typeface="Arial"/>
+                <a:cs typeface="Arial" panose="020B0604020202020204" pitchFamily="34" charset="0"/>
                 <a:sym typeface="Arial"/>
               </a:rPr>
               <a:t> Android Studio</a:t>
             </a:r>
-            <a:endParaRPr/>
+            <a:endParaRPr>
+              <a:latin typeface="Arial" panose="020B0604020202020204" pitchFamily="34" charset="0"/>
+              <a:cs typeface="Arial" panose="020B0604020202020204" pitchFamily="34" charset="0"/>
+            </a:endParaRPr>
           </a:p>
         </p:txBody>
       </p:sp>
@@ -6415,23 +6538,26 @@
             </a:pPr>
             <a:r>
               <a:rPr lang="ru-RU" sz="2200" b="1">
-                <a:latin typeface="Arial"/>
+                <a:latin typeface="Arial" panose="020B0604020202020204" pitchFamily="34" charset="0"/>
                 <a:ea typeface="Arial"/>
-                <a:cs typeface="Arial"/>
+                <a:cs typeface="Arial" panose="020B0604020202020204" pitchFamily="34" charset="0"/>
                 <a:sym typeface="Arial"/>
               </a:rPr>
               <a:t>Архитектура:</a:t>
             </a:r>
             <a:r>
               <a:rPr lang="ru-RU" sz="2200">
-                <a:latin typeface="Arial"/>
+                <a:latin typeface="Arial" panose="020B0604020202020204" pitchFamily="34" charset="0"/>
                 <a:ea typeface="Arial"/>
-                <a:cs typeface="Arial"/>
+                <a:cs typeface="Arial" panose="020B0604020202020204" pitchFamily="34" charset="0"/>
                 <a:sym typeface="Arial"/>
               </a:rPr>
               <a:t> MVVM</a:t>
             </a:r>
-            <a:endParaRPr/>
+            <a:endParaRPr>
+              <a:latin typeface="Arial" panose="020B0604020202020204" pitchFamily="34" charset="0"/>
+              <a:cs typeface="Arial" panose="020B0604020202020204" pitchFamily="34" charset="0"/>
+            </a:endParaRPr>
           </a:p>
         </p:txBody>
       </p:sp>
@@ -6479,18 +6605,18 @@
               <a:buNone/>
             </a:pPr>
             <a:r>
-              <a:rPr lang="ru-RU" sz="2200" b="1">
-                <a:latin typeface="Arial"/>
+              <a:rPr lang="ru-RU" sz="2200" b="1" dirty="0">
+                <a:latin typeface="Arial" panose="020B0604020202020204" pitchFamily="34" charset="0"/>
                 <a:ea typeface="Arial"/>
-                <a:cs typeface="Arial"/>
+                <a:cs typeface="Arial" panose="020B0604020202020204" pitchFamily="34" charset="0"/>
                 <a:sym typeface="Arial"/>
               </a:rPr>
               <a:t>Бэкенд и данные:</a:t>
             </a:r>
-            <a:endParaRPr sz="2200">
-              <a:latin typeface="Arial"/>
+            <a:endParaRPr sz="2200" dirty="0">
+              <a:latin typeface="Arial" panose="020B0604020202020204" pitchFamily="34" charset="0"/>
               <a:ea typeface="Arial"/>
-              <a:cs typeface="Arial"/>
+              <a:cs typeface="Arial" panose="020B0604020202020204" pitchFamily="34" charset="0"/>
               <a:sym typeface="Arial"/>
             </a:endParaRPr>
           </a:p>
@@ -6540,10 +6666,16 @@
               <a:buNone/>
             </a:pPr>
             <a:r>
-              <a:rPr lang="ru-RU" sz="2200" dirty="0"/>
+              <a:rPr lang="ru-RU" sz="2200" dirty="0">
+                <a:latin typeface="Arial" panose="020B0604020202020204" pitchFamily="34" charset="0"/>
+                <a:cs typeface="Arial" panose="020B0604020202020204" pitchFamily="34" charset="0"/>
+              </a:rPr>
               <a:t>Spring Boot</a:t>
             </a:r>
-            <a:endParaRPr dirty="0"/>
+            <a:endParaRPr dirty="0">
+              <a:latin typeface="Arial" panose="020B0604020202020204" pitchFamily="34" charset="0"/>
+              <a:cs typeface="Arial" panose="020B0604020202020204" pitchFamily="34" charset="0"/>
+            </a:endParaRPr>
           </a:p>
         </p:txBody>
       </p:sp>
@@ -6591,19 +6723,25 @@
               <a:buNone/>
             </a:pPr>
             <a:r>
-              <a:rPr lang="ru-RU" sz="2200"/>
+              <a:rPr lang="ru-RU" sz="2200">
+                <a:latin typeface="Arial" panose="020B0604020202020204" pitchFamily="34" charset="0"/>
+                <a:cs typeface="Arial" panose="020B0604020202020204" pitchFamily="34" charset="0"/>
+              </a:rPr>
               <a:t>PostgreSQL - </a:t>
             </a:r>
             <a:r>
               <a:rPr lang="ru-RU" sz="2200" b="0" i="0" u="none" strike="noStrike" cap="none">
-                <a:latin typeface="Arial"/>
+                <a:latin typeface="Arial" panose="020B0604020202020204" pitchFamily="34" charset="0"/>
                 <a:ea typeface="Arial"/>
-                <a:cs typeface="Arial"/>
+                <a:cs typeface="Arial" panose="020B0604020202020204" pitchFamily="34" charset="0"/>
                 <a:sym typeface="Arial"/>
               </a:rPr>
               <a:t>база данных</a:t>
             </a:r>
-            <a:endParaRPr/>
+            <a:endParaRPr>
+              <a:latin typeface="Arial" panose="020B0604020202020204" pitchFamily="34" charset="0"/>
+              <a:cs typeface="Arial" panose="020B0604020202020204" pitchFamily="34" charset="0"/>
+            </a:endParaRPr>
           </a:p>
         </p:txBody>
       </p:sp>
@@ -6649,17 +6787,17 @@
             </a:pPr>
             <a:r>
               <a:rPr lang="ru-RU" sz="2200">
-                <a:latin typeface="Arial"/>
+                <a:latin typeface="Arial" panose="020B0604020202020204" pitchFamily="34" charset="0"/>
                 <a:ea typeface="Arial"/>
-                <a:cs typeface="Arial"/>
+                <a:cs typeface="Arial" panose="020B0604020202020204" pitchFamily="34" charset="0"/>
                 <a:sym typeface="Arial"/>
               </a:rPr>
               <a:t>SharedPreferences – для локального хранения</a:t>
             </a:r>
             <a:endParaRPr sz="2200">
-              <a:latin typeface="Arial"/>
+              <a:latin typeface="Arial" panose="020B0604020202020204" pitchFamily="34" charset="0"/>
               <a:ea typeface="Arial"/>
-              <a:cs typeface="Arial"/>
+              <a:cs typeface="Arial" panose="020B0604020202020204" pitchFamily="34" charset="0"/>
               <a:sym typeface="Arial"/>
             </a:endParaRPr>
           </a:p>
@@ -6710,17 +6848,17 @@
             </a:pPr>
             <a:r>
               <a:rPr lang="ru-RU" sz="2200" b="1">
-                <a:latin typeface="Arial"/>
+                <a:latin typeface="Arial" panose="020B0604020202020204" pitchFamily="34" charset="0"/>
                 <a:ea typeface="Arial"/>
-                <a:cs typeface="Arial"/>
+                <a:cs typeface="Arial" panose="020B0604020202020204" pitchFamily="34" charset="0"/>
                 <a:sym typeface="Arial"/>
               </a:rPr>
               <a:t>Внешние API:</a:t>
             </a:r>
             <a:endParaRPr sz="2200">
-              <a:latin typeface="Arial"/>
+              <a:latin typeface="Arial" panose="020B0604020202020204" pitchFamily="34" charset="0"/>
               <a:ea typeface="Arial"/>
-              <a:cs typeface="Arial"/>
+              <a:cs typeface="Arial" panose="020B0604020202020204" pitchFamily="34" charset="0"/>
               <a:sym typeface="Arial"/>
             </a:endParaRPr>
           </a:p>
@@ -6771,14 +6909,17 @@
             </a:pPr>
             <a:r>
               <a:rPr lang="ru-RU" sz="2200" b="0" i="0" u="none" strike="noStrike" cap="none">
-                <a:latin typeface="Arial"/>
+                <a:latin typeface="Arial" panose="020B0604020202020204" pitchFamily="34" charset="0"/>
                 <a:ea typeface="Arial"/>
-                <a:cs typeface="Arial"/>
+                <a:cs typeface="Arial" panose="020B0604020202020204" pitchFamily="34" charset="0"/>
                 <a:sym typeface="Arial"/>
               </a:rPr>
               <a:t>Яндекс.Карты API (MapKit)</a:t>
             </a:r>
-            <a:endParaRPr/>
+            <a:endParaRPr>
+              <a:latin typeface="Arial" panose="020B0604020202020204" pitchFamily="34" charset="0"/>
+              <a:cs typeface="Arial" panose="020B0604020202020204" pitchFamily="34" charset="0"/>
+            </a:endParaRPr>
           </a:p>
         </p:txBody>
       </p:sp>
@@ -6824,26 +6965,26 @@
             </a:pPr>
             <a:r>
               <a:rPr lang="ru-RU" sz="2200" b="1">
-                <a:latin typeface="Arial"/>
+                <a:latin typeface="Arial" panose="020B0604020202020204" pitchFamily="34" charset="0"/>
                 <a:ea typeface="Arial"/>
-                <a:cs typeface="Arial"/>
+                <a:cs typeface="Arial" panose="020B0604020202020204" pitchFamily="34" charset="0"/>
                 <a:sym typeface="Arial"/>
               </a:rPr>
               <a:t>Системные сервисы:</a:t>
             </a:r>
             <a:r>
               <a:rPr lang="ru-RU" sz="2200">
-                <a:latin typeface="Arial"/>
+                <a:latin typeface="Arial" panose="020B0604020202020204" pitchFamily="34" charset="0"/>
                 <a:ea typeface="Arial"/>
-                <a:cs typeface="Arial"/>
+                <a:cs typeface="Arial" panose="020B0604020202020204" pitchFamily="34" charset="0"/>
                 <a:sym typeface="Arial"/>
               </a:rPr>
               <a:t> AlarmManager и NotificationManager </a:t>
             </a:r>
             <a:endParaRPr sz="2200">
-              <a:latin typeface="Arial"/>
+              <a:latin typeface="Arial" panose="020B0604020202020204" pitchFamily="34" charset="0"/>
               <a:ea typeface="Arial"/>
-              <a:cs typeface="Arial"/>
+              <a:cs typeface="Arial" panose="020B0604020202020204" pitchFamily="34" charset="0"/>
               <a:sym typeface="Arial"/>
             </a:endParaRPr>
           </a:p>
@@ -6898,7 +7039,10 @@
               </a:spcAft>
               <a:buNone/>
             </a:pPr>
-            <a:endParaRPr/>
+            <a:endParaRPr>
+              <a:latin typeface="Arial" panose="020B0604020202020204" pitchFamily="34" charset="0"/>
+              <a:cs typeface="Arial" panose="020B0604020202020204" pitchFamily="34" charset="0"/>
+            </a:endParaRPr>
           </a:p>
         </p:txBody>
       </p:sp>
@@ -6951,7 +7095,10 @@
               </a:spcAft>
               <a:buNone/>
             </a:pPr>
-            <a:endParaRPr/>
+            <a:endParaRPr>
+              <a:latin typeface="Arial" panose="020B0604020202020204" pitchFamily="34" charset="0"/>
+              <a:cs typeface="Arial" panose="020B0604020202020204" pitchFamily="34" charset="0"/>
+            </a:endParaRPr>
           </a:p>
         </p:txBody>
       </p:sp>
@@ -7004,7 +7151,10 @@
               </a:spcAft>
               <a:buNone/>
             </a:pPr>
-            <a:endParaRPr/>
+            <a:endParaRPr>
+              <a:latin typeface="Arial" panose="020B0604020202020204" pitchFamily="34" charset="0"/>
+              <a:cs typeface="Arial" panose="020B0604020202020204" pitchFamily="34" charset="0"/>
+            </a:endParaRPr>
           </a:p>
         </p:txBody>
       </p:sp>
@@ -7057,7 +7207,10 @@
               </a:spcAft>
               <a:buNone/>
             </a:pPr>
-            <a:endParaRPr/>
+            <a:endParaRPr>
+              <a:latin typeface="Arial" panose="020B0604020202020204" pitchFamily="34" charset="0"/>
+              <a:cs typeface="Arial" panose="020B0604020202020204" pitchFamily="34" charset="0"/>
+            </a:endParaRPr>
           </a:p>
         </p:txBody>
       </p:sp>
@@ -7105,36 +7258,48 @@
               <a:buNone/>
             </a:pPr>
             <a:r>
-              <a:rPr lang="ru-RU" sz="2200"/>
+              <a:rPr lang="ru-RU" sz="2200">
+                <a:latin typeface="Arial" panose="020B0604020202020204" pitchFamily="34" charset="0"/>
+                <a:cs typeface="Arial" panose="020B0604020202020204" pitchFamily="34" charset="0"/>
+              </a:rPr>
               <a:t>    </a:t>
             </a:r>
             <a:r>
               <a:rPr lang="ru-RU" sz="2200" b="0" i="0" u="none" strike="noStrike" cap="none">
-                <a:latin typeface="Arial"/>
+                <a:latin typeface="Arial" panose="020B0604020202020204" pitchFamily="34" charset="0"/>
                 <a:ea typeface="Arial"/>
-                <a:cs typeface="Arial"/>
+                <a:cs typeface="Arial" panose="020B0604020202020204" pitchFamily="34" charset="0"/>
                 <a:sym typeface="Arial"/>
               </a:rPr>
               <a:t>Яндекс.</a:t>
             </a:r>
             <a:r>
-              <a:rPr lang="ru-RU" sz="2200"/>
+              <a:rPr lang="ru-RU" sz="2200">
+                <a:latin typeface="Arial" panose="020B0604020202020204" pitchFamily="34" charset="0"/>
+                <a:cs typeface="Arial" panose="020B0604020202020204" pitchFamily="34" charset="0"/>
+              </a:rPr>
               <a:t>Диск</a:t>
             </a:r>
             <a:r>
               <a:rPr lang="ru-RU" sz="2200" b="0" i="0" u="none" strike="noStrike" cap="none">
-                <a:latin typeface="Arial"/>
+                <a:latin typeface="Arial" panose="020B0604020202020204" pitchFamily="34" charset="0"/>
                 <a:ea typeface="Arial"/>
-                <a:cs typeface="Arial"/>
+                <a:cs typeface="Arial" panose="020B0604020202020204" pitchFamily="34" charset="0"/>
                 <a:sym typeface="Arial"/>
               </a:rPr>
               <a:t> </a:t>
             </a:r>
             <a:r>
-              <a:rPr lang="ru-RU" sz="2200"/>
+              <a:rPr lang="ru-RU" sz="2200">
+                <a:latin typeface="Arial" panose="020B0604020202020204" pitchFamily="34" charset="0"/>
+                <a:cs typeface="Arial" panose="020B0604020202020204" pitchFamily="34" charset="0"/>
+              </a:rPr>
               <a:t>REST API</a:t>
             </a:r>
-            <a:endParaRPr/>
+            <a:endParaRPr>
+              <a:latin typeface="Arial" panose="020B0604020202020204" pitchFamily="34" charset="0"/>
+              <a:cs typeface="Arial" panose="020B0604020202020204" pitchFamily="34" charset="0"/>
+            </a:endParaRPr>
           </a:p>
         </p:txBody>
       </p:sp>
@@ -7187,7 +7352,10 @@
               </a:spcAft>
               <a:buNone/>
             </a:pPr>
-            <a:endParaRPr/>
+            <a:endParaRPr>
+              <a:latin typeface="Arial" panose="020B0604020202020204" pitchFamily="34" charset="0"/>
+              <a:cs typeface="Arial" panose="020B0604020202020204" pitchFamily="34" charset="0"/>
+            </a:endParaRPr>
           </a:p>
         </p:txBody>
       </p:sp>
@@ -7240,7 +7408,10 @@
               </a:spcAft>
               <a:buNone/>
             </a:pPr>
-            <a:endParaRPr/>
+            <a:endParaRPr>
+              <a:latin typeface="Arial" panose="020B0604020202020204" pitchFamily="34" charset="0"/>
+              <a:cs typeface="Arial" panose="020B0604020202020204" pitchFamily="34" charset="0"/>
+            </a:endParaRPr>
           </a:p>
         </p:txBody>
       </p:sp>
@@ -7293,7 +7464,10 @@
               </a:spcAft>
               <a:buNone/>
             </a:pPr>
-            <a:endParaRPr/>
+            <a:endParaRPr>
+              <a:latin typeface="Arial" panose="020B0604020202020204" pitchFamily="34" charset="0"/>
+              <a:cs typeface="Arial" panose="020B0604020202020204" pitchFamily="34" charset="0"/>
+            </a:endParaRPr>
           </a:p>
         </p:txBody>
       </p:sp>
@@ -7346,7 +7520,10 @@
               </a:spcAft>
               <a:buNone/>
             </a:pPr>
-            <a:endParaRPr/>
+            <a:endParaRPr>
+              <a:latin typeface="Arial" panose="020B0604020202020204" pitchFamily="34" charset="0"/>
+              <a:cs typeface="Arial" panose="020B0604020202020204" pitchFamily="34" charset="0"/>
+            </a:endParaRPr>
           </a:p>
         </p:txBody>
       </p:sp>
@@ -7399,7 +7576,10 @@
               </a:spcAft>
               <a:buNone/>
             </a:pPr>
-            <a:endParaRPr/>
+            <a:endParaRPr>
+              <a:latin typeface="Arial" panose="020B0604020202020204" pitchFamily="34" charset="0"/>
+              <a:cs typeface="Arial" panose="020B0604020202020204" pitchFamily="34" charset="0"/>
+            </a:endParaRPr>
           </a:p>
         </p:txBody>
       </p:sp>
@@ -7452,7 +7632,10 @@
               </a:spcAft>
               <a:buNone/>
             </a:pPr>
-            <a:endParaRPr/>
+            <a:endParaRPr>
+              <a:latin typeface="Arial" panose="020B0604020202020204" pitchFamily="34" charset="0"/>
+              <a:cs typeface="Arial" panose="020B0604020202020204" pitchFamily="34" charset="0"/>
+            </a:endParaRPr>
           </a:p>
         </p:txBody>
       </p:sp>
@@ -7505,7 +7688,10 @@
               </a:spcAft>
               <a:buNone/>
             </a:pPr>
-            <a:endParaRPr/>
+            <a:endParaRPr>
+              <a:latin typeface="Arial" panose="020B0604020202020204" pitchFamily="34" charset="0"/>
+              <a:cs typeface="Arial" panose="020B0604020202020204" pitchFamily="34" charset="0"/>
+            </a:endParaRPr>
           </a:p>
         </p:txBody>
       </p:sp>
@@ -7665,7 +7851,10 @@
               <a:buNone/>
             </a:pPr>
             <a:r>
-              <a:rPr lang="ru-RU"/>
+              <a:rPr lang="ru-RU" dirty="0">
+                <a:latin typeface="Arial" panose="020B0604020202020204" pitchFamily="34" charset="0"/>
+                <a:cs typeface="Arial" panose="020B0604020202020204" pitchFamily="34" charset="0"/>
+              </a:rPr>
               <a:t>Архитектура</a:t>
             </a:r>
           </a:p>
@@ -7784,6 +7973,8 @@
                 <a:solidFill>
                   <a:schemeClr val="tx1"/>
                 </a:solidFill>
+                <a:latin typeface="Arial" panose="020B0604020202020204" pitchFamily="34" charset="0"/>
+                <a:cs typeface="Arial" panose="020B0604020202020204" pitchFamily="34" charset="0"/>
               </a:rPr>
               <a:t>8</a:t>
             </a:fld>
@@ -7791,6 +7982,8 @@
               <a:solidFill>
                 <a:schemeClr val="tx1"/>
               </a:solidFill>
+              <a:latin typeface="Arial" panose="020B0604020202020204" pitchFamily="34" charset="0"/>
+              <a:cs typeface="Arial" panose="020B0604020202020204" pitchFamily="34" charset="0"/>
             </a:endParaRPr>
           </a:p>
         </p:txBody>
@@ -7861,7 +8054,10 @@
               <a:buNone/>
             </a:pPr>
             <a:r>
-              <a:rPr lang="ru-RU"/>
+              <a:rPr lang="ru-RU">
+                <a:latin typeface="Arial" panose="020B0604020202020204" pitchFamily="34" charset="0"/>
+                <a:cs typeface="Arial" panose="020B0604020202020204" pitchFamily="34" charset="0"/>
+              </a:rPr>
               <a:t>Дизайн</a:t>
             </a:r>
           </a:p>
@@ -7923,10 +8119,16 @@
               <a:buNone/>
             </a:pPr>
             <a:r>
-              <a:rPr lang="ru-RU" sz="1600"/>
+              <a:rPr lang="ru-RU" sz="1600">
+                <a:latin typeface="Arial" panose="020B0604020202020204" pitchFamily="34" charset="0"/>
+                <a:cs typeface="Arial" panose="020B0604020202020204" pitchFamily="34" charset="0"/>
+              </a:rPr>
               <a:t>#697255</a:t>
             </a:r>
-            <a:endParaRPr sz="1600"/>
+            <a:endParaRPr sz="1600">
+              <a:latin typeface="Arial" panose="020B0604020202020204" pitchFamily="34" charset="0"/>
+              <a:cs typeface="Arial" panose="020B0604020202020204" pitchFamily="34" charset="0"/>
+            </a:endParaRPr>
           </a:p>
         </p:txBody>
       </p:sp>
@@ -7986,10 +8188,16 @@
               <a:buNone/>
             </a:pPr>
             <a:r>
-              <a:rPr lang="ru-RU" sz="1600"/>
+              <a:rPr lang="ru-RU" sz="1600">
+                <a:latin typeface="Arial" panose="020B0604020202020204" pitchFamily="34" charset="0"/>
+                <a:cs typeface="Arial" panose="020B0604020202020204" pitchFamily="34" charset="0"/>
+              </a:rPr>
               <a:t>#F5F5F5</a:t>
             </a:r>
-            <a:endParaRPr sz="1600"/>
+            <a:endParaRPr sz="1600">
+              <a:latin typeface="Arial" panose="020B0604020202020204" pitchFamily="34" charset="0"/>
+              <a:cs typeface="Arial" panose="020B0604020202020204" pitchFamily="34" charset="0"/>
+            </a:endParaRPr>
           </a:p>
         </p:txBody>
       </p:sp>
@@ -8049,10 +8257,16 @@
               <a:buNone/>
             </a:pPr>
             <a:r>
-              <a:rPr lang="ru-RU" sz="1600"/>
+              <a:rPr lang="ru-RU" sz="1600">
+                <a:latin typeface="Arial" panose="020B0604020202020204" pitchFamily="34" charset="0"/>
+                <a:cs typeface="Arial" panose="020B0604020202020204" pitchFamily="34" charset="0"/>
+              </a:rPr>
               <a:t>#B66D4C</a:t>
             </a:r>
-            <a:endParaRPr sz="1600"/>
+            <a:endParaRPr sz="1600">
+              <a:latin typeface="Arial" panose="020B0604020202020204" pitchFamily="34" charset="0"/>
+              <a:cs typeface="Arial" panose="020B0604020202020204" pitchFamily="34" charset="0"/>
+            </a:endParaRPr>
           </a:p>
         </p:txBody>
       </p:sp>
@@ -8103,14 +8317,17 @@
             </a:pPr>
             <a:r>
               <a:rPr lang="ru-RU" sz="2300">
-                <a:latin typeface="Arial"/>
+                <a:latin typeface="Arial" panose="020B0604020202020204" pitchFamily="34" charset="0"/>
                 <a:ea typeface="Arial"/>
-                <a:cs typeface="Arial"/>
+                <a:cs typeface="Arial" panose="020B0604020202020204" pitchFamily="34" charset="0"/>
                 <a:sym typeface="Arial"/>
               </a:rPr>
               <a:t>Цветовая палитра:</a:t>
             </a:r>
-            <a:endParaRPr/>
+            <a:endParaRPr>
+              <a:latin typeface="Arial" panose="020B0604020202020204" pitchFamily="34" charset="0"/>
+              <a:cs typeface="Arial" panose="020B0604020202020204" pitchFamily="34" charset="0"/>
+            </a:endParaRPr>
           </a:p>
         </p:txBody>
       </p:sp>
@@ -8170,10 +8387,16 @@
               <a:buNone/>
             </a:pPr>
             <a:r>
-              <a:rPr lang="ru-RU" sz="1600" dirty="0"/>
+              <a:rPr lang="ru-RU" sz="1600" dirty="0">
+                <a:latin typeface="Arial" panose="020B0604020202020204" pitchFamily="34" charset="0"/>
+                <a:cs typeface="Arial" panose="020B0604020202020204" pitchFamily="34" charset="0"/>
+              </a:rPr>
               <a:t>#FFFFFFF</a:t>
             </a:r>
-            <a:endParaRPr sz="1600" dirty="0"/>
+            <a:endParaRPr sz="1600" dirty="0">
+              <a:latin typeface="Arial" panose="020B0604020202020204" pitchFamily="34" charset="0"/>
+              <a:cs typeface="Arial" panose="020B0604020202020204" pitchFamily="34" charset="0"/>
+            </a:endParaRPr>
           </a:p>
         </p:txBody>
       </p:sp>
@@ -8221,10 +8444,16 @@
               <a:buNone/>
             </a:pPr>
             <a:r>
-              <a:rPr lang="ru-RU" sz="2300"/>
+              <a:rPr lang="ru-RU" sz="2300">
+                <a:latin typeface="Arial" panose="020B0604020202020204" pitchFamily="34" charset="0"/>
+                <a:cs typeface="Arial" panose="020B0604020202020204" pitchFamily="34" charset="0"/>
+              </a:rPr>
               <a:t>Тростниково-зеленый</a:t>
             </a:r>
-            <a:endParaRPr/>
+            <a:endParaRPr>
+              <a:latin typeface="Arial" panose="020B0604020202020204" pitchFamily="34" charset="0"/>
+              <a:cs typeface="Arial" panose="020B0604020202020204" pitchFamily="34" charset="0"/>
+            </a:endParaRPr>
           </a:p>
         </p:txBody>
       </p:sp>
@@ -8272,10 +8501,16 @@
               <a:buNone/>
             </a:pPr>
             <a:r>
-              <a:rPr lang="ru-RU" sz="2300"/>
+              <a:rPr lang="ru-RU" sz="2300">
+                <a:latin typeface="Arial" panose="020B0604020202020204" pitchFamily="34" charset="0"/>
+                <a:cs typeface="Arial" panose="020B0604020202020204" pitchFamily="34" charset="0"/>
+              </a:rPr>
               <a:t>Дымчато-белый </a:t>
             </a:r>
-            <a:endParaRPr/>
+            <a:endParaRPr>
+              <a:latin typeface="Arial" panose="020B0604020202020204" pitchFamily="34" charset="0"/>
+              <a:cs typeface="Arial" panose="020B0604020202020204" pitchFamily="34" charset="0"/>
+            </a:endParaRPr>
           </a:p>
         </p:txBody>
       </p:sp>
@@ -8323,10 +8558,16 @@
               <a:buNone/>
             </a:pPr>
             <a:r>
-              <a:rPr lang="ru-RU" sz="2300"/>
+              <a:rPr lang="ru-RU" sz="2300">
+                <a:latin typeface="Arial" panose="020B0604020202020204" pitchFamily="34" charset="0"/>
+                <a:cs typeface="Arial" panose="020B0604020202020204" pitchFamily="34" charset="0"/>
+              </a:rPr>
               <a:t>Коричневый Крайола</a:t>
             </a:r>
-            <a:endParaRPr/>
+            <a:endParaRPr>
+              <a:latin typeface="Arial" panose="020B0604020202020204" pitchFamily="34" charset="0"/>
+              <a:cs typeface="Arial" panose="020B0604020202020204" pitchFamily="34" charset="0"/>
+            </a:endParaRPr>
           </a:p>
         </p:txBody>
       </p:sp>
@@ -8374,10 +8615,16 @@
               <a:buNone/>
             </a:pPr>
             <a:r>
-              <a:rPr lang="ru-RU" sz="2300"/>
+              <a:rPr lang="ru-RU" sz="2300">
+                <a:latin typeface="Arial" panose="020B0604020202020204" pitchFamily="34" charset="0"/>
+                <a:cs typeface="Arial" panose="020B0604020202020204" pitchFamily="34" charset="0"/>
+              </a:rPr>
               <a:t>Белый </a:t>
             </a:r>
-            <a:endParaRPr/>
+            <a:endParaRPr>
+              <a:latin typeface="Arial" panose="020B0604020202020204" pitchFamily="34" charset="0"/>
+              <a:cs typeface="Arial" panose="020B0604020202020204" pitchFamily="34" charset="0"/>
+            </a:endParaRPr>
           </a:p>
         </p:txBody>
       </p:sp>
@@ -8493,6 +8740,8 @@
                 <a:solidFill>
                   <a:schemeClr val="tx1"/>
                 </a:solidFill>
+                <a:latin typeface="Arial" panose="020B0604020202020204" pitchFamily="34" charset="0"/>
+                <a:cs typeface="Arial" panose="020B0604020202020204" pitchFamily="34" charset="0"/>
               </a:rPr>
               <a:t>9</a:t>
             </a:fld>
@@ -8500,6 +8749,8 @@
               <a:solidFill>
                 <a:schemeClr val="tx1"/>
               </a:solidFill>
+              <a:latin typeface="Arial" panose="020B0604020202020204" pitchFamily="34" charset="0"/>
+              <a:cs typeface="Arial" panose="020B0604020202020204" pitchFamily="34" charset="0"/>
             </a:endParaRPr>
           </a:p>
         </p:txBody>
@@ -8570,7 +8821,10 @@
               <a:buNone/>
             </a:pPr>
             <a:r>
-              <a:rPr lang="ru-RU"/>
+              <a:rPr lang="ru-RU">
+                <a:latin typeface="Arial" panose="020B0604020202020204" pitchFamily="34" charset="0"/>
+                <a:cs typeface="Arial" panose="020B0604020202020204" pitchFamily="34" charset="0"/>
+              </a:rPr>
               <a:t>Экраны авторизации</a:t>
             </a:r>
           </a:p>

--- a/documentation/презентация_PetDiary.pptx
+++ b/documentation/презентация_PetDiary.pptx
@@ -8,15 +8,17 @@
     <p:sldId id="268" r:id="rId2"/>
     <p:sldId id="257" r:id="rId3"/>
     <p:sldId id="258" r:id="rId4"/>
-    <p:sldId id="269" r:id="rId5"/>
-    <p:sldId id="259" r:id="rId6"/>
-    <p:sldId id="260" r:id="rId7"/>
-    <p:sldId id="261" r:id="rId8"/>
-    <p:sldId id="262" r:id="rId9"/>
+    <p:sldId id="273" r:id="rId5"/>
+    <p:sldId id="271" r:id="rId6"/>
+    <p:sldId id="261" r:id="rId7"/>
+    <p:sldId id="269" r:id="rId8"/>
+    <p:sldId id="259" r:id="rId9"/>
     <p:sldId id="263" r:id="rId10"/>
     <p:sldId id="264" r:id="rId11"/>
-    <p:sldId id="265" r:id="rId12"/>
-    <p:sldId id="267" r:id="rId13"/>
+    <p:sldId id="276" r:id="rId12"/>
+    <p:sldId id="275" r:id="rId13"/>
+    <p:sldId id="265" r:id="rId14"/>
+    <p:sldId id="272" r:id="rId15"/>
   </p:sldIdLst>
   <p:sldSz cx="12192000" cy="6858000"/>
   <p:notesSz cx="6858000" cy="9144000"/>
@@ -270,7 +272,7 @@
           <a:p>
             <a:fld id="{E6390BFC-4C86-4A7E-9030-5F942040A976}" type="datetimeFigureOut">
               <a:rPr lang="ru-RU" smtClean="0"/>
-              <a:t>08.06.2026</a:t>
+              <a:t>10.06.2026</a:t>
             </a:fld>
             <a:endParaRPr lang="ru-RU"/>
           </a:p>
@@ -468,7 +470,7 @@
           <a:p>
             <a:fld id="{E6390BFC-4C86-4A7E-9030-5F942040A976}" type="datetimeFigureOut">
               <a:rPr lang="ru-RU" smtClean="0"/>
-              <a:t>08.06.2026</a:t>
+              <a:t>10.06.2026</a:t>
             </a:fld>
             <a:endParaRPr lang="ru-RU"/>
           </a:p>
@@ -676,7 +678,7 @@
           <a:p>
             <a:fld id="{E6390BFC-4C86-4A7E-9030-5F942040A976}" type="datetimeFigureOut">
               <a:rPr lang="ru-RU" smtClean="0"/>
-              <a:t>08.06.2026</a:t>
+              <a:t>10.06.2026</a:t>
             </a:fld>
             <a:endParaRPr lang="ru-RU"/>
           </a:p>
@@ -874,7 +876,7 @@
           <a:p>
             <a:fld id="{E6390BFC-4C86-4A7E-9030-5F942040A976}" type="datetimeFigureOut">
               <a:rPr lang="ru-RU" smtClean="0"/>
-              <a:t>08.06.2026</a:t>
+              <a:t>10.06.2026</a:t>
             </a:fld>
             <a:endParaRPr lang="ru-RU"/>
           </a:p>
@@ -1149,7 +1151,7 @@
           <a:p>
             <a:fld id="{E6390BFC-4C86-4A7E-9030-5F942040A976}" type="datetimeFigureOut">
               <a:rPr lang="ru-RU" smtClean="0"/>
-              <a:t>08.06.2026</a:t>
+              <a:t>10.06.2026</a:t>
             </a:fld>
             <a:endParaRPr lang="ru-RU"/>
           </a:p>
@@ -1414,7 +1416,7 @@
           <a:p>
             <a:fld id="{E6390BFC-4C86-4A7E-9030-5F942040A976}" type="datetimeFigureOut">
               <a:rPr lang="ru-RU" smtClean="0"/>
-              <a:t>08.06.2026</a:t>
+              <a:t>10.06.2026</a:t>
             </a:fld>
             <a:endParaRPr lang="ru-RU"/>
           </a:p>
@@ -1826,7 +1828,7 @@
           <a:p>
             <a:fld id="{E6390BFC-4C86-4A7E-9030-5F942040A976}" type="datetimeFigureOut">
               <a:rPr lang="ru-RU" smtClean="0"/>
-              <a:t>08.06.2026</a:t>
+              <a:t>10.06.2026</a:t>
             </a:fld>
             <a:endParaRPr lang="ru-RU"/>
           </a:p>
@@ -1967,7 +1969,7 @@
           <a:p>
             <a:fld id="{E6390BFC-4C86-4A7E-9030-5F942040A976}" type="datetimeFigureOut">
               <a:rPr lang="ru-RU" smtClean="0"/>
-              <a:t>08.06.2026</a:t>
+              <a:t>10.06.2026</a:t>
             </a:fld>
             <a:endParaRPr lang="ru-RU"/>
           </a:p>
@@ -2080,7 +2082,7 @@
           <a:p>
             <a:fld id="{E6390BFC-4C86-4A7E-9030-5F942040A976}" type="datetimeFigureOut">
               <a:rPr lang="ru-RU" smtClean="0"/>
-              <a:t>08.06.2026</a:t>
+              <a:t>10.06.2026</a:t>
             </a:fld>
             <a:endParaRPr lang="ru-RU"/>
           </a:p>
@@ -2391,7 +2393,7 @@
           <a:p>
             <a:fld id="{E6390BFC-4C86-4A7E-9030-5F942040A976}" type="datetimeFigureOut">
               <a:rPr lang="ru-RU" smtClean="0"/>
-              <a:t>08.06.2026</a:t>
+              <a:t>10.06.2026</a:t>
             </a:fld>
             <a:endParaRPr lang="ru-RU"/>
           </a:p>
@@ -2679,7 +2681,7 @@
           <a:p>
             <a:fld id="{E6390BFC-4C86-4A7E-9030-5F942040A976}" type="datetimeFigureOut">
               <a:rPr lang="ru-RU" smtClean="0"/>
-              <a:t>08.06.2026</a:t>
+              <a:t>10.06.2026</a:t>
             </a:fld>
             <a:endParaRPr lang="ru-RU"/>
           </a:p>
@@ -2920,7 +2922,7 @@
           <a:p>
             <a:fld id="{E6390BFC-4C86-4A7E-9030-5F942040A976}" type="datetimeFigureOut">
               <a:rPr lang="ru-RU" smtClean="0"/>
-              <a:t>08.06.2026</a:t>
+              <a:t>10.06.2026</a:t>
             </a:fld>
             <a:endParaRPr lang="ru-RU"/>
           </a:p>
@@ -3589,70 +3591,6 @@
       </p:grpSpPr>
       <p:sp>
         <p:nvSpPr>
-          <p:cNvPr id="3" name="Google Shape;172;p12">
-            <a:extLst>
-              <a:ext uri="{FF2B5EF4-FFF2-40B4-BE49-F238E27FC236}">
-                <a16:creationId xmlns:a16="http://schemas.microsoft.com/office/drawing/2014/main" id="{66581FA5-FBC4-7261-DDCD-22E60DECE331}"/>
-              </a:ext>
-            </a:extLst>
-          </p:cNvPr>
-          <p:cNvSpPr txBox="1">
-            <a:spLocks noGrp="1"/>
-          </p:cNvSpPr>
-          <p:nvPr>
-            <p:ph type="sldNum" idx="12"/>
-          </p:nvPr>
-        </p:nvSpPr>
-        <p:spPr>
-          <a:xfrm>
-            <a:off x="8610600" y="6356350"/>
-            <a:ext cx="2743200" cy="365125"/>
-          </a:xfrm>
-          <a:prstGeom prst="rect">
-            <a:avLst/>
-          </a:prstGeom>
-          <a:noFill/>
-          <a:ln>
-            <a:noFill/>
-          </a:ln>
-        </p:spPr>
-        <p:txBody>
-          <a:bodyPr spcFirstLastPara="1" wrap="square" lIns="91425" tIns="45700" rIns="91425" bIns="45700" anchor="ctr" anchorCtr="0">
-            <a:noAutofit/>
-          </a:bodyPr>
-          <a:lstStyle/>
-          <a:p>
-            <a:pPr marL="0" lvl="0" indent="0" algn="r" rtl="0">
-              <a:spcBef>
-                <a:spcPts val="0"/>
-              </a:spcBef>
-              <a:spcAft>
-                <a:spcPts val="0"/>
-              </a:spcAft>
-              <a:buNone/>
-            </a:pPr>
-            <a:fld id="{00000000-1234-1234-1234-123412341234}" type="slidenum">
-              <a:rPr lang="ru-RU">
-                <a:solidFill>
-                  <a:schemeClr val="tx1"/>
-                </a:solidFill>
-                <a:latin typeface="Arial" panose="020B0604020202020204" pitchFamily="34" charset="0"/>
-                <a:cs typeface="Arial" panose="020B0604020202020204" pitchFamily="34" charset="0"/>
-              </a:rPr>
-              <a:t>10</a:t>
-            </a:fld>
-            <a:endParaRPr>
-              <a:solidFill>
-                <a:schemeClr val="tx1"/>
-              </a:solidFill>
-              <a:latin typeface="Arial" panose="020B0604020202020204" pitchFamily="34" charset="0"/>
-              <a:cs typeface="Arial" panose="020B0604020202020204" pitchFamily="34" charset="0"/>
-            </a:endParaRPr>
-          </a:p>
-        </p:txBody>
-      </p:sp>
-      <p:sp>
-        <p:nvSpPr>
           <p:cNvPr id="4" name="Google Shape;173;p12">
             <a:extLst>
               <a:ext uri="{FF2B5EF4-FFF2-40B4-BE49-F238E27FC236}">
@@ -3717,11 +3655,11 @@
               <a:buNone/>
             </a:pPr>
             <a:r>
-              <a:rPr lang="ru-RU">
-                <a:latin typeface="Arial" panose="020B0604020202020204" pitchFamily="34" charset="0"/>
-                <a:cs typeface="Arial" panose="020B0604020202020204" pitchFamily="34" charset="0"/>
-              </a:rPr>
-              <a:t>Основные экраны</a:t>
+              <a:rPr lang="ru-RU" dirty="0">
+                <a:latin typeface="Arial" panose="020B0604020202020204" pitchFamily="34" charset="0"/>
+                <a:cs typeface="Arial" panose="020B0604020202020204" pitchFamily="34" charset="0"/>
+              </a:rPr>
+              <a:t>Реализация интерфейса</a:t>
             </a:r>
           </a:p>
         </p:txBody>
@@ -3748,7 +3686,7 @@
         </p:blipFill>
         <p:spPr>
           <a:xfrm>
-            <a:off x="675922" y="1074028"/>
+            <a:off x="2306602" y="1108563"/>
             <a:ext cx="2228350" cy="4894085"/>
           </a:xfrm>
           <a:prstGeom prst="rect">
@@ -3758,14 +3696,21 @@
           <a:ln>
             <a:noFill/>
           </a:ln>
+          <a:effectLst>
+            <a:outerShdw blurRad="50800" dist="38100" dir="2700000" algn="tl" rotWithShape="0">
+              <a:prstClr val="black">
+                <a:alpha val="40000"/>
+              </a:prstClr>
+            </a:outerShdw>
+          </a:effectLst>
         </p:spPr>
       </p:pic>
       <p:pic>
         <p:nvPicPr>
-          <p:cNvPr id="6" name="Google Shape;175;p12">
-            <a:extLst>
-              <a:ext uri="{FF2B5EF4-FFF2-40B4-BE49-F238E27FC236}">
-                <a16:creationId xmlns:a16="http://schemas.microsoft.com/office/drawing/2014/main" id="{21C9AB45-6B29-EE2C-2521-D95B0CD50314}"/>
+          <p:cNvPr id="7" name="Google Shape;176;p12">
+            <a:extLst>
+              <a:ext uri="{FF2B5EF4-FFF2-40B4-BE49-F238E27FC236}">
+                <a16:creationId xmlns:a16="http://schemas.microsoft.com/office/drawing/2014/main" id="{B073929A-11CC-6D1F-1168-32C361AF6DCF}"/>
               </a:ext>
             </a:extLst>
           </p:cNvPr>
@@ -3782,8 +3727,8 @@
         </p:blipFill>
         <p:spPr>
           <a:xfrm>
-            <a:off x="6382263" y="1074066"/>
-            <a:ext cx="2228325" cy="4894020"/>
+            <a:off x="6900515" y="1062843"/>
+            <a:ext cx="2228351" cy="4894085"/>
           </a:xfrm>
           <a:prstGeom prst="rect">
             <a:avLst/>
@@ -3792,32 +3737,249 @@
           <a:ln>
             <a:noFill/>
           </a:ln>
+          <a:effectLst>
+            <a:outerShdw blurRad="50800" dist="38100" dir="2700000" algn="tl" rotWithShape="0">
+              <a:prstClr val="black">
+                <a:alpha val="40000"/>
+              </a:prstClr>
+            </a:outerShdw>
+          </a:effectLst>
         </p:spPr>
       </p:pic>
-      <p:pic>
-        <p:nvPicPr>
-          <p:cNvPr id="7" name="Google Shape;176;p12">
-            <a:extLst>
-              <a:ext uri="{FF2B5EF4-FFF2-40B4-BE49-F238E27FC236}">
-                <a16:creationId xmlns:a16="http://schemas.microsoft.com/office/drawing/2014/main" id="{B073929A-11CC-6D1F-1168-32C361AF6DCF}"/>
-              </a:ext>
-            </a:extLst>
-          </p:cNvPr>
-          <p:cNvPicPr preferRelativeResize="0"/>
+      <p:sp>
+        <p:nvSpPr>
+          <p:cNvPr id="9" name="TextBox 8">
+            <a:extLst>
+              <a:ext uri="{FF2B5EF4-FFF2-40B4-BE49-F238E27FC236}">
+                <a16:creationId xmlns:a16="http://schemas.microsoft.com/office/drawing/2014/main" id="{A0E94919-C1A9-E890-1690-2CC807F03300}"/>
+              </a:ext>
+            </a:extLst>
+          </p:cNvPr>
+          <p:cNvSpPr txBox="1"/>
           <p:nvPr/>
-        </p:nvPicPr>
-        <p:blipFill>
-          <a:blip r:embed="rId4">
-            <a:alphaModFix/>
-          </a:blip>
-          <a:stretch>
-            <a:fillRect/>
-          </a:stretch>
-        </p:blipFill>
+        </p:nvSpPr>
         <p:spPr>
           <a:xfrm>
-            <a:off x="9125447" y="1074028"/>
-            <a:ext cx="2228351" cy="4894085"/>
+            <a:off x="494677" y="3509884"/>
+            <a:ext cx="1258288" cy="383823"/>
+          </a:xfrm>
+          <a:prstGeom prst="rect">
+            <a:avLst/>
+          </a:prstGeom>
+          <a:noFill/>
+        </p:spPr>
+        <p:txBody>
+          <a:bodyPr wrap="square">
+            <a:spAutoFit/>
+          </a:bodyPr>
+          <a:lstStyle/>
+          <a:p>
+            <a:pPr marL="0" marR="0" lvl="1" indent="0" algn="just" rtl="0">
+              <a:lnSpc>
+                <a:spcPct val="115000"/>
+              </a:lnSpc>
+              <a:spcBef>
+                <a:spcPts val="0"/>
+              </a:spcBef>
+              <a:spcAft>
+                <a:spcPts val="0"/>
+              </a:spcAft>
+              <a:buNone/>
+            </a:pPr>
+            <a:r>
+              <a:rPr lang="ru-RU" sz="1800" b="1" i="0" u="none" strike="noStrike" cap="none" dirty="0">
+                <a:latin typeface="Arial" panose="020B0604020202020204" pitchFamily="34" charset="0"/>
+                <a:ea typeface="Arial"/>
+                <a:cs typeface="Arial" panose="020B0604020202020204" pitchFamily="34" charset="0"/>
+                <a:sym typeface="Arial"/>
+              </a:rPr>
+              <a:t>Главная</a:t>
+            </a:r>
+            <a:endParaRPr lang="en-US" b="1" dirty="0">
+              <a:latin typeface="Arial" panose="020B0604020202020204" pitchFamily="34" charset="0"/>
+              <a:cs typeface="Arial" panose="020B0604020202020204" pitchFamily="34" charset="0"/>
+            </a:endParaRPr>
+          </a:p>
+        </p:txBody>
+      </p:sp>
+      <p:sp>
+        <p:nvSpPr>
+          <p:cNvPr id="19" name="Дуга 18">
+            <a:extLst>
+              <a:ext uri="{FF2B5EF4-FFF2-40B4-BE49-F238E27FC236}">
+                <a16:creationId xmlns:a16="http://schemas.microsoft.com/office/drawing/2014/main" id="{5DB538D1-EF7F-0E3F-D9F4-C508E46CD8D4}"/>
+              </a:ext>
+            </a:extLst>
+          </p:cNvPr>
+          <p:cNvSpPr/>
+          <p:nvPr/>
+        </p:nvSpPr>
+        <p:spPr>
+          <a:xfrm rot="16774033">
+            <a:off x="1079414" y="2919576"/>
+            <a:ext cx="1342663" cy="1180617"/>
+          </a:xfrm>
+          <a:prstGeom prst="arc">
+            <a:avLst/>
+          </a:prstGeom>
+          <a:ln w="25400">
+            <a:solidFill>
+              <a:schemeClr val="tx1"/>
+            </a:solidFill>
+            <a:headEnd type="none"/>
+            <a:tailEnd type="triangle"/>
+          </a:ln>
+        </p:spPr>
+        <p:style>
+          <a:lnRef idx="2">
+            <a:schemeClr val="accent1"/>
+          </a:lnRef>
+          <a:fillRef idx="0">
+            <a:schemeClr val="accent1"/>
+          </a:fillRef>
+          <a:effectRef idx="1">
+            <a:schemeClr val="accent1"/>
+          </a:effectRef>
+          <a:fontRef idx="minor">
+            <a:schemeClr val="tx1"/>
+          </a:fontRef>
+        </p:style>
+        <p:txBody>
+          <a:bodyPr rtlCol="0" anchor="ctr"/>
+          <a:lstStyle/>
+          <a:p>
+            <a:pPr algn="ctr"/>
+            <a:endParaRPr lang="ru-RU"/>
+          </a:p>
+        </p:txBody>
+      </p:sp>
+      <p:sp>
+        <p:nvSpPr>
+          <p:cNvPr id="20" name="TextBox 19">
+            <a:extLst>
+              <a:ext uri="{FF2B5EF4-FFF2-40B4-BE49-F238E27FC236}">
+                <a16:creationId xmlns:a16="http://schemas.microsoft.com/office/drawing/2014/main" id="{B24FDBED-3B0D-31D7-AF89-FEC98973978D}"/>
+              </a:ext>
+            </a:extLst>
+          </p:cNvPr>
+          <p:cNvSpPr txBox="1"/>
+          <p:nvPr/>
+        </p:nvSpPr>
+        <p:spPr>
+          <a:xfrm>
+            <a:off x="9548019" y="3662284"/>
+            <a:ext cx="1258288" cy="383823"/>
+          </a:xfrm>
+          <a:prstGeom prst="rect">
+            <a:avLst/>
+          </a:prstGeom>
+          <a:noFill/>
+        </p:spPr>
+        <p:txBody>
+          <a:bodyPr wrap="square">
+            <a:spAutoFit/>
+          </a:bodyPr>
+          <a:lstStyle/>
+          <a:p>
+            <a:pPr marL="0" marR="0" lvl="1" indent="0" algn="just" rtl="0">
+              <a:lnSpc>
+                <a:spcPct val="115000"/>
+              </a:lnSpc>
+              <a:spcBef>
+                <a:spcPts val="0"/>
+              </a:spcBef>
+              <a:spcAft>
+                <a:spcPts val="0"/>
+              </a:spcAft>
+              <a:buNone/>
+            </a:pPr>
+            <a:r>
+              <a:rPr lang="ru-RU" sz="1800" b="1" i="0" u="none" strike="noStrike" cap="none" dirty="0">
+                <a:latin typeface="Arial" panose="020B0604020202020204" pitchFamily="34" charset="0"/>
+                <a:ea typeface="Arial"/>
+                <a:cs typeface="Arial" panose="020B0604020202020204" pitchFamily="34" charset="0"/>
+                <a:sym typeface="Arial"/>
+              </a:rPr>
+              <a:t>Профиль</a:t>
+            </a:r>
+            <a:endParaRPr lang="en-US" b="1" dirty="0">
+              <a:latin typeface="Arial" panose="020B0604020202020204" pitchFamily="34" charset="0"/>
+              <a:cs typeface="Arial" panose="020B0604020202020204" pitchFamily="34" charset="0"/>
+            </a:endParaRPr>
+          </a:p>
+        </p:txBody>
+      </p:sp>
+      <p:sp>
+        <p:nvSpPr>
+          <p:cNvPr id="21" name="Дуга 20">
+            <a:extLst>
+              <a:ext uri="{FF2B5EF4-FFF2-40B4-BE49-F238E27FC236}">
+                <a16:creationId xmlns:a16="http://schemas.microsoft.com/office/drawing/2014/main" id="{89D1D2C3-0F07-2044-CDDD-B7E7F57A4300}"/>
+              </a:ext>
+            </a:extLst>
+          </p:cNvPr>
+          <p:cNvSpPr/>
+          <p:nvPr/>
+        </p:nvSpPr>
+        <p:spPr>
+          <a:xfrm rot="911681">
+            <a:off x="8752462" y="2672553"/>
+            <a:ext cx="1342663" cy="1180617"/>
+          </a:xfrm>
+          <a:prstGeom prst="arc">
+            <a:avLst/>
+          </a:prstGeom>
+          <a:ln w="25400">
+            <a:solidFill>
+              <a:schemeClr val="tx1"/>
+            </a:solidFill>
+            <a:headEnd type="triangle"/>
+            <a:tailEnd type="none"/>
+          </a:ln>
+        </p:spPr>
+        <p:style>
+          <a:lnRef idx="2">
+            <a:schemeClr val="accent1"/>
+          </a:lnRef>
+          <a:fillRef idx="0">
+            <a:schemeClr val="accent1"/>
+          </a:fillRef>
+          <a:effectRef idx="1">
+            <a:schemeClr val="accent1"/>
+          </a:effectRef>
+          <a:fontRef idx="minor">
+            <a:schemeClr val="tx1"/>
+          </a:fontRef>
+        </p:style>
+        <p:txBody>
+          <a:bodyPr rtlCol="0" anchor="ctr"/>
+          <a:lstStyle/>
+          <a:p>
+            <a:pPr algn="ctr"/>
+            <a:endParaRPr lang="ru-RU"/>
+          </a:p>
+        </p:txBody>
+      </p:sp>
+      <p:sp>
+        <p:nvSpPr>
+          <p:cNvPr id="23" name="Google Shape;71;p5">
+            <a:extLst>
+              <a:ext uri="{FF2B5EF4-FFF2-40B4-BE49-F238E27FC236}">
+                <a16:creationId xmlns:a16="http://schemas.microsoft.com/office/drawing/2014/main" id="{4EBE4419-6B0A-2725-3C9E-1F28D6BB8835}"/>
+              </a:ext>
+            </a:extLst>
+          </p:cNvPr>
+          <p:cNvSpPr txBox="1">
+            <a:spLocks noGrp="1"/>
+          </p:cNvSpPr>
+          <p:nvPr>
+            <p:ph type="sldNum" idx="12"/>
+          </p:nvPr>
+        </p:nvSpPr>
+        <p:spPr>
+          <a:xfrm>
+            <a:off x="8610600" y="6308204"/>
+            <a:ext cx="3251106" cy="413272"/>
           </a:xfrm>
           <a:prstGeom prst="rect">
             <a:avLst/>
@@ -3827,41 +3989,61 @@
             <a:noFill/>
           </a:ln>
         </p:spPr>
-      </p:pic>
-      <p:pic>
-        <p:nvPicPr>
-          <p:cNvPr id="8" name="Google Shape;177;p12">
-            <a:extLst>
-              <a:ext uri="{FF2B5EF4-FFF2-40B4-BE49-F238E27FC236}">
-                <a16:creationId xmlns:a16="http://schemas.microsoft.com/office/drawing/2014/main" id="{1914963E-834B-0398-F23E-D74E38A8B1C5}"/>
-              </a:ext>
-            </a:extLst>
-          </p:cNvPr>
-          <p:cNvPicPr preferRelativeResize="0"/>
-          <p:nvPr/>
-        </p:nvPicPr>
-        <p:blipFill>
-          <a:blip r:embed="rId5">
-            <a:alphaModFix/>
-          </a:blip>
-          <a:stretch>
-            <a:fillRect/>
-          </a:stretch>
-        </p:blipFill>
-        <p:spPr>
-          <a:xfrm>
-            <a:off x="3581397" y="1074070"/>
-            <a:ext cx="2228325" cy="4894029"/>
-          </a:xfrm>
-          <a:prstGeom prst="rect">
-            <a:avLst/>
-          </a:prstGeom>
-          <a:noFill/>
-          <a:ln>
-            <a:noFill/>
-          </a:ln>
-        </p:spPr>
-      </p:pic>
+        <p:txBody>
+          <a:bodyPr spcFirstLastPara="1" wrap="square" lIns="91425" tIns="45700" rIns="91425" bIns="45700" anchor="ctr" anchorCtr="0">
+            <a:noAutofit/>
+          </a:bodyPr>
+          <a:lstStyle/>
+          <a:p>
+            <a:pPr marL="0" lvl="0" indent="0" algn="r" rtl="0">
+              <a:spcBef>
+                <a:spcPts val="0"/>
+              </a:spcBef>
+              <a:spcAft>
+                <a:spcPts val="0"/>
+              </a:spcAft>
+              <a:buNone/>
+            </a:pPr>
+            <a:fld id="{00000000-1234-1234-1234-123412341234}" type="slidenum">
+              <a:rPr lang="ru-RU" sz="1400" smtClean="0">
+                <a:solidFill>
+                  <a:schemeClr val="tx1"/>
+                </a:solidFill>
+                <a:latin typeface="Arial" panose="020B0604020202020204" pitchFamily="34" charset="0"/>
+                <a:cs typeface="Arial" panose="020B0604020202020204" pitchFamily="34" charset="0"/>
+              </a:rPr>
+              <a:t>10</a:t>
+            </a:fld>
+            <a:r>
+              <a:rPr lang="en-US" sz="1400" dirty="0">
+                <a:solidFill>
+                  <a:schemeClr val="tx1"/>
+                </a:solidFill>
+                <a:latin typeface="Arial" panose="020B0604020202020204" pitchFamily="34" charset="0"/>
+                <a:cs typeface="Arial" panose="020B0604020202020204" pitchFamily="34" charset="0"/>
+              </a:rPr>
+              <a:t>/1</a:t>
+            </a:r>
+            <a:r>
+              <a:rPr lang="ru-RU" sz="1400" dirty="0">
+                <a:solidFill>
+                  <a:schemeClr val="tx1"/>
+                </a:solidFill>
+                <a:latin typeface="Arial" panose="020B0604020202020204" pitchFamily="34" charset="0"/>
+                <a:cs typeface="Arial" panose="020B0604020202020204" pitchFamily="34" charset="0"/>
+              </a:rPr>
+              <a:t>3</a:t>
+            </a:r>
+            <a:endParaRPr sz="1400" dirty="0">
+              <a:solidFill>
+                <a:schemeClr val="tx1"/>
+              </a:solidFill>
+              <a:latin typeface="Arial" panose="020B0604020202020204" pitchFamily="34" charset="0"/>
+              <a:cs typeface="Arial" panose="020B0604020202020204" pitchFamily="34" charset="0"/>
+            </a:endParaRPr>
+          </a:p>
+        </p:txBody>
+      </p:sp>
     </p:spTree>
     <p:extLst>
       <p:ext uri="{BB962C8B-B14F-4D97-AF65-F5344CB8AC3E}">
@@ -3894,74 +4076,10 @@
       </p:grpSpPr>
       <p:sp>
         <p:nvSpPr>
-          <p:cNvPr id="3" name="Google Shape;183;p13">
-            <a:extLst>
-              <a:ext uri="{FF2B5EF4-FFF2-40B4-BE49-F238E27FC236}">
-                <a16:creationId xmlns:a16="http://schemas.microsoft.com/office/drawing/2014/main" id="{0548F77D-024B-F6C5-4264-2526BDDCA981}"/>
-              </a:ext>
-            </a:extLst>
-          </p:cNvPr>
-          <p:cNvSpPr txBox="1">
-            <a:spLocks noGrp="1"/>
-          </p:cNvSpPr>
-          <p:nvPr>
-            <p:ph type="sldNum" idx="12"/>
-          </p:nvPr>
-        </p:nvSpPr>
-        <p:spPr>
-          <a:xfrm>
-            <a:off x="8610600" y="6356350"/>
-            <a:ext cx="2743200" cy="365125"/>
-          </a:xfrm>
-          <a:prstGeom prst="rect">
-            <a:avLst/>
-          </a:prstGeom>
-          <a:noFill/>
-          <a:ln>
-            <a:noFill/>
-          </a:ln>
-        </p:spPr>
-        <p:txBody>
-          <a:bodyPr spcFirstLastPara="1" wrap="square" lIns="91425" tIns="45700" rIns="91425" bIns="45700" anchor="ctr" anchorCtr="0">
-            <a:noAutofit/>
-          </a:bodyPr>
-          <a:lstStyle/>
-          <a:p>
-            <a:pPr marL="0" lvl="0" indent="0" algn="r" rtl="0">
-              <a:spcBef>
-                <a:spcPts val="0"/>
-              </a:spcBef>
-              <a:spcAft>
-                <a:spcPts val="0"/>
-              </a:spcAft>
-              <a:buNone/>
-            </a:pPr>
-            <a:fld id="{00000000-1234-1234-1234-123412341234}" type="slidenum">
-              <a:rPr lang="ru-RU">
-                <a:solidFill>
-                  <a:schemeClr val="tx1"/>
-                </a:solidFill>
-                <a:latin typeface="Arial" panose="020B0604020202020204" pitchFamily="34" charset="0"/>
-                <a:cs typeface="Arial" panose="020B0604020202020204" pitchFamily="34" charset="0"/>
-              </a:rPr>
-              <a:t>11</a:t>
-            </a:fld>
-            <a:endParaRPr>
-              <a:solidFill>
-                <a:schemeClr val="tx1"/>
-              </a:solidFill>
-              <a:latin typeface="Arial" panose="020B0604020202020204" pitchFamily="34" charset="0"/>
-              <a:cs typeface="Arial" panose="020B0604020202020204" pitchFamily="34" charset="0"/>
-            </a:endParaRPr>
-          </a:p>
-        </p:txBody>
-      </p:sp>
-      <p:sp>
-        <p:nvSpPr>
-          <p:cNvPr id="4" name="Google Shape;184;p13">
-            <a:extLst>
-              <a:ext uri="{FF2B5EF4-FFF2-40B4-BE49-F238E27FC236}">
-                <a16:creationId xmlns:a16="http://schemas.microsoft.com/office/drawing/2014/main" id="{6FB9703A-FF9A-000F-1549-2A26868FCA42}"/>
+          <p:cNvPr id="4" name="Google Shape;173;p12">
+            <a:extLst>
+              <a:ext uri="{FF2B5EF4-FFF2-40B4-BE49-F238E27FC236}">
+                <a16:creationId xmlns:a16="http://schemas.microsoft.com/office/drawing/2014/main" id="{F1D3D133-B7E7-1344-25DB-1B80C37CA510}"/>
               </a:ext>
             </a:extLst>
           </p:cNvPr>
@@ -4022,31 +4140,39 @@
               <a:buNone/>
             </a:pPr>
             <a:r>
-              <a:rPr lang="ru-RU">
-                <a:latin typeface="Arial" panose="020B0604020202020204" pitchFamily="34" charset="0"/>
-                <a:cs typeface="Arial" panose="020B0604020202020204" pitchFamily="34" charset="0"/>
-              </a:rPr>
-              <a:t>Заключение</a:t>
-            </a:r>
-          </a:p>
-        </p:txBody>
-      </p:sp>
-      <p:sp>
-        <p:nvSpPr>
-          <p:cNvPr id="5" name="Google Shape;185;p13">
-            <a:extLst>
-              <a:ext uri="{FF2B5EF4-FFF2-40B4-BE49-F238E27FC236}">
-                <a16:creationId xmlns:a16="http://schemas.microsoft.com/office/drawing/2014/main" id="{B5A52987-F053-1AC8-8F26-53A6D1B36963}"/>
-              </a:ext>
-            </a:extLst>
-          </p:cNvPr>
-          <p:cNvSpPr txBox="1"/>
+              <a:rPr lang="ru-RU" dirty="0">
+                <a:latin typeface="Arial" panose="020B0604020202020204" pitchFamily="34" charset="0"/>
+                <a:cs typeface="Arial" panose="020B0604020202020204" pitchFamily="34" charset="0"/>
+              </a:rPr>
+              <a:t>Реализация интерфейса</a:t>
+            </a:r>
+          </a:p>
+        </p:txBody>
+      </p:sp>
+      <p:pic>
+        <p:nvPicPr>
+          <p:cNvPr id="8" name="Google Shape;177;p12">
+            <a:extLst>
+              <a:ext uri="{FF2B5EF4-FFF2-40B4-BE49-F238E27FC236}">
+                <a16:creationId xmlns:a16="http://schemas.microsoft.com/office/drawing/2014/main" id="{1914963E-834B-0398-F23E-D74E38A8B1C5}"/>
+              </a:ext>
+            </a:extLst>
+          </p:cNvPr>
+          <p:cNvPicPr preferRelativeResize="0"/>
           <p:nvPr/>
-        </p:nvSpPr>
+        </p:nvPicPr>
+        <p:blipFill>
+          <a:blip r:embed="rId2">
+            <a:alphaModFix/>
+          </a:blip>
+          <a:stretch>
+            <a:fillRect/>
+          </a:stretch>
+        </p:blipFill>
         <p:spPr>
           <a:xfrm>
-            <a:off x="838200" y="1679512"/>
-            <a:ext cx="10582469" cy="1785064"/>
+            <a:off x="1386837" y="1103905"/>
+            <a:ext cx="2228325" cy="4894029"/>
           </a:xfrm>
           <a:prstGeom prst="rect">
             <a:avLst/>
@@ -4055,14 +4181,140 @@
           <a:ln>
             <a:noFill/>
           </a:ln>
-        </p:spPr>
-        <p:txBody>
-          <a:bodyPr spcFirstLastPara="1" wrap="square" lIns="91425" tIns="45700" rIns="91425" bIns="45700" anchor="t" anchorCtr="0">
+          <a:effectLst>
+            <a:outerShdw blurRad="50800" dist="38100" dir="2700000" algn="tl" rotWithShape="0">
+              <a:prstClr val="black">
+                <a:alpha val="40000"/>
+              </a:prstClr>
+            </a:outerShdw>
+          </a:effectLst>
+        </p:spPr>
+      </p:pic>
+      <p:pic>
+        <p:nvPicPr>
+          <p:cNvPr id="9" name="Рисунок 8" descr="Изображение выглядит как текст, снимок экрана, программное обеспечение, число&#10;&#10;Автоматически созданное описание">
+            <a:extLst>
+              <a:ext uri="{FF2B5EF4-FFF2-40B4-BE49-F238E27FC236}">
+                <a16:creationId xmlns:a16="http://schemas.microsoft.com/office/drawing/2014/main" id="{A09ADEB3-8860-6BAC-2C20-A72C3A025AF8}"/>
+              </a:ext>
+            </a:extLst>
+          </p:cNvPr>
+          <p:cNvPicPr>
+            <a:picLocks noChangeAspect="1"/>
+          </p:cNvPicPr>
+          <p:nvPr/>
+        </p:nvPicPr>
+        <p:blipFill>
+          <a:blip r:embed="rId3" cstate="print">
+            <a:extLst>
+              <a:ext uri="{28A0092B-C50C-407E-A947-70E740481C1C}">
+                <a14:useLocalDpi xmlns:a14="http://schemas.microsoft.com/office/drawing/2010/main" val="0"/>
+              </a:ext>
+            </a:extLst>
+          </a:blip>
+          <a:stretch>
+            <a:fillRect/>
+          </a:stretch>
+        </p:blipFill>
+        <p:spPr>
+          <a:xfrm>
+            <a:off x="5311149" y="1103904"/>
+            <a:ext cx="2228409" cy="4894029"/>
+          </a:xfrm>
+          <a:prstGeom prst="rect">
+            <a:avLst/>
+          </a:prstGeom>
+          <a:effectLst>
+            <a:outerShdw blurRad="50800" dist="38100" dir="2700000" algn="tl" rotWithShape="0">
+              <a:prstClr val="black">
+                <a:alpha val="40000"/>
+              </a:prstClr>
+            </a:outerShdw>
+          </a:effectLst>
+        </p:spPr>
+      </p:pic>
+      <p:pic>
+        <p:nvPicPr>
+          <p:cNvPr id="10" name="Рисунок 9" descr="Изображение выглядит как текст, облако, небо, снимок экрана&#10;&#10;Автоматически созданное описание">
+            <a:extLst>
+              <a:ext uri="{FF2B5EF4-FFF2-40B4-BE49-F238E27FC236}">
+                <a16:creationId xmlns:a16="http://schemas.microsoft.com/office/drawing/2014/main" id="{79B005D0-C2FC-2E6F-97FC-BCD92B141CA2}"/>
+              </a:ext>
+            </a:extLst>
+          </p:cNvPr>
+          <p:cNvPicPr>
+            <a:picLocks noChangeAspect="1"/>
+          </p:cNvPicPr>
+          <p:nvPr/>
+        </p:nvPicPr>
+        <p:blipFill rotWithShape="1">
+          <a:blip r:embed="rId4">
+            <a:extLst>
+              <a:ext uri="{28A0092B-C50C-407E-A947-70E740481C1C}">
+                <a14:useLocalDpi xmlns:a14="http://schemas.microsoft.com/office/drawing/2010/main" val="0"/>
+              </a:ext>
+            </a:extLst>
+          </a:blip>
+          <a:srcRect t="25425" b="64093"/>
+          <a:stretch/>
+        </p:blipFill>
+        <p:spPr bwMode="auto">
+          <a:xfrm>
+            <a:off x="8430577" y="1103904"/>
+            <a:ext cx="3103245" cy="714375"/>
+          </a:xfrm>
+          <a:prstGeom prst="rect">
+            <a:avLst/>
+          </a:prstGeom>
+          <a:ln>
+            <a:noFill/>
+          </a:ln>
+          <a:effectLst>
+            <a:outerShdw blurRad="50800" dist="38100" dir="2700000" algn="tl" rotWithShape="0">
+              <a:prstClr val="black">
+                <a:alpha val="40000"/>
+              </a:prstClr>
+            </a:outerShdw>
+          </a:effectLst>
+          <a:extLst>
+            <a:ext uri="{53640926-AAD7-44D8-BBD7-CCE9431645EC}">
+              <a14:shadowObscured xmlns:a14="http://schemas.microsoft.com/office/drawing/2010/main"/>
+            </a:ext>
+          </a:extLst>
+        </p:spPr>
+      </p:pic>
+      <p:sp>
+        <p:nvSpPr>
+          <p:cNvPr id="2" name="TextBox 1">
+            <a:extLst>
+              <a:ext uri="{FF2B5EF4-FFF2-40B4-BE49-F238E27FC236}">
+                <a16:creationId xmlns:a16="http://schemas.microsoft.com/office/drawing/2014/main" id="{8798BCD1-2D19-3D34-1777-A7BA7FC1F093}"/>
+              </a:ext>
+            </a:extLst>
+          </p:cNvPr>
+          <p:cNvSpPr txBox="1"/>
+          <p:nvPr/>
+        </p:nvSpPr>
+        <p:spPr>
+          <a:xfrm>
+            <a:off x="128549" y="2570512"/>
+            <a:ext cx="1258288" cy="702372"/>
+          </a:xfrm>
+          <a:prstGeom prst="rect">
+            <a:avLst/>
+          </a:prstGeom>
+          <a:noFill/>
+        </p:spPr>
+        <p:txBody>
+          <a:bodyPr wrap="square">
             <a:spAutoFit/>
           </a:bodyPr>
           <a:lstStyle/>
           <a:p>
-            <a:pPr marL="0" marR="0" lvl="0" indent="0" algn="just" rtl="0">
+            <a:pPr marL="0" marR="0" lvl="1" indent="0" algn="just" rtl="0">
+              <a:lnSpc>
+                <a:spcPct val="115000"/>
+              </a:lnSpc>
               <a:spcBef>
                 <a:spcPts val="0"/>
               </a:spcBef>
@@ -4072,66 +4324,104 @@
               <a:buNone/>
             </a:pPr>
             <a:r>
-              <a:rPr lang="ru-RU" sz="2300" b="0" i="0" dirty="0">
+              <a:rPr lang="ru-RU" sz="1800" b="1" i="0" u="none" strike="noStrike" cap="none" dirty="0">
                 <a:latin typeface="Arial" panose="020B0604020202020204" pitchFamily="34" charset="0"/>
                 <a:ea typeface="Arial"/>
                 <a:cs typeface="Arial" panose="020B0604020202020204" pitchFamily="34" charset="0"/>
                 <a:sym typeface="Arial"/>
               </a:rPr>
-              <a:t>	В результате выполнения работы было разработано мобильное приложение «</a:t>
-            </a:r>
-            <a:r>
-              <a:rPr lang="ru-RU" sz="2300" b="0" i="0" dirty="0" err="1">
-                <a:latin typeface="Arial" panose="020B0604020202020204" pitchFamily="34" charset="0"/>
-                <a:ea typeface="Arial"/>
-                <a:cs typeface="Arial" panose="020B0604020202020204" pitchFamily="34" charset="0"/>
-                <a:sym typeface="Arial"/>
-              </a:rPr>
-              <a:t>Pet</a:t>
-            </a:r>
-            <a:r>
-              <a:rPr lang="ru-RU" sz="2300" b="0" i="0" dirty="0">
-                <a:latin typeface="Arial" panose="020B0604020202020204" pitchFamily="34" charset="0"/>
-                <a:ea typeface="Arial"/>
-                <a:cs typeface="Arial" panose="020B0604020202020204" pitchFamily="34" charset="0"/>
-                <a:sym typeface="Arial"/>
-              </a:rPr>
-              <a:t> </a:t>
-            </a:r>
-            <a:r>
-              <a:rPr lang="ru-RU" sz="2300" b="0" i="0" dirty="0" err="1">
-                <a:latin typeface="Arial" panose="020B0604020202020204" pitchFamily="34" charset="0"/>
-                <a:ea typeface="Arial"/>
-                <a:cs typeface="Arial" panose="020B0604020202020204" pitchFamily="34" charset="0"/>
-                <a:sym typeface="Arial"/>
-              </a:rPr>
-              <a:t>Diary</a:t>
-            </a:r>
-            <a:r>
-              <a:rPr lang="ru-RU" sz="2300" b="0" i="0" dirty="0">
-                <a:latin typeface="Arial" panose="020B0604020202020204" pitchFamily="34" charset="0"/>
-                <a:ea typeface="Arial"/>
-                <a:cs typeface="Arial" panose="020B0604020202020204" pitchFamily="34" charset="0"/>
-                <a:sym typeface="Arial"/>
-              </a:rPr>
-              <a:t>», которое полностью соответствует поставленным целям и задачам.</a:t>
-            </a:r>
-            <a:r>
-              <a:rPr lang="ru-RU" sz="1800" dirty="0">
-                <a:latin typeface="Arial" panose="020B0604020202020204" pitchFamily="34" charset="0"/>
-                <a:ea typeface="Times New Roman"/>
-                <a:cs typeface="Arial" panose="020B0604020202020204" pitchFamily="34" charset="0"/>
-                <a:sym typeface="Times New Roman"/>
-              </a:rPr>
-              <a:t> </a:t>
-            </a:r>
-            <a:endParaRPr dirty="0">
+              <a:t>Экран событий</a:t>
+            </a:r>
+            <a:endParaRPr lang="en-US" b="1" dirty="0">
               <a:latin typeface="Arial" panose="020B0604020202020204" pitchFamily="34" charset="0"/>
               <a:cs typeface="Arial" panose="020B0604020202020204" pitchFamily="34" charset="0"/>
             </a:endParaRPr>
           </a:p>
-          <a:p>
-            <a:pPr marL="0" marR="0" lvl="0" indent="0" algn="just" rtl="0">
+        </p:txBody>
+      </p:sp>
+      <p:sp>
+        <p:nvSpPr>
+          <p:cNvPr id="5" name="Дуга 4">
+            <a:extLst>
+              <a:ext uri="{FF2B5EF4-FFF2-40B4-BE49-F238E27FC236}">
+                <a16:creationId xmlns:a16="http://schemas.microsoft.com/office/drawing/2014/main" id="{6F87922E-EB1F-F4A0-CFEC-A10219545CFC}"/>
+              </a:ext>
+            </a:extLst>
+          </p:cNvPr>
+          <p:cNvSpPr/>
+          <p:nvPr/>
+        </p:nvSpPr>
+        <p:spPr>
+          <a:xfrm rot="16774033">
+            <a:off x="198218" y="1869683"/>
+            <a:ext cx="1669708" cy="994609"/>
+          </a:xfrm>
+          <a:prstGeom prst="arc">
+            <a:avLst/>
+          </a:prstGeom>
+          <a:ln w="25400">
+            <a:solidFill>
+              <a:schemeClr val="tx1"/>
+            </a:solidFill>
+            <a:headEnd type="none"/>
+            <a:tailEnd type="triangle"/>
+          </a:ln>
+        </p:spPr>
+        <p:style>
+          <a:lnRef idx="2">
+            <a:schemeClr val="accent1"/>
+          </a:lnRef>
+          <a:fillRef idx="0">
+            <a:schemeClr val="accent1"/>
+          </a:fillRef>
+          <a:effectRef idx="1">
+            <a:schemeClr val="accent1"/>
+          </a:effectRef>
+          <a:fontRef idx="minor">
+            <a:schemeClr val="tx1"/>
+          </a:fontRef>
+        </p:style>
+        <p:txBody>
+          <a:bodyPr rtlCol="0" anchor="ctr"/>
+          <a:lstStyle/>
+          <a:p>
+            <a:pPr algn="ctr"/>
+            <a:endParaRPr lang="ru-RU" dirty="0"/>
+          </a:p>
+        </p:txBody>
+      </p:sp>
+      <p:sp>
+        <p:nvSpPr>
+          <p:cNvPr id="6" name="TextBox 5">
+            <a:extLst>
+              <a:ext uri="{FF2B5EF4-FFF2-40B4-BE49-F238E27FC236}">
+                <a16:creationId xmlns:a16="http://schemas.microsoft.com/office/drawing/2014/main" id="{42F2DF28-6A21-396F-AF4A-C0D0C8CC0218}"/>
+              </a:ext>
+            </a:extLst>
+          </p:cNvPr>
+          <p:cNvSpPr txBox="1"/>
+          <p:nvPr/>
+        </p:nvSpPr>
+        <p:spPr>
+          <a:xfrm>
+            <a:off x="8191232" y="4405254"/>
+            <a:ext cx="1725726" cy="702372"/>
+          </a:xfrm>
+          <a:prstGeom prst="rect">
+            <a:avLst/>
+          </a:prstGeom>
+          <a:noFill/>
+        </p:spPr>
+        <p:txBody>
+          <a:bodyPr wrap="square">
+            <a:spAutoFit/>
+          </a:bodyPr>
+          <a:lstStyle/>
+          <a:p>
+            <a:pPr marL="0" marR="0" lvl="1" indent="0" algn="just" rtl="0">
+              <a:lnSpc>
+                <a:spcPct val="115000"/>
+              </a:lnSpc>
               <a:spcBef>
                 <a:spcPts val="0"/>
               </a:spcBef>
@@ -4140,15 +4430,105 @@
               </a:spcAft>
               <a:buNone/>
             </a:pPr>
-            <a:endParaRPr sz="1800" dirty="0">
+            <a:r>
+              <a:rPr lang="ru-RU" sz="1800" b="1" i="0" u="none" strike="noStrike" cap="none" dirty="0">
+                <a:latin typeface="Arial" panose="020B0604020202020204" pitchFamily="34" charset="0"/>
+                <a:ea typeface="Arial"/>
+                <a:cs typeface="Arial" panose="020B0604020202020204" pitchFamily="34" charset="0"/>
+                <a:sym typeface="Arial"/>
+              </a:rPr>
+              <a:t>Создать напоминание</a:t>
+            </a:r>
+            <a:endParaRPr lang="en-US" b="1" dirty="0">
               <a:latin typeface="Arial" panose="020B0604020202020204" pitchFamily="34" charset="0"/>
-              <a:ea typeface="Times New Roman"/>
               <a:cs typeface="Arial" panose="020B0604020202020204" pitchFamily="34" charset="0"/>
-              <a:sym typeface="Times New Roman"/>
             </a:endParaRPr>
           </a:p>
-          <a:p>
-            <a:pPr marL="0" marR="0" lvl="0" indent="0" algn="just" rtl="0">
+        </p:txBody>
+      </p:sp>
+      <p:sp>
+        <p:nvSpPr>
+          <p:cNvPr id="7" name="Дуга 6">
+            <a:extLst>
+              <a:ext uri="{FF2B5EF4-FFF2-40B4-BE49-F238E27FC236}">
+                <a16:creationId xmlns:a16="http://schemas.microsoft.com/office/drawing/2014/main" id="{C7832665-746E-F272-1D9A-15CC3250924B}"/>
+              </a:ext>
+            </a:extLst>
+          </p:cNvPr>
+          <p:cNvSpPr/>
+          <p:nvPr/>
+        </p:nvSpPr>
+        <p:spPr>
+          <a:xfrm rot="21133381">
+            <a:off x="7456094" y="3841595"/>
+            <a:ext cx="1342663" cy="1180617"/>
+          </a:xfrm>
+          <a:prstGeom prst="arc">
+            <a:avLst/>
+          </a:prstGeom>
+          <a:ln w="25400">
+            <a:solidFill>
+              <a:schemeClr val="tx1"/>
+            </a:solidFill>
+            <a:headEnd type="triangle"/>
+            <a:tailEnd type="none"/>
+          </a:ln>
+        </p:spPr>
+        <p:style>
+          <a:lnRef idx="2">
+            <a:schemeClr val="accent1"/>
+          </a:lnRef>
+          <a:fillRef idx="0">
+            <a:schemeClr val="accent1"/>
+          </a:fillRef>
+          <a:effectRef idx="1">
+            <a:schemeClr val="accent1"/>
+          </a:effectRef>
+          <a:fontRef idx="minor">
+            <a:schemeClr val="tx1"/>
+          </a:fontRef>
+        </p:style>
+        <p:txBody>
+          <a:bodyPr rtlCol="0" anchor="ctr"/>
+          <a:lstStyle/>
+          <a:p>
+            <a:pPr algn="ctr"/>
+            <a:endParaRPr lang="ru-RU"/>
+          </a:p>
+        </p:txBody>
+      </p:sp>
+      <p:sp>
+        <p:nvSpPr>
+          <p:cNvPr id="11" name="TextBox 10">
+            <a:extLst>
+              <a:ext uri="{FF2B5EF4-FFF2-40B4-BE49-F238E27FC236}">
+                <a16:creationId xmlns:a16="http://schemas.microsoft.com/office/drawing/2014/main" id="{E23E4B83-C86D-7ED3-F430-827455315727}"/>
+              </a:ext>
+            </a:extLst>
+          </p:cNvPr>
+          <p:cNvSpPr txBox="1"/>
+          <p:nvPr/>
+        </p:nvSpPr>
+        <p:spPr>
+          <a:xfrm>
+            <a:off x="9887199" y="2772707"/>
+            <a:ext cx="1835928" cy="383823"/>
+          </a:xfrm>
+          <a:prstGeom prst="rect">
+            <a:avLst/>
+          </a:prstGeom>
+          <a:noFill/>
+        </p:spPr>
+        <p:txBody>
+          <a:bodyPr wrap="square">
+            <a:spAutoFit/>
+          </a:bodyPr>
+          <a:lstStyle/>
+          <a:p>
+            <a:pPr marL="0" marR="0" lvl="1" indent="0" algn="just" rtl="0">
+              <a:lnSpc>
+                <a:spcPct val="115000"/>
+              </a:lnSpc>
               <a:spcBef>
                 <a:spcPts val="0"/>
               </a:spcBef>
@@ -4158,39 +4538,92 @@
               <a:buNone/>
             </a:pPr>
             <a:r>
-              <a:rPr lang="ru-RU" sz="2300" b="0" i="0" dirty="0">
+              <a:rPr lang="ru-RU" sz="1800" b="1" i="0" u="none" strike="noStrike" cap="none" dirty="0">
                 <a:latin typeface="Arial" panose="020B0604020202020204" pitchFamily="34" charset="0"/>
                 <a:ea typeface="Arial"/>
                 <a:cs typeface="Arial" panose="020B0604020202020204" pitchFamily="34" charset="0"/>
                 <a:sym typeface="Arial"/>
               </a:rPr>
-              <a:t>	</a:t>
-            </a:r>
-            <a:endParaRPr sz="2300" dirty="0">
+              <a:t>Уведомление</a:t>
+            </a:r>
+            <a:endParaRPr lang="en-US" b="1" dirty="0">
               <a:latin typeface="Arial" panose="020B0604020202020204" pitchFamily="34" charset="0"/>
-              <a:ea typeface="Arial"/>
               <a:cs typeface="Arial" panose="020B0604020202020204" pitchFamily="34" charset="0"/>
-              <a:sym typeface="Arial"/>
             </a:endParaRPr>
           </a:p>
         </p:txBody>
       </p:sp>
       <p:sp>
         <p:nvSpPr>
-          <p:cNvPr id="2" name="Google Shape;89;p6">
-            <a:extLst>
-              <a:ext uri="{FF2B5EF4-FFF2-40B4-BE49-F238E27FC236}">
-                <a16:creationId xmlns:a16="http://schemas.microsoft.com/office/drawing/2014/main" id="{BAF7F9CB-01CD-E97D-E0D8-A0048D83CB0B}"/>
-              </a:ext>
-            </a:extLst>
-          </p:cNvPr>
-          <p:cNvSpPr txBox="1"/>
+          <p:cNvPr id="12" name="Дуга 11">
+            <a:extLst>
+              <a:ext uri="{FF2B5EF4-FFF2-40B4-BE49-F238E27FC236}">
+                <a16:creationId xmlns:a16="http://schemas.microsoft.com/office/drawing/2014/main" id="{FE095867-3C92-4B67-82EC-88F7D5ECC97C}"/>
+              </a:ext>
+            </a:extLst>
+          </p:cNvPr>
+          <p:cNvSpPr/>
           <p:nvPr/>
         </p:nvSpPr>
         <p:spPr>
+          <a:xfrm rot="911681">
+            <a:off x="9717231" y="2027400"/>
+            <a:ext cx="736305" cy="1258406"/>
+          </a:xfrm>
+          <a:prstGeom prst="arc">
+            <a:avLst/>
+          </a:prstGeom>
+          <a:ln w="25400">
+            <a:solidFill>
+              <a:schemeClr val="tx1"/>
+            </a:solidFill>
+            <a:headEnd type="triangle"/>
+            <a:tailEnd type="none"/>
+          </a:ln>
+        </p:spPr>
+        <p:style>
+          <a:lnRef idx="2">
+            <a:schemeClr val="accent1"/>
+          </a:lnRef>
+          <a:fillRef idx="0">
+            <a:schemeClr val="accent1"/>
+          </a:fillRef>
+          <a:effectRef idx="1">
+            <a:schemeClr val="accent1"/>
+          </a:effectRef>
+          <a:fontRef idx="minor">
+            <a:schemeClr val="tx1"/>
+          </a:fontRef>
+        </p:style>
+        <p:txBody>
+          <a:bodyPr rtlCol="0" anchor="ctr"/>
+          <a:lstStyle/>
+          <a:p>
+            <a:pPr algn="ctr"/>
+            <a:endParaRPr lang="ru-RU"/>
+          </a:p>
+        </p:txBody>
+      </p:sp>
+      <p:sp>
+        <p:nvSpPr>
+          <p:cNvPr id="14" name="Google Shape;71;p5">
+            <a:extLst>
+              <a:ext uri="{FF2B5EF4-FFF2-40B4-BE49-F238E27FC236}">
+                <a16:creationId xmlns:a16="http://schemas.microsoft.com/office/drawing/2014/main" id="{F4BDCE1D-F725-7E47-7E6B-2B1ACDBD0083}"/>
+              </a:ext>
+            </a:extLst>
+          </p:cNvPr>
+          <p:cNvSpPr txBox="1">
+            <a:spLocks noGrp="1"/>
+          </p:cNvSpPr>
+          <p:nvPr>
+            <p:ph type="sldNum" idx="12"/>
+          </p:nvPr>
+        </p:nvSpPr>
+        <p:spPr>
           <a:xfrm>
-            <a:off x="1407166" y="3379653"/>
-            <a:ext cx="10078800" cy="499327"/>
+            <a:off x="8610600" y="6308204"/>
+            <a:ext cx="3251106" cy="413272"/>
           </a:xfrm>
           <a:prstGeom prst="rect">
             <a:avLst/>
@@ -4201,15 +4634,12 @@
           </a:ln>
         </p:spPr>
         <p:txBody>
-          <a:bodyPr spcFirstLastPara="1" wrap="square" lIns="91425" tIns="45700" rIns="91425" bIns="45700" anchor="t" anchorCtr="0">
-            <a:spAutoFit/>
+          <a:bodyPr spcFirstLastPara="1" wrap="square" lIns="91425" tIns="45700" rIns="91425" bIns="45700" anchor="ctr" anchorCtr="0">
+            <a:noAutofit/>
           </a:bodyPr>
           <a:lstStyle/>
           <a:p>
-            <a:pPr marL="0" marR="0" lvl="0" indent="0" algn="l" rtl="0">
-              <a:lnSpc>
-                <a:spcPct val="115000"/>
-              </a:lnSpc>
+            <a:pPr marL="0" lvl="0" indent="0" algn="r" rtl="0">
               <a:spcBef>
                 <a:spcPts val="0"/>
               </a:spcBef>
@@ -4218,315 +4648,50 @@
               </a:spcAft>
               <a:buNone/>
             </a:pPr>
-            <a:r>
-              <a:rPr lang="ru-RU" sz="2300" dirty="0">
-                <a:latin typeface="Arial" panose="020B0604020202020204" pitchFamily="34" charset="0"/>
-                <a:ea typeface="Courier New" panose="02070309020205020404" pitchFamily="49" charset="0"/>
-                <a:cs typeface="Arial" panose="020B0604020202020204" pitchFamily="34" charset="0"/>
-              </a:rPr>
-              <a:t>Был проанализирован</a:t>
-            </a:r>
-            <a:r>
-              <a:rPr lang="ru-RU" sz="2300" dirty="0">
-                <a:effectLst/>
-                <a:latin typeface="Arial" panose="020B0604020202020204" pitchFamily="34" charset="0"/>
-                <a:ea typeface="Courier New" panose="02070309020205020404" pitchFamily="49" charset="0"/>
-                <a:cs typeface="Arial" panose="020B0604020202020204" pitchFamily="34" charset="0"/>
-              </a:rPr>
-              <a:t> рынок мобильных приложений для владельцев;</a:t>
-            </a:r>
-            <a:endParaRPr sz="2300" dirty="0">
+            <a:fld id="{00000000-1234-1234-1234-123412341234}" type="slidenum">
+              <a:rPr lang="ru-RU" sz="1400" smtClean="0">
+                <a:solidFill>
+                  <a:schemeClr val="tx1"/>
+                </a:solidFill>
+                <a:latin typeface="Arial" panose="020B0604020202020204" pitchFamily="34" charset="0"/>
+                <a:cs typeface="Arial" panose="020B0604020202020204" pitchFamily="34" charset="0"/>
+              </a:rPr>
+              <a:t>11</a:t>
+            </a:fld>
+            <a:r>
+              <a:rPr lang="en-US" sz="1400" dirty="0">
+                <a:solidFill>
+                  <a:schemeClr val="tx1"/>
+                </a:solidFill>
+                <a:latin typeface="Arial" panose="020B0604020202020204" pitchFamily="34" charset="0"/>
+                <a:cs typeface="Arial" panose="020B0604020202020204" pitchFamily="34" charset="0"/>
+              </a:rPr>
+              <a:t>/1</a:t>
+            </a:r>
+            <a:r>
+              <a:rPr lang="ru-RU" sz="1400" dirty="0">
+                <a:solidFill>
+                  <a:schemeClr val="tx1"/>
+                </a:solidFill>
+                <a:latin typeface="Arial" panose="020B0604020202020204" pitchFamily="34" charset="0"/>
+                <a:cs typeface="Arial" panose="020B0604020202020204" pitchFamily="34" charset="0"/>
+              </a:rPr>
+              <a:t>3</a:t>
+            </a:r>
+            <a:endParaRPr sz="1400" dirty="0">
+              <a:solidFill>
+                <a:schemeClr val="tx1"/>
+              </a:solidFill>
               <a:latin typeface="Arial" panose="020B0604020202020204" pitchFamily="34" charset="0"/>
               <a:cs typeface="Arial" panose="020B0604020202020204" pitchFamily="34" charset="0"/>
             </a:endParaRPr>
           </a:p>
         </p:txBody>
       </p:sp>
-      <p:sp>
-        <p:nvSpPr>
-          <p:cNvPr id="6" name="Google Shape;90;p6">
-            <a:extLst>
-              <a:ext uri="{FF2B5EF4-FFF2-40B4-BE49-F238E27FC236}">
-                <a16:creationId xmlns:a16="http://schemas.microsoft.com/office/drawing/2014/main" id="{267B54EA-DA71-F7E2-659B-3F31E732820C}"/>
-              </a:ext>
-            </a:extLst>
-          </p:cNvPr>
-          <p:cNvSpPr txBox="1"/>
-          <p:nvPr/>
-        </p:nvSpPr>
-        <p:spPr>
-          <a:xfrm>
-            <a:off x="1332466" y="5211058"/>
-            <a:ext cx="5918566" cy="446236"/>
-          </a:xfrm>
-          <a:prstGeom prst="rect">
-            <a:avLst/>
-          </a:prstGeom>
-          <a:noFill/>
-          <a:ln>
-            <a:noFill/>
-          </a:ln>
-        </p:spPr>
-        <p:txBody>
-          <a:bodyPr spcFirstLastPara="1" wrap="square" lIns="91425" tIns="45700" rIns="91425" bIns="45700" anchor="t" anchorCtr="0">
-            <a:spAutoFit/>
-          </a:bodyPr>
-          <a:lstStyle/>
-          <a:p>
-            <a:pPr marL="0" marR="0" lvl="0" indent="0" algn="l" rtl="0">
-              <a:spcBef>
-                <a:spcPts val="0"/>
-              </a:spcBef>
-              <a:spcAft>
-                <a:spcPts val="0"/>
-              </a:spcAft>
-              <a:buNone/>
-            </a:pPr>
-            <a:r>
-              <a:rPr lang="ru-RU" sz="2300" dirty="0">
-                <a:latin typeface="Arial" panose="020B0604020202020204" pitchFamily="34" charset="0"/>
-                <a:cs typeface="Arial" panose="020B0604020202020204" pitchFamily="34" charset="0"/>
-                <a:sym typeface="Arial"/>
-              </a:rPr>
-              <a:t>Реализованы основные функции.</a:t>
-            </a:r>
-            <a:endParaRPr dirty="0">
-              <a:latin typeface="Arial" panose="020B0604020202020204" pitchFamily="34" charset="0"/>
-              <a:cs typeface="Arial" panose="020B0604020202020204" pitchFamily="34" charset="0"/>
-            </a:endParaRPr>
-          </a:p>
-        </p:txBody>
-      </p:sp>
-      <p:sp>
-        <p:nvSpPr>
-          <p:cNvPr id="7" name="Google Shape;91;p6">
-            <a:extLst>
-              <a:ext uri="{FF2B5EF4-FFF2-40B4-BE49-F238E27FC236}">
-                <a16:creationId xmlns:a16="http://schemas.microsoft.com/office/drawing/2014/main" id="{52A25696-11A1-719E-93AF-95256F81C654}"/>
-              </a:ext>
-            </a:extLst>
-          </p:cNvPr>
-          <p:cNvSpPr txBox="1"/>
-          <p:nvPr/>
-        </p:nvSpPr>
-        <p:spPr>
-          <a:xfrm>
-            <a:off x="1407166" y="4303644"/>
-            <a:ext cx="8234139" cy="446236"/>
-          </a:xfrm>
-          <a:prstGeom prst="rect">
-            <a:avLst/>
-          </a:prstGeom>
-          <a:noFill/>
-          <a:ln>
-            <a:noFill/>
-          </a:ln>
-        </p:spPr>
-        <p:txBody>
-          <a:bodyPr spcFirstLastPara="1" wrap="square" lIns="91425" tIns="45700" rIns="91425" bIns="45700" anchor="t" anchorCtr="0">
-            <a:spAutoFit/>
-          </a:bodyPr>
-          <a:lstStyle/>
-          <a:p>
-            <a:pPr marL="0" marR="0" lvl="0" indent="0" algn="l" rtl="0">
-              <a:spcBef>
-                <a:spcPts val="0"/>
-              </a:spcBef>
-              <a:spcAft>
-                <a:spcPts val="0"/>
-              </a:spcAft>
-              <a:buNone/>
-            </a:pPr>
-            <a:r>
-              <a:rPr lang="ru-RU" sz="2300" b="0" i="0" u="none" strike="noStrike" cap="none" dirty="0">
-                <a:latin typeface="Arial" panose="020B0604020202020204" pitchFamily="34" charset="0"/>
-                <a:ea typeface="Arial"/>
-                <a:cs typeface="Arial" panose="020B0604020202020204" pitchFamily="34" charset="0"/>
-                <a:sym typeface="Arial"/>
-              </a:rPr>
-              <a:t>Спроектирована архитектура приложения и база данных;</a:t>
-            </a:r>
-            <a:endParaRPr sz="2300" b="0" i="0" u="none" strike="noStrike" cap="none" dirty="0">
-              <a:latin typeface="Arial" panose="020B0604020202020204" pitchFamily="34" charset="0"/>
-              <a:ea typeface="Arial"/>
-              <a:cs typeface="Arial" panose="020B0604020202020204" pitchFamily="34" charset="0"/>
-              <a:sym typeface="Arial"/>
-            </a:endParaRPr>
-          </a:p>
-        </p:txBody>
-      </p:sp>
-      <p:sp>
-        <p:nvSpPr>
-          <p:cNvPr id="8" name="Google Shape;126;p8">
-            <a:extLst>
-              <a:ext uri="{FF2B5EF4-FFF2-40B4-BE49-F238E27FC236}">
-                <a16:creationId xmlns:a16="http://schemas.microsoft.com/office/drawing/2014/main" id="{A60A00FA-7686-76FC-2B57-EEB1C5000A31}"/>
-              </a:ext>
-            </a:extLst>
-          </p:cNvPr>
-          <p:cNvSpPr/>
-          <p:nvPr/>
-        </p:nvSpPr>
-        <p:spPr>
-          <a:xfrm flipH="1">
-            <a:off x="951090" y="3586504"/>
-            <a:ext cx="154500" cy="158400"/>
-          </a:xfrm>
-          <a:prstGeom prst="ellipse">
-            <a:avLst/>
-          </a:prstGeom>
-          <a:solidFill>
-            <a:schemeClr val="tx1"/>
-          </a:solidFill>
-          <a:ln>
-            <a:noFill/>
-          </a:ln>
-          <a:effectLst>
-            <a:outerShdw blurRad="203040" dist="75967" dir="5448874" sx="102000" sy="102000" algn="ctr" rotWithShape="0">
-              <a:srgbClr val="BFBFBF">
-                <a:alpha val="50980"/>
-              </a:srgbClr>
-            </a:outerShdw>
-          </a:effectLst>
-        </p:spPr>
-        <p:txBody>
-          <a:bodyPr spcFirstLastPara="1" wrap="square" lIns="91425" tIns="91425" rIns="91425" bIns="91425" anchor="ctr" anchorCtr="0">
-            <a:noAutofit/>
-          </a:bodyPr>
-          <a:lstStyle/>
-          <a:p>
-            <a:pPr marL="0" lvl="0" indent="0" algn="l" rtl="0">
-              <a:spcBef>
-                <a:spcPts val="0"/>
-              </a:spcBef>
-              <a:spcAft>
-                <a:spcPts val="0"/>
-              </a:spcAft>
-              <a:buNone/>
-            </a:pPr>
-            <a:endParaRPr>
-              <a:latin typeface="Arial" panose="020B0604020202020204" pitchFamily="34" charset="0"/>
-              <a:cs typeface="Arial" panose="020B0604020202020204" pitchFamily="34" charset="0"/>
-            </a:endParaRPr>
-          </a:p>
-        </p:txBody>
-      </p:sp>
-      <p:sp>
-        <p:nvSpPr>
-          <p:cNvPr id="9" name="Google Shape;126;p8">
-            <a:extLst>
-              <a:ext uri="{FF2B5EF4-FFF2-40B4-BE49-F238E27FC236}">
-                <a16:creationId xmlns:a16="http://schemas.microsoft.com/office/drawing/2014/main" id="{363F81E7-2197-C370-6ABE-AEA7C0A4897B}"/>
-              </a:ext>
-            </a:extLst>
-          </p:cNvPr>
-          <p:cNvSpPr/>
-          <p:nvPr/>
-        </p:nvSpPr>
-        <p:spPr>
-          <a:xfrm flipH="1">
-            <a:off x="951090" y="4447562"/>
-            <a:ext cx="154500" cy="158400"/>
-          </a:xfrm>
-          <a:prstGeom prst="ellipse">
-            <a:avLst/>
-          </a:prstGeom>
-          <a:solidFill>
-            <a:schemeClr val="tx1"/>
-          </a:solidFill>
-          <a:ln>
-            <a:noFill/>
-          </a:ln>
-          <a:effectLst>
-            <a:outerShdw blurRad="203040" dist="75967" dir="5448874" sx="102000" sy="102000" algn="ctr" rotWithShape="0">
-              <a:srgbClr val="BFBFBF">
-                <a:alpha val="50980"/>
-              </a:srgbClr>
-            </a:outerShdw>
-          </a:effectLst>
-        </p:spPr>
-        <p:txBody>
-          <a:bodyPr spcFirstLastPara="1" wrap="square" lIns="91425" tIns="91425" rIns="91425" bIns="91425" anchor="ctr" anchorCtr="0">
-            <a:noAutofit/>
-          </a:bodyPr>
-          <a:lstStyle/>
-          <a:p>
-            <a:pPr marL="0" lvl="0" indent="0" algn="l" rtl="0">
-              <a:spcBef>
-                <a:spcPts val="0"/>
-              </a:spcBef>
-              <a:spcAft>
-                <a:spcPts val="0"/>
-              </a:spcAft>
-              <a:buNone/>
-            </a:pPr>
-            <a:endParaRPr>
-              <a:latin typeface="Arial" panose="020B0604020202020204" pitchFamily="34" charset="0"/>
-              <a:cs typeface="Arial" panose="020B0604020202020204" pitchFamily="34" charset="0"/>
-            </a:endParaRPr>
-          </a:p>
-        </p:txBody>
-      </p:sp>
-      <p:sp>
-        <p:nvSpPr>
-          <p:cNvPr id="10" name="Google Shape;126;p8">
-            <a:extLst>
-              <a:ext uri="{FF2B5EF4-FFF2-40B4-BE49-F238E27FC236}">
-                <a16:creationId xmlns:a16="http://schemas.microsoft.com/office/drawing/2014/main" id="{3BD8A43C-FC8B-4CEC-F50F-EDDDBE2F6A03}"/>
-              </a:ext>
-            </a:extLst>
-          </p:cNvPr>
-          <p:cNvSpPr/>
-          <p:nvPr/>
-        </p:nvSpPr>
-        <p:spPr>
-          <a:xfrm flipH="1">
-            <a:off x="951090" y="5273866"/>
-            <a:ext cx="154500" cy="158400"/>
-          </a:xfrm>
-          <a:prstGeom prst="ellipse">
-            <a:avLst/>
-          </a:prstGeom>
-          <a:solidFill>
-            <a:schemeClr val="tx1"/>
-          </a:solidFill>
-          <a:ln>
-            <a:noFill/>
-          </a:ln>
-          <a:effectLst>
-            <a:outerShdw blurRad="203040" dist="75967" dir="5448874" sx="102000" sy="102000" algn="ctr" rotWithShape="0">
-              <a:srgbClr val="BFBFBF">
-                <a:alpha val="50980"/>
-              </a:srgbClr>
-            </a:outerShdw>
-          </a:effectLst>
-        </p:spPr>
-        <p:txBody>
-          <a:bodyPr spcFirstLastPara="1" wrap="square" lIns="91425" tIns="91425" rIns="91425" bIns="91425" anchor="ctr" anchorCtr="0">
-            <a:noAutofit/>
-          </a:bodyPr>
-          <a:lstStyle/>
-          <a:p>
-            <a:pPr marL="0" lvl="0" indent="0" algn="l" rtl="0">
-              <a:spcBef>
-                <a:spcPts val="0"/>
-              </a:spcBef>
-              <a:spcAft>
-                <a:spcPts val="0"/>
-              </a:spcAft>
-              <a:buNone/>
-            </a:pPr>
-            <a:endParaRPr>
-              <a:latin typeface="Arial" panose="020B0604020202020204" pitchFamily="34" charset="0"/>
-              <a:cs typeface="Arial" panose="020B0604020202020204" pitchFamily="34" charset="0"/>
-            </a:endParaRPr>
-          </a:p>
-        </p:txBody>
-      </p:sp>
     </p:spTree>
     <p:extLst>
       <p:ext uri="{BB962C8B-B14F-4D97-AF65-F5344CB8AC3E}">
-        <p14:creationId xmlns:p14="http://schemas.microsoft.com/office/powerpoint/2010/main" val="2351513384"/>
+        <p14:creationId xmlns:p14="http://schemas.microsoft.com/office/powerpoint/2010/main" val="2795025444"/>
       </p:ext>
     </p:extLst>
   </p:cSld>
@@ -4555,10 +4720,169 @@
       </p:grpSpPr>
       <p:sp>
         <p:nvSpPr>
-          <p:cNvPr id="3" name="TextBox 2">
-            <a:extLst>
-              <a:ext uri="{FF2B5EF4-FFF2-40B4-BE49-F238E27FC236}">
-                <a16:creationId xmlns:a16="http://schemas.microsoft.com/office/drawing/2014/main" id="{883983F3-4292-7D7C-42A4-1DB0A7410BAA}"/>
+          <p:cNvPr id="4" name="Google Shape;173;p12">
+            <a:extLst>
+              <a:ext uri="{FF2B5EF4-FFF2-40B4-BE49-F238E27FC236}">
+                <a16:creationId xmlns:a16="http://schemas.microsoft.com/office/drawing/2014/main" id="{F1D3D133-B7E7-1344-25DB-1B80C37CA510}"/>
+              </a:ext>
+            </a:extLst>
+          </p:cNvPr>
+          <p:cNvSpPr txBox="1">
+            <a:spLocks/>
+          </p:cNvSpPr>
+          <p:nvPr/>
+        </p:nvSpPr>
+        <p:spPr>
+          <a:xfrm>
+            <a:off x="1033072" y="365126"/>
+            <a:ext cx="8202474" cy="697717"/>
+          </a:xfrm>
+          <a:prstGeom prst="rect">
+            <a:avLst/>
+          </a:prstGeom>
+          <a:noFill/>
+          <a:ln>
+            <a:noFill/>
+          </a:ln>
+        </p:spPr>
+        <p:txBody>
+          <a:bodyPr spcFirstLastPara="1" wrap="square" lIns="91425" tIns="45700" rIns="91425" bIns="45700" anchor="ctr" anchorCtr="0">
+            <a:normAutofit/>
+          </a:bodyPr>
+          <a:lstStyle>
+            <a:lvl1pPr algn="l" defTabSz="914400" rtl="0" eaLnBrk="1" latinLnBrk="0" hangingPunct="1">
+              <a:lnSpc>
+                <a:spcPct val="90000"/>
+              </a:lnSpc>
+              <a:spcBef>
+                <a:spcPct val="0"/>
+              </a:spcBef>
+              <a:buNone/>
+              <a:defRPr sz="4400" kern="1200">
+                <a:solidFill>
+                  <a:schemeClr val="tx1"/>
+                </a:solidFill>
+                <a:latin typeface="+mj-lt"/>
+                <a:ea typeface="+mj-ea"/>
+                <a:cs typeface="+mj-cs"/>
+              </a:defRPr>
+            </a:lvl1pPr>
+          </a:lstStyle>
+          <a:p>
+            <a:pPr>
+              <a:lnSpc>
+                <a:spcPct val="70000"/>
+              </a:lnSpc>
+              <a:spcBef>
+                <a:spcPts val="0"/>
+              </a:spcBef>
+              <a:buClr>
+                <a:srgbClr val="00497A"/>
+              </a:buClr>
+              <a:buSzPts val="3200"/>
+              <a:buFont typeface="Arial"/>
+              <a:buNone/>
+            </a:pPr>
+            <a:r>
+              <a:rPr lang="ru-RU" dirty="0">
+                <a:latin typeface="Arial" panose="020B0604020202020204" pitchFamily="34" charset="0"/>
+                <a:cs typeface="Arial" panose="020B0604020202020204" pitchFamily="34" charset="0"/>
+              </a:rPr>
+              <a:t>Реализация интерфейса</a:t>
+            </a:r>
+          </a:p>
+        </p:txBody>
+      </p:sp>
+      <p:pic>
+        <p:nvPicPr>
+          <p:cNvPr id="6" name="Google Shape;175;p12">
+            <a:extLst>
+              <a:ext uri="{FF2B5EF4-FFF2-40B4-BE49-F238E27FC236}">
+                <a16:creationId xmlns:a16="http://schemas.microsoft.com/office/drawing/2014/main" id="{21C9AB45-6B29-EE2C-2521-D95B0CD50314}"/>
+              </a:ext>
+            </a:extLst>
+          </p:cNvPr>
+          <p:cNvPicPr preferRelativeResize="0"/>
+          <p:nvPr/>
+        </p:nvPicPr>
+        <p:blipFill>
+          <a:blip r:embed="rId2">
+            <a:alphaModFix/>
+          </a:blip>
+          <a:stretch>
+            <a:fillRect/>
+          </a:stretch>
+        </p:blipFill>
+        <p:spPr>
+          <a:xfrm>
+            <a:off x="2587503" y="1262586"/>
+            <a:ext cx="2228325" cy="4894020"/>
+          </a:xfrm>
+          <a:prstGeom prst="rect">
+            <a:avLst/>
+          </a:prstGeom>
+          <a:noFill/>
+          <a:ln>
+            <a:noFill/>
+          </a:ln>
+          <a:effectLst>
+            <a:outerShdw blurRad="50800" dist="38100" dir="2700000" algn="tl" rotWithShape="0">
+              <a:prstClr val="black">
+                <a:alpha val="40000"/>
+              </a:prstClr>
+            </a:outerShdw>
+          </a:effectLst>
+        </p:spPr>
+      </p:pic>
+      <p:pic>
+        <p:nvPicPr>
+          <p:cNvPr id="11" name="Рисунок 10" descr="Изображение выглядит как текст, снимок экрана, Шрифт, число&#10;&#10;Автоматически созданное описание">
+            <a:extLst>
+              <a:ext uri="{FF2B5EF4-FFF2-40B4-BE49-F238E27FC236}">
+                <a16:creationId xmlns:a16="http://schemas.microsoft.com/office/drawing/2014/main" id="{E09080E4-492E-5591-A1DD-F452FD7947EE}"/>
+              </a:ext>
+            </a:extLst>
+          </p:cNvPr>
+          <p:cNvPicPr>
+            <a:picLocks noChangeAspect="1"/>
+          </p:cNvPicPr>
+          <p:nvPr/>
+        </p:nvPicPr>
+        <p:blipFill>
+          <a:blip r:embed="rId3" cstate="print">
+            <a:extLst>
+              <a:ext uri="{28A0092B-C50C-407E-A947-70E740481C1C}">
+                <a14:useLocalDpi xmlns:a14="http://schemas.microsoft.com/office/drawing/2010/main" val="0"/>
+              </a:ext>
+            </a:extLst>
+          </a:blip>
+          <a:stretch>
+            <a:fillRect/>
+          </a:stretch>
+        </p:blipFill>
+        <p:spPr>
+          <a:xfrm>
+            <a:off x="6396051" y="1262586"/>
+            <a:ext cx="2228325" cy="4894086"/>
+          </a:xfrm>
+          <a:prstGeom prst="rect">
+            <a:avLst/>
+          </a:prstGeom>
+          <a:effectLst>
+            <a:outerShdw blurRad="50800" dist="38100" dir="2700000" algn="tl" rotWithShape="0">
+              <a:prstClr val="black">
+                <a:alpha val="40000"/>
+              </a:prstClr>
+            </a:outerShdw>
+          </a:effectLst>
+        </p:spPr>
+      </p:pic>
+      <p:sp>
+        <p:nvSpPr>
+          <p:cNvPr id="12" name="TextBox 11">
+            <a:extLst>
+              <a:ext uri="{FF2B5EF4-FFF2-40B4-BE49-F238E27FC236}">
+                <a16:creationId xmlns:a16="http://schemas.microsoft.com/office/drawing/2014/main" id="{84598FAB-1B39-A783-336F-9EDC7A94C0E2}"/>
               </a:ext>
             </a:extLst>
           </p:cNvPr>
@@ -4567,8 +4891,8 @@
         </p:nvSpPr>
         <p:spPr>
           <a:xfrm>
-            <a:off x="2045368" y="2725830"/>
-            <a:ext cx="8101263" cy="923330"/>
+            <a:off x="865069" y="3463584"/>
+            <a:ext cx="1258288" cy="383823"/>
           </a:xfrm>
           <a:prstGeom prst="rect">
             <a:avLst/>
@@ -4581,20 +4905,1211 @@
           </a:bodyPr>
           <a:lstStyle/>
           <a:p>
-            <a:r>
-              <a:rPr lang="ru-RU" sz="5400" dirty="0">
-                <a:latin typeface="Arial" panose="020B0604020202020204" pitchFamily="34" charset="0"/>
-                <a:cs typeface="Arial" panose="020B0604020202020204" pitchFamily="34" charset="0"/>
-              </a:rPr>
-              <a:t>Спасибо за внимание!</a:t>
-            </a:r>
+            <a:pPr marL="0" marR="0" lvl="1" indent="0" algn="just" rtl="0">
+              <a:lnSpc>
+                <a:spcPct val="115000"/>
+              </a:lnSpc>
+              <a:spcBef>
+                <a:spcPts val="0"/>
+              </a:spcBef>
+              <a:spcAft>
+                <a:spcPts val="0"/>
+              </a:spcAft>
+              <a:buNone/>
+            </a:pPr>
+            <a:r>
+              <a:rPr lang="ru-RU" sz="1800" b="1" i="0" u="none" strike="noStrike" cap="none" dirty="0">
+                <a:latin typeface="Arial" panose="020B0604020202020204" pitchFamily="34" charset="0"/>
+                <a:ea typeface="Arial"/>
+                <a:cs typeface="Arial" panose="020B0604020202020204" pitchFamily="34" charset="0"/>
+                <a:sym typeface="Arial"/>
+              </a:rPr>
+              <a:t>Карта</a:t>
+            </a:r>
+            <a:endParaRPr lang="en-US" b="1" dirty="0">
+              <a:latin typeface="Arial" panose="020B0604020202020204" pitchFamily="34" charset="0"/>
+              <a:cs typeface="Arial" panose="020B0604020202020204" pitchFamily="34" charset="0"/>
+            </a:endParaRPr>
+          </a:p>
+        </p:txBody>
+      </p:sp>
+      <p:sp>
+        <p:nvSpPr>
+          <p:cNvPr id="13" name="Дуга 12">
+            <a:extLst>
+              <a:ext uri="{FF2B5EF4-FFF2-40B4-BE49-F238E27FC236}">
+                <a16:creationId xmlns:a16="http://schemas.microsoft.com/office/drawing/2014/main" id="{3EA9516B-E0B8-1E93-D27D-BB39CBA3FD9D}"/>
+              </a:ext>
+            </a:extLst>
+          </p:cNvPr>
+          <p:cNvSpPr/>
+          <p:nvPr/>
+        </p:nvSpPr>
+        <p:spPr>
+          <a:xfrm rot="16774033">
+            <a:off x="1449806" y="2873276"/>
+            <a:ext cx="1342663" cy="1180617"/>
+          </a:xfrm>
+          <a:prstGeom prst="arc">
+            <a:avLst/>
+          </a:prstGeom>
+          <a:ln w="25400">
+            <a:solidFill>
+              <a:schemeClr val="tx1"/>
+            </a:solidFill>
+            <a:headEnd type="none"/>
+            <a:tailEnd type="triangle"/>
+          </a:ln>
+        </p:spPr>
+        <p:style>
+          <a:lnRef idx="2">
+            <a:schemeClr val="accent1"/>
+          </a:lnRef>
+          <a:fillRef idx="0">
+            <a:schemeClr val="accent1"/>
+          </a:fillRef>
+          <a:effectRef idx="1">
+            <a:schemeClr val="accent1"/>
+          </a:effectRef>
+          <a:fontRef idx="minor">
+            <a:schemeClr val="tx1"/>
+          </a:fontRef>
+        </p:style>
+        <p:txBody>
+          <a:bodyPr rtlCol="0" anchor="ctr"/>
+          <a:lstStyle/>
+          <a:p>
+            <a:pPr algn="ctr"/>
+            <a:endParaRPr lang="ru-RU"/>
+          </a:p>
+        </p:txBody>
+      </p:sp>
+      <p:sp>
+        <p:nvSpPr>
+          <p:cNvPr id="14" name="TextBox 13">
+            <a:extLst>
+              <a:ext uri="{FF2B5EF4-FFF2-40B4-BE49-F238E27FC236}">
+                <a16:creationId xmlns:a16="http://schemas.microsoft.com/office/drawing/2014/main" id="{7E2149E2-D3C1-8F9A-8668-AF85276ABD36}"/>
+              </a:ext>
+            </a:extLst>
+          </p:cNvPr>
+          <p:cNvSpPr txBox="1"/>
+          <p:nvPr/>
+        </p:nvSpPr>
+        <p:spPr>
+          <a:xfrm>
+            <a:off x="9094057" y="5701621"/>
+            <a:ext cx="1725726" cy="702372"/>
+          </a:xfrm>
+          <a:prstGeom prst="rect">
+            <a:avLst/>
+          </a:prstGeom>
+          <a:noFill/>
+        </p:spPr>
+        <p:txBody>
+          <a:bodyPr wrap="square">
+            <a:spAutoFit/>
+          </a:bodyPr>
+          <a:lstStyle/>
+          <a:p>
+            <a:pPr marL="0" marR="0" lvl="1" indent="0" algn="just" rtl="0">
+              <a:lnSpc>
+                <a:spcPct val="115000"/>
+              </a:lnSpc>
+              <a:spcBef>
+                <a:spcPts val="0"/>
+              </a:spcBef>
+              <a:spcAft>
+                <a:spcPts val="0"/>
+              </a:spcAft>
+              <a:buNone/>
+            </a:pPr>
+            <a:r>
+              <a:rPr lang="ru-RU" sz="1800" b="1" i="0" u="none" strike="noStrike" cap="none" dirty="0">
+                <a:latin typeface="Arial" panose="020B0604020202020204" pitchFamily="34" charset="0"/>
+                <a:ea typeface="Arial"/>
+                <a:cs typeface="Arial" panose="020B0604020202020204" pitchFamily="34" charset="0"/>
+                <a:sym typeface="Arial"/>
+              </a:rPr>
+              <a:t>Информация о месте</a:t>
+            </a:r>
+            <a:endParaRPr lang="en-US" b="1" dirty="0">
+              <a:latin typeface="Arial" panose="020B0604020202020204" pitchFamily="34" charset="0"/>
+              <a:cs typeface="Arial" panose="020B0604020202020204" pitchFamily="34" charset="0"/>
+            </a:endParaRPr>
+          </a:p>
+        </p:txBody>
+      </p:sp>
+      <p:sp>
+        <p:nvSpPr>
+          <p:cNvPr id="15" name="Дуга 14">
+            <a:extLst>
+              <a:ext uri="{FF2B5EF4-FFF2-40B4-BE49-F238E27FC236}">
+                <a16:creationId xmlns:a16="http://schemas.microsoft.com/office/drawing/2014/main" id="{B3BFCE8D-8706-76DC-E21D-68CC68E7D7D1}"/>
+              </a:ext>
+            </a:extLst>
+          </p:cNvPr>
+          <p:cNvSpPr/>
+          <p:nvPr/>
+        </p:nvSpPr>
+        <p:spPr>
+          <a:xfrm rot="21133381">
+            <a:off x="8358919" y="5137962"/>
+            <a:ext cx="1342663" cy="1180617"/>
+          </a:xfrm>
+          <a:prstGeom prst="arc">
+            <a:avLst/>
+          </a:prstGeom>
+          <a:ln w="25400">
+            <a:solidFill>
+              <a:schemeClr val="tx1"/>
+            </a:solidFill>
+            <a:headEnd type="triangle"/>
+            <a:tailEnd type="none"/>
+          </a:ln>
+        </p:spPr>
+        <p:style>
+          <a:lnRef idx="2">
+            <a:schemeClr val="accent1"/>
+          </a:lnRef>
+          <a:fillRef idx="0">
+            <a:schemeClr val="accent1"/>
+          </a:fillRef>
+          <a:effectRef idx="1">
+            <a:schemeClr val="accent1"/>
+          </a:effectRef>
+          <a:fontRef idx="minor">
+            <a:schemeClr val="tx1"/>
+          </a:fontRef>
+        </p:style>
+        <p:txBody>
+          <a:bodyPr rtlCol="0" anchor="ctr"/>
+          <a:lstStyle/>
+          <a:p>
+            <a:pPr algn="ctr"/>
+            <a:endParaRPr lang="ru-RU"/>
+          </a:p>
+        </p:txBody>
+      </p:sp>
+      <p:sp>
+        <p:nvSpPr>
+          <p:cNvPr id="17" name="Google Shape;71;p5">
+            <a:extLst>
+              <a:ext uri="{FF2B5EF4-FFF2-40B4-BE49-F238E27FC236}">
+                <a16:creationId xmlns:a16="http://schemas.microsoft.com/office/drawing/2014/main" id="{5919ADF4-B9CC-E9A9-8F9A-7525CE85E5E6}"/>
+              </a:ext>
+            </a:extLst>
+          </p:cNvPr>
+          <p:cNvSpPr txBox="1">
+            <a:spLocks noGrp="1"/>
+          </p:cNvSpPr>
+          <p:nvPr>
+            <p:ph type="sldNum" idx="12"/>
+          </p:nvPr>
+        </p:nvSpPr>
+        <p:spPr>
+          <a:xfrm>
+            <a:off x="8610600" y="6308204"/>
+            <a:ext cx="3251106" cy="413272"/>
+          </a:xfrm>
+          <a:prstGeom prst="rect">
+            <a:avLst/>
+          </a:prstGeom>
+          <a:noFill/>
+          <a:ln>
+            <a:noFill/>
+          </a:ln>
+        </p:spPr>
+        <p:txBody>
+          <a:bodyPr spcFirstLastPara="1" wrap="square" lIns="91425" tIns="45700" rIns="91425" bIns="45700" anchor="ctr" anchorCtr="0">
+            <a:noAutofit/>
+          </a:bodyPr>
+          <a:lstStyle/>
+          <a:p>
+            <a:pPr marL="0" lvl="0" indent="0" algn="r" rtl="0">
+              <a:spcBef>
+                <a:spcPts val="0"/>
+              </a:spcBef>
+              <a:spcAft>
+                <a:spcPts val="0"/>
+              </a:spcAft>
+              <a:buNone/>
+            </a:pPr>
+            <a:fld id="{00000000-1234-1234-1234-123412341234}" type="slidenum">
+              <a:rPr lang="ru-RU" sz="1400" smtClean="0">
+                <a:solidFill>
+                  <a:schemeClr val="tx1"/>
+                </a:solidFill>
+                <a:latin typeface="Arial" panose="020B0604020202020204" pitchFamily="34" charset="0"/>
+                <a:cs typeface="Arial" panose="020B0604020202020204" pitchFamily="34" charset="0"/>
+              </a:rPr>
+              <a:t>12</a:t>
+            </a:fld>
+            <a:r>
+              <a:rPr lang="en-US" sz="1400" dirty="0">
+                <a:solidFill>
+                  <a:schemeClr val="tx1"/>
+                </a:solidFill>
+                <a:latin typeface="Arial" panose="020B0604020202020204" pitchFamily="34" charset="0"/>
+                <a:cs typeface="Arial" panose="020B0604020202020204" pitchFamily="34" charset="0"/>
+              </a:rPr>
+              <a:t>/1</a:t>
+            </a:r>
+            <a:r>
+              <a:rPr lang="ru-RU" sz="1400" dirty="0">
+                <a:solidFill>
+                  <a:schemeClr val="tx1"/>
+                </a:solidFill>
+                <a:latin typeface="Arial" panose="020B0604020202020204" pitchFamily="34" charset="0"/>
+                <a:cs typeface="Arial" panose="020B0604020202020204" pitchFamily="34" charset="0"/>
+              </a:rPr>
+              <a:t>3</a:t>
+            </a:r>
+            <a:endParaRPr sz="1400" dirty="0">
+              <a:solidFill>
+                <a:schemeClr val="tx1"/>
+              </a:solidFill>
+              <a:latin typeface="Arial" panose="020B0604020202020204" pitchFamily="34" charset="0"/>
+              <a:cs typeface="Arial" panose="020B0604020202020204" pitchFamily="34" charset="0"/>
+            </a:endParaRPr>
           </a:p>
         </p:txBody>
       </p:sp>
     </p:spTree>
     <p:extLst>
       <p:ext uri="{BB962C8B-B14F-4D97-AF65-F5344CB8AC3E}">
-        <p14:creationId xmlns:p14="http://schemas.microsoft.com/office/powerpoint/2010/main" val="440649440"/>
+        <p14:creationId xmlns:p14="http://schemas.microsoft.com/office/powerpoint/2010/main" val="488504716"/>
+      </p:ext>
+    </p:extLst>
+  </p:cSld>
+  <p:clrMapOvr>
+    <a:masterClrMapping/>
+  </p:clrMapOvr>
+</p:sld>
+</file>
+
+<file path=ppt/slides/slide13.xml><?xml version="1.0" encoding="utf-8"?>
+<p:sld xmlns:a="http://schemas.openxmlformats.org/drawingml/2006/main" xmlns:r="http://schemas.openxmlformats.org/officeDocument/2006/relationships" xmlns:p="http://schemas.openxmlformats.org/presentationml/2006/main">
+  <p:cSld>
+    <p:spTree>
+      <p:nvGrpSpPr>
+        <p:cNvPr id="1" name=""/>
+        <p:cNvGrpSpPr/>
+        <p:nvPr/>
+      </p:nvGrpSpPr>
+      <p:grpSpPr>
+        <a:xfrm>
+          <a:off x="0" y="0"/>
+          <a:ext cx="0" cy="0"/>
+          <a:chOff x="0" y="0"/>
+          <a:chExt cx="0" cy="0"/>
+        </a:xfrm>
+      </p:grpSpPr>
+      <p:sp>
+        <p:nvSpPr>
+          <p:cNvPr id="4" name="Google Shape;184;p13">
+            <a:extLst>
+              <a:ext uri="{FF2B5EF4-FFF2-40B4-BE49-F238E27FC236}">
+                <a16:creationId xmlns:a16="http://schemas.microsoft.com/office/drawing/2014/main" id="{6FB9703A-FF9A-000F-1549-2A26868FCA42}"/>
+              </a:ext>
+            </a:extLst>
+          </p:cNvPr>
+          <p:cNvSpPr txBox="1">
+            <a:spLocks/>
+          </p:cNvSpPr>
+          <p:nvPr/>
+        </p:nvSpPr>
+        <p:spPr>
+          <a:xfrm>
+            <a:off x="1033072" y="365126"/>
+            <a:ext cx="8202474" cy="697717"/>
+          </a:xfrm>
+          <a:prstGeom prst="rect">
+            <a:avLst/>
+          </a:prstGeom>
+          <a:noFill/>
+          <a:ln>
+            <a:noFill/>
+          </a:ln>
+        </p:spPr>
+        <p:txBody>
+          <a:bodyPr spcFirstLastPara="1" wrap="square" lIns="91425" tIns="45700" rIns="91425" bIns="45700" anchor="ctr" anchorCtr="0">
+            <a:normAutofit/>
+          </a:bodyPr>
+          <a:lstStyle>
+            <a:lvl1pPr algn="l" defTabSz="914400" rtl="0" eaLnBrk="1" latinLnBrk="0" hangingPunct="1">
+              <a:lnSpc>
+                <a:spcPct val="90000"/>
+              </a:lnSpc>
+              <a:spcBef>
+                <a:spcPct val="0"/>
+              </a:spcBef>
+              <a:buNone/>
+              <a:defRPr sz="4400" kern="1200">
+                <a:solidFill>
+                  <a:schemeClr val="tx1"/>
+                </a:solidFill>
+                <a:latin typeface="+mj-lt"/>
+                <a:ea typeface="+mj-ea"/>
+                <a:cs typeface="+mj-cs"/>
+              </a:defRPr>
+            </a:lvl1pPr>
+          </a:lstStyle>
+          <a:p>
+            <a:pPr>
+              <a:lnSpc>
+                <a:spcPct val="70000"/>
+              </a:lnSpc>
+              <a:spcBef>
+                <a:spcPts val="0"/>
+              </a:spcBef>
+              <a:buClr>
+                <a:srgbClr val="00497A"/>
+              </a:buClr>
+              <a:buSzPts val="3200"/>
+              <a:buFont typeface="Arial"/>
+              <a:buNone/>
+            </a:pPr>
+            <a:r>
+              <a:rPr lang="ru-RU">
+                <a:latin typeface="Arial" panose="020B0604020202020204" pitchFamily="34" charset="0"/>
+                <a:cs typeface="Arial" panose="020B0604020202020204" pitchFamily="34" charset="0"/>
+              </a:rPr>
+              <a:t>Заключение</a:t>
+            </a:r>
+          </a:p>
+        </p:txBody>
+      </p:sp>
+      <p:sp>
+        <p:nvSpPr>
+          <p:cNvPr id="5" name="Google Shape;185;p13">
+            <a:extLst>
+              <a:ext uri="{FF2B5EF4-FFF2-40B4-BE49-F238E27FC236}">
+                <a16:creationId xmlns:a16="http://schemas.microsoft.com/office/drawing/2014/main" id="{B5A52987-F053-1AC8-8F26-53A6D1B36963}"/>
+              </a:ext>
+            </a:extLst>
+          </p:cNvPr>
+          <p:cNvSpPr txBox="1"/>
+          <p:nvPr/>
+        </p:nvSpPr>
+        <p:spPr>
+          <a:xfrm>
+            <a:off x="838200" y="1679512"/>
+            <a:ext cx="10582469" cy="1785064"/>
+          </a:xfrm>
+          <a:prstGeom prst="rect">
+            <a:avLst/>
+          </a:prstGeom>
+          <a:noFill/>
+          <a:ln>
+            <a:noFill/>
+          </a:ln>
+        </p:spPr>
+        <p:txBody>
+          <a:bodyPr spcFirstLastPara="1" wrap="square" lIns="91425" tIns="45700" rIns="91425" bIns="45700" anchor="t" anchorCtr="0">
+            <a:spAutoFit/>
+          </a:bodyPr>
+          <a:lstStyle/>
+          <a:p>
+            <a:pPr marL="0" marR="0" lvl="0" indent="0" algn="just" rtl="0">
+              <a:spcBef>
+                <a:spcPts val="0"/>
+              </a:spcBef>
+              <a:spcAft>
+                <a:spcPts val="0"/>
+              </a:spcAft>
+              <a:buNone/>
+            </a:pPr>
+            <a:r>
+              <a:rPr lang="ru-RU" sz="2300" b="0" i="0" dirty="0">
+                <a:latin typeface="Arial" panose="020B0604020202020204" pitchFamily="34" charset="0"/>
+                <a:ea typeface="Arial"/>
+                <a:cs typeface="Arial" panose="020B0604020202020204" pitchFamily="34" charset="0"/>
+                <a:sym typeface="Arial"/>
+              </a:rPr>
+              <a:t>	В результате выполнения работы было разработано мобильное приложение «</a:t>
+            </a:r>
+            <a:r>
+              <a:rPr lang="ru-RU" sz="2300" b="0" i="0" dirty="0" err="1">
+                <a:latin typeface="Arial" panose="020B0604020202020204" pitchFamily="34" charset="0"/>
+                <a:ea typeface="Arial"/>
+                <a:cs typeface="Arial" panose="020B0604020202020204" pitchFamily="34" charset="0"/>
+                <a:sym typeface="Arial"/>
+              </a:rPr>
+              <a:t>Pet</a:t>
+            </a:r>
+            <a:r>
+              <a:rPr lang="ru-RU" sz="2300" b="0" i="0" dirty="0">
+                <a:latin typeface="Arial" panose="020B0604020202020204" pitchFamily="34" charset="0"/>
+                <a:ea typeface="Arial"/>
+                <a:cs typeface="Arial" panose="020B0604020202020204" pitchFamily="34" charset="0"/>
+                <a:sym typeface="Arial"/>
+              </a:rPr>
+              <a:t> </a:t>
+            </a:r>
+            <a:r>
+              <a:rPr lang="ru-RU" sz="2300" b="0" i="0" dirty="0" err="1">
+                <a:latin typeface="Arial" panose="020B0604020202020204" pitchFamily="34" charset="0"/>
+                <a:ea typeface="Arial"/>
+                <a:cs typeface="Arial" panose="020B0604020202020204" pitchFamily="34" charset="0"/>
+                <a:sym typeface="Arial"/>
+              </a:rPr>
+              <a:t>Diary</a:t>
+            </a:r>
+            <a:r>
+              <a:rPr lang="ru-RU" sz="2300" b="0" i="0" dirty="0">
+                <a:latin typeface="Arial" panose="020B0604020202020204" pitchFamily="34" charset="0"/>
+                <a:ea typeface="Arial"/>
+                <a:cs typeface="Arial" panose="020B0604020202020204" pitchFamily="34" charset="0"/>
+                <a:sym typeface="Arial"/>
+              </a:rPr>
+              <a:t>», которое полностью соответствует поставленным целям и задачам.</a:t>
+            </a:r>
+            <a:r>
+              <a:rPr lang="ru-RU" sz="1800" dirty="0">
+                <a:latin typeface="Arial" panose="020B0604020202020204" pitchFamily="34" charset="0"/>
+                <a:ea typeface="Times New Roman"/>
+                <a:cs typeface="Arial" panose="020B0604020202020204" pitchFamily="34" charset="0"/>
+                <a:sym typeface="Times New Roman"/>
+              </a:rPr>
+              <a:t> </a:t>
+            </a:r>
+            <a:endParaRPr dirty="0">
+              <a:latin typeface="Arial" panose="020B0604020202020204" pitchFamily="34" charset="0"/>
+              <a:cs typeface="Arial" panose="020B0604020202020204" pitchFamily="34" charset="0"/>
+            </a:endParaRPr>
+          </a:p>
+          <a:p>
+            <a:pPr marL="0" marR="0" lvl="0" indent="0" algn="just" rtl="0">
+              <a:spcBef>
+                <a:spcPts val="0"/>
+              </a:spcBef>
+              <a:spcAft>
+                <a:spcPts val="0"/>
+              </a:spcAft>
+              <a:buNone/>
+            </a:pPr>
+            <a:endParaRPr sz="1800" dirty="0">
+              <a:latin typeface="Arial" panose="020B0604020202020204" pitchFamily="34" charset="0"/>
+              <a:ea typeface="Times New Roman"/>
+              <a:cs typeface="Arial" panose="020B0604020202020204" pitchFamily="34" charset="0"/>
+              <a:sym typeface="Times New Roman"/>
+            </a:endParaRPr>
+          </a:p>
+          <a:p>
+            <a:pPr marL="0" marR="0" lvl="0" indent="0" algn="just" rtl="0">
+              <a:spcBef>
+                <a:spcPts val="0"/>
+              </a:spcBef>
+              <a:spcAft>
+                <a:spcPts val="0"/>
+              </a:spcAft>
+              <a:buNone/>
+            </a:pPr>
+            <a:r>
+              <a:rPr lang="ru-RU" sz="2300" b="0" i="0" dirty="0">
+                <a:latin typeface="Arial" panose="020B0604020202020204" pitchFamily="34" charset="0"/>
+                <a:ea typeface="Arial"/>
+                <a:cs typeface="Arial" panose="020B0604020202020204" pitchFamily="34" charset="0"/>
+                <a:sym typeface="Arial"/>
+              </a:rPr>
+              <a:t>	</a:t>
+            </a:r>
+            <a:endParaRPr sz="2300" dirty="0">
+              <a:latin typeface="Arial" panose="020B0604020202020204" pitchFamily="34" charset="0"/>
+              <a:ea typeface="Arial"/>
+              <a:cs typeface="Arial" panose="020B0604020202020204" pitchFamily="34" charset="0"/>
+              <a:sym typeface="Arial"/>
+            </a:endParaRPr>
+          </a:p>
+        </p:txBody>
+      </p:sp>
+      <p:sp>
+        <p:nvSpPr>
+          <p:cNvPr id="2" name="Google Shape;89;p6">
+            <a:extLst>
+              <a:ext uri="{FF2B5EF4-FFF2-40B4-BE49-F238E27FC236}">
+                <a16:creationId xmlns:a16="http://schemas.microsoft.com/office/drawing/2014/main" id="{BAF7F9CB-01CD-E97D-E0D8-A0048D83CB0B}"/>
+              </a:ext>
+            </a:extLst>
+          </p:cNvPr>
+          <p:cNvSpPr txBox="1"/>
+          <p:nvPr/>
+        </p:nvSpPr>
+        <p:spPr>
+          <a:xfrm>
+            <a:off x="1407166" y="3379653"/>
+            <a:ext cx="10078800" cy="499327"/>
+          </a:xfrm>
+          <a:prstGeom prst="rect">
+            <a:avLst/>
+          </a:prstGeom>
+          <a:noFill/>
+          <a:ln>
+            <a:noFill/>
+          </a:ln>
+        </p:spPr>
+        <p:txBody>
+          <a:bodyPr spcFirstLastPara="1" wrap="square" lIns="91425" tIns="45700" rIns="91425" bIns="45700" anchor="t" anchorCtr="0">
+            <a:spAutoFit/>
+          </a:bodyPr>
+          <a:lstStyle/>
+          <a:p>
+            <a:pPr marL="0" marR="0" lvl="0" indent="0" algn="l" rtl="0">
+              <a:lnSpc>
+                <a:spcPct val="115000"/>
+              </a:lnSpc>
+              <a:spcBef>
+                <a:spcPts val="0"/>
+              </a:spcBef>
+              <a:spcAft>
+                <a:spcPts val="0"/>
+              </a:spcAft>
+              <a:buNone/>
+            </a:pPr>
+            <a:r>
+              <a:rPr lang="ru-RU" sz="2300" dirty="0">
+                <a:latin typeface="Arial" panose="020B0604020202020204" pitchFamily="34" charset="0"/>
+                <a:ea typeface="Courier New" panose="02070309020205020404" pitchFamily="49" charset="0"/>
+                <a:cs typeface="Arial" panose="020B0604020202020204" pitchFamily="34" charset="0"/>
+              </a:rPr>
+              <a:t>Был проанализирован</a:t>
+            </a:r>
+            <a:r>
+              <a:rPr lang="ru-RU" sz="2300" dirty="0">
+                <a:effectLst/>
+                <a:latin typeface="Arial" panose="020B0604020202020204" pitchFamily="34" charset="0"/>
+                <a:ea typeface="Courier New" panose="02070309020205020404" pitchFamily="49" charset="0"/>
+                <a:cs typeface="Arial" panose="020B0604020202020204" pitchFamily="34" charset="0"/>
+              </a:rPr>
+              <a:t> рынок мобильных приложений для владельцев;</a:t>
+            </a:r>
+            <a:endParaRPr sz="2300" dirty="0">
+              <a:latin typeface="Arial" panose="020B0604020202020204" pitchFamily="34" charset="0"/>
+              <a:cs typeface="Arial" panose="020B0604020202020204" pitchFamily="34" charset="0"/>
+            </a:endParaRPr>
+          </a:p>
+        </p:txBody>
+      </p:sp>
+      <p:sp>
+        <p:nvSpPr>
+          <p:cNvPr id="6" name="Google Shape;90;p6">
+            <a:extLst>
+              <a:ext uri="{FF2B5EF4-FFF2-40B4-BE49-F238E27FC236}">
+                <a16:creationId xmlns:a16="http://schemas.microsoft.com/office/drawing/2014/main" id="{267B54EA-DA71-F7E2-659B-3F31E732820C}"/>
+              </a:ext>
+            </a:extLst>
+          </p:cNvPr>
+          <p:cNvSpPr txBox="1"/>
+          <p:nvPr/>
+        </p:nvSpPr>
+        <p:spPr>
+          <a:xfrm>
+            <a:off x="1332466" y="5211058"/>
+            <a:ext cx="5918566" cy="446236"/>
+          </a:xfrm>
+          <a:prstGeom prst="rect">
+            <a:avLst/>
+          </a:prstGeom>
+          <a:noFill/>
+          <a:ln>
+            <a:noFill/>
+          </a:ln>
+        </p:spPr>
+        <p:txBody>
+          <a:bodyPr spcFirstLastPara="1" wrap="square" lIns="91425" tIns="45700" rIns="91425" bIns="45700" anchor="t" anchorCtr="0">
+            <a:spAutoFit/>
+          </a:bodyPr>
+          <a:lstStyle/>
+          <a:p>
+            <a:pPr marL="0" marR="0" lvl="0" indent="0" algn="l" rtl="0">
+              <a:spcBef>
+                <a:spcPts val="0"/>
+              </a:spcBef>
+              <a:spcAft>
+                <a:spcPts val="0"/>
+              </a:spcAft>
+              <a:buNone/>
+            </a:pPr>
+            <a:r>
+              <a:rPr lang="ru-RU" sz="2300" dirty="0">
+                <a:latin typeface="Arial" panose="020B0604020202020204" pitchFamily="34" charset="0"/>
+                <a:cs typeface="Arial" panose="020B0604020202020204" pitchFamily="34" charset="0"/>
+                <a:sym typeface="Arial"/>
+              </a:rPr>
+              <a:t>Реализованы основные функции.</a:t>
+            </a:r>
+            <a:endParaRPr dirty="0">
+              <a:latin typeface="Arial" panose="020B0604020202020204" pitchFamily="34" charset="0"/>
+              <a:cs typeface="Arial" panose="020B0604020202020204" pitchFamily="34" charset="0"/>
+            </a:endParaRPr>
+          </a:p>
+        </p:txBody>
+      </p:sp>
+      <p:sp>
+        <p:nvSpPr>
+          <p:cNvPr id="7" name="Google Shape;91;p6">
+            <a:extLst>
+              <a:ext uri="{FF2B5EF4-FFF2-40B4-BE49-F238E27FC236}">
+                <a16:creationId xmlns:a16="http://schemas.microsoft.com/office/drawing/2014/main" id="{52A25696-11A1-719E-93AF-95256F81C654}"/>
+              </a:ext>
+            </a:extLst>
+          </p:cNvPr>
+          <p:cNvSpPr txBox="1"/>
+          <p:nvPr/>
+        </p:nvSpPr>
+        <p:spPr>
+          <a:xfrm>
+            <a:off x="1407166" y="4303644"/>
+            <a:ext cx="8234139" cy="446236"/>
+          </a:xfrm>
+          <a:prstGeom prst="rect">
+            <a:avLst/>
+          </a:prstGeom>
+          <a:noFill/>
+          <a:ln>
+            <a:noFill/>
+          </a:ln>
+        </p:spPr>
+        <p:txBody>
+          <a:bodyPr spcFirstLastPara="1" wrap="square" lIns="91425" tIns="45700" rIns="91425" bIns="45700" anchor="t" anchorCtr="0">
+            <a:spAutoFit/>
+          </a:bodyPr>
+          <a:lstStyle/>
+          <a:p>
+            <a:pPr marL="0" marR="0" lvl="0" indent="0" algn="l" rtl="0">
+              <a:spcBef>
+                <a:spcPts val="0"/>
+              </a:spcBef>
+              <a:spcAft>
+                <a:spcPts val="0"/>
+              </a:spcAft>
+              <a:buNone/>
+            </a:pPr>
+            <a:r>
+              <a:rPr lang="ru-RU" sz="2300" b="0" i="0" u="none" strike="noStrike" cap="none" dirty="0">
+                <a:latin typeface="Arial" panose="020B0604020202020204" pitchFamily="34" charset="0"/>
+                <a:ea typeface="Arial"/>
+                <a:cs typeface="Arial" panose="020B0604020202020204" pitchFamily="34" charset="0"/>
+                <a:sym typeface="Arial"/>
+              </a:rPr>
+              <a:t>Спроектирована архитектура приложения и база данных;</a:t>
+            </a:r>
+            <a:endParaRPr sz="2300" b="0" i="0" u="none" strike="noStrike" cap="none" dirty="0">
+              <a:latin typeface="Arial" panose="020B0604020202020204" pitchFamily="34" charset="0"/>
+              <a:ea typeface="Arial"/>
+              <a:cs typeface="Arial" panose="020B0604020202020204" pitchFamily="34" charset="0"/>
+              <a:sym typeface="Arial"/>
+            </a:endParaRPr>
+          </a:p>
+        </p:txBody>
+      </p:sp>
+      <p:sp>
+        <p:nvSpPr>
+          <p:cNvPr id="8" name="Google Shape;126;p8">
+            <a:extLst>
+              <a:ext uri="{FF2B5EF4-FFF2-40B4-BE49-F238E27FC236}">
+                <a16:creationId xmlns:a16="http://schemas.microsoft.com/office/drawing/2014/main" id="{A60A00FA-7686-76FC-2B57-EEB1C5000A31}"/>
+              </a:ext>
+            </a:extLst>
+          </p:cNvPr>
+          <p:cNvSpPr/>
+          <p:nvPr/>
+        </p:nvSpPr>
+        <p:spPr>
+          <a:xfrm flipH="1">
+            <a:off x="951090" y="3586504"/>
+            <a:ext cx="154500" cy="158400"/>
+          </a:xfrm>
+          <a:prstGeom prst="ellipse">
+            <a:avLst/>
+          </a:prstGeom>
+          <a:solidFill>
+            <a:schemeClr val="tx1"/>
+          </a:solidFill>
+          <a:ln>
+            <a:noFill/>
+          </a:ln>
+          <a:effectLst>
+            <a:outerShdw blurRad="203040" dist="75967" dir="5448874" sx="102000" sy="102000" algn="ctr" rotWithShape="0">
+              <a:srgbClr val="BFBFBF">
+                <a:alpha val="50980"/>
+              </a:srgbClr>
+            </a:outerShdw>
+          </a:effectLst>
+        </p:spPr>
+        <p:txBody>
+          <a:bodyPr spcFirstLastPara="1" wrap="square" lIns="91425" tIns="91425" rIns="91425" bIns="91425" anchor="ctr" anchorCtr="0">
+            <a:noAutofit/>
+          </a:bodyPr>
+          <a:lstStyle/>
+          <a:p>
+            <a:pPr marL="0" lvl="0" indent="0" algn="l" rtl="0">
+              <a:spcBef>
+                <a:spcPts val="0"/>
+              </a:spcBef>
+              <a:spcAft>
+                <a:spcPts val="0"/>
+              </a:spcAft>
+              <a:buNone/>
+            </a:pPr>
+            <a:endParaRPr>
+              <a:latin typeface="Arial" panose="020B0604020202020204" pitchFamily="34" charset="0"/>
+              <a:cs typeface="Arial" panose="020B0604020202020204" pitchFamily="34" charset="0"/>
+            </a:endParaRPr>
+          </a:p>
+        </p:txBody>
+      </p:sp>
+      <p:sp>
+        <p:nvSpPr>
+          <p:cNvPr id="9" name="Google Shape;126;p8">
+            <a:extLst>
+              <a:ext uri="{FF2B5EF4-FFF2-40B4-BE49-F238E27FC236}">
+                <a16:creationId xmlns:a16="http://schemas.microsoft.com/office/drawing/2014/main" id="{363F81E7-2197-C370-6ABE-AEA7C0A4897B}"/>
+              </a:ext>
+            </a:extLst>
+          </p:cNvPr>
+          <p:cNvSpPr/>
+          <p:nvPr/>
+        </p:nvSpPr>
+        <p:spPr>
+          <a:xfrm flipH="1">
+            <a:off x="951090" y="4447562"/>
+            <a:ext cx="154500" cy="158400"/>
+          </a:xfrm>
+          <a:prstGeom prst="ellipse">
+            <a:avLst/>
+          </a:prstGeom>
+          <a:solidFill>
+            <a:schemeClr val="tx1"/>
+          </a:solidFill>
+          <a:ln>
+            <a:noFill/>
+          </a:ln>
+          <a:effectLst>
+            <a:outerShdw blurRad="203040" dist="75967" dir="5448874" sx="102000" sy="102000" algn="ctr" rotWithShape="0">
+              <a:srgbClr val="BFBFBF">
+                <a:alpha val="50980"/>
+              </a:srgbClr>
+            </a:outerShdw>
+          </a:effectLst>
+        </p:spPr>
+        <p:txBody>
+          <a:bodyPr spcFirstLastPara="1" wrap="square" lIns="91425" tIns="91425" rIns="91425" bIns="91425" anchor="ctr" anchorCtr="0">
+            <a:noAutofit/>
+          </a:bodyPr>
+          <a:lstStyle/>
+          <a:p>
+            <a:pPr marL="0" lvl="0" indent="0" algn="l" rtl="0">
+              <a:spcBef>
+                <a:spcPts val="0"/>
+              </a:spcBef>
+              <a:spcAft>
+                <a:spcPts val="0"/>
+              </a:spcAft>
+              <a:buNone/>
+            </a:pPr>
+            <a:endParaRPr>
+              <a:latin typeface="Arial" panose="020B0604020202020204" pitchFamily="34" charset="0"/>
+              <a:cs typeface="Arial" panose="020B0604020202020204" pitchFamily="34" charset="0"/>
+            </a:endParaRPr>
+          </a:p>
+        </p:txBody>
+      </p:sp>
+      <p:sp>
+        <p:nvSpPr>
+          <p:cNvPr id="10" name="Google Shape;126;p8">
+            <a:extLst>
+              <a:ext uri="{FF2B5EF4-FFF2-40B4-BE49-F238E27FC236}">
+                <a16:creationId xmlns:a16="http://schemas.microsoft.com/office/drawing/2014/main" id="{3BD8A43C-FC8B-4CEC-F50F-EDDDBE2F6A03}"/>
+              </a:ext>
+            </a:extLst>
+          </p:cNvPr>
+          <p:cNvSpPr/>
+          <p:nvPr/>
+        </p:nvSpPr>
+        <p:spPr>
+          <a:xfrm flipH="1">
+            <a:off x="951090" y="5273866"/>
+            <a:ext cx="154500" cy="158400"/>
+          </a:xfrm>
+          <a:prstGeom prst="ellipse">
+            <a:avLst/>
+          </a:prstGeom>
+          <a:solidFill>
+            <a:schemeClr val="tx1"/>
+          </a:solidFill>
+          <a:ln>
+            <a:noFill/>
+          </a:ln>
+          <a:effectLst>
+            <a:outerShdw blurRad="203040" dist="75967" dir="5448874" sx="102000" sy="102000" algn="ctr" rotWithShape="0">
+              <a:srgbClr val="BFBFBF">
+                <a:alpha val="50980"/>
+              </a:srgbClr>
+            </a:outerShdw>
+          </a:effectLst>
+        </p:spPr>
+        <p:txBody>
+          <a:bodyPr spcFirstLastPara="1" wrap="square" lIns="91425" tIns="91425" rIns="91425" bIns="91425" anchor="ctr" anchorCtr="0">
+            <a:noAutofit/>
+          </a:bodyPr>
+          <a:lstStyle/>
+          <a:p>
+            <a:pPr marL="0" lvl="0" indent="0" algn="l" rtl="0">
+              <a:spcBef>
+                <a:spcPts val="0"/>
+              </a:spcBef>
+              <a:spcAft>
+                <a:spcPts val="0"/>
+              </a:spcAft>
+              <a:buNone/>
+            </a:pPr>
+            <a:endParaRPr>
+              <a:latin typeface="Arial" panose="020B0604020202020204" pitchFamily="34" charset="0"/>
+              <a:cs typeface="Arial" panose="020B0604020202020204" pitchFamily="34" charset="0"/>
+            </a:endParaRPr>
+          </a:p>
+        </p:txBody>
+      </p:sp>
+      <p:sp>
+        <p:nvSpPr>
+          <p:cNvPr id="12" name="Google Shape;71;p5">
+            <a:extLst>
+              <a:ext uri="{FF2B5EF4-FFF2-40B4-BE49-F238E27FC236}">
+                <a16:creationId xmlns:a16="http://schemas.microsoft.com/office/drawing/2014/main" id="{AC1034CF-E005-ABCD-F321-DDE2433B7809}"/>
+              </a:ext>
+            </a:extLst>
+          </p:cNvPr>
+          <p:cNvSpPr txBox="1">
+            <a:spLocks noGrp="1"/>
+          </p:cNvSpPr>
+          <p:nvPr>
+            <p:ph type="sldNum" idx="12"/>
+          </p:nvPr>
+        </p:nvSpPr>
+        <p:spPr>
+          <a:xfrm>
+            <a:off x="8610600" y="6308204"/>
+            <a:ext cx="3251106" cy="413272"/>
+          </a:xfrm>
+          <a:prstGeom prst="rect">
+            <a:avLst/>
+          </a:prstGeom>
+          <a:noFill/>
+          <a:ln>
+            <a:noFill/>
+          </a:ln>
+        </p:spPr>
+        <p:txBody>
+          <a:bodyPr spcFirstLastPara="1" wrap="square" lIns="91425" tIns="45700" rIns="91425" bIns="45700" anchor="ctr" anchorCtr="0">
+            <a:noAutofit/>
+          </a:bodyPr>
+          <a:lstStyle/>
+          <a:p>
+            <a:pPr marL="0" lvl="0" indent="0" algn="r" rtl="0">
+              <a:spcBef>
+                <a:spcPts val="0"/>
+              </a:spcBef>
+              <a:spcAft>
+                <a:spcPts val="0"/>
+              </a:spcAft>
+              <a:buNone/>
+            </a:pPr>
+            <a:fld id="{00000000-1234-1234-1234-123412341234}" type="slidenum">
+              <a:rPr lang="ru-RU" sz="1400" smtClean="0">
+                <a:solidFill>
+                  <a:schemeClr val="tx1"/>
+                </a:solidFill>
+                <a:latin typeface="Arial" panose="020B0604020202020204" pitchFamily="34" charset="0"/>
+                <a:cs typeface="Arial" panose="020B0604020202020204" pitchFamily="34" charset="0"/>
+              </a:rPr>
+              <a:t>13</a:t>
+            </a:fld>
+            <a:r>
+              <a:rPr lang="en-US" sz="1400" dirty="0">
+                <a:solidFill>
+                  <a:schemeClr val="tx1"/>
+                </a:solidFill>
+                <a:latin typeface="Arial" panose="020B0604020202020204" pitchFamily="34" charset="0"/>
+                <a:cs typeface="Arial" panose="020B0604020202020204" pitchFamily="34" charset="0"/>
+              </a:rPr>
+              <a:t>/1</a:t>
+            </a:r>
+            <a:r>
+              <a:rPr lang="ru-RU" sz="1400" dirty="0">
+                <a:solidFill>
+                  <a:schemeClr val="tx1"/>
+                </a:solidFill>
+                <a:latin typeface="Arial" panose="020B0604020202020204" pitchFamily="34" charset="0"/>
+                <a:cs typeface="Arial" panose="020B0604020202020204" pitchFamily="34" charset="0"/>
+              </a:rPr>
+              <a:t>3</a:t>
+            </a:r>
+            <a:endParaRPr sz="1400" dirty="0">
+              <a:solidFill>
+                <a:schemeClr val="tx1"/>
+              </a:solidFill>
+              <a:latin typeface="Arial" panose="020B0604020202020204" pitchFamily="34" charset="0"/>
+              <a:cs typeface="Arial" panose="020B0604020202020204" pitchFamily="34" charset="0"/>
+            </a:endParaRPr>
+          </a:p>
+        </p:txBody>
+      </p:sp>
+    </p:spTree>
+    <p:extLst>
+      <p:ext uri="{BB962C8B-B14F-4D97-AF65-F5344CB8AC3E}">
+        <p14:creationId xmlns:p14="http://schemas.microsoft.com/office/powerpoint/2010/main" val="2351513384"/>
+      </p:ext>
+    </p:extLst>
+  </p:cSld>
+  <p:clrMapOvr>
+    <a:masterClrMapping/>
+  </p:clrMapOvr>
+</p:sld>
+</file>
+
+<file path=ppt/slides/slide14.xml><?xml version="1.0" encoding="utf-8"?>
+<p:sld xmlns:a="http://schemas.openxmlformats.org/drawingml/2006/main" xmlns:r="http://schemas.openxmlformats.org/officeDocument/2006/relationships" xmlns:p="http://schemas.openxmlformats.org/presentationml/2006/main">
+  <p:cSld>
+    <p:spTree>
+      <p:nvGrpSpPr>
+        <p:cNvPr id="1" name=""/>
+        <p:cNvGrpSpPr/>
+        <p:nvPr/>
+      </p:nvGrpSpPr>
+      <p:grpSpPr>
+        <a:xfrm>
+          <a:off x="0" y="0"/>
+          <a:ext cx="0" cy="0"/>
+          <a:chOff x="0" y="0"/>
+          <a:chExt cx="0" cy="0"/>
+        </a:xfrm>
+      </p:grpSpPr>
+      <p:sp>
+        <p:nvSpPr>
+          <p:cNvPr id="3" name="TextBox 2">
+            <a:extLst>
+              <a:ext uri="{FF2B5EF4-FFF2-40B4-BE49-F238E27FC236}">
+                <a16:creationId xmlns:a16="http://schemas.microsoft.com/office/drawing/2014/main" id="{A9909FDF-C3F4-B8C7-8219-ACAB6E75C323}"/>
+              </a:ext>
+            </a:extLst>
+          </p:cNvPr>
+          <p:cNvSpPr txBox="1"/>
+          <p:nvPr/>
+        </p:nvSpPr>
+        <p:spPr>
+          <a:xfrm>
+            <a:off x="1416186" y="3189774"/>
+            <a:ext cx="9359626" cy="1077218"/>
+          </a:xfrm>
+          <a:prstGeom prst="rect">
+            <a:avLst/>
+          </a:prstGeom>
+          <a:noFill/>
+        </p:spPr>
+        <p:txBody>
+          <a:bodyPr wrap="square">
+            <a:spAutoFit/>
+          </a:bodyPr>
+          <a:lstStyle/>
+          <a:p>
+            <a:pPr algn="ctr"/>
+            <a:r>
+              <a:rPr lang="ru-RU" sz="3200" dirty="0">
+                <a:latin typeface="Times New Roman" panose="02020603050405020304" pitchFamily="18" charset="0"/>
+                <a:cs typeface="Times New Roman" panose="02020603050405020304" pitchFamily="18" charset="0"/>
+              </a:rPr>
+              <a:t>Разработка мобильного приложения для владельцев домашних питомцев «</a:t>
+            </a:r>
+            <a:r>
+              <a:rPr lang="en-US" sz="3200" dirty="0" err="1">
+                <a:latin typeface="Times New Roman" panose="02020603050405020304" pitchFamily="18" charset="0"/>
+                <a:cs typeface="Times New Roman" panose="02020603050405020304" pitchFamily="18" charset="0"/>
+              </a:rPr>
+              <a:t>PetDiary</a:t>
+            </a:r>
+            <a:r>
+              <a:rPr lang="ru-RU" sz="3200" dirty="0">
+                <a:latin typeface="Times New Roman" panose="02020603050405020304" pitchFamily="18" charset="0"/>
+                <a:cs typeface="Times New Roman" panose="02020603050405020304" pitchFamily="18" charset="0"/>
+              </a:rPr>
+              <a:t>»</a:t>
+            </a:r>
+          </a:p>
+        </p:txBody>
+      </p:sp>
+      <p:sp>
+        <p:nvSpPr>
+          <p:cNvPr id="5" name="TextBox 4">
+            <a:extLst>
+              <a:ext uri="{FF2B5EF4-FFF2-40B4-BE49-F238E27FC236}">
+                <a16:creationId xmlns:a16="http://schemas.microsoft.com/office/drawing/2014/main" id="{2F85A4FD-A72A-6DF0-A1CA-0B51C8D5F4A8}"/>
+              </a:ext>
+            </a:extLst>
+          </p:cNvPr>
+          <p:cNvSpPr txBox="1"/>
+          <p:nvPr/>
+        </p:nvSpPr>
+        <p:spPr>
+          <a:xfrm>
+            <a:off x="645695" y="228676"/>
+            <a:ext cx="11429999" cy="1154162"/>
+          </a:xfrm>
+          <a:prstGeom prst="rect">
+            <a:avLst/>
+          </a:prstGeom>
+          <a:noFill/>
+        </p:spPr>
+        <p:txBody>
+          <a:bodyPr wrap="square">
+            <a:spAutoFit/>
+          </a:bodyPr>
+          <a:lstStyle/>
+          <a:p>
+            <a:pPr algn="ctr"/>
+            <a:r>
+              <a:rPr lang="ru-RU" sz="2300" dirty="0">
+                <a:latin typeface="Arial" panose="020B0604020202020204" pitchFamily="34" charset="0"/>
+                <a:cs typeface="Arial" panose="020B0604020202020204" pitchFamily="34" charset="0"/>
+              </a:rPr>
+              <a:t>МИНОБРНАУКИ РОССИИ ФЕДЕРАЛЬНОЕ ГОСУДАРСТВЕННОЕ БЮДЖЕТНОЕ ОБРАЗОВАТЕЛЬНОЕ УЧРЕЖДЕНИЕ ВЫСШЕГО ОБРАЗОВАНИЯ «ВОРОНЕЖСКИЙ ГОСУДАРСТВЕННЫЙ УНИВЕРСИТЕТ» (ФГБОУ ВО «ВГУ») </a:t>
+            </a:r>
+          </a:p>
+        </p:txBody>
+      </p:sp>
+      <p:sp>
+        <p:nvSpPr>
+          <p:cNvPr id="7" name="TextBox 6">
+            <a:extLst>
+              <a:ext uri="{FF2B5EF4-FFF2-40B4-BE49-F238E27FC236}">
+                <a16:creationId xmlns:a16="http://schemas.microsoft.com/office/drawing/2014/main" id="{32F80E46-2CFB-DA4C-9229-298B71126795}"/>
+              </a:ext>
+            </a:extLst>
+          </p:cNvPr>
+          <p:cNvSpPr txBox="1"/>
+          <p:nvPr/>
+        </p:nvSpPr>
+        <p:spPr>
+          <a:xfrm>
+            <a:off x="1074822" y="1789943"/>
+            <a:ext cx="10571746" cy="800219"/>
+          </a:xfrm>
+          <a:prstGeom prst="rect">
+            <a:avLst/>
+          </a:prstGeom>
+          <a:noFill/>
+        </p:spPr>
+        <p:txBody>
+          <a:bodyPr wrap="square">
+            <a:spAutoFit/>
+          </a:bodyPr>
+          <a:lstStyle/>
+          <a:p>
+            <a:pPr algn="ctr"/>
+            <a:r>
+              <a:rPr lang="ru-RU" sz="2300" dirty="0">
+                <a:latin typeface="Arial" panose="020B0604020202020204" pitchFamily="34" charset="0"/>
+                <a:cs typeface="Arial" panose="020B0604020202020204" pitchFamily="34" charset="0"/>
+              </a:rPr>
+              <a:t>Факультет компьютерных наук </a:t>
+            </a:r>
+            <a:endParaRPr lang="en-US" sz="2300" dirty="0">
+              <a:latin typeface="Arial" panose="020B0604020202020204" pitchFamily="34" charset="0"/>
+              <a:cs typeface="Arial" panose="020B0604020202020204" pitchFamily="34" charset="0"/>
+            </a:endParaRPr>
+          </a:p>
+          <a:p>
+            <a:pPr algn="ctr"/>
+            <a:r>
+              <a:rPr lang="ru-RU" sz="2300" dirty="0">
+                <a:latin typeface="Arial" panose="020B0604020202020204" pitchFamily="34" charset="0"/>
+                <a:cs typeface="Arial" panose="020B0604020202020204" pitchFamily="34" charset="0"/>
+              </a:rPr>
+              <a:t>Кафедра программирования и информационных технологий </a:t>
+            </a:r>
+          </a:p>
+        </p:txBody>
+      </p:sp>
+      <p:sp>
+        <p:nvSpPr>
+          <p:cNvPr id="9" name="TextBox 8">
+            <a:extLst>
+              <a:ext uri="{FF2B5EF4-FFF2-40B4-BE49-F238E27FC236}">
+                <a16:creationId xmlns:a16="http://schemas.microsoft.com/office/drawing/2014/main" id="{38BFCE6F-AC5F-63A8-D705-E83276E1119D}"/>
+              </a:ext>
+            </a:extLst>
+          </p:cNvPr>
+          <p:cNvSpPr txBox="1"/>
+          <p:nvPr/>
+        </p:nvSpPr>
+        <p:spPr>
+          <a:xfrm>
+            <a:off x="6360695" y="5828259"/>
+            <a:ext cx="5999746" cy="800219"/>
+          </a:xfrm>
+          <a:prstGeom prst="rect">
+            <a:avLst/>
+          </a:prstGeom>
+          <a:noFill/>
+        </p:spPr>
+        <p:txBody>
+          <a:bodyPr wrap="square">
+            <a:spAutoFit/>
+          </a:bodyPr>
+          <a:lstStyle/>
+          <a:p>
+            <a:r>
+              <a:rPr lang="ru-RU" sz="2300" dirty="0">
+                <a:latin typeface="Arial" panose="020B0604020202020204" pitchFamily="34" charset="0"/>
+                <a:cs typeface="Arial" panose="020B0604020202020204" pitchFamily="34" charset="0"/>
+              </a:rPr>
+              <a:t>Научный руководитель: </a:t>
+            </a:r>
+            <a:r>
+              <a:rPr lang="en-US" sz="2300" dirty="0">
+                <a:latin typeface="Arial" panose="020B0604020202020204" pitchFamily="34" charset="0"/>
+                <a:cs typeface="Arial" panose="020B0604020202020204" pitchFamily="34" charset="0"/>
+              </a:rPr>
+              <a:t> </a:t>
+            </a:r>
+            <a:r>
+              <a:rPr lang="ru-RU" sz="2300" dirty="0">
+                <a:latin typeface="Arial" panose="020B0604020202020204" pitchFamily="34" charset="0"/>
+                <a:cs typeface="Arial" panose="020B0604020202020204" pitchFamily="34" charset="0"/>
+              </a:rPr>
+              <a:t>асс. Ушаков В.А. </a:t>
+            </a:r>
+          </a:p>
+          <a:p>
+            <a:r>
+              <a:rPr lang="ru-RU" sz="2300" dirty="0">
+                <a:latin typeface="Arial" panose="020B0604020202020204" pitchFamily="34" charset="0"/>
+                <a:cs typeface="Arial" panose="020B0604020202020204" pitchFamily="34" charset="0"/>
+              </a:rPr>
+              <a:t>Выполнила: ст.</a:t>
+            </a:r>
+            <a:r>
+              <a:rPr lang="en-US" sz="2300" dirty="0">
+                <a:latin typeface="Arial" panose="020B0604020202020204" pitchFamily="34" charset="0"/>
+                <a:cs typeface="Arial" panose="020B0604020202020204" pitchFamily="34" charset="0"/>
+              </a:rPr>
+              <a:t> </a:t>
+            </a:r>
+            <a:r>
+              <a:rPr lang="ru-RU" sz="2300" dirty="0">
+                <a:latin typeface="Arial" panose="020B0604020202020204" pitchFamily="34" charset="0"/>
+                <a:cs typeface="Arial" panose="020B0604020202020204" pitchFamily="34" charset="0"/>
+              </a:rPr>
+              <a:t>3 курса Аверкиева  Е.А.</a:t>
+            </a:r>
+          </a:p>
+        </p:txBody>
+      </p:sp>
+    </p:spTree>
+    <p:extLst>
+      <p:ext uri="{BB962C8B-B14F-4D97-AF65-F5344CB8AC3E}">
+        <p14:creationId xmlns:p14="http://schemas.microsoft.com/office/powerpoint/2010/main" val="931236471"/>
       </p:ext>
     </p:extLst>
   </p:cSld>
@@ -4639,8 +6154,8 @@
         </p:nvSpPr>
         <p:spPr>
           <a:xfrm>
-            <a:off x="8610600" y="6356350"/>
-            <a:ext cx="2743200" cy="365125"/>
+            <a:off x="8610600" y="6308204"/>
+            <a:ext cx="3251106" cy="413272"/>
           </a:xfrm>
           <a:prstGeom prst="rect">
             <a:avLst/>
@@ -4666,7 +6181,7 @@
               <a:buNone/>
             </a:pPr>
             <a:fld id="{00000000-1234-1234-1234-123412341234}" type="slidenum">
-              <a:rPr lang="ru-RU">
+              <a:rPr lang="ru-RU" sz="1400" smtClean="0">
                 <a:solidFill>
                   <a:schemeClr val="tx1"/>
                 </a:solidFill>
@@ -4675,7 +6190,27 @@
               </a:rPr>
               <a:t>2</a:t>
             </a:fld>
-            <a:endParaRPr>
+            <a:r>
+              <a:rPr lang="en-US" sz="1400" dirty="0">
+                <a:solidFill>
+                  <a:schemeClr val="tx1"/>
+                </a:solidFill>
+                <a:latin typeface="Arial" panose="020B0604020202020204" pitchFamily="34" charset="0"/>
+                <a:cs typeface="Arial" panose="020B0604020202020204" pitchFamily="34" charset="0"/>
+              </a:rPr>
+              <a:t>/1</a:t>
+            </a:r>
+            <a:r>
+              <a:rPr lang="ru-RU" sz="1400" dirty="0">
+                <a:solidFill>
+                  <a:schemeClr val="tx1"/>
+                </a:solidFill>
+                <a:latin typeface="Arial" panose="020B0604020202020204" pitchFamily="34" charset="0"/>
+                <a:cs typeface="Arial" panose="020B0604020202020204" pitchFamily="34" charset="0"/>
+              </a:rPr>
+              <a:t>3</a:t>
+            </a:r>
+            <a:endParaRPr sz="1400" dirty="0">
               <a:solidFill>
                 <a:schemeClr val="tx1"/>
               </a:solidFill>
@@ -5194,66 +6729,6 @@
       </p:grpSpPr>
       <p:sp>
         <p:nvSpPr>
-          <p:cNvPr id="3" name="Google Shape;84;p6">
-            <a:extLst>
-              <a:ext uri="{FF2B5EF4-FFF2-40B4-BE49-F238E27FC236}">
-                <a16:creationId xmlns:a16="http://schemas.microsoft.com/office/drawing/2014/main" id="{333F555D-7674-E7B8-B8D6-488DEFC96FFD}"/>
-              </a:ext>
-            </a:extLst>
-          </p:cNvPr>
-          <p:cNvSpPr txBox="1">
-            <a:spLocks noGrp="1"/>
-          </p:cNvSpPr>
-          <p:nvPr>
-            <p:ph type="sldNum" sz="quarter" idx="12"/>
-          </p:nvPr>
-        </p:nvSpPr>
-        <p:spPr>
-          <a:prstGeom prst="rect">
-            <a:avLst/>
-          </a:prstGeom>
-          <a:noFill/>
-          <a:ln>
-            <a:noFill/>
-          </a:ln>
-        </p:spPr>
-        <p:txBody>
-          <a:bodyPr spcFirstLastPara="1" wrap="square" lIns="91425" tIns="45700" rIns="91425" bIns="45700" anchor="ctr" anchorCtr="0">
-            <a:noAutofit/>
-          </a:bodyPr>
-          <a:lstStyle/>
-          <a:p>
-            <a:pPr marL="0" lvl="0" indent="0" algn="r" rtl="0">
-              <a:spcBef>
-                <a:spcPts val="0"/>
-              </a:spcBef>
-              <a:spcAft>
-                <a:spcPts val="0"/>
-              </a:spcAft>
-              <a:buNone/>
-            </a:pPr>
-            <a:fld id="{00000000-1234-1234-1234-123412341234}" type="slidenum">
-              <a:rPr lang="ru-RU">
-                <a:solidFill>
-                  <a:schemeClr val="tx1"/>
-                </a:solidFill>
-                <a:latin typeface="Arial" panose="020B0604020202020204" pitchFamily="34" charset="0"/>
-                <a:cs typeface="Arial" panose="020B0604020202020204" pitchFamily="34" charset="0"/>
-              </a:rPr>
-              <a:t>3</a:t>
-            </a:fld>
-            <a:endParaRPr dirty="0">
-              <a:solidFill>
-                <a:schemeClr val="tx1"/>
-              </a:solidFill>
-              <a:latin typeface="Arial" panose="020B0604020202020204" pitchFamily="34" charset="0"/>
-              <a:cs typeface="Arial" panose="020B0604020202020204" pitchFamily="34" charset="0"/>
-            </a:endParaRPr>
-          </a:p>
-        </p:txBody>
-      </p:sp>
-      <p:sp>
-        <p:nvSpPr>
           <p:cNvPr id="4" name="Google Shape;85;p6">
             <a:extLst>
               <a:ext uri="{FF2B5EF4-FFF2-40B4-BE49-F238E27FC236}">
@@ -5544,7 +7019,25 @@
                 <a:cs typeface="Arial" panose="020B0604020202020204" pitchFamily="34" charset="0"/>
                 <a:sym typeface="Arial"/>
               </a:rPr>
-              <a:t>Реализация функций разрабатываемой.</a:t>
+              <a:t>Реализация функций разрабатываемой</a:t>
+            </a:r>
+            <a:r>
+              <a:rPr lang="en-US" sz="2300" b="0" i="0" u="none" strike="noStrike" cap="none" dirty="0">
+                <a:latin typeface="Arial" panose="020B0604020202020204" pitchFamily="34" charset="0"/>
+                <a:ea typeface="Arial"/>
+                <a:cs typeface="Arial" panose="020B0604020202020204" pitchFamily="34" charset="0"/>
+                <a:sym typeface="Arial"/>
+              </a:rPr>
+              <a:t> </a:t>
+            </a:r>
+            <a:r>
+              <a:rPr lang="ru-RU" sz="2300" b="0" i="0" u="none" strike="noStrike" cap="none" dirty="0">
+                <a:latin typeface="Arial" panose="020B0604020202020204" pitchFamily="34" charset="0"/>
+                <a:ea typeface="Arial"/>
+                <a:cs typeface="Arial" panose="020B0604020202020204" pitchFamily="34" charset="0"/>
+                <a:sym typeface="Arial"/>
+              </a:rPr>
+              <a:t>системы.</a:t>
             </a:r>
             <a:endParaRPr sz="2300" dirty="0">
               <a:latin typeface="Arial" panose="020B0604020202020204" pitchFamily="34" charset="0"/>
@@ -5773,6 +7266,90 @@
               <a:buNone/>
             </a:pPr>
             <a:endParaRPr>
+              <a:latin typeface="Arial" panose="020B0604020202020204" pitchFamily="34" charset="0"/>
+              <a:cs typeface="Arial" panose="020B0604020202020204" pitchFamily="34" charset="0"/>
+            </a:endParaRPr>
+          </a:p>
+        </p:txBody>
+      </p:sp>
+      <p:sp>
+        <p:nvSpPr>
+          <p:cNvPr id="6" name="Google Shape;71;p5">
+            <a:extLst>
+              <a:ext uri="{FF2B5EF4-FFF2-40B4-BE49-F238E27FC236}">
+                <a16:creationId xmlns:a16="http://schemas.microsoft.com/office/drawing/2014/main" id="{EB935FA8-8E48-20AD-3E82-7C803BFC10BE}"/>
+              </a:ext>
+            </a:extLst>
+          </p:cNvPr>
+          <p:cNvSpPr txBox="1">
+            <a:spLocks noGrp="1"/>
+          </p:cNvSpPr>
+          <p:nvPr>
+            <p:ph type="sldNum" idx="12"/>
+          </p:nvPr>
+        </p:nvSpPr>
+        <p:spPr>
+          <a:xfrm>
+            <a:off x="8610600" y="6308204"/>
+            <a:ext cx="3251106" cy="413272"/>
+          </a:xfrm>
+          <a:prstGeom prst="rect">
+            <a:avLst/>
+          </a:prstGeom>
+          <a:noFill/>
+          <a:ln>
+            <a:noFill/>
+          </a:ln>
+        </p:spPr>
+        <p:txBody>
+          <a:bodyPr spcFirstLastPara="1" wrap="square" lIns="91425" tIns="45700" rIns="91425" bIns="45700" anchor="ctr" anchorCtr="0">
+            <a:noAutofit/>
+          </a:bodyPr>
+          <a:lstStyle/>
+          <a:p>
+            <a:pPr marL="0" lvl="0" indent="0" algn="r" rtl="0">
+              <a:spcBef>
+                <a:spcPts val="0"/>
+              </a:spcBef>
+              <a:spcAft>
+                <a:spcPts val="0"/>
+              </a:spcAft>
+              <a:buNone/>
+            </a:pPr>
+            <a:fld id="{00000000-1234-1234-1234-123412341234}" type="slidenum">
+              <a:rPr lang="ru-RU" sz="1400" smtClean="0">
+                <a:solidFill>
+                  <a:schemeClr val="tx1"/>
+                </a:solidFill>
+                <a:latin typeface="Arial" panose="020B0604020202020204" pitchFamily="34" charset="0"/>
+                <a:cs typeface="Arial" panose="020B0604020202020204" pitchFamily="34" charset="0"/>
+              </a:rPr>
+              <a:t>3</a:t>
+            </a:fld>
+            <a:r>
+              <a:rPr lang="en-US" sz="1400" dirty="0">
+                <a:solidFill>
+                  <a:schemeClr val="tx1"/>
+                </a:solidFill>
+                <a:latin typeface="Arial" panose="020B0604020202020204" pitchFamily="34" charset="0"/>
+                <a:cs typeface="Arial" panose="020B0604020202020204" pitchFamily="34" charset="0"/>
+              </a:rPr>
+              <a:t>/1</a:t>
+            </a:r>
+            <a:r>
+              <a:rPr lang="ru-RU" sz="1400" dirty="0">
+                <a:solidFill>
+                  <a:schemeClr val="tx1"/>
+                </a:solidFill>
+                <a:latin typeface="Arial" panose="020B0604020202020204" pitchFamily="34" charset="0"/>
+                <a:cs typeface="Arial" panose="020B0604020202020204" pitchFamily="34" charset="0"/>
+              </a:rPr>
+              <a:t>3</a:t>
+            </a:r>
+            <a:endParaRPr sz="1400" dirty="0">
+              <a:solidFill>
+                <a:schemeClr val="tx1"/>
+              </a:solidFill>
               <a:latin typeface="Arial" panose="020B0604020202020204" pitchFamily="34" charset="0"/>
               <a:cs typeface="Arial" panose="020B0604020202020204" pitchFamily="34" charset="0"/>
             </a:endParaRPr>
@@ -5811,10 +7388,10 @@
       </p:grpSpPr>
       <p:sp>
         <p:nvSpPr>
-          <p:cNvPr id="2" name="Google Shape;101;p7">
-            <a:extLst>
-              <a:ext uri="{FF2B5EF4-FFF2-40B4-BE49-F238E27FC236}">
-                <a16:creationId xmlns:a16="http://schemas.microsoft.com/office/drawing/2014/main" id="{889FED40-C1BC-90F8-F68C-3780EFEDC7B6}"/>
+          <p:cNvPr id="2" name="Google Shape;85;p6">
+            <a:extLst>
+              <a:ext uri="{FF2B5EF4-FFF2-40B4-BE49-F238E27FC236}">
+                <a16:creationId xmlns:a16="http://schemas.microsoft.com/office/drawing/2014/main" id="{9D917E89-9D16-C704-93C5-86BBE49238B4}"/>
               </a:ext>
             </a:extLst>
           </p:cNvPr>
@@ -5826,7 +7403,7 @@
         <p:spPr>
           <a:xfrm>
             <a:off x="1033072" y="365126"/>
-            <a:ext cx="8202600" cy="697800"/>
+            <a:ext cx="8202474" cy="697717"/>
           </a:xfrm>
           <a:prstGeom prst="rect">
             <a:avLst/>
@@ -5875,28 +7452,21 @@
               <a:buNone/>
             </a:pPr>
             <a:r>
-              <a:rPr lang="en-US" dirty="0">
-                <a:latin typeface="Arial" panose="020B0604020202020204" pitchFamily="34" charset="0"/>
-                <a:cs typeface="Arial" panose="020B0604020202020204" pitchFamily="34" charset="0"/>
-              </a:rPr>
-              <a:t>ER</a:t>
-            </a:r>
-            <a:r>
               <a:rPr lang="ru-RU" dirty="0">
                 <a:latin typeface="Arial" panose="020B0604020202020204" pitchFamily="34" charset="0"/>
                 <a:cs typeface="Arial" panose="020B0604020202020204" pitchFamily="34" charset="0"/>
               </a:rPr>
-              <a:t>-диаграмма</a:t>
+              <a:t>Обзор аналогов</a:t>
             </a:r>
           </a:p>
         </p:txBody>
       </p:sp>
       <p:pic>
         <p:nvPicPr>
-          <p:cNvPr id="4" name="Рисунок 3" descr="Изображение выглядит как текст, диаграмма, число, Параллельный&#10;&#10;Автоматически созданное описание">
-            <a:extLst>
-              <a:ext uri="{FF2B5EF4-FFF2-40B4-BE49-F238E27FC236}">
-                <a16:creationId xmlns:a16="http://schemas.microsoft.com/office/drawing/2014/main" id="{7B9EF08C-7B9D-0A14-BD37-BC007267794E}"/>
+          <p:cNvPr id="5" name="Рисунок 4">
+            <a:extLst>
+              <a:ext uri="{FF2B5EF4-FFF2-40B4-BE49-F238E27FC236}">
+                <a16:creationId xmlns:a16="http://schemas.microsoft.com/office/drawing/2014/main" id="{BA530D5F-AE10-7FA4-F413-8BE8EC4288E6}"/>
               </a:ext>
             </a:extLst>
           </p:cNvPr>
@@ -5906,20 +7476,15 @@
           <p:nvPr/>
         </p:nvPicPr>
         <p:blipFill>
-          <a:blip r:embed="rId2">
-            <a:extLst>
-              <a:ext uri="{28A0092B-C50C-407E-A947-70E740481C1C}">
-                <a14:useLocalDpi xmlns:a14="http://schemas.microsoft.com/office/drawing/2010/main" val="0"/>
-              </a:ext>
-            </a:extLst>
-          </a:blip>
-          <a:srcRect l="8144" t="4589"/>
-          <a:stretch/>
+          <a:blip r:embed="rId2"/>
+          <a:stretch>
+            <a:fillRect/>
+          </a:stretch>
         </p:blipFill>
         <p:spPr>
           <a:xfrm>
-            <a:off x="2956328" y="1058978"/>
-            <a:ext cx="5598367" cy="5433896"/>
+            <a:off x="189260" y="1769605"/>
+            <a:ext cx="12002740" cy="3030995"/>
           </a:xfrm>
           <a:prstGeom prst="rect">
             <a:avLst/>
@@ -5928,10 +7493,10 @@
       </p:pic>
       <p:sp>
         <p:nvSpPr>
-          <p:cNvPr id="5" name="Google Shape;84;p6">
-            <a:extLst>
-              <a:ext uri="{FF2B5EF4-FFF2-40B4-BE49-F238E27FC236}">
-                <a16:creationId xmlns:a16="http://schemas.microsoft.com/office/drawing/2014/main" id="{AB101A6C-D296-01A5-C673-0800072376AA}"/>
+          <p:cNvPr id="7" name="Google Shape;71;p5">
+            <a:extLst>
+              <a:ext uri="{FF2B5EF4-FFF2-40B4-BE49-F238E27FC236}">
+                <a16:creationId xmlns:a16="http://schemas.microsoft.com/office/drawing/2014/main" id="{96493A99-C42B-65F4-54B3-71156FF3FD6F}"/>
               </a:ext>
             </a:extLst>
           </p:cNvPr>
@@ -5939,13 +7504,13 @@
             <a:spLocks noGrp="1"/>
           </p:cNvSpPr>
           <p:nvPr>
-            <p:ph type="sldNum" sz="quarter" idx="12"/>
+            <p:ph type="sldNum" idx="12"/>
           </p:nvPr>
         </p:nvSpPr>
         <p:spPr>
           <a:xfrm>
-            <a:off x="8610600" y="6356350"/>
-            <a:ext cx="2743200" cy="365125"/>
+            <a:off x="8610600" y="6308204"/>
+            <a:ext cx="3251106" cy="413272"/>
           </a:xfrm>
           <a:prstGeom prst="rect">
             <a:avLst/>
@@ -5971,7 +7536,7 @@
               <a:buNone/>
             </a:pPr>
             <a:fld id="{00000000-1234-1234-1234-123412341234}" type="slidenum">
-              <a:rPr lang="ru-RU">
+              <a:rPr lang="ru-RU" sz="1400" smtClean="0">
                 <a:solidFill>
                   <a:schemeClr val="tx1"/>
                 </a:solidFill>
@@ -5980,7 +7545,27 @@
               </a:rPr>
               <a:t>4</a:t>
             </a:fld>
-            <a:endParaRPr dirty="0">
+            <a:r>
+              <a:rPr lang="en-US" sz="1400" dirty="0">
+                <a:solidFill>
+                  <a:schemeClr val="tx1"/>
+                </a:solidFill>
+                <a:latin typeface="Arial" panose="020B0604020202020204" pitchFamily="34" charset="0"/>
+                <a:cs typeface="Arial" panose="020B0604020202020204" pitchFamily="34" charset="0"/>
+              </a:rPr>
+              <a:t>/1</a:t>
+            </a:r>
+            <a:r>
+              <a:rPr lang="ru-RU" sz="1400" dirty="0">
+                <a:solidFill>
+                  <a:schemeClr val="tx1"/>
+                </a:solidFill>
+                <a:latin typeface="Arial" panose="020B0604020202020204" pitchFamily="34" charset="0"/>
+                <a:cs typeface="Arial" panose="020B0604020202020204" pitchFamily="34" charset="0"/>
+              </a:rPr>
+              <a:t>3</a:t>
+            </a:r>
+            <a:endParaRPr sz="1400" dirty="0">
               <a:solidFill>
                 <a:schemeClr val="tx1"/>
               </a:solidFill>
@@ -5993,7 +7578,7 @@
     </p:spTree>
     <p:extLst>
       <p:ext uri="{BB962C8B-B14F-4D97-AF65-F5344CB8AC3E}">
-        <p14:creationId xmlns:p14="http://schemas.microsoft.com/office/powerpoint/2010/main" val="960810450"/>
+        <p14:creationId xmlns:p14="http://schemas.microsoft.com/office/powerpoint/2010/main" val="1809553778"/>
       </p:ext>
     </p:extLst>
   </p:cSld>
@@ -6022,10 +7607,10 @@
       </p:grpSpPr>
       <p:sp>
         <p:nvSpPr>
-          <p:cNvPr id="4" name="Google Shape;101;p7">
-            <a:extLst>
-              <a:ext uri="{FF2B5EF4-FFF2-40B4-BE49-F238E27FC236}">
-                <a16:creationId xmlns:a16="http://schemas.microsoft.com/office/drawing/2014/main" id="{05C491F7-BF31-B606-E8A3-37B348313FB3}"/>
+          <p:cNvPr id="4" name="Google Shape;109;p8">
+            <a:extLst>
+              <a:ext uri="{FF2B5EF4-FFF2-40B4-BE49-F238E27FC236}">
+                <a16:creationId xmlns:a16="http://schemas.microsoft.com/office/drawing/2014/main" id="{F4709B77-D597-B99C-BCFD-ADBF0853D766}"/>
               </a:ext>
             </a:extLst>
           </p:cNvPr>
@@ -6037,7 +7622,7 @@
         <p:spPr>
           <a:xfrm>
             <a:off x="1033072" y="365126"/>
-            <a:ext cx="8202600" cy="697800"/>
+            <a:ext cx="8202474" cy="697717"/>
           </a:xfrm>
           <a:prstGeom prst="rect">
             <a:avLst/>
@@ -6090,22 +7675,805 @@
                 <a:latin typeface="Arial" panose="020B0604020202020204" pitchFamily="34" charset="0"/>
                 <a:cs typeface="Arial" panose="020B0604020202020204" pitchFamily="34" charset="0"/>
               </a:rPr>
-              <a:t>Диаграмма прецедентов</a:t>
-            </a:r>
+              <a:t>Средства реализации</a:t>
+            </a:r>
+          </a:p>
+        </p:txBody>
+      </p:sp>
+      <p:sp>
+        <p:nvSpPr>
+          <p:cNvPr id="9" name="Google Shape;114;p8">
+            <a:extLst>
+              <a:ext uri="{FF2B5EF4-FFF2-40B4-BE49-F238E27FC236}">
+                <a16:creationId xmlns:a16="http://schemas.microsoft.com/office/drawing/2014/main" id="{FFD0DE75-AC77-EF47-2933-28889524DB68}"/>
+              </a:ext>
+            </a:extLst>
+          </p:cNvPr>
+          <p:cNvSpPr txBox="1"/>
+          <p:nvPr/>
+        </p:nvSpPr>
+        <p:spPr>
+          <a:xfrm>
+            <a:off x="1401147" y="1281056"/>
+            <a:ext cx="5361097" cy="481630"/>
+          </a:xfrm>
+          <a:prstGeom prst="rect">
+            <a:avLst/>
+          </a:prstGeom>
+          <a:noFill/>
+          <a:ln>
+            <a:noFill/>
+          </a:ln>
+        </p:spPr>
+        <p:txBody>
+          <a:bodyPr spcFirstLastPara="1" wrap="square" lIns="91425" tIns="45700" rIns="91425" bIns="45700" anchor="t" anchorCtr="0">
+            <a:spAutoFit/>
+          </a:bodyPr>
+          <a:lstStyle/>
+          <a:p>
+            <a:pPr marL="0" marR="0" lvl="0" indent="0" algn="l" rtl="0">
+              <a:lnSpc>
+                <a:spcPct val="115000"/>
+              </a:lnSpc>
+              <a:spcBef>
+                <a:spcPts val="0"/>
+              </a:spcBef>
+              <a:spcAft>
+                <a:spcPts val="0"/>
+              </a:spcAft>
+              <a:buNone/>
+            </a:pPr>
+            <a:r>
+              <a:rPr lang="ru-RU" sz="2200" dirty="0">
+                <a:latin typeface="Arial" panose="020B0604020202020204" pitchFamily="34" charset="0"/>
+                <a:ea typeface="Arial"/>
+                <a:cs typeface="Arial" panose="020B0604020202020204" pitchFamily="34" charset="0"/>
+                <a:sym typeface="Arial"/>
+              </a:rPr>
+              <a:t>Язык программирования </a:t>
+            </a:r>
+            <a:r>
+              <a:rPr lang="ru-RU" sz="2200" dirty="0" err="1">
+                <a:latin typeface="Arial" panose="020B0604020202020204" pitchFamily="34" charset="0"/>
+                <a:ea typeface="Arial"/>
+                <a:cs typeface="Arial" panose="020B0604020202020204" pitchFamily="34" charset="0"/>
+                <a:sym typeface="Arial"/>
+              </a:rPr>
+              <a:t>Kotlin</a:t>
+            </a:r>
+            <a:r>
+              <a:rPr lang="ru-RU" sz="2200" dirty="0">
+                <a:latin typeface="Arial" panose="020B0604020202020204" pitchFamily="34" charset="0"/>
+                <a:ea typeface="Arial"/>
+                <a:cs typeface="Arial" panose="020B0604020202020204" pitchFamily="34" charset="0"/>
+                <a:sym typeface="Arial"/>
+              </a:rPr>
+              <a:t> </a:t>
+            </a:r>
+            <a:endParaRPr dirty="0">
+              <a:latin typeface="Arial" panose="020B0604020202020204" pitchFamily="34" charset="0"/>
+              <a:cs typeface="Arial" panose="020B0604020202020204" pitchFamily="34" charset="0"/>
+            </a:endParaRPr>
+          </a:p>
+        </p:txBody>
+      </p:sp>
+      <p:sp>
+        <p:nvSpPr>
+          <p:cNvPr id="13" name="Google Shape;118;p8">
+            <a:extLst>
+              <a:ext uri="{FF2B5EF4-FFF2-40B4-BE49-F238E27FC236}">
+                <a16:creationId xmlns:a16="http://schemas.microsoft.com/office/drawing/2014/main" id="{A8A127A9-4A26-D403-539B-075BCCC2072E}"/>
+              </a:ext>
+            </a:extLst>
+          </p:cNvPr>
+          <p:cNvSpPr txBox="1"/>
+          <p:nvPr/>
+        </p:nvSpPr>
+        <p:spPr>
+          <a:xfrm>
+            <a:off x="960517" y="4141139"/>
+            <a:ext cx="4186996" cy="481630"/>
+          </a:xfrm>
+          <a:prstGeom prst="rect">
+            <a:avLst/>
+          </a:prstGeom>
+          <a:noFill/>
+          <a:ln>
+            <a:noFill/>
+          </a:ln>
+        </p:spPr>
+        <p:txBody>
+          <a:bodyPr spcFirstLastPara="1" wrap="square" lIns="91425" tIns="45700" rIns="91425" bIns="45700" anchor="t" anchorCtr="0">
+            <a:spAutoFit/>
+          </a:bodyPr>
+          <a:lstStyle/>
+          <a:p>
+            <a:pPr marL="457200" marR="0" lvl="1" indent="0" algn="just" rtl="0">
+              <a:lnSpc>
+                <a:spcPct val="115000"/>
+              </a:lnSpc>
+              <a:spcBef>
+                <a:spcPts val="0"/>
+              </a:spcBef>
+              <a:spcAft>
+                <a:spcPts val="0"/>
+              </a:spcAft>
+              <a:buNone/>
+            </a:pPr>
+            <a:r>
+              <a:rPr lang="ru-RU" sz="2200" dirty="0">
+                <a:latin typeface="Arial" panose="020B0604020202020204" pitchFamily="34" charset="0"/>
+                <a:cs typeface="Arial" panose="020B0604020202020204" pitchFamily="34" charset="0"/>
+              </a:rPr>
+              <a:t>Фреймворк </a:t>
+            </a:r>
+            <a:r>
+              <a:rPr lang="en-US" sz="2200" dirty="0">
+                <a:latin typeface="Arial" panose="020B0604020202020204" pitchFamily="34" charset="0"/>
+                <a:cs typeface="Arial" panose="020B0604020202020204" pitchFamily="34" charset="0"/>
+              </a:rPr>
+              <a:t>Spring Boot</a:t>
+            </a:r>
+            <a:endParaRPr lang="en-US" dirty="0">
+              <a:latin typeface="Arial" panose="020B0604020202020204" pitchFamily="34" charset="0"/>
+              <a:cs typeface="Arial" panose="020B0604020202020204" pitchFamily="34" charset="0"/>
+            </a:endParaRPr>
+          </a:p>
+        </p:txBody>
+      </p:sp>
+      <p:sp>
+        <p:nvSpPr>
+          <p:cNvPr id="14" name="Google Shape;119;p8">
+            <a:extLst>
+              <a:ext uri="{FF2B5EF4-FFF2-40B4-BE49-F238E27FC236}">
+                <a16:creationId xmlns:a16="http://schemas.microsoft.com/office/drawing/2014/main" id="{D95A8893-F7B3-E576-C607-E8CEE072C854}"/>
+              </a:ext>
+            </a:extLst>
+          </p:cNvPr>
+          <p:cNvSpPr txBox="1"/>
+          <p:nvPr/>
+        </p:nvSpPr>
+        <p:spPr>
+          <a:xfrm>
+            <a:off x="960517" y="4837838"/>
+            <a:ext cx="5062928" cy="481630"/>
+          </a:xfrm>
+          <a:prstGeom prst="rect">
+            <a:avLst/>
+          </a:prstGeom>
+          <a:noFill/>
+          <a:ln>
+            <a:noFill/>
+          </a:ln>
+        </p:spPr>
+        <p:txBody>
+          <a:bodyPr spcFirstLastPara="1" wrap="square" lIns="91425" tIns="45700" rIns="91425" bIns="45700" anchor="t" anchorCtr="0">
+            <a:spAutoFit/>
+          </a:bodyPr>
+          <a:lstStyle/>
+          <a:p>
+            <a:pPr marL="457200" marR="0" lvl="1" indent="0" algn="just" rtl="0">
+              <a:lnSpc>
+                <a:spcPct val="115000"/>
+              </a:lnSpc>
+              <a:spcBef>
+                <a:spcPts val="0"/>
+              </a:spcBef>
+              <a:spcAft>
+                <a:spcPts val="0"/>
+              </a:spcAft>
+              <a:buNone/>
+            </a:pPr>
+            <a:r>
+              <a:rPr lang="ru-RU" sz="2200" dirty="0" err="1">
+                <a:latin typeface="Arial" panose="020B0604020202020204" pitchFamily="34" charset="0"/>
+                <a:cs typeface="Arial" panose="020B0604020202020204" pitchFamily="34" charset="0"/>
+              </a:rPr>
+              <a:t>PostgreSQL</a:t>
+            </a:r>
+            <a:r>
+              <a:rPr lang="ru-RU" sz="2200" dirty="0">
+                <a:latin typeface="Arial" panose="020B0604020202020204" pitchFamily="34" charset="0"/>
+                <a:cs typeface="Arial" panose="020B0604020202020204" pitchFamily="34" charset="0"/>
+              </a:rPr>
+              <a:t> - </a:t>
+            </a:r>
+            <a:r>
+              <a:rPr lang="ru-RU" sz="2200" b="0" i="0" u="none" strike="noStrike" cap="none" dirty="0">
+                <a:latin typeface="Arial" panose="020B0604020202020204" pitchFamily="34" charset="0"/>
+                <a:ea typeface="Arial"/>
+                <a:cs typeface="Arial" panose="020B0604020202020204" pitchFamily="34" charset="0"/>
+                <a:sym typeface="Arial"/>
+              </a:rPr>
+              <a:t>база данных</a:t>
+            </a:r>
+            <a:endParaRPr dirty="0">
+              <a:latin typeface="Arial" panose="020B0604020202020204" pitchFamily="34" charset="0"/>
+              <a:cs typeface="Arial" panose="020B0604020202020204" pitchFamily="34" charset="0"/>
+            </a:endParaRPr>
+          </a:p>
+        </p:txBody>
+      </p:sp>
+      <p:sp>
+        <p:nvSpPr>
+          <p:cNvPr id="17" name="Google Shape;122;p8">
+            <a:extLst>
+              <a:ext uri="{FF2B5EF4-FFF2-40B4-BE49-F238E27FC236}">
+                <a16:creationId xmlns:a16="http://schemas.microsoft.com/office/drawing/2014/main" id="{BD051E4B-1262-43E1-F06D-329E04B75B52}"/>
+              </a:ext>
+            </a:extLst>
+          </p:cNvPr>
+          <p:cNvSpPr txBox="1"/>
+          <p:nvPr/>
+        </p:nvSpPr>
+        <p:spPr>
+          <a:xfrm>
+            <a:off x="927829" y="2004354"/>
+            <a:ext cx="4309116" cy="481630"/>
+          </a:xfrm>
+          <a:prstGeom prst="rect">
+            <a:avLst/>
+          </a:prstGeom>
+          <a:noFill/>
+          <a:ln>
+            <a:noFill/>
+          </a:ln>
+        </p:spPr>
+        <p:txBody>
+          <a:bodyPr spcFirstLastPara="1" wrap="square" lIns="91425" tIns="45700" rIns="91425" bIns="45700" anchor="t" anchorCtr="0">
+            <a:spAutoFit/>
+          </a:bodyPr>
+          <a:lstStyle/>
+          <a:p>
+            <a:pPr marL="457200" marR="0" lvl="1" indent="0" rtl="0">
+              <a:lnSpc>
+                <a:spcPct val="115000"/>
+              </a:lnSpc>
+              <a:spcBef>
+                <a:spcPts val="0"/>
+              </a:spcBef>
+              <a:spcAft>
+                <a:spcPts val="0"/>
+              </a:spcAft>
+              <a:buNone/>
+            </a:pPr>
+            <a:r>
+              <a:rPr lang="ru-RU" sz="2200" b="0" i="0" u="none" strike="noStrike" cap="none" dirty="0" err="1">
+                <a:latin typeface="Arial" panose="020B0604020202020204" pitchFamily="34" charset="0"/>
+                <a:ea typeface="Arial"/>
+                <a:cs typeface="Arial" panose="020B0604020202020204" pitchFamily="34" charset="0"/>
+                <a:sym typeface="Arial"/>
+              </a:rPr>
+              <a:t>Яндекс.Карты</a:t>
+            </a:r>
+            <a:r>
+              <a:rPr lang="ru-RU" sz="2200" b="0" i="0" u="none" strike="noStrike" cap="none" dirty="0">
+                <a:latin typeface="Arial" panose="020B0604020202020204" pitchFamily="34" charset="0"/>
+                <a:ea typeface="Arial"/>
+                <a:cs typeface="Arial" panose="020B0604020202020204" pitchFamily="34" charset="0"/>
+                <a:sym typeface="Arial"/>
+              </a:rPr>
+              <a:t> API (</a:t>
+            </a:r>
+            <a:r>
+              <a:rPr lang="ru-RU" sz="2200" b="0" i="0" u="none" strike="noStrike" cap="none" dirty="0" err="1">
+                <a:latin typeface="Arial" panose="020B0604020202020204" pitchFamily="34" charset="0"/>
+                <a:ea typeface="Arial"/>
+                <a:cs typeface="Arial" panose="020B0604020202020204" pitchFamily="34" charset="0"/>
+                <a:sym typeface="Arial"/>
+              </a:rPr>
+              <a:t>MapKit</a:t>
+            </a:r>
+            <a:r>
+              <a:rPr lang="ru-RU" sz="2200" b="0" i="0" u="none" strike="noStrike" cap="none" dirty="0">
+                <a:latin typeface="Arial" panose="020B0604020202020204" pitchFamily="34" charset="0"/>
+                <a:ea typeface="Arial"/>
+                <a:cs typeface="Arial" panose="020B0604020202020204" pitchFamily="34" charset="0"/>
+                <a:sym typeface="Arial"/>
+              </a:rPr>
+              <a:t>)</a:t>
+            </a:r>
+            <a:endParaRPr dirty="0">
+              <a:latin typeface="Arial" panose="020B0604020202020204" pitchFamily="34" charset="0"/>
+              <a:cs typeface="Arial" panose="020B0604020202020204" pitchFamily="34" charset="0"/>
+            </a:endParaRPr>
+          </a:p>
+        </p:txBody>
+      </p:sp>
+      <p:sp>
+        <p:nvSpPr>
+          <p:cNvPr id="25" name="Google Shape;130;p8">
+            <a:extLst>
+              <a:ext uri="{FF2B5EF4-FFF2-40B4-BE49-F238E27FC236}">
+                <a16:creationId xmlns:a16="http://schemas.microsoft.com/office/drawing/2014/main" id="{931C45CD-4171-6F09-95AA-B8E16EAEDD99}"/>
+              </a:ext>
+            </a:extLst>
+          </p:cNvPr>
+          <p:cNvSpPr txBox="1"/>
+          <p:nvPr/>
+        </p:nvSpPr>
+        <p:spPr>
+          <a:xfrm>
+            <a:off x="1401147" y="2727652"/>
+            <a:ext cx="3580039" cy="481630"/>
+          </a:xfrm>
+          <a:prstGeom prst="rect">
+            <a:avLst/>
+          </a:prstGeom>
+          <a:noFill/>
+          <a:ln>
+            <a:noFill/>
+          </a:ln>
+        </p:spPr>
+        <p:txBody>
+          <a:bodyPr spcFirstLastPara="1" wrap="square" lIns="91425" tIns="45700" rIns="91425" bIns="45700" anchor="t" anchorCtr="0">
+            <a:spAutoFit/>
+          </a:bodyPr>
+          <a:lstStyle/>
+          <a:p>
+            <a:pPr marL="0" marR="0" lvl="1" indent="0" algn="just" rtl="0">
+              <a:lnSpc>
+                <a:spcPct val="115000"/>
+              </a:lnSpc>
+              <a:spcBef>
+                <a:spcPts val="0"/>
+              </a:spcBef>
+              <a:spcAft>
+                <a:spcPts val="0"/>
+              </a:spcAft>
+              <a:buNone/>
+            </a:pPr>
+            <a:r>
+              <a:rPr lang="ru-RU" sz="2200" b="0" i="0" u="none" strike="noStrike" cap="none" dirty="0" err="1">
+                <a:latin typeface="Arial" panose="020B0604020202020204" pitchFamily="34" charset="0"/>
+                <a:ea typeface="Arial"/>
+                <a:cs typeface="Arial" panose="020B0604020202020204" pitchFamily="34" charset="0"/>
+                <a:sym typeface="Arial"/>
+              </a:rPr>
+              <a:t>Яндекс.</a:t>
+            </a:r>
+            <a:r>
+              <a:rPr lang="ru-RU" sz="2200" dirty="0" err="1">
+                <a:latin typeface="Arial" panose="020B0604020202020204" pitchFamily="34" charset="0"/>
+                <a:cs typeface="Arial" panose="020B0604020202020204" pitchFamily="34" charset="0"/>
+              </a:rPr>
+              <a:t>Диск</a:t>
+            </a:r>
+            <a:r>
+              <a:rPr lang="ru-RU" sz="2200" b="0" i="0" u="none" strike="noStrike" cap="none" dirty="0">
+                <a:latin typeface="Arial" panose="020B0604020202020204" pitchFamily="34" charset="0"/>
+                <a:ea typeface="Arial"/>
+                <a:cs typeface="Arial" panose="020B0604020202020204" pitchFamily="34" charset="0"/>
+                <a:sym typeface="Arial"/>
+              </a:rPr>
+              <a:t> </a:t>
+            </a:r>
+            <a:r>
+              <a:rPr lang="ru-RU" sz="2200" dirty="0">
+                <a:latin typeface="Arial" panose="020B0604020202020204" pitchFamily="34" charset="0"/>
+                <a:cs typeface="Arial" panose="020B0604020202020204" pitchFamily="34" charset="0"/>
+              </a:rPr>
+              <a:t>REST API</a:t>
+            </a:r>
+            <a:endParaRPr dirty="0">
+              <a:latin typeface="Arial" panose="020B0604020202020204" pitchFamily="34" charset="0"/>
+              <a:cs typeface="Arial" panose="020B0604020202020204" pitchFamily="34" charset="0"/>
+            </a:endParaRPr>
+          </a:p>
+        </p:txBody>
+      </p:sp>
+      <p:sp>
+        <p:nvSpPr>
+          <p:cNvPr id="2" name="Google Shape;126;p8">
+            <a:extLst>
+              <a:ext uri="{FF2B5EF4-FFF2-40B4-BE49-F238E27FC236}">
+                <a16:creationId xmlns:a16="http://schemas.microsoft.com/office/drawing/2014/main" id="{0788D324-9844-2784-B567-FCAE41E02F3A}"/>
+              </a:ext>
+            </a:extLst>
+          </p:cNvPr>
+          <p:cNvSpPr/>
+          <p:nvPr/>
+        </p:nvSpPr>
+        <p:spPr>
+          <a:xfrm flipH="1">
+            <a:off x="850044" y="1420247"/>
+            <a:ext cx="154500" cy="158400"/>
+          </a:xfrm>
+          <a:prstGeom prst="ellipse">
+            <a:avLst/>
+          </a:prstGeom>
+          <a:solidFill>
+            <a:schemeClr val="tx1"/>
+          </a:solidFill>
+          <a:ln>
+            <a:noFill/>
+          </a:ln>
+          <a:effectLst>
+            <a:outerShdw blurRad="203040" dist="75967" dir="5448874" sx="102000" sy="102000" algn="ctr" rotWithShape="0">
+              <a:srgbClr val="BFBFBF">
+                <a:alpha val="50980"/>
+              </a:srgbClr>
+            </a:outerShdw>
+          </a:effectLst>
+        </p:spPr>
+        <p:txBody>
+          <a:bodyPr spcFirstLastPara="1" wrap="square" lIns="91425" tIns="91425" rIns="91425" bIns="91425" anchor="ctr" anchorCtr="0">
+            <a:noAutofit/>
+          </a:bodyPr>
+          <a:lstStyle/>
+          <a:p>
+            <a:pPr marL="0" lvl="0" indent="0" algn="l" rtl="0">
+              <a:spcBef>
+                <a:spcPts val="0"/>
+              </a:spcBef>
+              <a:spcAft>
+                <a:spcPts val="0"/>
+              </a:spcAft>
+              <a:buNone/>
+            </a:pPr>
+            <a:endParaRPr>
+              <a:latin typeface="Arial" panose="020B0604020202020204" pitchFamily="34" charset="0"/>
+              <a:cs typeface="Arial" panose="020B0604020202020204" pitchFamily="34" charset="0"/>
+            </a:endParaRPr>
+          </a:p>
+        </p:txBody>
+      </p:sp>
+      <p:sp>
+        <p:nvSpPr>
+          <p:cNvPr id="27" name="Google Shape;126;p8">
+            <a:extLst>
+              <a:ext uri="{FF2B5EF4-FFF2-40B4-BE49-F238E27FC236}">
+                <a16:creationId xmlns:a16="http://schemas.microsoft.com/office/drawing/2014/main" id="{E8040E52-6C27-0833-F917-5F615310ACE8}"/>
+              </a:ext>
+            </a:extLst>
+          </p:cNvPr>
+          <p:cNvSpPr/>
+          <p:nvPr/>
+        </p:nvSpPr>
+        <p:spPr>
+          <a:xfrm flipH="1">
+            <a:off x="850044" y="2136088"/>
+            <a:ext cx="154500" cy="158400"/>
+          </a:xfrm>
+          <a:prstGeom prst="ellipse">
+            <a:avLst/>
+          </a:prstGeom>
+          <a:solidFill>
+            <a:schemeClr val="tx1"/>
+          </a:solidFill>
+          <a:ln>
+            <a:noFill/>
+          </a:ln>
+          <a:effectLst>
+            <a:outerShdw blurRad="203040" dist="75967" dir="5448874" sx="102000" sy="102000" algn="ctr" rotWithShape="0">
+              <a:srgbClr val="BFBFBF">
+                <a:alpha val="50980"/>
+              </a:srgbClr>
+            </a:outerShdw>
+          </a:effectLst>
+        </p:spPr>
+        <p:txBody>
+          <a:bodyPr spcFirstLastPara="1" wrap="square" lIns="91425" tIns="91425" rIns="91425" bIns="91425" anchor="ctr" anchorCtr="0">
+            <a:noAutofit/>
+          </a:bodyPr>
+          <a:lstStyle/>
+          <a:p>
+            <a:pPr marL="0" lvl="0" indent="0" algn="l" rtl="0">
+              <a:spcBef>
+                <a:spcPts val="0"/>
+              </a:spcBef>
+              <a:spcAft>
+                <a:spcPts val="0"/>
+              </a:spcAft>
+              <a:buNone/>
+            </a:pPr>
+            <a:endParaRPr>
+              <a:latin typeface="Arial" panose="020B0604020202020204" pitchFamily="34" charset="0"/>
+              <a:cs typeface="Arial" panose="020B0604020202020204" pitchFamily="34" charset="0"/>
+            </a:endParaRPr>
+          </a:p>
+        </p:txBody>
+      </p:sp>
+      <p:sp>
+        <p:nvSpPr>
+          <p:cNvPr id="28" name="Google Shape;126;p8">
+            <a:extLst>
+              <a:ext uri="{FF2B5EF4-FFF2-40B4-BE49-F238E27FC236}">
+                <a16:creationId xmlns:a16="http://schemas.microsoft.com/office/drawing/2014/main" id="{F04D9C3C-A0D9-4197-3CD1-9D00E71DF1CF}"/>
+              </a:ext>
+            </a:extLst>
+          </p:cNvPr>
+          <p:cNvSpPr/>
+          <p:nvPr/>
+        </p:nvSpPr>
+        <p:spPr>
+          <a:xfrm flipH="1">
+            <a:off x="850044" y="2851929"/>
+            <a:ext cx="154500" cy="158400"/>
+          </a:xfrm>
+          <a:prstGeom prst="ellipse">
+            <a:avLst/>
+          </a:prstGeom>
+          <a:solidFill>
+            <a:schemeClr val="tx1"/>
+          </a:solidFill>
+          <a:ln>
+            <a:noFill/>
+          </a:ln>
+          <a:effectLst>
+            <a:outerShdw blurRad="203040" dist="75967" dir="5448874" sx="102000" sy="102000" algn="ctr" rotWithShape="0">
+              <a:srgbClr val="BFBFBF">
+                <a:alpha val="50980"/>
+              </a:srgbClr>
+            </a:outerShdw>
+          </a:effectLst>
+        </p:spPr>
+        <p:txBody>
+          <a:bodyPr spcFirstLastPara="1" wrap="square" lIns="91425" tIns="91425" rIns="91425" bIns="91425" anchor="ctr" anchorCtr="0">
+            <a:noAutofit/>
+          </a:bodyPr>
+          <a:lstStyle/>
+          <a:p>
+            <a:pPr marL="0" lvl="0" indent="0" algn="l" rtl="0">
+              <a:spcBef>
+                <a:spcPts val="0"/>
+              </a:spcBef>
+              <a:spcAft>
+                <a:spcPts val="0"/>
+              </a:spcAft>
+              <a:buNone/>
+            </a:pPr>
+            <a:endParaRPr>
+              <a:latin typeface="Arial" panose="020B0604020202020204" pitchFamily="34" charset="0"/>
+              <a:cs typeface="Arial" panose="020B0604020202020204" pitchFamily="34" charset="0"/>
+            </a:endParaRPr>
+          </a:p>
+        </p:txBody>
+      </p:sp>
+      <p:sp>
+        <p:nvSpPr>
+          <p:cNvPr id="29" name="Google Shape;126;p8">
+            <a:extLst>
+              <a:ext uri="{FF2B5EF4-FFF2-40B4-BE49-F238E27FC236}">
+                <a16:creationId xmlns:a16="http://schemas.microsoft.com/office/drawing/2014/main" id="{13577764-A10A-5150-3324-94AC04FF3F95}"/>
+              </a:ext>
+            </a:extLst>
+          </p:cNvPr>
+          <p:cNvSpPr/>
+          <p:nvPr/>
+        </p:nvSpPr>
+        <p:spPr>
+          <a:xfrm flipH="1">
+            <a:off x="850044" y="3567770"/>
+            <a:ext cx="154500" cy="158400"/>
+          </a:xfrm>
+          <a:prstGeom prst="ellipse">
+            <a:avLst/>
+          </a:prstGeom>
+          <a:solidFill>
+            <a:schemeClr val="tx1"/>
+          </a:solidFill>
+          <a:ln>
+            <a:noFill/>
+          </a:ln>
+          <a:effectLst>
+            <a:outerShdw blurRad="203040" dist="75967" dir="5448874" sx="102000" sy="102000" algn="ctr" rotWithShape="0">
+              <a:srgbClr val="BFBFBF">
+                <a:alpha val="50980"/>
+              </a:srgbClr>
+            </a:outerShdw>
+          </a:effectLst>
+        </p:spPr>
+        <p:txBody>
+          <a:bodyPr spcFirstLastPara="1" wrap="square" lIns="91425" tIns="91425" rIns="91425" bIns="91425" anchor="ctr" anchorCtr="0">
+            <a:noAutofit/>
+          </a:bodyPr>
+          <a:lstStyle/>
+          <a:p>
+            <a:pPr marL="0" lvl="0" indent="0" algn="l" rtl="0">
+              <a:spcBef>
+                <a:spcPts val="0"/>
+              </a:spcBef>
+              <a:spcAft>
+                <a:spcPts val="0"/>
+              </a:spcAft>
+              <a:buNone/>
+            </a:pPr>
+            <a:endParaRPr>
+              <a:latin typeface="Arial" panose="020B0604020202020204" pitchFamily="34" charset="0"/>
+              <a:cs typeface="Arial" panose="020B0604020202020204" pitchFamily="34" charset="0"/>
+            </a:endParaRPr>
+          </a:p>
+        </p:txBody>
+      </p:sp>
+      <p:sp>
+        <p:nvSpPr>
+          <p:cNvPr id="6" name="TextBox 5">
+            <a:extLst>
+              <a:ext uri="{FF2B5EF4-FFF2-40B4-BE49-F238E27FC236}">
+                <a16:creationId xmlns:a16="http://schemas.microsoft.com/office/drawing/2014/main" id="{C1CF1BE4-C360-B6BC-5E9A-78FC12601E79}"/>
+              </a:ext>
+            </a:extLst>
+          </p:cNvPr>
+          <p:cNvSpPr txBox="1"/>
+          <p:nvPr/>
+        </p:nvSpPr>
+        <p:spPr>
+          <a:xfrm>
+            <a:off x="1401147" y="3450950"/>
+            <a:ext cx="4595986" cy="448521"/>
+          </a:xfrm>
+          <a:prstGeom prst="rect">
+            <a:avLst/>
+          </a:prstGeom>
+          <a:noFill/>
+        </p:spPr>
+        <p:txBody>
+          <a:bodyPr wrap="square">
+            <a:spAutoFit/>
+          </a:bodyPr>
+          <a:lstStyle/>
+          <a:p>
+            <a:pPr marL="0" marR="0" lvl="0" indent="0" algn="l" rtl="0">
+              <a:lnSpc>
+                <a:spcPct val="115000"/>
+              </a:lnSpc>
+              <a:spcBef>
+                <a:spcPts val="0"/>
+              </a:spcBef>
+              <a:spcAft>
+                <a:spcPts val="0"/>
+              </a:spcAft>
+              <a:buNone/>
+            </a:pPr>
+            <a:r>
+              <a:rPr lang="ru-RU" sz="2200" dirty="0">
+                <a:latin typeface="Arial" panose="020B0604020202020204" pitchFamily="34" charset="0"/>
+                <a:ea typeface="Arial"/>
+                <a:cs typeface="Arial" panose="020B0604020202020204" pitchFamily="34" charset="0"/>
+                <a:sym typeface="Arial"/>
+              </a:rPr>
+              <a:t>Язык программирования  </a:t>
+            </a:r>
+            <a:r>
+              <a:rPr lang="en-US" sz="2200" dirty="0">
+                <a:latin typeface="Arial" panose="020B0604020202020204" pitchFamily="34" charset="0"/>
+                <a:ea typeface="Arial"/>
+                <a:cs typeface="Arial" panose="020B0604020202020204" pitchFamily="34" charset="0"/>
+                <a:sym typeface="Arial"/>
+              </a:rPr>
+              <a:t>Java</a:t>
+            </a:r>
+            <a:endParaRPr lang="en-US" sz="2200" dirty="0">
+              <a:latin typeface="Arial" panose="020B0604020202020204" pitchFamily="34" charset="0"/>
+              <a:cs typeface="Arial" panose="020B0604020202020204" pitchFamily="34" charset="0"/>
+            </a:endParaRPr>
+          </a:p>
+        </p:txBody>
+      </p:sp>
+      <p:sp>
+        <p:nvSpPr>
+          <p:cNvPr id="7" name="Google Shape;126;p8">
+            <a:extLst>
+              <a:ext uri="{FF2B5EF4-FFF2-40B4-BE49-F238E27FC236}">
+                <a16:creationId xmlns:a16="http://schemas.microsoft.com/office/drawing/2014/main" id="{4A234B72-6CF7-AA96-F68E-09E4858DE8D7}"/>
+              </a:ext>
+            </a:extLst>
+          </p:cNvPr>
+          <p:cNvSpPr/>
+          <p:nvPr/>
+        </p:nvSpPr>
+        <p:spPr>
+          <a:xfrm flipH="1">
+            <a:off x="850044" y="4283611"/>
+            <a:ext cx="154500" cy="158400"/>
+          </a:xfrm>
+          <a:prstGeom prst="ellipse">
+            <a:avLst/>
+          </a:prstGeom>
+          <a:solidFill>
+            <a:schemeClr val="tx1"/>
+          </a:solidFill>
+          <a:ln>
+            <a:noFill/>
+          </a:ln>
+          <a:effectLst>
+            <a:outerShdw blurRad="203040" dist="75967" dir="5448874" sx="102000" sy="102000" algn="ctr" rotWithShape="0">
+              <a:srgbClr val="BFBFBF">
+                <a:alpha val="50980"/>
+              </a:srgbClr>
+            </a:outerShdw>
+          </a:effectLst>
+        </p:spPr>
+        <p:txBody>
+          <a:bodyPr spcFirstLastPara="1" wrap="square" lIns="91425" tIns="91425" rIns="91425" bIns="91425" anchor="ctr" anchorCtr="0">
+            <a:noAutofit/>
+          </a:bodyPr>
+          <a:lstStyle/>
+          <a:p>
+            <a:pPr marL="0" lvl="0" indent="0" algn="l" rtl="0">
+              <a:spcBef>
+                <a:spcPts val="0"/>
+              </a:spcBef>
+              <a:spcAft>
+                <a:spcPts val="0"/>
+              </a:spcAft>
+              <a:buNone/>
+            </a:pPr>
+            <a:endParaRPr>
+              <a:latin typeface="Arial" panose="020B0604020202020204" pitchFamily="34" charset="0"/>
+              <a:cs typeface="Arial" panose="020B0604020202020204" pitchFamily="34" charset="0"/>
+            </a:endParaRPr>
+          </a:p>
+        </p:txBody>
+      </p:sp>
+      <p:sp>
+        <p:nvSpPr>
+          <p:cNvPr id="8" name="Google Shape;126;p8">
+            <a:extLst>
+              <a:ext uri="{FF2B5EF4-FFF2-40B4-BE49-F238E27FC236}">
+                <a16:creationId xmlns:a16="http://schemas.microsoft.com/office/drawing/2014/main" id="{2F833B39-7AC8-C2C1-50F2-F39C49F16A79}"/>
+              </a:ext>
+            </a:extLst>
+          </p:cNvPr>
+          <p:cNvSpPr/>
+          <p:nvPr/>
+        </p:nvSpPr>
+        <p:spPr>
+          <a:xfrm flipH="1">
+            <a:off x="850044" y="4999453"/>
+            <a:ext cx="154500" cy="158400"/>
+          </a:xfrm>
+          <a:prstGeom prst="ellipse">
+            <a:avLst/>
+          </a:prstGeom>
+          <a:solidFill>
+            <a:schemeClr val="tx1"/>
+          </a:solidFill>
+          <a:ln>
+            <a:noFill/>
+          </a:ln>
+          <a:effectLst>
+            <a:outerShdw blurRad="203040" dist="75967" dir="5448874" sx="102000" sy="102000" algn="ctr" rotWithShape="0">
+              <a:srgbClr val="BFBFBF">
+                <a:alpha val="50980"/>
+              </a:srgbClr>
+            </a:outerShdw>
+          </a:effectLst>
+        </p:spPr>
+        <p:txBody>
+          <a:bodyPr spcFirstLastPara="1" wrap="square" lIns="91425" tIns="91425" rIns="91425" bIns="91425" anchor="ctr" anchorCtr="0">
+            <a:noAutofit/>
+          </a:bodyPr>
+          <a:lstStyle/>
+          <a:p>
+            <a:pPr marL="0" lvl="0" indent="0" algn="l" rtl="0">
+              <a:spcBef>
+                <a:spcPts val="0"/>
+              </a:spcBef>
+              <a:spcAft>
+                <a:spcPts val="0"/>
+              </a:spcAft>
+              <a:buNone/>
+            </a:pPr>
+            <a:endParaRPr>
+              <a:latin typeface="Arial" panose="020B0604020202020204" pitchFamily="34" charset="0"/>
+              <a:cs typeface="Arial" panose="020B0604020202020204" pitchFamily="34" charset="0"/>
+            </a:endParaRPr>
           </a:p>
         </p:txBody>
       </p:sp>
       <p:pic>
         <p:nvPicPr>
-          <p:cNvPr id="6" name="Рисунок 5" descr="Изображение выглядит как диаграмма, текст, рисунок, зарисовка&#10;&#10;Автоматически созданное описание">
-            <a:extLst>
-              <a:ext uri="{FF2B5EF4-FFF2-40B4-BE49-F238E27FC236}">
-                <a16:creationId xmlns:a16="http://schemas.microsoft.com/office/drawing/2014/main" id="{9D22C038-5AA0-AC7A-32CB-3142363856EC}"/>
+          <p:cNvPr id="1026" name="Picture 2" descr="Грабли, спрятанные в Kotlin / Хабр">
+            <a:extLst>
+              <a:ext uri="{FF2B5EF4-FFF2-40B4-BE49-F238E27FC236}">
+                <a16:creationId xmlns:a16="http://schemas.microsoft.com/office/drawing/2014/main" id="{28EEA50B-5A8A-73B1-AEEF-B758365B24BB}"/>
               </a:ext>
             </a:extLst>
           </p:cNvPr>
           <p:cNvPicPr>
-            <a:picLocks noChangeAspect="1"/>
+            <a:picLocks noChangeAspect="1" noChangeArrowheads="1"/>
           </p:cNvPicPr>
           <p:nvPr/>
         </p:nvPicPr>
@@ -6117,26 +8485,272 @@
               </a:ext>
             </a:extLst>
           </a:blip>
+          <a:srcRect/>
           <a:stretch>
             <a:fillRect/>
           </a:stretch>
         </p:blipFill>
-        <p:spPr>
+        <p:spPr bwMode="auto">
           <a:xfrm>
-            <a:off x="663534" y="1088046"/>
-            <a:ext cx="11199865" cy="5404827"/>
+            <a:off x="7836575" y="192266"/>
+            <a:ext cx="3144519" cy="2177580"/>
           </a:xfrm>
           <a:prstGeom prst="rect">
             <a:avLst/>
           </a:prstGeom>
+          <a:noFill/>
+          <a:extLst>
+            <a:ext uri="{909E8E84-426E-40DD-AFC4-6F175D3DCCD1}">
+              <a14:hiddenFill xmlns:a14="http://schemas.microsoft.com/office/drawing/2010/main">
+                <a:solidFill>
+                  <a:srgbClr val="FFFFFF"/>
+                </a:solidFill>
+              </a14:hiddenFill>
+            </a:ext>
+          </a:extLst>
         </p:spPr>
       </p:pic>
-      <p:sp>
-        <p:nvSpPr>
-          <p:cNvPr id="2" name="Google Shape;99;p7">
-            <a:extLst>
-              <a:ext uri="{FF2B5EF4-FFF2-40B4-BE49-F238E27FC236}">
-                <a16:creationId xmlns:a16="http://schemas.microsoft.com/office/drawing/2014/main" id="{6F39D71D-830B-BF38-8573-0CF2A0A6C6C4}"/>
+      <p:pic>
+        <p:nvPicPr>
+          <p:cNvPr id="1028" name="Picture 4" descr="MapKit: Перезагрузка — Клуб API Карт">
+            <a:extLst>
+              <a:ext uri="{FF2B5EF4-FFF2-40B4-BE49-F238E27FC236}">
+                <a16:creationId xmlns:a16="http://schemas.microsoft.com/office/drawing/2014/main" id="{1CEFBB82-C24D-87E6-098D-05B22D7B53A8}"/>
+              </a:ext>
+            </a:extLst>
+          </p:cNvPr>
+          <p:cNvPicPr>
+            <a:picLocks noChangeAspect="1" noChangeArrowheads="1"/>
+          </p:cNvPicPr>
+          <p:nvPr/>
+        </p:nvPicPr>
+        <p:blipFill>
+          <a:blip r:embed="rId3">
+            <a:extLst>
+              <a:ext uri="{28A0092B-C50C-407E-A947-70E740481C1C}">
+                <a14:useLocalDpi xmlns:a14="http://schemas.microsoft.com/office/drawing/2010/main" val="0"/>
+              </a:ext>
+            </a:extLst>
+          </a:blip>
+          <a:srcRect/>
+          <a:stretch>
+            <a:fillRect/>
+          </a:stretch>
+        </p:blipFill>
+        <p:spPr bwMode="auto">
+          <a:xfrm>
+            <a:off x="7277924" y="1762686"/>
+            <a:ext cx="1329030" cy="1180443"/>
+          </a:xfrm>
+          <a:prstGeom prst="rect">
+            <a:avLst/>
+          </a:prstGeom>
+          <a:noFill/>
+          <a:extLst>
+            <a:ext uri="{909E8E84-426E-40DD-AFC4-6F175D3DCCD1}">
+              <a14:hiddenFill xmlns:a14="http://schemas.microsoft.com/office/drawing/2010/main">
+                <a:solidFill>
+                  <a:srgbClr val="FFFFFF"/>
+                </a:solidFill>
+              </a14:hiddenFill>
+            </a:ext>
+          </a:extLst>
+        </p:spPr>
+      </p:pic>
+      <p:pic>
+        <p:nvPicPr>
+          <p:cNvPr id="1030" name="Picture 6">
+            <a:extLst>
+              <a:ext uri="{FF2B5EF4-FFF2-40B4-BE49-F238E27FC236}">
+                <a16:creationId xmlns:a16="http://schemas.microsoft.com/office/drawing/2014/main" id="{30F0CE91-8367-EF6A-CB44-FFEE1ECD143D}"/>
+              </a:ext>
+            </a:extLst>
+          </p:cNvPr>
+          <p:cNvPicPr>
+            <a:picLocks noChangeAspect="1" noChangeArrowheads="1"/>
+          </p:cNvPicPr>
+          <p:nvPr/>
+        </p:nvPicPr>
+        <p:blipFill>
+          <a:blip r:embed="rId4">
+            <a:extLst>
+              <a:ext uri="{28A0092B-C50C-407E-A947-70E740481C1C}">
+                <a14:useLocalDpi xmlns:a14="http://schemas.microsoft.com/office/drawing/2010/main" val="0"/>
+              </a:ext>
+            </a:extLst>
+          </a:blip>
+          <a:srcRect/>
+          <a:stretch>
+            <a:fillRect/>
+          </a:stretch>
+        </p:blipFill>
+        <p:spPr bwMode="auto">
+          <a:xfrm>
+            <a:off x="10302445" y="1591535"/>
+            <a:ext cx="1180443" cy="1180443"/>
+          </a:xfrm>
+          <a:prstGeom prst="rect">
+            <a:avLst/>
+          </a:prstGeom>
+          <a:noFill/>
+          <a:extLst>
+            <a:ext uri="{909E8E84-426E-40DD-AFC4-6F175D3DCCD1}">
+              <a14:hiddenFill xmlns:a14="http://schemas.microsoft.com/office/drawing/2010/main">
+                <a:solidFill>
+                  <a:srgbClr val="FFFFFF"/>
+                </a:solidFill>
+              </a14:hiddenFill>
+            </a:ext>
+          </a:extLst>
+        </p:spPr>
+      </p:pic>
+      <p:pic>
+        <p:nvPicPr>
+          <p:cNvPr id="1032" name="Picture 8" descr="Java — Википедия">
+            <a:extLst>
+              <a:ext uri="{FF2B5EF4-FFF2-40B4-BE49-F238E27FC236}">
+                <a16:creationId xmlns:a16="http://schemas.microsoft.com/office/drawing/2014/main" id="{3D83EC10-FFA1-B09B-9154-0361081252C1}"/>
+              </a:ext>
+            </a:extLst>
+          </p:cNvPr>
+          <p:cNvPicPr>
+            <a:picLocks noChangeAspect="1" noChangeArrowheads="1"/>
+          </p:cNvPicPr>
+          <p:nvPr/>
+        </p:nvPicPr>
+        <p:blipFill>
+          <a:blip r:embed="rId5">
+            <a:extLst>
+              <a:ext uri="{28A0092B-C50C-407E-A947-70E740481C1C}">
+                <a14:useLocalDpi xmlns:a14="http://schemas.microsoft.com/office/drawing/2010/main" val="0"/>
+              </a:ext>
+            </a:extLst>
+          </a:blip>
+          <a:srcRect/>
+          <a:stretch>
+            <a:fillRect/>
+          </a:stretch>
+        </p:blipFill>
+        <p:spPr bwMode="auto">
+          <a:xfrm>
+            <a:off x="8866838" y="2735278"/>
+            <a:ext cx="1032160" cy="1892585"/>
+          </a:xfrm>
+          <a:prstGeom prst="rect">
+            <a:avLst/>
+          </a:prstGeom>
+          <a:noFill/>
+          <a:extLst>
+            <a:ext uri="{909E8E84-426E-40DD-AFC4-6F175D3DCCD1}">
+              <a14:hiddenFill xmlns:a14="http://schemas.microsoft.com/office/drawing/2010/main">
+                <a:solidFill>
+                  <a:srgbClr val="FFFFFF"/>
+                </a:solidFill>
+              </a14:hiddenFill>
+            </a:ext>
+          </a:extLst>
+        </p:spPr>
+      </p:pic>
+      <p:pic>
+        <p:nvPicPr>
+          <p:cNvPr id="1034" name="Picture 10" descr="Spring Boot - Wikipedia">
+            <a:extLst>
+              <a:ext uri="{FF2B5EF4-FFF2-40B4-BE49-F238E27FC236}">
+                <a16:creationId xmlns:a16="http://schemas.microsoft.com/office/drawing/2014/main" id="{1CC243ED-6A19-27BA-34C9-BB43D941E01A}"/>
+              </a:ext>
+            </a:extLst>
+          </p:cNvPr>
+          <p:cNvPicPr>
+            <a:picLocks noChangeAspect="1" noChangeArrowheads="1"/>
+          </p:cNvPicPr>
+          <p:nvPr/>
+        </p:nvPicPr>
+        <p:blipFill>
+          <a:blip r:embed="rId6">
+            <a:extLst>
+              <a:ext uri="{28A0092B-C50C-407E-A947-70E740481C1C}">
+                <a14:useLocalDpi xmlns:a14="http://schemas.microsoft.com/office/drawing/2010/main" val="0"/>
+              </a:ext>
+            </a:extLst>
+          </a:blip>
+          <a:srcRect/>
+          <a:stretch>
+            <a:fillRect/>
+          </a:stretch>
+        </p:blipFill>
+        <p:spPr bwMode="auto">
+          <a:xfrm>
+            <a:off x="10553315" y="3899471"/>
+            <a:ext cx="1032160" cy="1031444"/>
+          </a:xfrm>
+          <a:prstGeom prst="rect">
+            <a:avLst/>
+          </a:prstGeom>
+          <a:noFill/>
+          <a:extLst>
+            <a:ext uri="{909E8E84-426E-40DD-AFC4-6F175D3DCCD1}">
+              <a14:hiddenFill xmlns:a14="http://schemas.microsoft.com/office/drawing/2010/main">
+                <a:solidFill>
+                  <a:srgbClr val="FFFFFF"/>
+                </a:solidFill>
+              </a14:hiddenFill>
+            </a:ext>
+          </a:extLst>
+        </p:spPr>
+      </p:pic>
+      <p:pic>
+        <p:nvPicPr>
+          <p:cNvPr id="1036" name="Picture 12" descr="PostgreSQL: что это за СУБД, основы и преимущества">
+            <a:extLst>
+              <a:ext uri="{FF2B5EF4-FFF2-40B4-BE49-F238E27FC236}">
+                <a16:creationId xmlns:a16="http://schemas.microsoft.com/office/drawing/2014/main" id="{9186F863-5C1C-B040-6EC9-09A105BF3001}"/>
+              </a:ext>
+            </a:extLst>
+          </p:cNvPr>
+          <p:cNvPicPr>
+            <a:picLocks noChangeAspect="1" noChangeArrowheads="1"/>
+          </p:cNvPicPr>
+          <p:nvPr/>
+        </p:nvPicPr>
+        <p:blipFill>
+          <a:blip r:embed="rId7">
+            <a:extLst>
+              <a:ext uri="{28A0092B-C50C-407E-A947-70E740481C1C}">
+                <a14:useLocalDpi xmlns:a14="http://schemas.microsoft.com/office/drawing/2010/main" val="0"/>
+              </a:ext>
+            </a:extLst>
+          </a:blip>
+          <a:srcRect/>
+          <a:stretch>
+            <a:fillRect/>
+          </a:stretch>
+        </p:blipFill>
+        <p:spPr bwMode="auto">
+          <a:xfrm>
+            <a:off x="7277924" y="4807871"/>
+            <a:ext cx="1049817" cy="1082648"/>
+          </a:xfrm>
+          <a:prstGeom prst="rect">
+            <a:avLst/>
+          </a:prstGeom>
+          <a:noFill/>
+          <a:extLst>
+            <a:ext uri="{909E8E84-426E-40DD-AFC4-6F175D3DCCD1}">
+              <a14:hiddenFill xmlns:a14="http://schemas.microsoft.com/office/drawing/2010/main">
+                <a:solidFill>
+                  <a:srgbClr val="FFFFFF"/>
+                </a:solidFill>
+              </a14:hiddenFill>
+            </a:ext>
+          </a:extLst>
+        </p:spPr>
+      </p:pic>
+      <p:sp>
+        <p:nvSpPr>
+          <p:cNvPr id="33" name="Google Shape;71;p5">
+            <a:extLst>
+              <a:ext uri="{FF2B5EF4-FFF2-40B4-BE49-F238E27FC236}">
+                <a16:creationId xmlns:a16="http://schemas.microsoft.com/office/drawing/2014/main" id="{BD6D6AC4-EB07-237E-24E7-F475D83416B5}"/>
               </a:ext>
             </a:extLst>
           </p:cNvPr>
@@ -6149,12 +8763,16 @@
         </p:nvSpPr>
         <p:spPr>
           <a:xfrm>
-            <a:off x="8785266" y="6310323"/>
-            <a:ext cx="2743200" cy="365100"/>
+            <a:off x="8610600" y="6308204"/>
+            <a:ext cx="3251106" cy="413272"/>
           </a:xfrm>
           <a:prstGeom prst="rect">
             <a:avLst/>
           </a:prstGeom>
+          <a:noFill/>
+          <a:ln>
+            <a:noFill/>
+          </a:ln>
         </p:spPr>
         <p:txBody>
           <a:bodyPr spcFirstLastPara="1" wrap="square" lIns="91425" tIns="45700" rIns="91425" bIns="45700" anchor="ctr" anchorCtr="0">
@@ -6169,24 +8787,44 @@
               <a:spcAft>
                 <a:spcPts val="0"/>
               </a:spcAft>
-              <a:buClr>
-                <a:srgbClr val="000000"/>
-              </a:buClr>
-              <a:buFont typeface="Arial"/>
               <a:buNone/>
             </a:pPr>
             <a:fld id="{00000000-1234-1234-1234-123412341234}" type="slidenum">
-              <a:rPr lang="ru-RU">
+              <a:rPr lang="ru-RU" sz="1400" smtClean="0">
                 <a:solidFill>
                   <a:schemeClr val="tx1"/>
                 </a:solidFill>
+                <a:latin typeface="Arial" panose="020B0604020202020204" pitchFamily="34" charset="0"/>
+                <a:cs typeface="Arial" panose="020B0604020202020204" pitchFamily="34" charset="0"/>
               </a:rPr>
               <a:t>5</a:t>
             </a:fld>
-            <a:endParaRPr dirty="0">
+            <a:r>
+              <a:rPr lang="en-US" sz="1400" dirty="0">
+                <a:solidFill>
+                  <a:schemeClr val="tx1"/>
+                </a:solidFill>
+                <a:latin typeface="Arial" panose="020B0604020202020204" pitchFamily="34" charset="0"/>
+                <a:cs typeface="Arial" panose="020B0604020202020204" pitchFamily="34" charset="0"/>
+              </a:rPr>
+              <a:t>/1</a:t>
+            </a:r>
+            <a:r>
+              <a:rPr lang="ru-RU" sz="1400" dirty="0">
+                <a:solidFill>
+                  <a:schemeClr val="tx1"/>
+                </a:solidFill>
+                <a:latin typeface="Arial" panose="020B0604020202020204" pitchFamily="34" charset="0"/>
+                <a:cs typeface="Arial" panose="020B0604020202020204" pitchFamily="34" charset="0"/>
+              </a:rPr>
+              <a:t>3</a:t>
+            </a:r>
+            <a:endParaRPr sz="1400" dirty="0">
               <a:solidFill>
                 <a:schemeClr val="tx1"/>
               </a:solidFill>
+              <a:latin typeface="Arial" panose="020B0604020202020204" pitchFamily="34" charset="0"/>
+              <a:cs typeface="Arial" panose="020B0604020202020204" pitchFamily="34" charset="0"/>
             </a:endParaRPr>
           </a:p>
         </p:txBody>
@@ -6194,7 +8832,7 @@
     </p:spTree>
     <p:extLst>
       <p:ext uri="{BB962C8B-B14F-4D97-AF65-F5344CB8AC3E}">
-        <p14:creationId xmlns:p14="http://schemas.microsoft.com/office/powerpoint/2010/main" val="561711780"/>
+        <p14:creationId xmlns:p14="http://schemas.microsoft.com/office/powerpoint/2010/main" val="3816991011"/>
       </p:ext>
     </p:extLst>
   </p:cSld>
@@ -6223,74 +8861,10 @@
       </p:grpSpPr>
       <p:sp>
         <p:nvSpPr>
-          <p:cNvPr id="3" name="Google Shape;108;p8">
-            <a:extLst>
-              <a:ext uri="{FF2B5EF4-FFF2-40B4-BE49-F238E27FC236}">
-                <a16:creationId xmlns:a16="http://schemas.microsoft.com/office/drawing/2014/main" id="{E63C679E-32E0-54D9-7F2C-24A67562AB71}"/>
-              </a:ext>
-            </a:extLst>
-          </p:cNvPr>
-          <p:cNvSpPr txBox="1">
-            <a:spLocks noGrp="1"/>
-          </p:cNvSpPr>
-          <p:nvPr>
-            <p:ph type="sldNum" idx="12"/>
-          </p:nvPr>
-        </p:nvSpPr>
-        <p:spPr>
-          <a:xfrm>
-            <a:off x="8131878" y="6277474"/>
-            <a:ext cx="3144520" cy="430800"/>
-          </a:xfrm>
-          <a:prstGeom prst="rect">
-            <a:avLst/>
-          </a:prstGeom>
-          <a:noFill/>
-          <a:ln>
-            <a:noFill/>
-          </a:ln>
-        </p:spPr>
-        <p:txBody>
-          <a:bodyPr spcFirstLastPara="1" wrap="square" lIns="91425" tIns="45700" rIns="91425" bIns="45700" anchor="ctr" anchorCtr="0">
-            <a:noAutofit/>
-          </a:bodyPr>
-          <a:lstStyle/>
-          <a:p>
-            <a:pPr marL="0" lvl="0" indent="0" algn="r" rtl="0">
-              <a:spcBef>
-                <a:spcPts val="0"/>
-              </a:spcBef>
-              <a:spcAft>
-                <a:spcPts val="0"/>
-              </a:spcAft>
-              <a:buNone/>
-            </a:pPr>
-            <a:fld id="{00000000-1234-1234-1234-123412341234}" type="slidenum">
-              <a:rPr lang="ru-RU">
-                <a:solidFill>
-                  <a:schemeClr val="tx1"/>
-                </a:solidFill>
-                <a:latin typeface="Arial" panose="020B0604020202020204" pitchFamily="34" charset="0"/>
-                <a:cs typeface="Arial" panose="020B0604020202020204" pitchFamily="34" charset="0"/>
-              </a:rPr>
-              <a:t>6</a:t>
-            </a:fld>
-            <a:endParaRPr dirty="0">
-              <a:solidFill>
-                <a:schemeClr val="tx1"/>
-              </a:solidFill>
-              <a:latin typeface="Arial" panose="020B0604020202020204" pitchFamily="34" charset="0"/>
-              <a:cs typeface="Arial" panose="020B0604020202020204" pitchFamily="34" charset="0"/>
-            </a:endParaRPr>
-          </a:p>
-        </p:txBody>
-      </p:sp>
-      <p:sp>
-        <p:nvSpPr>
-          <p:cNvPr id="4" name="Google Shape;109;p8">
-            <a:extLst>
-              <a:ext uri="{FF2B5EF4-FFF2-40B4-BE49-F238E27FC236}">
-                <a16:creationId xmlns:a16="http://schemas.microsoft.com/office/drawing/2014/main" id="{F4709B77-D597-B99C-BCFD-ADBF0853D766}"/>
+          <p:cNvPr id="4" name="Google Shape;138;p9">
+            <a:extLst>
+              <a:ext uri="{FF2B5EF4-FFF2-40B4-BE49-F238E27FC236}">
+                <a16:creationId xmlns:a16="http://schemas.microsoft.com/office/drawing/2014/main" id="{5841E619-3D1B-DC7F-EB0F-322E4EC054D7}"/>
               </a:ext>
             </a:extLst>
           </p:cNvPr>
@@ -6302,7 +8876,7 @@
         <p:spPr>
           <a:xfrm>
             <a:off x="1033072" y="365126"/>
-            <a:ext cx="8202474" cy="697717"/>
+            <a:ext cx="8202600" cy="697800"/>
           </a:xfrm>
           <a:prstGeom prst="rect">
             <a:avLst/>
@@ -6351,31 +8925,35 @@
               <a:buNone/>
             </a:pPr>
             <a:r>
-              <a:rPr lang="ru-RU">
-                <a:latin typeface="Arial" panose="020B0604020202020204" pitchFamily="34" charset="0"/>
-                <a:cs typeface="Arial" panose="020B0604020202020204" pitchFamily="34" charset="0"/>
-              </a:rPr>
-              <a:t>Технический стек</a:t>
-            </a:r>
-          </a:p>
-        </p:txBody>
-      </p:sp>
-      <p:sp>
-        <p:nvSpPr>
-          <p:cNvPr id="9" name="Google Shape;114;p8">
-            <a:extLst>
-              <a:ext uri="{FF2B5EF4-FFF2-40B4-BE49-F238E27FC236}">
-                <a16:creationId xmlns:a16="http://schemas.microsoft.com/office/drawing/2014/main" id="{FFD0DE75-AC77-EF47-2933-28889524DB68}"/>
-              </a:ext>
-            </a:extLst>
-          </p:cNvPr>
-          <p:cNvSpPr txBox="1"/>
-          <p:nvPr/>
+              <a:rPr lang="ru-RU" dirty="0">
+                <a:latin typeface="Arial" panose="020B0604020202020204" pitchFamily="34" charset="0"/>
+                <a:cs typeface="Arial" panose="020B0604020202020204" pitchFamily="34" charset="0"/>
+              </a:rPr>
+              <a:t>Архитектура</a:t>
+            </a:r>
+          </a:p>
+        </p:txBody>
+      </p:sp>
+      <p:sp>
+        <p:nvSpPr>
+          <p:cNvPr id="7" name="Google Shape;71;p5">
+            <a:extLst>
+              <a:ext uri="{FF2B5EF4-FFF2-40B4-BE49-F238E27FC236}">
+                <a16:creationId xmlns:a16="http://schemas.microsoft.com/office/drawing/2014/main" id="{105E6B34-A38B-3AAC-80CC-9CDA527FB2DE}"/>
+              </a:ext>
+            </a:extLst>
+          </p:cNvPr>
+          <p:cNvSpPr txBox="1">
+            <a:spLocks noGrp="1"/>
+          </p:cNvSpPr>
+          <p:nvPr>
+            <p:ph type="sldNum" idx="12"/>
+          </p:nvPr>
         </p:nvSpPr>
         <p:spPr>
           <a:xfrm>
-            <a:off x="1318532" y="1075784"/>
-            <a:ext cx="6098720" cy="481630"/>
+            <a:off x="8610600" y="6308204"/>
+            <a:ext cx="3251106" cy="413272"/>
           </a:xfrm>
           <a:prstGeom prst="rect">
             <a:avLst/>
@@ -6386,15 +8964,12 @@
           </a:ln>
         </p:spPr>
         <p:txBody>
-          <a:bodyPr spcFirstLastPara="1" wrap="square" lIns="91425" tIns="45700" rIns="91425" bIns="45700" anchor="t" anchorCtr="0">
-            <a:spAutoFit/>
+          <a:bodyPr spcFirstLastPara="1" wrap="square" lIns="91425" tIns="45700" rIns="91425" bIns="45700" anchor="ctr" anchorCtr="0">
+            <a:noAutofit/>
           </a:bodyPr>
           <a:lstStyle/>
           <a:p>
-            <a:pPr marL="0" marR="0" lvl="0" indent="0" algn="l" rtl="0">
-              <a:lnSpc>
-                <a:spcPct val="115000"/>
-              </a:lnSpc>
+            <a:pPr marL="0" lvl="0" indent="0" algn="r" rtl="0">
               <a:spcBef>
                 <a:spcPts val="0"/>
               </a:spcBef>
@@ -6403,25 +8978,40 @@
               </a:spcAft>
               <a:buNone/>
             </a:pPr>
-            <a:r>
-              <a:rPr lang="ru-RU" sz="2200" b="1">
-                <a:latin typeface="Arial" panose="020B0604020202020204" pitchFamily="34" charset="0"/>
-                <a:ea typeface="Arial"/>
-                <a:cs typeface="Arial" panose="020B0604020202020204" pitchFamily="34" charset="0"/>
-                <a:sym typeface="Arial"/>
-              </a:rPr>
-              <a:t>Язык разработки:</a:t>
-            </a:r>
-            <a:r>
-              <a:rPr lang="ru-RU" sz="2200">
-                <a:latin typeface="Arial" panose="020B0604020202020204" pitchFamily="34" charset="0"/>
-                <a:ea typeface="Arial"/>
-                <a:cs typeface="Arial" panose="020B0604020202020204" pitchFamily="34" charset="0"/>
-                <a:sym typeface="Arial"/>
-              </a:rPr>
-              <a:t> Kotlin </a:t>
-            </a:r>
-            <a:endParaRPr>
+            <a:fld id="{00000000-1234-1234-1234-123412341234}" type="slidenum">
+              <a:rPr lang="ru-RU" sz="1400" smtClean="0">
+                <a:solidFill>
+                  <a:schemeClr val="tx1"/>
+                </a:solidFill>
+                <a:latin typeface="Arial" panose="020B0604020202020204" pitchFamily="34" charset="0"/>
+                <a:cs typeface="Arial" panose="020B0604020202020204" pitchFamily="34" charset="0"/>
+              </a:rPr>
+              <a:t>6</a:t>
+            </a:fld>
+            <a:r>
+              <a:rPr lang="en-US" sz="1400" dirty="0">
+                <a:solidFill>
+                  <a:schemeClr val="tx1"/>
+                </a:solidFill>
+                <a:latin typeface="Arial" panose="020B0604020202020204" pitchFamily="34" charset="0"/>
+                <a:cs typeface="Arial" panose="020B0604020202020204" pitchFamily="34" charset="0"/>
+              </a:rPr>
+              <a:t>/1</a:t>
+            </a:r>
+            <a:r>
+              <a:rPr lang="ru-RU" sz="1400" dirty="0">
+                <a:solidFill>
+                  <a:schemeClr val="tx1"/>
+                </a:solidFill>
+                <a:latin typeface="Arial" panose="020B0604020202020204" pitchFamily="34" charset="0"/>
+                <a:cs typeface="Arial" panose="020B0604020202020204" pitchFamily="34" charset="0"/>
+              </a:rPr>
+              <a:t>3</a:t>
+            </a:r>
+            <a:endParaRPr sz="1400" dirty="0">
+              <a:solidFill>
+                <a:schemeClr val="tx1"/>
+              </a:solidFill>
               <a:latin typeface="Arial" panose="020B0604020202020204" pitchFamily="34" charset="0"/>
               <a:cs typeface="Arial" panose="020B0604020202020204" pitchFamily="34" charset="0"/>
             </a:endParaRPr>
@@ -6430,572 +9020,10 @@
       </p:sp>
       <p:sp>
         <p:nvSpPr>
-          <p:cNvPr id="10" name="Google Shape;115;p8">
-            <a:extLst>
-              <a:ext uri="{FF2B5EF4-FFF2-40B4-BE49-F238E27FC236}">
-                <a16:creationId xmlns:a16="http://schemas.microsoft.com/office/drawing/2014/main" id="{760FEB38-65E8-3021-4FBD-9F80A06F62B4}"/>
-              </a:ext>
-            </a:extLst>
-          </p:cNvPr>
-          <p:cNvSpPr txBox="1"/>
-          <p:nvPr/>
-        </p:nvSpPr>
-        <p:spPr>
-          <a:xfrm>
-            <a:off x="1297363" y="1521424"/>
-            <a:ext cx="6098720" cy="430887"/>
-          </a:xfrm>
-          <a:prstGeom prst="rect">
-            <a:avLst/>
-          </a:prstGeom>
-          <a:noFill/>
-          <a:ln>
-            <a:noFill/>
-          </a:ln>
-        </p:spPr>
-        <p:txBody>
-          <a:bodyPr spcFirstLastPara="1" wrap="square" lIns="91425" tIns="45700" rIns="91425" bIns="45700" anchor="t" anchorCtr="0">
-            <a:spAutoFit/>
-          </a:bodyPr>
-          <a:lstStyle/>
-          <a:p>
-            <a:pPr marL="0" marR="0" lvl="0" indent="0" algn="l" rtl="0">
-              <a:spcBef>
-                <a:spcPts val="0"/>
-              </a:spcBef>
-              <a:spcAft>
-                <a:spcPts val="0"/>
-              </a:spcAft>
-              <a:buNone/>
-            </a:pPr>
-            <a:r>
-              <a:rPr lang="ru-RU" sz="2200" b="1">
-                <a:latin typeface="Arial" panose="020B0604020202020204" pitchFamily="34" charset="0"/>
-                <a:ea typeface="Arial"/>
-                <a:cs typeface="Arial" panose="020B0604020202020204" pitchFamily="34" charset="0"/>
-                <a:sym typeface="Arial"/>
-              </a:rPr>
-              <a:t>Среда разработки:</a:t>
-            </a:r>
-            <a:r>
-              <a:rPr lang="ru-RU" sz="2200">
-                <a:latin typeface="Arial" panose="020B0604020202020204" pitchFamily="34" charset="0"/>
-                <a:ea typeface="Arial"/>
-                <a:cs typeface="Arial" panose="020B0604020202020204" pitchFamily="34" charset="0"/>
-                <a:sym typeface="Arial"/>
-              </a:rPr>
-              <a:t> Android Studio</a:t>
-            </a:r>
-            <a:endParaRPr>
-              <a:latin typeface="Arial" panose="020B0604020202020204" pitchFamily="34" charset="0"/>
-              <a:cs typeface="Arial" panose="020B0604020202020204" pitchFamily="34" charset="0"/>
-            </a:endParaRPr>
-          </a:p>
-        </p:txBody>
-      </p:sp>
-      <p:sp>
-        <p:nvSpPr>
-          <p:cNvPr id="11" name="Google Shape;116;p8">
-            <a:extLst>
-              <a:ext uri="{FF2B5EF4-FFF2-40B4-BE49-F238E27FC236}">
-                <a16:creationId xmlns:a16="http://schemas.microsoft.com/office/drawing/2014/main" id="{1CAFB16B-0CD0-0D7C-01C1-447023178E23}"/>
-              </a:ext>
-            </a:extLst>
-          </p:cNvPr>
-          <p:cNvSpPr txBox="1"/>
-          <p:nvPr/>
-        </p:nvSpPr>
-        <p:spPr>
-          <a:xfrm>
-            <a:off x="1297363" y="1988952"/>
-            <a:ext cx="6098700" cy="481630"/>
-          </a:xfrm>
-          <a:prstGeom prst="rect">
-            <a:avLst/>
-          </a:prstGeom>
-          <a:noFill/>
-          <a:ln>
-            <a:noFill/>
-          </a:ln>
-        </p:spPr>
-        <p:txBody>
-          <a:bodyPr spcFirstLastPara="1" wrap="square" lIns="91425" tIns="45700" rIns="91425" bIns="45700" anchor="t" anchorCtr="0">
-            <a:spAutoFit/>
-          </a:bodyPr>
-          <a:lstStyle/>
-          <a:p>
-            <a:pPr marL="0" marR="0" lvl="0" indent="0" algn="l" rtl="0">
-              <a:lnSpc>
-                <a:spcPct val="115000"/>
-              </a:lnSpc>
-              <a:spcBef>
-                <a:spcPts val="0"/>
-              </a:spcBef>
-              <a:spcAft>
-                <a:spcPts val="0"/>
-              </a:spcAft>
-              <a:buNone/>
-            </a:pPr>
-            <a:r>
-              <a:rPr lang="ru-RU" sz="2200" b="1">
-                <a:latin typeface="Arial" panose="020B0604020202020204" pitchFamily="34" charset="0"/>
-                <a:ea typeface="Arial"/>
-                <a:cs typeface="Arial" panose="020B0604020202020204" pitchFamily="34" charset="0"/>
-                <a:sym typeface="Arial"/>
-              </a:rPr>
-              <a:t>Архитектура:</a:t>
-            </a:r>
-            <a:r>
-              <a:rPr lang="ru-RU" sz="2200">
-                <a:latin typeface="Arial" panose="020B0604020202020204" pitchFamily="34" charset="0"/>
-                <a:ea typeface="Arial"/>
-                <a:cs typeface="Arial" panose="020B0604020202020204" pitchFamily="34" charset="0"/>
-                <a:sym typeface="Arial"/>
-              </a:rPr>
-              <a:t> MVVM</a:t>
-            </a:r>
-            <a:endParaRPr>
-              <a:latin typeface="Arial" panose="020B0604020202020204" pitchFamily="34" charset="0"/>
-              <a:cs typeface="Arial" panose="020B0604020202020204" pitchFamily="34" charset="0"/>
-            </a:endParaRPr>
-          </a:p>
-        </p:txBody>
-      </p:sp>
-      <p:sp>
-        <p:nvSpPr>
-          <p:cNvPr id="12" name="Google Shape;117;p8">
-            <a:extLst>
-              <a:ext uri="{FF2B5EF4-FFF2-40B4-BE49-F238E27FC236}">
-                <a16:creationId xmlns:a16="http://schemas.microsoft.com/office/drawing/2014/main" id="{7FC2FCE7-1C8F-2C5C-FA69-381C3F9FB751}"/>
-              </a:ext>
-            </a:extLst>
-          </p:cNvPr>
-          <p:cNvSpPr txBox="1"/>
-          <p:nvPr/>
-        </p:nvSpPr>
-        <p:spPr>
-          <a:xfrm>
-            <a:off x="1297363" y="2377919"/>
-            <a:ext cx="6098700" cy="481630"/>
-          </a:xfrm>
-          <a:prstGeom prst="rect">
-            <a:avLst/>
-          </a:prstGeom>
-          <a:noFill/>
-          <a:ln>
-            <a:noFill/>
-          </a:ln>
-        </p:spPr>
-        <p:txBody>
-          <a:bodyPr spcFirstLastPara="1" wrap="square" lIns="91425" tIns="45700" rIns="91425" bIns="45700" anchor="t" anchorCtr="0">
-            <a:spAutoFit/>
-          </a:bodyPr>
-          <a:lstStyle/>
-          <a:p>
-            <a:pPr marL="0" marR="0" lvl="0" indent="0" algn="l" rtl="0">
-              <a:lnSpc>
-                <a:spcPct val="115000"/>
-              </a:lnSpc>
-              <a:spcBef>
-                <a:spcPts val="0"/>
-              </a:spcBef>
-              <a:spcAft>
-                <a:spcPts val="0"/>
-              </a:spcAft>
-              <a:buNone/>
-            </a:pPr>
-            <a:r>
-              <a:rPr lang="ru-RU" sz="2200" b="1" dirty="0">
-                <a:latin typeface="Arial" panose="020B0604020202020204" pitchFamily="34" charset="0"/>
-                <a:ea typeface="Arial"/>
-                <a:cs typeface="Arial" panose="020B0604020202020204" pitchFamily="34" charset="0"/>
-                <a:sym typeface="Arial"/>
-              </a:rPr>
-              <a:t>Бэкенд и данные:</a:t>
-            </a:r>
-            <a:endParaRPr sz="2200" dirty="0">
-              <a:latin typeface="Arial" panose="020B0604020202020204" pitchFamily="34" charset="0"/>
-              <a:ea typeface="Arial"/>
-              <a:cs typeface="Arial" panose="020B0604020202020204" pitchFamily="34" charset="0"/>
-              <a:sym typeface="Arial"/>
-            </a:endParaRPr>
-          </a:p>
-        </p:txBody>
-      </p:sp>
-      <p:sp>
-        <p:nvSpPr>
-          <p:cNvPr id="13" name="Google Shape;118;p8">
-            <a:extLst>
-              <a:ext uri="{FF2B5EF4-FFF2-40B4-BE49-F238E27FC236}">
-                <a16:creationId xmlns:a16="http://schemas.microsoft.com/office/drawing/2014/main" id="{A8A127A9-4A26-D403-539B-075BCCC2072E}"/>
-              </a:ext>
-            </a:extLst>
-          </p:cNvPr>
-          <p:cNvSpPr txBox="1"/>
-          <p:nvPr/>
-        </p:nvSpPr>
-        <p:spPr>
-          <a:xfrm>
-            <a:off x="1880398" y="2771355"/>
-            <a:ext cx="9396000" cy="481630"/>
-          </a:xfrm>
-          <a:prstGeom prst="rect">
-            <a:avLst/>
-          </a:prstGeom>
-          <a:noFill/>
-          <a:ln>
-            <a:noFill/>
-          </a:ln>
-        </p:spPr>
-        <p:txBody>
-          <a:bodyPr spcFirstLastPara="1" wrap="square" lIns="91425" tIns="45700" rIns="91425" bIns="45700" anchor="t" anchorCtr="0">
-            <a:spAutoFit/>
-          </a:bodyPr>
-          <a:lstStyle/>
-          <a:p>
-            <a:pPr marL="457200" marR="0" lvl="1" indent="0" algn="just" rtl="0">
-              <a:lnSpc>
-                <a:spcPct val="115000"/>
-              </a:lnSpc>
-              <a:spcBef>
-                <a:spcPts val="0"/>
-              </a:spcBef>
-              <a:spcAft>
-                <a:spcPts val="0"/>
-              </a:spcAft>
-              <a:buNone/>
-            </a:pPr>
-            <a:r>
-              <a:rPr lang="ru-RU" sz="2200" dirty="0">
-                <a:latin typeface="Arial" panose="020B0604020202020204" pitchFamily="34" charset="0"/>
-                <a:cs typeface="Arial" panose="020B0604020202020204" pitchFamily="34" charset="0"/>
-              </a:rPr>
-              <a:t>Spring Boot</a:t>
-            </a:r>
-            <a:endParaRPr dirty="0">
-              <a:latin typeface="Arial" panose="020B0604020202020204" pitchFamily="34" charset="0"/>
-              <a:cs typeface="Arial" panose="020B0604020202020204" pitchFamily="34" charset="0"/>
-            </a:endParaRPr>
-          </a:p>
-        </p:txBody>
-      </p:sp>
-      <p:sp>
-        <p:nvSpPr>
-          <p:cNvPr id="14" name="Google Shape;119;p8">
-            <a:extLst>
-              <a:ext uri="{FF2B5EF4-FFF2-40B4-BE49-F238E27FC236}">
-                <a16:creationId xmlns:a16="http://schemas.microsoft.com/office/drawing/2014/main" id="{D95A8893-F7B3-E576-C607-E8CEE072C854}"/>
-              </a:ext>
-            </a:extLst>
-          </p:cNvPr>
-          <p:cNvSpPr txBox="1"/>
-          <p:nvPr/>
-        </p:nvSpPr>
-        <p:spPr>
-          <a:xfrm>
-            <a:off x="1880398" y="3240220"/>
-            <a:ext cx="8121600" cy="481630"/>
-          </a:xfrm>
-          <a:prstGeom prst="rect">
-            <a:avLst/>
-          </a:prstGeom>
-          <a:noFill/>
-          <a:ln>
-            <a:noFill/>
-          </a:ln>
-        </p:spPr>
-        <p:txBody>
-          <a:bodyPr spcFirstLastPara="1" wrap="square" lIns="91425" tIns="45700" rIns="91425" bIns="45700" anchor="t" anchorCtr="0">
-            <a:spAutoFit/>
-          </a:bodyPr>
-          <a:lstStyle/>
-          <a:p>
-            <a:pPr marL="457200" marR="0" lvl="1" indent="0" algn="just" rtl="0">
-              <a:lnSpc>
-                <a:spcPct val="115000"/>
-              </a:lnSpc>
-              <a:spcBef>
-                <a:spcPts val="0"/>
-              </a:spcBef>
-              <a:spcAft>
-                <a:spcPts val="0"/>
-              </a:spcAft>
-              <a:buNone/>
-            </a:pPr>
-            <a:r>
-              <a:rPr lang="ru-RU" sz="2200">
-                <a:latin typeface="Arial" panose="020B0604020202020204" pitchFamily="34" charset="0"/>
-                <a:cs typeface="Arial" panose="020B0604020202020204" pitchFamily="34" charset="0"/>
-              </a:rPr>
-              <a:t>PostgreSQL - </a:t>
-            </a:r>
-            <a:r>
-              <a:rPr lang="ru-RU" sz="2200" b="0" i="0" u="none" strike="noStrike" cap="none">
-                <a:latin typeface="Arial" panose="020B0604020202020204" pitchFamily="34" charset="0"/>
-                <a:ea typeface="Arial"/>
-                <a:cs typeface="Arial" panose="020B0604020202020204" pitchFamily="34" charset="0"/>
-                <a:sym typeface="Arial"/>
-              </a:rPr>
-              <a:t>база данных</a:t>
-            </a:r>
-            <a:endParaRPr>
-              <a:latin typeface="Arial" panose="020B0604020202020204" pitchFamily="34" charset="0"/>
-              <a:cs typeface="Arial" panose="020B0604020202020204" pitchFamily="34" charset="0"/>
-            </a:endParaRPr>
-          </a:p>
-        </p:txBody>
-      </p:sp>
-      <p:sp>
-        <p:nvSpPr>
-          <p:cNvPr id="15" name="Google Shape;120;p8">
-            <a:extLst>
-              <a:ext uri="{FF2B5EF4-FFF2-40B4-BE49-F238E27FC236}">
-                <a16:creationId xmlns:a16="http://schemas.microsoft.com/office/drawing/2014/main" id="{ADB6C602-199D-FA43-AF1B-A8974F2D2985}"/>
-              </a:ext>
-            </a:extLst>
-          </p:cNvPr>
-          <p:cNvSpPr txBox="1"/>
-          <p:nvPr/>
-        </p:nvSpPr>
-        <p:spPr>
-          <a:xfrm>
-            <a:off x="2314635" y="3708006"/>
-            <a:ext cx="8527500" cy="430800"/>
-          </a:xfrm>
-          <a:prstGeom prst="rect">
-            <a:avLst/>
-          </a:prstGeom>
-          <a:noFill/>
-          <a:ln>
-            <a:noFill/>
-          </a:ln>
-        </p:spPr>
-        <p:txBody>
-          <a:bodyPr spcFirstLastPara="1" wrap="square" lIns="91425" tIns="45700" rIns="91425" bIns="45700" anchor="t" anchorCtr="0">
-            <a:spAutoFit/>
-          </a:bodyPr>
-          <a:lstStyle/>
-          <a:p>
-            <a:pPr marL="0" marR="0" lvl="0" indent="0" algn="just" rtl="0">
-              <a:spcBef>
-                <a:spcPts val="0"/>
-              </a:spcBef>
-              <a:spcAft>
-                <a:spcPts val="0"/>
-              </a:spcAft>
-              <a:buNone/>
-            </a:pPr>
-            <a:r>
-              <a:rPr lang="ru-RU" sz="2200">
-                <a:latin typeface="Arial" panose="020B0604020202020204" pitchFamily="34" charset="0"/>
-                <a:ea typeface="Arial"/>
-                <a:cs typeface="Arial" panose="020B0604020202020204" pitchFamily="34" charset="0"/>
-                <a:sym typeface="Arial"/>
-              </a:rPr>
-              <a:t>SharedPreferences – для локального хранения</a:t>
-            </a:r>
-            <a:endParaRPr sz="2200">
-              <a:latin typeface="Arial" panose="020B0604020202020204" pitchFamily="34" charset="0"/>
-              <a:ea typeface="Arial"/>
-              <a:cs typeface="Arial" panose="020B0604020202020204" pitchFamily="34" charset="0"/>
-              <a:sym typeface="Arial"/>
-            </a:endParaRPr>
-          </a:p>
-        </p:txBody>
-      </p:sp>
-      <p:sp>
-        <p:nvSpPr>
-          <p:cNvPr id="16" name="Google Shape;121;p8">
-            <a:extLst>
-              <a:ext uri="{FF2B5EF4-FFF2-40B4-BE49-F238E27FC236}">
-                <a16:creationId xmlns:a16="http://schemas.microsoft.com/office/drawing/2014/main" id="{792EC11D-272F-791F-1237-55D826F240EE}"/>
-              </a:ext>
-            </a:extLst>
-          </p:cNvPr>
-          <p:cNvSpPr txBox="1"/>
-          <p:nvPr/>
-        </p:nvSpPr>
-        <p:spPr>
-          <a:xfrm>
-            <a:off x="1318532" y="4260035"/>
-            <a:ext cx="6098700" cy="481630"/>
-          </a:xfrm>
-          <a:prstGeom prst="rect">
-            <a:avLst/>
-          </a:prstGeom>
-          <a:noFill/>
-          <a:ln>
-            <a:noFill/>
-          </a:ln>
-        </p:spPr>
-        <p:txBody>
-          <a:bodyPr spcFirstLastPara="1" wrap="square" lIns="91425" tIns="45700" rIns="91425" bIns="45700" anchor="t" anchorCtr="0">
-            <a:spAutoFit/>
-          </a:bodyPr>
-          <a:lstStyle/>
-          <a:p>
-            <a:pPr marL="0" marR="0" lvl="0" indent="0" algn="just" rtl="0">
-              <a:lnSpc>
-                <a:spcPct val="115000"/>
-              </a:lnSpc>
-              <a:spcBef>
-                <a:spcPts val="0"/>
-              </a:spcBef>
-              <a:spcAft>
-                <a:spcPts val="0"/>
-              </a:spcAft>
-              <a:buNone/>
-            </a:pPr>
-            <a:r>
-              <a:rPr lang="ru-RU" sz="2200" b="1">
-                <a:latin typeface="Arial" panose="020B0604020202020204" pitchFamily="34" charset="0"/>
-                <a:ea typeface="Arial"/>
-                <a:cs typeface="Arial" panose="020B0604020202020204" pitchFamily="34" charset="0"/>
-                <a:sym typeface="Arial"/>
-              </a:rPr>
-              <a:t>Внешние API:</a:t>
-            </a:r>
-            <a:endParaRPr sz="2200">
-              <a:latin typeface="Arial" panose="020B0604020202020204" pitchFamily="34" charset="0"/>
-              <a:ea typeface="Arial"/>
-              <a:cs typeface="Arial" panose="020B0604020202020204" pitchFamily="34" charset="0"/>
-              <a:sym typeface="Arial"/>
-            </a:endParaRPr>
-          </a:p>
-        </p:txBody>
-      </p:sp>
-      <p:sp>
-        <p:nvSpPr>
-          <p:cNvPr id="17" name="Google Shape;122;p8">
-            <a:extLst>
-              <a:ext uri="{FF2B5EF4-FFF2-40B4-BE49-F238E27FC236}">
-                <a16:creationId xmlns:a16="http://schemas.microsoft.com/office/drawing/2014/main" id="{BD051E4B-1262-43E1-F06D-329E04B75B52}"/>
-              </a:ext>
-            </a:extLst>
-          </p:cNvPr>
-          <p:cNvSpPr txBox="1"/>
-          <p:nvPr/>
-        </p:nvSpPr>
-        <p:spPr>
-          <a:xfrm>
-            <a:off x="1891604" y="4653471"/>
-            <a:ext cx="6670200" cy="481630"/>
-          </a:xfrm>
-          <a:prstGeom prst="rect">
-            <a:avLst/>
-          </a:prstGeom>
-          <a:noFill/>
-          <a:ln>
-            <a:noFill/>
-          </a:ln>
-        </p:spPr>
-        <p:txBody>
-          <a:bodyPr spcFirstLastPara="1" wrap="square" lIns="91425" tIns="45700" rIns="91425" bIns="45700" anchor="t" anchorCtr="0">
-            <a:spAutoFit/>
-          </a:bodyPr>
-          <a:lstStyle/>
-          <a:p>
-            <a:pPr marL="457200" marR="0" lvl="1" indent="0" algn="just" rtl="0">
-              <a:lnSpc>
-                <a:spcPct val="115000"/>
-              </a:lnSpc>
-              <a:spcBef>
-                <a:spcPts val="0"/>
-              </a:spcBef>
-              <a:spcAft>
-                <a:spcPts val="0"/>
-              </a:spcAft>
-              <a:buNone/>
-            </a:pPr>
-            <a:r>
-              <a:rPr lang="ru-RU" sz="2200" b="0" i="0" u="none" strike="noStrike" cap="none">
-                <a:latin typeface="Arial" panose="020B0604020202020204" pitchFamily="34" charset="0"/>
-                <a:ea typeface="Arial"/>
-                <a:cs typeface="Arial" panose="020B0604020202020204" pitchFamily="34" charset="0"/>
-                <a:sym typeface="Arial"/>
-              </a:rPr>
-              <a:t>Яндекс.Карты API (MapKit)</a:t>
-            </a:r>
-            <a:endParaRPr>
-              <a:latin typeface="Arial" panose="020B0604020202020204" pitchFamily="34" charset="0"/>
-              <a:cs typeface="Arial" panose="020B0604020202020204" pitchFamily="34" charset="0"/>
-            </a:endParaRPr>
-          </a:p>
-        </p:txBody>
-      </p:sp>
-      <p:sp>
-        <p:nvSpPr>
-          <p:cNvPr id="18" name="Google Shape;123;p8">
-            <a:extLst>
-              <a:ext uri="{FF2B5EF4-FFF2-40B4-BE49-F238E27FC236}">
-                <a16:creationId xmlns:a16="http://schemas.microsoft.com/office/drawing/2014/main" id="{ED206EE4-8026-DE57-70ED-2362FE43D04A}"/>
-              </a:ext>
-            </a:extLst>
-          </p:cNvPr>
-          <p:cNvSpPr txBox="1"/>
-          <p:nvPr/>
-        </p:nvSpPr>
-        <p:spPr>
-          <a:xfrm>
-            <a:off x="1297363" y="5521772"/>
-            <a:ext cx="9151800" cy="430800"/>
-          </a:xfrm>
-          <a:prstGeom prst="rect">
-            <a:avLst/>
-          </a:prstGeom>
-          <a:noFill/>
-          <a:ln>
-            <a:noFill/>
-          </a:ln>
-        </p:spPr>
-        <p:txBody>
-          <a:bodyPr spcFirstLastPara="1" wrap="square" lIns="91425" tIns="45700" rIns="91425" bIns="45700" anchor="t" anchorCtr="0">
-            <a:spAutoFit/>
-          </a:bodyPr>
-          <a:lstStyle/>
-          <a:p>
-            <a:pPr marL="0" marR="0" lvl="0" indent="0" algn="l" rtl="0">
-              <a:spcBef>
-                <a:spcPts val="0"/>
-              </a:spcBef>
-              <a:spcAft>
-                <a:spcPts val="0"/>
-              </a:spcAft>
-              <a:buNone/>
-            </a:pPr>
-            <a:r>
-              <a:rPr lang="ru-RU" sz="2200" b="1">
-                <a:latin typeface="Arial" panose="020B0604020202020204" pitchFamily="34" charset="0"/>
-                <a:ea typeface="Arial"/>
-                <a:cs typeface="Arial" panose="020B0604020202020204" pitchFamily="34" charset="0"/>
-                <a:sym typeface="Arial"/>
-              </a:rPr>
-              <a:t>Системные сервисы:</a:t>
-            </a:r>
-            <a:r>
-              <a:rPr lang="ru-RU" sz="2200">
-                <a:latin typeface="Arial" panose="020B0604020202020204" pitchFamily="34" charset="0"/>
-                <a:ea typeface="Arial"/>
-                <a:cs typeface="Arial" panose="020B0604020202020204" pitchFamily="34" charset="0"/>
-                <a:sym typeface="Arial"/>
-              </a:rPr>
-              <a:t> AlarmManager и NotificationManager </a:t>
-            </a:r>
-            <a:endParaRPr sz="2200">
-              <a:latin typeface="Arial" panose="020B0604020202020204" pitchFamily="34" charset="0"/>
-              <a:ea typeface="Arial"/>
-              <a:cs typeface="Arial" panose="020B0604020202020204" pitchFamily="34" charset="0"/>
-              <a:sym typeface="Arial"/>
-            </a:endParaRPr>
-          </a:p>
-        </p:txBody>
-      </p:sp>
-      <p:sp>
-        <p:nvSpPr>
-          <p:cNvPr id="21" name="Google Shape;126;p8">
-            <a:extLst>
-              <a:ext uri="{FF2B5EF4-FFF2-40B4-BE49-F238E27FC236}">
-                <a16:creationId xmlns:a16="http://schemas.microsoft.com/office/drawing/2014/main" id="{30100F95-0BA7-7364-D468-C2DBF6D95E4D}"/>
+          <p:cNvPr id="10" name="Google Shape;126;p8">
+            <a:extLst>
+              <a:ext uri="{FF2B5EF4-FFF2-40B4-BE49-F238E27FC236}">
+                <a16:creationId xmlns:a16="http://schemas.microsoft.com/office/drawing/2014/main" id="{BF8B1C92-8899-3D0E-9E27-0A90F93C639E}"/>
               </a:ext>
             </a:extLst>
           </p:cNvPr>
@@ -7004,7 +9032,7 @@
         </p:nvSpPr>
         <p:spPr>
           <a:xfrm flipH="1">
-            <a:off x="2042757" y="2948130"/>
+            <a:off x="850044" y="1605442"/>
             <a:ext cx="154500" cy="158400"/>
           </a:xfrm>
           <a:prstGeom prst="ellipse">
@@ -7048,10 +9076,10 @@
       </p:sp>
       <p:sp>
         <p:nvSpPr>
-          <p:cNvPr id="22" name="Google Shape;127;p8">
-            <a:extLst>
-              <a:ext uri="{FF2B5EF4-FFF2-40B4-BE49-F238E27FC236}">
-                <a16:creationId xmlns:a16="http://schemas.microsoft.com/office/drawing/2014/main" id="{53F0D775-1BFF-3FF7-FB31-98845CE905CA}"/>
+          <p:cNvPr id="11" name="Google Shape;126;p8">
+            <a:extLst>
+              <a:ext uri="{FF2B5EF4-FFF2-40B4-BE49-F238E27FC236}">
+                <a16:creationId xmlns:a16="http://schemas.microsoft.com/office/drawing/2014/main" id="{5F6CB9F6-A2AF-42CF-6B47-D3EBD39CC0B2}"/>
               </a:ext>
             </a:extLst>
           </p:cNvPr>
@@ -7060,7 +9088,7 @@
         </p:nvSpPr>
         <p:spPr>
           <a:xfrm flipH="1">
-            <a:off x="2047927" y="3407571"/>
+            <a:off x="850044" y="2517221"/>
             <a:ext cx="154500" cy="158400"/>
           </a:xfrm>
           <a:prstGeom prst="ellipse">
@@ -7104,10 +9132,10 @@
       </p:sp>
       <p:sp>
         <p:nvSpPr>
-          <p:cNvPr id="23" name="Google Shape;128;p8">
-            <a:extLst>
-              <a:ext uri="{FF2B5EF4-FFF2-40B4-BE49-F238E27FC236}">
-                <a16:creationId xmlns:a16="http://schemas.microsoft.com/office/drawing/2014/main" id="{CA3E1C5E-B94E-AB74-CCE1-3E32FCF50C75}"/>
+          <p:cNvPr id="12" name="Google Shape;126;p8">
+            <a:extLst>
+              <a:ext uri="{FF2B5EF4-FFF2-40B4-BE49-F238E27FC236}">
+                <a16:creationId xmlns:a16="http://schemas.microsoft.com/office/drawing/2014/main" id="{FCAA920D-148E-5F99-514E-D97794A9A7D7}"/>
               </a:ext>
             </a:extLst>
           </p:cNvPr>
@@ -7116,7 +9144,7 @@
         </p:nvSpPr>
         <p:spPr>
           <a:xfrm flipH="1">
-            <a:off x="2047927" y="3838040"/>
+            <a:off x="850044" y="3429000"/>
             <a:ext cx="154500" cy="158400"/>
           </a:xfrm>
           <a:prstGeom prst="ellipse">
@@ -7160,66 +9188,10 @@
       </p:sp>
       <p:sp>
         <p:nvSpPr>
-          <p:cNvPr id="24" name="Google Shape;129;p8">
-            <a:extLst>
-              <a:ext uri="{FF2B5EF4-FFF2-40B4-BE49-F238E27FC236}">
-                <a16:creationId xmlns:a16="http://schemas.microsoft.com/office/drawing/2014/main" id="{0D0446B2-89EB-48D7-CAD2-AA5ACEA06C0D}"/>
-              </a:ext>
-            </a:extLst>
-          </p:cNvPr>
-          <p:cNvSpPr/>
-          <p:nvPr/>
-        </p:nvSpPr>
-        <p:spPr>
-          <a:xfrm flipH="1">
-            <a:off x="2042757" y="4808387"/>
-            <a:ext cx="154500" cy="158400"/>
-          </a:xfrm>
-          <a:prstGeom prst="ellipse">
-            <a:avLst/>
-          </a:prstGeom>
-          <a:solidFill>
-            <a:schemeClr val="tx1"/>
-          </a:solidFill>
-          <a:ln>
-            <a:noFill/>
-          </a:ln>
-          <a:effectLst>
-            <a:outerShdw blurRad="203040" dist="75967" dir="5448874" sx="102000" sy="102000" algn="ctr" rotWithShape="0">
-              <a:srgbClr val="BFBFBF">
-                <a:alpha val="50980"/>
-              </a:srgbClr>
-            </a:outerShdw>
-          </a:effectLst>
-        </p:spPr>
-        <p:txBody>
-          <a:bodyPr spcFirstLastPara="1" wrap="square" lIns="91425" tIns="91425" rIns="91425" bIns="91425" anchor="ctr" anchorCtr="0">
-            <a:noAutofit/>
-          </a:bodyPr>
-          <a:lstStyle/>
-          <a:p>
-            <a:pPr marL="0" lvl="0" indent="0" algn="l" rtl="0">
-              <a:spcBef>
-                <a:spcPts val="0"/>
-              </a:spcBef>
-              <a:spcAft>
-                <a:spcPts val="0"/>
-              </a:spcAft>
-              <a:buNone/>
-            </a:pPr>
-            <a:endParaRPr>
-              <a:latin typeface="Arial" panose="020B0604020202020204" pitchFamily="34" charset="0"/>
-              <a:cs typeface="Arial" panose="020B0604020202020204" pitchFamily="34" charset="0"/>
-            </a:endParaRPr>
-          </a:p>
-        </p:txBody>
-      </p:sp>
-      <p:sp>
-        <p:nvSpPr>
-          <p:cNvPr id="25" name="Google Shape;130;p8">
-            <a:extLst>
-              <a:ext uri="{FF2B5EF4-FFF2-40B4-BE49-F238E27FC236}">
-                <a16:creationId xmlns:a16="http://schemas.microsoft.com/office/drawing/2014/main" id="{931C45CD-4171-6F09-95AA-B8E16EAEDD99}"/>
+          <p:cNvPr id="14" name="Google Shape;114;p8">
+            <a:extLst>
+              <a:ext uri="{FF2B5EF4-FFF2-40B4-BE49-F238E27FC236}">
+                <a16:creationId xmlns:a16="http://schemas.microsoft.com/office/drawing/2014/main" id="{2A5FAD43-D9A7-78C8-5893-33375CF8EF4D}"/>
               </a:ext>
             </a:extLst>
           </p:cNvPr>
@@ -7228,8 +9200,8 @@
         </p:nvSpPr>
         <p:spPr>
           <a:xfrm>
-            <a:off x="2042873" y="5084255"/>
-            <a:ext cx="6670200" cy="481630"/>
+            <a:off x="1252960" y="1443827"/>
+            <a:ext cx="8668828" cy="499327"/>
           </a:xfrm>
           <a:prstGeom prst="rect">
             <a:avLst/>
@@ -7245,7 +9217,7 @@
           </a:bodyPr>
           <a:lstStyle/>
           <a:p>
-            <a:pPr marL="0" marR="0" lvl="1" indent="0" algn="just" rtl="0">
+            <a:pPr marL="0" marR="0" lvl="0" indent="0" algn="l" rtl="0">
               <a:lnSpc>
                 <a:spcPct val="115000"/>
               </a:lnSpc>
@@ -7258,45 +9230,38 @@
               <a:buNone/>
             </a:pPr>
             <a:r>
-              <a:rPr lang="ru-RU" sz="2200">
-                <a:latin typeface="Arial" panose="020B0604020202020204" pitchFamily="34" charset="0"/>
-                <a:cs typeface="Arial" panose="020B0604020202020204" pitchFamily="34" charset="0"/>
-              </a:rPr>
-              <a:t>    </a:t>
-            </a:r>
-            <a:r>
-              <a:rPr lang="ru-RU" sz="2200" b="0" i="0" u="none" strike="noStrike" cap="none">
-                <a:latin typeface="Arial" panose="020B0604020202020204" pitchFamily="34" charset="0"/>
-                <a:ea typeface="Arial"/>
-                <a:cs typeface="Arial" panose="020B0604020202020204" pitchFamily="34" charset="0"/>
-                <a:sym typeface="Arial"/>
-              </a:rPr>
-              <a:t>Яндекс.</a:t>
-            </a:r>
-            <a:r>
-              <a:rPr lang="ru-RU" sz="2200">
-                <a:latin typeface="Arial" panose="020B0604020202020204" pitchFamily="34" charset="0"/>
-                <a:cs typeface="Arial" panose="020B0604020202020204" pitchFamily="34" charset="0"/>
-              </a:rPr>
-              <a:t>Диск</a:t>
-            </a:r>
-            <a:r>
-              <a:rPr lang="ru-RU" sz="2200" b="0" i="0" u="none" strike="noStrike" cap="none">
-                <a:latin typeface="Arial" panose="020B0604020202020204" pitchFamily="34" charset="0"/>
-                <a:ea typeface="Arial"/>
-                <a:cs typeface="Arial" panose="020B0604020202020204" pitchFamily="34" charset="0"/>
-                <a:sym typeface="Arial"/>
-              </a:rPr>
-              <a:t> </a:t>
-            </a:r>
-            <a:r>
-              <a:rPr lang="ru-RU" sz="2200">
-                <a:latin typeface="Arial" panose="020B0604020202020204" pitchFamily="34" charset="0"/>
-                <a:cs typeface="Arial" panose="020B0604020202020204" pitchFamily="34" charset="0"/>
-              </a:rPr>
-              <a:t>REST API</a:t>
-            </a:r>
-            <a:endParaRPr>
+              <a:rPr lang="ru-RU" sz="2300" i="0" dirty="0">
+                <a:effectLst/>
+                <a:latin typeface="Arial" panose="020B0604020202020204" pitchFamily="34" charset="0"/>
+                <a:cs typeface="Arial" panose="020B0604020202020204" pitchFamily="34" charset="0"/>
+              </a:rPr>
+              <a:t>Клиент </a:t>
+            </a:r>
+            <a:r>
+              <a:rPr lang="en-US" sz="2300" i="0" dirty="0">
+                <a:effectLst/>
+                <a:latin typeface="Arial" panose="020B0604020202020204" pitchFamily="34" charset="0"/>
+                <a:cs typeface="Arial" panose="020B0604020202020204" pitchFamily="34" charset="0"/>
+              </a:rPr>
+              <a:t>Android – </a:t>
+            </a:r>
+            <a:r>
+              <a:rPr lang="ru-RU" sz="2300" i="0" dirty="0">
+                <a:effectLst/>
+                <a:latin typeface="Arial" panose="020B0604020202020204" pitchFamily="34" charset="0"/>
+                <a:cs typeface="Arial" panose="020B0604020202020204" pitchFamily="34" charset="0"/>
+              </a:rPr>
+              <a:t>нативное приложение, </a:t>
+            </a:r>
+            <a:r>
+              <a:rPr lang="en-US" sz="2300" i="0" dirty="0">
+                <a:effectLst/>
+                <a:latin typeface="Arial" panose="020B0604020202020204" pitchFamily="34" charset="0"/>
+                <a:cs typeface="Arial" panose="020B0604020202020204" pitchFamily="34" charset="0"/>
+              </a:rPr>
+              <a:t>MVVM</a:t>
+            </a:r>
+            <a:endParaRPr sz="2300" dirty="0">
               <a:latin typeface="Arial" panose="020B0604020202020204" pitchFamily="34" charset="0"/>
               <a:cs typeface="Arial" panose="020B0604020202020204" pitchFamily="34" charset="0"/>
             </a:endParaRPr>
@@ -7305,400 +9270,120 @@
       </p:sp>
       <p:sp>
         <p:nvSpPr>
-          <p:cNvPr id="26" name="Google Shape;131;p8">
-            <a:extLst>
-              <a:ext uri="{FF2B5EF4-FFF2-40B4-BE49-F238E27FC236}">
-                <a16:creationId xmlns:a16="http://schemas.microsoft.com/office/drawing/2014/main" id="{B5BA69F0-7CB2-4E9B-AA32-06139778808A}"/>
-              </a:ext>
-            </a:extLst>
-          </p:cNvPr>
-          <p:cNvSpPr/>
+          <p:cNvPr id="16" name="TextBox 15">
+            <a:extLst>
+              <a:ext uri="{FF2B5EF4-FFF2-40B4-BE49-F238E27FC236}">
+                <a16:creationId xmlns:a16="http://schemas.microsoft.com/office/drawing/2014/main" id="{D4A4156D-A6D4-8DE8-D0E5-0A267684534E}"/>
+              </a:ext>
+            </a:extLst>
+          </p:cNvPr>
+          <p:cNvSpPr txBox="1"/>
           <p:nvPr/>
         </p:nvSpPr>
         <p:spPr>
-          <a:xfrm flipH="1">
-            <a:off x="2042820" y="5220287"/>
-            <a:ext cx="154500" cy="158400"/>
-          </a:xfrm>
-          <a:prstGeom prst="ellipse">
-            <a:avLst/>
-          </a:prstGeom>
-          <a:solidFill>
-            <a:schemeClr val="tx1"/>
-          </a:solidFill>
-          <a:ln>
-            <a:noFill/>
-          </a:ln>
-          <a:effectLst>
-            <a:outerShdw blurRad="203040" dist="75967" dir="5448874" sx="102000" sy="102000" algn="ctr" rotWithShape="0">
-              <a:srgbClr val="BFBFBF">
-                <a:alpha val="50980"/>
-              </a:srgbClr>
-            </a:outerShdw>
-          </a:effectLst>
-        </p:spPr>
-        <p:txBody>
-          <a:bodyPr spcFirstLastPara="1" wrap="square" lIns="91425" tIns="91425" rIns="91425" bIns="91425" anchor="ctr" anchorCtr="0">
-            <a:noAutofit/>
+          <a:xfrm>
+            <a:off x="1252960" y="2213999"/>
+            <a:ext cx="7982712" cy="800219"/>
+          </a:xfrm>
+          <a:prstGeom prst="rect">
+            <a:avLst/>
+          </a:prstGeom>
+          <a:noFill/>
+        </p:spPr>
+        <p:txBody>
+          <a:bodyPr wrap="square">
+            <a:spAutoFit/>
           </a:bodyPr>
           <a:lstStyle/>
           <a:p>
-            <a:pPr marL="0" lvl="0" indent="0" algn="l" rtl="0">
-              <a:spcBef>
-                <a:spcPts val="0"/>
-              </a:spcBef>
-              <a:spcAft>
-                <a:spcPts val="0"/>
-              </a:spcAft>
-              <a:buNone/>
-            </a:pPr>
-            <a:endParaRPr>
-              <a:latin typeface="Arial" panose="020B0604020202020204" pitchFamily="34" charset="0"/>
-              <a:cs typeface="Arial" panose="020B0604020202020204" pitchFamily="34" charset="0"/>
-            </a:endParaRPr>
-          </a:p>
-        </p:txBody>
-      </p:sp>
-      <p:sp>
-        <p:nvSpPr>
-          <p:cNvPr id="2" name="Google Shape;126;p8">
-            <a:extLst>
-              <a:ext uri="{FF2B5EF4-FFF2-40B4-BE49-F238E27FC236}">
-                <a16:creationId xmlns:a16="http://schemas.microsoft.com/office/drawing/2014/main" id="{0788D324-9844-2784-B567-FCAE41E02F3A}"/>
-              </a:ext>
-            </a:extLst>
-          </p:cNvPr>
-          <p:cNvSpPr/>
+            <a:pPr algn="l"/>
+            <a:r>
+              <a:rPr lang="ru-RU" sz="2300" i="0" dirty="0">
+                <a:effectLst/>
+                <a:latin typeface="Arial" panose="020B0604020202020204" pitchFamily="34" charset="0"/>
+                <a:cs typeface="Arial" panose="020B0604020202020204" pitchFamily="34" charset="0"/>
+              </a:rPr>
+              <a:t>Сервер </a:t>
+            </a:r>
+            <a:r>
+              <a:rPr lang="en-US" sz="2300" i="0" dirty="0">
+                <a:effectLst/>
+                <a:latin typeface="Arial" panose="020B0604020202020204" pitchFamily="34" charset="0"/>
+                <a:cs typeface="Arial" panose="020B0604020202020204" pitchFamily="34" charset="0"/>
+              </a:rPr>
+              <a:t>Spring Boot – </a:t>
+            </a:r>
+            <a:r>
+              <a:rPr lang="ru-RU" sz="2300" i="0" dirty="0">
+                <a:effectLst/>
+                <a:latin typeface="Arial" panose="020B0604020202020204" pitchFamily="34" charset="0"/>
+                <a:cs typeface="Arial" panose="020B0604020202020204" pitchFamily="34" charset="0"/>
+              </a:rPr>
+              <a:t>многоуровневая архитектура (</a:t>
+            </a:r>
+            <a:r>
+              <a:rPr lang="en-US" sz="2300" i="0" dirty="0">
+                <a:effectLst/>
+                <a:latin typeface="Arial" panose="020B0604020202020204" pitchFamily="34" charset="0"/>
+                <a:cs typeface="Arial" panose="020B0604020202020204" pitchFamily="34" charset="0"/>
+              </a:rPr>
+              <a:t>Controller → Service → Repository)</a:t>
+            </a:r>
+          </a:p>
+        </p:txBody>
+      </p:sp>
+      <p:sp>
+        <p:nvSpPr>
+          <p:cNvPr id="18" name="TextBox 17">
+            <a:extLst>
+              <a:ext uri="{FF2B5EF4-FFF2-40B4-BE49-F238E27FC236}">
+                <a16:creationId xmlns:a16="http://schemas.microsoft.com/office/drawing/2014/main" id="{EE0CC395-CC77-0CB4-11DB-3EA02CF2F893}"/>
+              </a:ext>
+            </a:extLst>
+          </p:cNvPr>
+          <p:cNvSpPr txBox="1"/>
           <p:nvPr/>
         </p:nvSpPr>
         <p:spPr>
-          <a:xfrm flipH="1">
-            <a:off x="911260" y="1236239"/>
-            <a:ext cx="154500" cy="158400"/>
-          </a:xfrm>
-          <a:prstGeom prst="ellipse">
-            <a:avLst/>
-          </a:prstGeom>
-          <a:solidFill>
-            <a:schemeClr val="tx1"/>
-          </a:solidFill>
-          <a:ln>
-            <a:noFill/>
-          </a:ln>
-          <a:effectLst>
-            <a:outerShdw blurRad="203040" dist="75967" dir="5448874" sx="102000" sy="102000" algn="ctr" rotWithShape="0">
-              <a:srgbClr val="BFBFBF">
-                <a:alpha val="50980"/>
-              </a:srgbClr>
-            </a:outerShdw>
-          </a:effectLst>
-        </p:spPr>
-        <p:txBody>
-          <a:bodyPr spcFirstLastPara="1" wrap="square" lIns="91425" tIns="91425" rIns="91425" bIns="91425" anchor="ctr" anchorCtr="0">
-            <a:noAutofit/>
+          <a:xfrm>
+            <a:off x="1252960" y="3285062"/>
+            <a:ext cx="6094070" cy="446276"/>
+          </a:xfrm>
+          <a:prstGeom prst="rect">
+            <a:avLst/>
+          </a:prstGeom>
+          <a:noFill/>
+        </p:spPr>
+        <p:txBody>
+          <a:bodyPr wrap="square">
+            <a:spAutoFit/>
           </a:bodyPr>
           <a:lstStyle/>
           <a:p>
-            <a:pPr marL="0" lvl="0" indent="0" algn="l" rtl="0">
-              <a:spcBef>
-                <a:spcPts val="0"/>
-              </a:spcBef>
-              <a:spcAft>
-                <a:spcPts val="0"/>
-              </a:spcAft>
-              <a:buNone/>
-            </a:pPr>
-            <a:endParaRPr>
-              <a:latin typeface="Arial" panose="020B0604020202020204" pitchFamily="34" charset="0"/>
-              <a:cs typeface="Arial" panose="020B0604020202020204" pitchFamily="34" charset="0"/>
-            </a:endParaRPr>
-          </a:p>
-        </p:txBody>
-      </p:sp>
-      <p:sp>
-        <p:nvSpPr>
-          <p:cNvPr id="27" name="Google Shape;126;p8">
-            <a:extLst>
-              <a:ext uri="{FF2B5EF4-FFF2-40B4-BE49-F238E27FC236}">
-                <a16:creationId xmlns:a16="http://schemas.microsoft.com/office/drawing/2014/main" id="{E8040E52-6C27-0833-F917-5F615310ACE8}"/>
-              </a:ext>
-            </a:extLst>
-          </p:cNvPr>
-          <p:cNvSpPr/>
-          <p:nvPr/>
-        </p:nvSpPr>
-        <p:spPr>
-          <a:xfrm flipH="1">
-            <a:off x="902197" y="1683907"/>
-            <a:ext cx="154500" cy="158400"/>
-          </a:xfrm>
-          <a:prstGeom prst="ellipse">
-            <a:avLst/>
-          </a:prstGeom>
-          <a:solidFill>
-            <a:schemeClr val="tx1"/>
-          </a:solidFill>
-          <a:ln>
-            <a:noFill/>
-          </a:ln>
-          <a:effectLst>
-            <a:outerShdw blurRad="203040" dist="75967" dir="5448874" sx="102000" sy="102000" algn="ctr" rotWithShape="0">
-              <a:srgbClr val="BFBFBF">
-                <a:alpha val="50980"/>
-              </a:srgbClr>
-            </a:outerShdw>
-          </a:effectLst>
-        </p:spPr>
-        <p:txBody>
-          <a:bodyPr spcFirstLastPara="1" wrap="square" lIns="91425" tIns="91425" rIns="91425" bIns="91425" anchor="ctr" anchorCtr="0">
-            <a:noAutofit/>
-          </a:bodyPr>
-          <a:lstStyle/>
-          <a:p>
-            <a:pPr marL="0" lvl="0" indent="0" algn="l" rtl="0">
-              <a:spcBef>
-                <a:spcPts val="0"/>
-              </a:spcBef>
-              <a:spcAft>
-                <a:spcPts val="0"/>
-              </a:spcAft>
-              <a:buNone/>
-            </a:pPr>
-            <a:endParaRPr>
-              <a:latin typeface="Arial" panose="020B0604020202020204" pitchFamily="34" charset="0"/>
-              <a:cs typeface="Arial" panose="020B0604020202020204" pitchFamily="34" charset="0"/>
-            </a:endParaRPr>
-          </a:p>
-        </p:txBody>
-      </p:sp>
-      <p:sp>
-        <p:nvSpPr>
-          <p:cNvPr id="28" name="Google Shape;126;p8">
-            <a:extLst>
-              <a:ext uri="{FF2B5EF4-FFF2-40B4-BE49-F238E27FC236}">
-                <a16:creationId xmlns:a16="http://schemas.microsoft.com/office/drawing/2014/main" id="{F04D9C3C-A0D9-4197-3CD1-9D00E71DF1CF}"/>
-              </a:ext>
-            </a:extLst>
-          </p:cNvPr>
-          <p:cNvSpPr/>
-          <p:nvPr/>
-        </p:nvSpPr>
-        <p:spPr>
-          <a:xfrm flipH="1">
-            <a:off x="902197" y="2193404"/>
-            <a:ext cx="154500" cy="158400"/>
-          </a:xfrm>
-          <a:prstGeom prst="ellipse">
-            <a:avLst/>
-          </a:prstGeom>
-          <a:solidFill>
-            <a:schemeClr val="tx1"/>
-          </a:solidFill>
-          <a:ln>
-            <a:noFill/>
-          </a:ln>
-          <a:effectLst>
-            <a:outerShdw blurRad="203040" dist="75967" dir="5448874" sx="102000" sy="102000" algn="ctr" rotWithShape="0">
-              <a:srgbClr val="BFBFBF">
-                <a:alpha val="50980"/>
-              </a:srgbClr>
-            </a:outerShdw>
-          </a:effectLst>
-        </p:spPr>
-        <p:txBody>
-          <a:bodyPr spcFirstLastPara="1" wrap="square" lIns="91425" tIns="91425" rIns="91425" bIns="91425" anchor="ctr" anchorCtr="0">
-            <a:noAutofit/>
-          </a:bodyPr>
-          <a:lstStyle/>
-          <a:p>
-            <a:pPr marL="0" lvl="0" indent="0" algn="l" rtl="0">
-              <a:spcBef>
-                <a:spcPts val="0"/>
-              </a:spcBef>
-              <a:spcAft>
-                <a:spcPts val="0"/>
-              </a:spcAft>
-              <a:buNone/>
-            </a:pPr>
-            <a:endParaRPr>
-              <a:latin typeface="Arial" panose="020B0604020202020204" pitchFamily="34" charset="0"/>
-              <a:cs typeface="Arial" panose="020B0604020202020204" pitchFamily="34" charset="0"/>
-            </a:endParaRPr>
-          </a:p>
-        </p:txBody>
-      </p:sp>
-      <p:sp>
-        <p:nvSpPr>
-          <p:cNvPr id="29" name="Google Shape;126;p8">
-            <a:extLst>
-              <a:ext uri="{FF2B5EF4-FFF2-40B4-BE49-F238E27FC236}">
-                <a16:creationId xmlns:a16="http://schemas.microsoft.com/office/drawing/2014/main" id="{13577764-A10A-5150-3324-94AC04FF3F95}"/>
-              </a:ext>
-            </a:extLst>
-          </p:cNvPr>
-          <p:cNvSpPr/>
-          <p:nvPr/>
-        </p:nvSpPr>
-        <p:spPr>
-          <a:xfrm flipH="1">
-            <a:off x="902197" y="2632724"/>
-            <a:ext cx="154500" cy="158400"/>
-          </a:xfrm>
-          <a:prstGeom prst="ellipse">
-            <a:avLst/>
-          </a:prstGeom>
-          <a:solidFill>
-            <a:schemeClr val="tx1"/>
-          </a:solidFill>
-          <a:ln>
-            <a:noFill/>
-          </a:ln>
-          <a:effectLst>
-            <a:outerShdw blurRad="203040" dist="75967" dir="5448874" sx="102000" sy="102000" algn="ctr" rotWithShape="0">
-              <a:srgbClr val="BFBFBF">
-                <a:alpha val="50980"/>
-              </a:srgbClr>
-            </a:outerShdw>
-          </a:effectLst>
-        </p:spPr>
-        <p:txBody>
-          <a:bodyPr spcFirstLastPara="1" wrap="square" lIns="91425" tIns="91425" rIns="91425" bIns="91425" anchor="ctr" anchorCtr="0">
-            <a:noAutofit/>
-          </a:bodyPr>
-          <a:lstStyle/>
-          <a:p>
-            <a:pPr marL="0" lvl="0" indent="0" algn="l" rtl="0">
-              <a:spcBef>
-                <a:spcPts val="0"/>
-              </a:spcBef>
-              <a:spcAft>
-                <a:spcPts val="0"/>
-              </a:spcAft>
-              <a:buNone/>
-            </a:pPr>
-            <a:endParaRPr>
-              <a:latin typeface="Arial" panose="020B0604020202020204" pitchFamily="34" charset="0"/>
-              <a:cs typeface="Arial" panose="020B0604020202020204" pitchFamily="34" charset="0"/>
-            </a:endParaRPr>
-          </a:p>
-        </p:txBody>
-      </p:sp>
-      <p:sp>
-        <p:nvSpPr>
-          <p:cNvPr id="30" name="Google Shape;126;p8">
-            <a:extLst>
-              <a:ext uri="{FF2B5EF4-FFF2-40B4-BE49-F238E27FC236}">
-                <a16:creationId xmlns:a16="http://schemas.microsoft.com/office/drawing/2014/main" id="{57A4A18E-5F06-C500-EA15-E28E899050FC}"/>
-              </a:ext>
-            </a:extLst>
-          </p:cNvPr>
-          <p:cNvSpPr/>
-          <p:nvPr/>
-        </p:nvSpPr>
-        <p:spPr>
-          <a:xfrm flipH="1">
-            <a:off x="902197" y="4421650"/>
-            <a:ext cx="154500" cy="158400"/>
-          </a:xfrm>
-          <a:prstGeom prst="ellipse">
-            <a:avLst/>
-          </a:prstGeom>
-          <a:solidFill>
-            <a:schemeClr val="tx1"/>
-          </a:solidFill>
-          <a:ln>
-            <a:noFill/>
-          </a:ln>
-          <a:effectLst>
-            <a:outerShdw blurRad="203040" dist="75967" dir="5448874" sx="102000" sy="102000" algn="ctr" rotWithShape="0">
-              <a:srgbClr val="BFBFBF">
-                <a:alpha val="50980"/>
-              </a:srgbClr>
-            </a:outerShdw>
-          </a:effectLst>
-        </p:spPr>
-        <p:txBody>
-          <a:bodyPr spcFirstLastPara="1" wrap="square" lIns="91425" tIns="91425" rIns="91425" bIns="91425" anchor="ctr" anchorCtr="0">
-            <a:noAutofit/>
-          </a:bodyPr>
-          <a:lstStyle/>
-          <a:p>
-            <a:pPr marL="0" lvl="0" indent="0" algn="l" rtl="0">
-              <a:spcBef>
-                <a:spcPts val="0"/>
-              </a:spcBef>
-              <a:spcAft>
-                <a:spcPts val="0"/>
-              </a:spcAft>
-              <a:buNone/>
-            </a:pPr>
-            <a:endParaRPr>
-              <a:latin typeface="Arial" panose="020B0604020202020204" pitchFamily="34" charset="0"/>
-              <a:cs typeface="Arial" panose="020B0604020202020204" pitchFamily="34" charset="0"/>
-            </a:endParaRPr>
-          </a:p>
-        </p:txBody>
-      </p:sp>
-      <p:sp>
-        <p:nvSpPr>
-          <p:cNvPr id="31" name="Google Shape;126;p8">
-            <a:extLst>
-              <a:ext uri="{FF2B5EF4-FFF2-40B4-BE49-F238E27FC236}">
-                <a16:creationId xmlns:a16="http://schemas.microsoft.com/office/drawing/2014/main" id="{B13627A4-A5F7-4C0A-BE95-A2DFAE21A332}"/>
-              </a:ext>
-            </a:extLst>
-          </p:cNvPr>
-          <p:cNvSpPr/>
-          <p:nvPr/>
-        </p:nvSpPr>
-        <p:spPr>
-          <a:xfrm flipH="1">
-            <a:off x="902197" y="5657972"/>
-            <a:ext cx="154500" cy="158400"/>
-          </a:xfrm>
-          <a:prstGeom prst="ellipse">
-            <a:avLst/>
-          </a:prstGeom>
-          <a:solidFill>
-            <a:schemeClr val="tx1"/>
-          </a:solidFill>
-          <a:ln>
-            <a:noFill/>
-          </a:ln>
-          <a:effectLst>
-            <a:outerShdw blurRad="203040" dist="75967" dir="5448874" sx="102000" sy="102000" algn="ctr" rotWithShape="0">
-              <a:srgbClr val="BFBFBF">
-                <a:alpha val="50980"/>
-              </a:srgbClr>
-            </a:outerShdw>
-          </a:effectLst>
-        </p:spPr>
-        <p:txBody>
-          <a:bodyPr spcFirstLastPara="1" wrap="square" lIns="91425" tIns="91425" rIns="91425" bIns="91425" anchor="ctr" anchorCtr="0">
-            <a:noAutofit/>
-          </a:bodyPr>
-          <a:lstStyle/>
-          <a:p>
-            <a:pPr marL="0" lvl="0" indent="0" algn="l" rtl="0">
-              <a:spcBef>
-                <a:spcPts val="0"/>
-              </a:spcBef>
-              <a:spcAft>
-                <a:spcPts val="0"/>
-              </a:spcAft>
-              <a:buNone/>
-            </a:pPr>
-            <a:endParaRPr>
-              <a:latin typeface="Arial" panose="020B0604020202020204" pitchFamily="34" charset="0"/>
-              <a:cs typeface="Arial" panose="020B0604020202020204" pitchFamily="34" charset="0"/>
-            </a:endParaRPr>
+            <a:pPr algn="l"/>
+            <a:r>
+              <a:rPr lang="ru-RU" sz="2300" i="0" dirty="0">
+                <a:effectLst/>
+                <a:latin typeface="Arial" panose="020B0604020202020204" pitchFamily="34" charset="0"/>
+                <a:cs typeface="Arial" panose="020B0604020202020204" pitchFamily="34" charset="0"/>
+              </a:rPr>
+              <a:t>База данных – </a:t>
+            </a:r>
+            <a:r>
+              <a:rPr lang="en-US" sz="2300" i="0" dirty="0">
+                <a:effectLst/>
+                <a:latin typeface="Arial" panose="020B0604020202020204" pitchFamily="34" charset="0"/>
+                <a:cs typeface="Arial" panose="020B0604020202020204" pitchFamily="34" charset="0"/>
+              </a:rPr>
+              <a:t>PostgreSQL</a:t>
+            </a:r>
           </a:p>
         </p:txBody>
       </p:sp>
     </p:spTree>
     <p:extLst>
       <p:ext uri="{BB962C8B-B14F-4D97-AF65-F5344CB8AC3E}">
-        <p14:creationId xmlns:p14="http://schemas.microsoft.com/office/powerpoint/2010/main" val="1894482553"/>
+        <p14:creationId xmlns:p14="http://schemas.microsoft.com/office/powerpoint/2010/main" val="1493152506"/>
       </p:ext>
     </p:extLst>
   </p:cSld>
@@ -7725,72 +9410,47 @@
           <a:chExt cx="0" cy="0"/>
         </a:xfrm>
       </p:grpSpPr>
-      <p:sp>
-        <p:nvSpPr>
-          <p:cNvPr id="3" name="Google Shape;137;p9">
-            <a:extLst>
-              <a:ext uri="{FF2B5EF4-FFF2-40B4-BE49-F238E27FC236}">
-                <a16:creationId xmlns:a16="http://schemas.microsoft.com/office/drawing/2014/main" id="{9ABB6F61-0E2E-4D1C-7802-6B8325BD45DB}"/>
-              </a:ext>
-            </a:extLst>
-          </p:cNvPr>
-          <p:cNvSpPr txBox="1">
-            <a:spLocks noGrp="1"/>
-          </p:cNvSpPr>
-          <p:nvPr>
-            <p:ph type="sldNum" idx="12"/>
-          </p:nvPr>
-        </p:nvSpPr>
+      <p:pic>
+        <p:nvPicPr>
+          <p:cNvPr id="4" name="Рисунок 3" descr="Изображение выглядит как текст, диаграмма, число, Параллельный&#10;&#10;Автоматически созданное описание">
+            <a:extLst>
+              <a:ext uri="{FF2B5EF4-FFF2-40B4-BE49-F238E27FC236}">
+                <a16:creationId xmlns:a16="http://schemas.microsoft.com/office/drawing/2014/main" id="{7B9EF08C-7B9D-0A14-BD37-BC007267794E}"/>
+              </a:ext>
+            </a:extLst>
+          </p:cNvPr>
+          <p:cNvPicPr>
+            <a:picLocks noChangeAspect="1"/>
+          </p:cNvPicPr>
+          <p:nvPr/>
+        </p:nvPicPr>
+        <p:blipFill>
+          <a:blip r:embed="rId2">
+            <a:extLst>
+              <a:ext uri="{28A0092B-C50C-407E-A947-70E740481C1C}">
+                <a14:useLocalDpi xmlns:a14="http://schemas.microsoft.com/office/drawing/2010/main" val="0"/>
+              </a:ext>
+            </a:extLst>
+          </a:blip>
+          <a:srcRect l="8144" t="4589"/>
+          <a:stretch/>
+        </p:blipFill>
         <p:spPr>
           <a:xfrm>
-            <a:off x="8610600" y="6356350"/>
-            <a:ext cx="2743200" cy="365100"/>
+            <a:off x="2956327" y="179064"/>
+            <a:ext cx="6504913" cy="6313810"/>
           </a:xfrm>
           <a:prstGeom prst="rect">
             <a:avLst/>
           </a:prstGeom>
-          <a:noFill/>
-          <a:ln>
-            <a:noFill/>
-          </a:ln>
-        </p:spPr>
-        <p:txBody>
-          <a:bodyPr spcFirstLastPara="1" wrap="square" lIns="91425" tIns="45700" rIns="91425" bIns="45700" anchor="ctr" anchorCtr="0">
-            <a:noAutofit/>
-          </a:bodyPr>
-          <a:lstStyle/>
-          <a:p>
-            <a:pPr marL="0" lvl="0" indent="0" algn="r" rtl="0">
-              <a:spcBef>
-                <a:spcPts val="0"/>
-              </a:spcBef>
-              <a:spcAft>
-                <a:spcPts val="0"/>
-              </a:spcAft>
-              <a:buNone/>
-            </a:pPr>
-            <a:fld id="{00000000-1234-1234-1234-123412341234}" type="slidenum">
-              <a:rPr lang="ru-RU">
-                <a:solidFill>
-                  <a:schemeClr val="tx1"/>
-                </a:solidFill>
-              </a:rPr>
-              <a:t>7</a:t>
-            </a:fld>
-            <a:endParaRPr>
-              <a:solidFill>
-                <a:schemeClr val="tx1"/>
-              </a:solidFill>
-            </a:endParaRPr>
-          </a:p>
-        </p:txBody>
-      </p:sp>
-      <p:sp>
-        <p:nvSpPr>
-          <p:cNvPr id="4" name="Google Shape;138;p9">
-            <a:extLst>
-              <a:ext uri="{FF2B5EF4-FFF2-40B4-BE49-F238E27FC236}">
-                <a16:creationId xmlns:a16="http://schemas.microsoft.com/office/drawing/2014/main" id="{5841E619-3D1B-DC7F-EB0F-322E4EC054D7}"/>
+        </p:spPr>
+      </p:pic>
+      <p:sp>
+        <p:nvSpPr>
+          <p:cNvPr id="2" name="Google Shape;101;p7">
+            <a:extLst>
+              <a:ext uri="{FF2B5EF4-FFF2-40B4-BE49-F238E27FC236}">
+                <a16:creationId xmlns:a16="http://schemas.microsoft.com/office/drawing/2014/main" id="{889FED40-C1BC-90F8-F68C-3780EFEDC7B6}"/>
               </a:ext>
             </a:extLst>
           </p:cNvPr>
@@ -7851,39 +9511,42 @@
               <a:buNone/>
             </a:pPr>
             <a:r>
+              <a:rPr lang="en-US" dirty="0">
+                <a:latin typeface="Arial" panose="020B0604020202020204" pitchFamily="34" charset="0"/>
+                <a:cs typeface="Arial" panose="020B0604020202020204" pitchFamily="34" charset="0"/>
+              </a:rPr>
+              <a:t>ER</a:t>
+            </a:r>
+            <a:r>
               <a:rPr lang="ru-RU" dirty="0">
                 <a:latin typeface="Arial" panose="020B0604020202020204" pitchFamily="34" charset="0"/>
                 <a:cs typeface="Arial" panose="020B0604020202020204" pitchFamily="34" charset="0"/>
               </a:rPr>
-              <a:t>Архитектура</a:t>
-            </a:r>
-          </a:p>
-        </p:txBody>
-      </p:sp>
-      <p:pic>
-        <p:nvPicPr>
-          <p:cNvPr id="5" name="Google Shape;139;p9">
-            <a:extLst>
-              <a:ext uri="{FF2B5EF4-FFF2-40B4-BE49-F238E27FC236}">
-                <a16:creationId xmlns:a16="http://schemas.microsoft.com/office/drawing/2014/main" id="{4D5EB15E-099E-4AED-8CBF-1A50AAFF011D}"/>
-              </a:ext>
-            </a:extLst>
-          </p:cNvPr>
-          <p:cNvPicPr preferRelativeResize="0"/>
-          <p:nvPr/>
-        </p:nvPicPr>
-        <p:blipFill>
-          <a:blip r:embed="rId2">
-            <a:alphaModFix/>
-          </a:blip>
-          <a:stretch>
-            <a:fillRect/>
-          </a:stretch>
-        </p:blipFill>
+              <a:t>-диаграмма</a:t>
+            </a:r>
+          </a:p>
+        </p:txBody>
+      </p:sp>
+      <p:sp>
+        <p:nvSpPr>
+          <p:cNvPr id="6" name="Google Shape;71;p5">
+            <a:extLst>
+              <a:ext uri="{FF2B5EF4-FFF2-40B4-BE49-F238E27FC236}">
+                <a16:creationId xmlns:a16="http://schemas.microsoft.com/office/drawing/2014/main" id="{6CBE1862-A95C-34F7-21B5-2783B17267B2}"/>
+              </a:ext>
+            </a:extLst>
+          </p:cNvPr>
+          <p:cNvSpPr txBox="1">
+            <a:spLocks noGrp="1"/>
+          </p:cNvSpPr>
+          <p:nvPr>
+            <p:ph type="sldNum" idx="12"/>
+          </p:nvPr>
+        </p:nvSpPr>
         <p:spPr>
           <a:xfrm>
-            <a:off x="3188800" y="951275"/>
-            <a:ext cx="6046875" cy="5635026"/>
+            <a:off x="8610600" y="6308204"/>
+            <a:ext cx="3251106" cy="413272"/>
           </a:xfrm>
           <a:prstGeom prst="rect">
             <a:avLst/>
@@ -7893,11 +9556,65 @@
             <a:noFill/>
           </a:ln>
         </p:spPr>
-      </p:pic>
+        <p:txBody>
+          <a:bodyPr spcFirstLastPara="1" wrap="square" lIns="91425" tIns="45700" rIns="91425" bIns="45700" anchor="ctr" anchorCtr="0">
+            <a:noAutofit/>
+          </a:bodyPr>
+          <a:lstStyle/>
+          <a:p>
+            <a:pPr marL="0" lvl="0" indent="0" algn="r" rtl="0">
+              <a:spcBef>
+                <a:spcPts val="0"/>
+              </a:spcBef>
+              <a:spcAft>
+                <a:spcPts val="0"/>
+              </a:spcAft>
+              <a:buNone/>
+            </a:pPr>
+            <a:fld id="{00000000-1234-1234-1234-123412341234}" type="slidenum">
+              <a:rPr lang="ru-RU" sz="1400" smtClean="0">
+                <a:solidFill>
+                  <a:schemeClr val="tx1"/>
+                </a:solidFill>
+                <a:latin typeface="Arial" panose="020B0604020202020204" pitchFamily="34" charset="0"/>
+                <a:cs typeface="Arial" panose="020B0604020202020204" pitchFamily="34" charset="0"/>
+              </a:rPr>
+              <a:t>7</a:t>
+            </a:fld>
+            <a:r>
+              <a:rPr lang="en-US" sz="1400" dirty="0">
+                <a:solidFill>
+                  <a:schemeClr val="tx1"/>
+                </a:solidFill>
+                <a:latin typeface="Arial" panose="020B0604020202020204" pitchFamily="34" charset="0"/>
+                <a:cs typeface="Arial" panose="020B0604020202020204" pitchFamily="34" charset="0"/>
+              </a:rPr>
+              <a:t>/1</a:t>
+            </a:r>
+            <a:r>
+              <a:rPr lang="ru-RU" sz="1400" dirty="0">
+                <a:solidFill>
+                  <a:schemeClr val="tx1"/>
+                </a:solidFill>
+                <a:latin typeface="Arial" panose="020B0604020202020204" pitchFamily="34" charset="0"/>
+                <a:cs typeface="Arial" panose="020B0604020202020204" pitchFamily="34" charset="0"/>
+              </a:rPr>
+              <a:t>3</a:t>
+            </a:r>
+            <a:endParaRPr sz="1400" dirty="0">
+              <a:solidFill>
+                <a:schemeClr val="tx1"/>
+              </a:solidFill>
+              <a:latin typeface="Arial" panose="020B0604020202020204" pitchFamily="34" charset="0"/>
+              <a:cs typeface="Arial" panose="020B0604020202020204" pitchFamily="34" charset="0"/>
+            </a:endParaRPr>
+          </a:p>
+        </p:txBody>
+      </p:sp>
     </p:spTree>
     <p:extLst>
       <p:ext uri="{BB962C8B-B14F-4D97-AF65-F5344CB8AC3E}">
-        <p14:creationId xmlns:p14="http://schemas.microsoft.com/office/powerpoint/2010/main" val="1493152506"/>
+        <p14:creationId xmlns:p14="http://schemas.microsoft.com/office/powerpoint/2010/main" val="960810450"/>
       </p:ext>
     </p:extLst>
   </p:cSld>
@@ -7924,76 +9641,48 @@
           <a:chExt cx="0" cy="0"/>
         </a:xfrm>
       </p:grpSpPr>
-      <p:sp>
-        <p:nvSpPr>
-          <p:cNvPr id="3" name="Google Shape;145;p10">
-            <a:extLst>
-              <a:ext uri="{FF2B5EF4-FFF2-40B4-BE49-F238E27FC236}">
-                <a16:creationId xmlns:a16="http://schemas.microsoft.com/office/drawing/2014/main" id="{82F71AFA-CC28-36CE-4B15-B302E582B9AC}"/>
-              </a:ext>
-            </a:extLst>
-          </p:cNvPr>
-          <p:cNvSpPr txBox="1">
-            <a:spLocks noGrp="1"/>
-          </p:cNvSpPr>
-          <p:nvPr>
-            <p:ph type="sldNum" idx="12"/>
-          </p:nvPr>
-        </p:nvSpPr>
+      <p:pic>
+        <p:nvPicPr>
+          <p:cNvPr id="6" name="Рисунок 5" descr="Изображение выглядит как диаграмма, текст, рисунок, зарисовка&#10;&#10;Автоматически созданное описание">
+            <a:extLst>
+              <a:ext uri="{FF2B5EF4-FFF2-40B4-BE49-F238E27FC236}">
+                <a16:creationId xmlns:a16="http://schemas.microsoft.com/office/drawing/2014/main" id="{9D22C038-5AA0-AC7A-32CB-3142363856EC}"/>
+              </a:ext>
+            </a:extLst>
+          </p:cNvPr>
+          <p:cNvPicPr>
+            <a:picLocks noChangeAspect="1"/>
+          </p:cNvPicPr>
+          <p:nvPr/>
+        </p:nvPicPr>
+        <p:blipFill>
+          <a:blip r:embed="rId2">
+            <a:extLst>
+              <a:ext uri="{28A0092B-C50C-407E-A947-70E740481C1C}">
+                <a14:useLocalDpi xmlns:a14="http://schemas.microsoft.com/office/drawing/2010/main" val="0"/>
+              </a:ext>
+            </a:extLst>
+          </a:blip>
+          <a:stretch>
+            <a:fillRect/>
+          </a:stretch>
+        </p:blipFill>
         <p:spPr>
           <a:xfrm>
-            <a:off x="8610600" y="6356350"/>
-            <a:ext cx="2743200" cy="365125"/>
+            <a:off x="325821" y="923732"/>
+            <a:ext cx="11540358" cy="5569142"/>
           </a:xfrm>
           <a:prstGeom prst="rect">
             <a:avLst/>
           </a:prstGeom>
-          <a:noFill/>
-          <a:ln>
-            <a:noFill/>
-          </a:ln>
-        </p:spPr>
-        <p:txBody>
-          <a:bodyPr spcFirstLastPara="1" wrap="square" lIns="91425" tIns="45700" rIns="91425" bIns="45700" anchor="ctr" anchorCtr="0">
-            <a:noAutofit/>
-          </a:bodyPr>
-          <a:lstStyle/>
-          <a:p>
-            <a:pPr marL="0" lvl="0" indent="0" algn="r" rtl="0">
-              <a:spcBef>
-                <a:spcPts val="0"/>
-              </a:spcBef>
-              <a:spcAft>
-                <a:spcPts val="0"/>
-              </a:spcAft>
-              <a:buNone/>
-            </a:pPr>
-            <a:fld id="{00000000-1234-1234-1234-123412341234}" type="slidenum">
-              <a:rPr lang="ru-RU">
-                <a:solidFill>
-                  <a:schemeClr val="tx1"/>
-                </a:solidFill>
-                <a:latin typeface="Arial" panose="020B0604020202020204" pitchFamily="34" charset="0"/>
-                <a:cs typeface="Arial" panose="020B0604020202020204" pitchFamily="34" charset="0"/>
-              </a:rPr>
-              <a:t>8</a:t>
-            </a:fld>
-            <a:endParaRPr>
-              <a:solidFill>
-                <a:schemeClr val="tx1"/>
-              </a:solidFill>
-              <a:latin typeface="Arial" panose="020B0604020202020204" pitchFamily="34" charset="0"/>
-              <a:cs typeface="Arial" panose="020B0604020202020204" pitchFamily="34" charset="0"/>
-            </a:endParaRPr>
-          </a:p>
-        </p:txBody>
-      </p:sp>
-      <p:sp>
-        <p:nvSpPr>
-          <p:cNvPr id="4" name="Google Shape;146;p10">
-            <a:extLst>
-              <a:ext uri="{FF2B5EF4-FFF2-40B4-BE49-F238E27FC236}">
-                <a16:creationId xmlns:a16="http://schemas.microsoft.com/office/drawing/2014/main" id="{FD09AF47-20FC-3E82-1015-BF644DE2A633}"/>
+        </p:spPr>
+      </p:pic>
+      <p:sp>
+        <p:nvSpPr>
+          <p:cNvPr id="4" name="Google Shape;101;p7">
+            <a:extLst>
+              <a:ext uri="{FF2B5EF4-FFF2-40B4-BE49-F238E27FC236}">
+                <a16:creationId xmlns:a16="http://schemas.microsoft.com/office/drawing/2014/main" id="{05C491F7-BF31-B606-E8A3-37B348313FB3}"/>
               </a:ext>
             </a:extLst>
           </p:cNvPr>
@@ -8004,8 +9693,8 @@
         </p:nvSpPr>
         <p:spPr>
           <a:xfrm>
-            <a:off x="838200" y="502515"/>
-            <a:ext cx="8202474" cy="697717"/>
+            <a:off x="1033072" y="365126"/>
+            <a:ext cx="8202600" cy="697800"/>
           </a:xfrm>
           <a:prstGeom prst="rect">
             <a:avLst/>
@@ -8054,238 +9743,35 @@
               <a:buNone/>
             </a:pPr>
             <a:r>
-              <a:rPr lang="ru-RU">
-                <a:latin typeface="Arial" panose="020B0604020202020204" pitchFamily="34" charset="0"/>
-                <a:cs typeface="Arial" panose="020B0604020202020204" pitchFamily="34" charset="0"/>
-              </a:rPr>
-              <a:t>Дизайн</a:t>
-            </a:r>
-          </a:p>
-        </p:txBody>
-      </p:sp>
-      <p:sp>
-        <p:nvSpPr>
-          <p:cNvPr id="5" name="Google Shape;147;p10">
-            <a:extLst>
-              <a:ext uri="{FF2B5EF4-FFF2-40B4-BE49-F238E27FC236}">
-                <a16:creationId xmlns:a16="http://schemas.microsoft.com/office/drawing/2014/main" id="{84A7DA9D-2B67-A39A-E682-DE8B928B1E6D}"/>
-              </a:ext>
-            </a:extLst>
-          </p:cNvPr>
-          <p:cNvSpPr/>
-          <p:nvPr/>
+              <a:rPr lang="ru-RU" dirty="0">
+                <a:latin typeface="Arial" panose="020B0604020202020204" pitchFamily="34" charset="0"/>
+                <a:cs typeface="Arial" panose="020B0604020202020204" pitchFamily="34" charset="0"/>
+              </a:rPr>
+              <a:t>Диаграмма прецедентов</a:t>
+            </a:r>
+          </a:p>
+        </p:txBody>
+      </p:sp>
+      <p:sp>
+        <p:nvSpPr>
+          <p:cNvPr id="7" name="Google Shape;71;p5">
+            <a:extLst>
+              <a:ext uri="{FF2B5EF4-FFF2-40B4-BE49-F238E27FC236}">
+                <a16:creationId xmlns:a16="http://schemas.microsoft.com/office/drawing/2014/main" id="{342DE219-CCE0-DC4E-F860-A6B8E57BBF2A}"/>
+              </a:ext>
+            </a:extLst>
+          </p:cNvPr>
+          <p:cNvSpPr txBox="1">
+            <a:spLocks noGrp="1"/>
+          </p:cNvSpPr>
+          <p:nvPr>
+            <p:ph type="sldNum" idx="12"/>
+          </p:nvPr>
         </p:nvSpPr>
         <p:spPr>
           <a:xfrm>
-            <a:off x="893167" y="2413714"/>
-            <a:ext cx="1239600" cy="325800"/>
-          </a:xfrm>
-          <a:prstGeom prst="roundRect">
-            <a:avLst>
-              <a:gd name="adj" fmla="val 16667"/>
-            </a:avLst>
-          </a:prstGeom>
-          <a:solidFill>
-            <a:srgbClr val="697256"/>
-          </a:solidFill>
-          <a:ln w="10775" cap="flat" cmpd="sng">
-            <a:solidFill>
-              <a:schemeClr val="dk1"/>
-            </a:solidFill>
-            <a:prstDash val="solid"/>
-            <a:round/>
-            <a:headEnd type="none" w="sm" len="sm"/>
-            <a:tailEnd type="none" w="sm" len="sm"/>
-          </a:ln>
-        </p:spPr>
-        <p:txBody>
-          <a:bodyPr spcFirstLastPara="1" wrap="square" lIns="91425" tIns="45700" rIns="91425" bIns="45700" anchor="ctr" anchorCtr="0">
-            <a:noAutofit/>
-          </a:bodyPr>
-          <a:lstStyle/>
-          <a:p>
-            <a:pPr marL="0" lvl="0" indent="0" algn="ctr" rtl="0">
-              <a:spcBef>
-                <a:spcPts val="0"/>
-              </a:spcBef>
-              <a:spcAft>
-                <a:spcPts val="0"/>
-              </a:spcAft>
-              <a:buClr>
-                <a:schemeClr val="dk1"/>
-              </a:buClr>
-              <a:buSzPts val="1100"/>
-              <a:buFont typeface="Arial"/>
-              <a:buNone/>
-            </a:pPr>
-            <a:r>
-              <a:rPr lang="ru-RU" sz="1600">
-                <a:latin typeface="Arial" panose="020B0604020202020204" pitchFamily="34" charset="0"/>
-                <a:cs typeface="Arial" panose="020B0604020202020204" pitchFamily="34" charset="0"/>
-              </a:rPr>
-              <a:t>#697255</a:t>
-            </a:r>
-            <a:endParaRPr sz="1600">
-              <a:latin typeface="Arial" panose="020B0604020202020204" pitchFamily="34" charset="0"/>
-              <a:cs typeface="Arial" panose="020B0604020202020204" pitchFamily="34" charset="0"/>
-            </a:endParaRPr>
-          </a:p>
-        </p:txBody>
-      </p:sp>
-      <p:sp>
-        <p:nvSpPr>
-          <p:cNvPr id="6" name="Google Shape;148;p10">
-            <a:extLst>
-              <a:ext uri="{FF2B5EF4-FFF2-40B4-BE49-F238E27FC236}">
-                <a16:creationId xmlns:a16="http://schemas.microsoft.com/office/drawing/2014/main" id="{BCA500C1-0DB9-67D3-1352-AB1CCC84230B}"/>
-              </a:ext>
-            </a:extLst>
-          </p:cNvPr>
-          <p:cNvSpPr/>
-          <p:nvPr/>
-        </p:nvSpPr>
-        <p:spPr>
-          <a:xfrm>
-            <a:off x="893276" y="3497439"/>
-            <a:ext cx="1239600" cy="270900"/>
-          </a:xfrm>
-          <a:prstGeom prst="roundRect">
-            <a:avLst>
-              <a:gd name="adj" fmla="val 16667"/>
-            </a:avLst>
-          </a:prstGeom>
-          <a:solidFill>
-            <a:srgbClr val="EBEBEB"/>
-          </a:solidFill>
-          <a:ln w="10775" cap="flat" cmpd="sng">
-            <a:solidFill>
-              <a:schemeClr val="dk1"/>
-            </a:solidFill>
-            <a:prstDash val="solid"/>
-            <a:round/>
-            <a:headEnd type="none" w="sm" len="sm"/>
-            <a:tailEnd type="none" w="sm" len="sm"/>
-          </a:ln>
-        </p:spPr>
-        <p:txBody>
-          <a:bodyPr spcFirstLastPara="1" wrap="square" lIns="91425" tIns="45700" rIns="91425" bIns="45700" anchor="ctr" anchorCtr="0">
-            <a:noAutofit/>
-          </a:bodyPr>
-          <a:lstStyle/>
-          <a:p>
-            <a:pPr marL="0" lvl="0" indent="0" algn="ctr" rtl="0">
-              <a:spcBef>
-                <a:spcPts val="0"/>
-              </a:spcBef>
-              <a:spcAft>
-                <a:spcPts val="0"/>
-              </a:spcAft>
-              <a:buClr>
-                <a:schemeClr val="dk1"/>
-              </a:buClr>
-              <a:buSzPts val="1100"/>
-              <a:buFont typeface="Arial"/>
-              <a:buNone/>
-            </a:pPr>
-            <a:r>
-              <a:rPr lang="ru-RU" sz="1600">
-                <a:latin typeface="Arial" panose="020B0604020202020204" pitchFamily="34" charset="0"/>
-                <a:cs typeface="Arial" panose="020B0604020202020204" pitchFamily="34" charset="0"/>
-              </a:rPr>
-              <a:t>#F5F5F5</a:t>
-            </a:r>
-            <a:endParaRPr sz="1600">
-              <a:latin typeface="Arial" panose="020B0604020202020204" pitchFamily="34" charset="0"/>
-              <a:cs typeface="Arial" panose="020B0604020202020204" pitchFamily="34" charset="0"/>
-            </a:endParaRPr>
-          </a:p>
-        </p:txBody>
-      </p:sp>
-      <p:sp>
-        <p:nvSpPr>
-          <p:cNvPr id="7" name="Google Shape;149;p10">
-            <a:extLst>
-              <a:ext uri="{FF2B5EF4-FFF2-40B4-BE49-F238E27FC236}">
-                <a16:creationId xmlns:a16="http://schemas.microsoft.com/office/drawing/2014/main" id="{EAC541E1-1FB3-5126-2054-FE62449A5AA3}"/>
-              </a:ext>
-            </a:extLst>
-          </p:cNvPr>
-          <p:cNvSpPr/>
-          <p:nvPr/>
-        </p:nvSpPr>
-        <p:spPr>
-          <a:xfrm>
-            <a:off x="893275" y="2953839"/>
-            <a:ext cx="1239600" cy="325800"/>
-          </a:xfrm>
-          <a:prstGeom prst="roundRect">
-            <a:avLst>
-              <a:gd name="adj" fmla="val 16667"/>
-            </a:avLst>
-          </a:prstGeom>
-          <a:solidFill>
-            <a:srgbClr val="B56D4B"/>
-          </a:solidFill>
-          <a:ln w="10775" cap="flat" cmpd="sng">
-            <a:solidFill>
-              <a:schemeClr val="dk1"/>
-            </a:solidFill>
-            <a:prstDash val="solid"/>
-            <a:round/>
-            <a:headEnd type="none" w="sm" len="sm"/>
-            <a:tailEnd type="none" w="sm" len="sm"/>
-          </a:ln>
-        </p:spPr>
-        <p:txBody>
-          <a:bodyPr spcFirstLastPara="1" wrap="square" lIns="91425" tIns="45700" rIns="91425" bIns="45700" anchor="ctr" anchorCtr="0">
-            <a:noAutofit/>
-          </a:bodyPr>
-          <a:lstStyle/>
-          <a:p>
-            <a:pPr marL="0" lvl="0" indent="0" algn="ctr" rtl="0">
-              <a:spcBef>
-                <a:spcPts val="0"/>
-              </a:spcBef>
-              <a:spcAft>
-                <a:spcPts val="0"/>
-              </a:spcAft>
-              <a:buClr>
-                <a:schemeClr val="dk1"/>
-              </a:buClr>
-              <a:buSzPts val="1100"/>
-              <a:buFont typeface="Arial"/>
-              <a:buNone/>
-            </a:pPr>
-            <a:r>
-              <a:rPr lang="ru-RU" sz="1600">
-                <a:latin typeface="Arial" panose="020B0604020202020204" pitchFamily="34" charset="0"/>
-                <a:cs typeface="Arial" panose="020B0604020202020204" pitchFamily="34" charset="0"/>
-              </a:rPr>
-              <a:t>#B66D4C</a:t>
-            </a:r>
-            <a:endParaRPr sz="1600">
-              <a:latin typeface="Arial" panose="020B0604020202020204" pitchFamily="34" charset="0"/>
-              <a:cs typeface="Arial" panose="020B0604020202020204" pitchFamily="34" charset="0"/>
-            </a:endParaRPr>
-          </a:p>
-        </p:txBody>
-      </p:sp>
-      <p:sp>
-        <p:nvSpPr>
-          <p:cNvPr id="8" name="Google Shape;150;p10">
-            <a:extLst>
-              <a:ext uri="{FF2B5EF4-FFF2-40B4-BE49-F238E27FC236}">
-                <a16:creationId xmlns:a16="http://schemas.microsoft.com/office/drawing/2014/main" id="{815A3166-37F6-5CE3-BA70-3C2658EC120D}"/>
-              </a:ext>
-            </a:extLst>
-          </p:cNvPr>
-          <p:cNvSpPr txBox="1"/>
-          <p:nvPr/>
-        </p:nvSpPr>
-        <p:spPr>
-          <a:xfrm>
-            <a:off x="838200" y="1493129"/>
-            <a:ext cx="6096000" cy="446400"/>
+            <a:off x="8610600" y="6308204"/>
+            <a:ext cx="3251106" cy="413272"/>
           </a:xfrm>
           <a:prstGeom prst="rect">
             <a:avLst/>
@@ -8296,375 +9782,64 @@
           </a:ln>
         </p:spPr>
         <p:txBody>
-          <a:bodyPr spcFirstLastPara="1" wrap="square" lIns="91425" tIns="45700" rIns="91425" bIns="45700" anchor="t" anchorCtr="0">
-            <a:spAutoFit/>
+          <a:bodyPr spcFirstLastPara="1" wrap="square" lIns="91425" tIns="45700" rIns="91425" bIns="45700" anchor="ctr" anchorCtr="0">
+            <a:noAutofit/>
           </a:bodyPr>
           <a:lstStyle/>
           <a:p>
-            <a:pPr marL="0" marR="0" lvl="0" indent="0" algn="l" rtl="0">
+            <a:pPr marL="0" lvl="0" indent="0" algn="r" rtl="0">
               <a:spcBef>
                 <a:spcPts val="0"/>
               </a:spcBef>
               <a:spcAft>
                 <a:spcPts val="0"/>
               </a:spcAft>
-              <a:buClr>
-                <a:srgbClr val="00497A"/>
-              </a:buClr>
-              <a:buSzPts val="2300"/>
-              <a:buFont typeface="Arial"/>
               <a:buNone/>
             </a:pPr>
-            <a:r>
-              <a:rPr lang="ru-RU" sz="2300">
-                <a:latin typeface="Arial" panose="020B0604020202020204" pitchFamily="34" charset="0"/>
-                <a:ea typeface="Arial"/>
-                <a:cs typeface="Arial" panose="020B0604020202020204" pitchFamily="34" charset="0"/>
-                <a:sym typeface="Arial"/>
-              </a:rPr>
-              <a:t>Цветовая палитра:</a:t>
-            </a:r>
-            <a:endParaRPr>
+            <a:fld id="{00000000-1234-1234-1234-123412341234}" type="slidenum">
+              <a:rPr lang="ru-RU" sz="1400" smtClean="0">
+                <a:solidFill>
+                  <a:schemeClr val="tx1"/>
+                </a:solidFill>
+                <a:latin typeface="Arial" panose="020B0604020202020204" pitchFamily="34" charset="0"/>
+                <a:cs typeface="Arial" panose="020B0604020202020204" pitchFamily="34" charset="0"/>
+              </a:rPr>
+              <a:t>8</a:t>
+            </a:fld>
+            <a:r>
+              <a:rPr lang="en-US" sz="1400" dirty="0">
+                <a:solidFill>
+                  <a:schemeClr val="tx1"/>
+                </a:solidFill>
+                <a:latin typeface="Arial" panose="020B0604020202020204" pitchFamily="34" charset="0"/>
+                <a:cs typeface="Arial" panose="020B0604020202020204" pitchFamily="34" charset="0"/>
+              </a:rPr>
+              <a:t>/1</a:t>
+            </a:r>
+            <a:r>
+              <a:rPr lang="ru-RU" sz="1400" dirty="0">
+                <a:solidFill>
+                  <a:schemeClr val="tx1"/>
+                </a:solidFill>
+                <a:latin typeface="Arial" panose="020B0604020202020204" pitchFamily="34" charset="0"/>
+                <a:cs typeface="Arial" panose="020B0604020202020204" pitchFamily="34" charset="0"/>
+              </a:rPr>
+              <a:t>3</a:t>
+            </a:r>
+            <a:endParaRPr sz="1400" dirty="0">
+              <a:solidFill>
+                <a:schemeClr val="tx1"/>
+              </a:solidFill>
               <a:latin typeface="Arial" panose="020B0604020202020204" pitchFamily="34" charset="0"/>
               <a:cs typeface="Arial" panose="020B0604020202020204" pitchFamily="34" charset="0"/>
             </a:endParaRPr>
           </a:p>
         </p:txBody>
       </p:sp>
-      <p:sp>
-        <p:nvSpPr>
-          <p:cNvPr id="9" name="Google Shape;151;p10">
-            <a:extLst>
-              <a:ext uri="{FF2B5EF4-FFF2-40B4-BE49-F238E27FC236}">
-                <a16:creationId xmlns:a16="http://schemas.microsoft.com/office/drawing/2014/main" id="{8FF6DC7D-DCF1-1372-BF52-436882392D41}"/>
-              </a:ext>
-            </a:extLst>
-          </p:cNvPr>
-          <p:cNvSpPr/>
-          <p:nvPr/>
-        </p:nvSpPr>
-        <p:spPr>
-          <a:xfrm>
-            <a:off x="893167" y="4098001"/>
-            <a:ext cx="1239600" cy="325800"/>
-          </a:xfrm>
-          <a:prstGeom prst="roundRect">
-            <a:avLst>
-              <a:gd name="adj" fmla="val 16667"/>
-            </a:avLst>
-          </a:prstGeom>
-          <a:solidFill>
-            <a:schemeClr val="lt1"/>
-          </a:solidFill>
-          <a:ln w="10775" cap="flat" cmpd="sng">
-            <a:solidFill>
-              <a:schemeClr val="dk1"/>
-            </a:solidFill>
-            <a:prstDash val="solid"/>
-            <a:round/>
-            <a:headEnd type="none" w="sm" len="sm"/>
-            <a:tailEnd type="none" w="sm" len="sm"/>
-          </a:ln>
-        </p:spPr>
-        <p:txBody>
-          <a:bodyPr spcFirstLastPara="1" wrap="square" lIns="91425" tIns="45700" rIns="91425" bIns="45700" anchor="ctr" anchorCtr="0">
-            <a:noAutofit/>
-          </a:bodyPr>
-          <a:lstStyle/>
-          <a:p>
-            <a:pPr marL="0" lvl="0" indent="0" algn="ctr" rtl="0">
-              <a:spcBef>
-                <a:spcPts val="0"/>
-              </a:spcBef>
-              <a:spcAft>
-                <a:spcPts val="0"/>
-              </a:spcAft>
-              <a:buClr>
-                <a:schemeClr val="dk1"/>
-              </a:buClr>
-              <a:buSzPts val="1100"/>
-              <a:buFont typeface="Arial"/>
-              <a:buNone/>
-            </a:pPr>
-            <a:r>
-              <a:rPr lang="ru-RU" sz="1600" dirty="0">
-                <a:latin typeface="Arial" panose="020B0604020202020204" pitchFamily="34" charset="0"/>
-                <a:cs typeface="Arial" panose="020B0604020202020204" pitchFamily="34" charset="0"/>
-              </a:rPr>
-              <a:t>#FFFFFFF</a:t>
-            </a:r>
-            <a:endParaRPr sz="1600" dirty="0">
-              <a:latin typeface="Arial" panose="020B0604020202020204" pitchFamily="34" charset="0"/>
-              <a:cs typeface="Arial" panose="020B0604020202020204" pitchFamily="34" charset="0"/>
-            </a:endParaRPr>
-          </a:p>
-        </p:txBody>
-      </p:sp>
-      <p:sp>
-        <p:nvSpPr>
-          <p:cNvPr id="10" name="Google Shape;152;p10">
-            <a:extLst>
-              <a:ext uri="{FF2B5EF4-FFF2-40B4-BE49-F238E27FC236}">
-                <a16:creationId xmlns:a16="http://schemas.microsoft.com/office/drawing/2014/main" id="{7298AECE-18CE-6DBB-C40A-B5B8CDBA33E6}"/>
-              </a:ext>
-            </a:extLst>
-          </p:cNvPr>
-          <p:cNvSpPr txBox="1"/>
-          <p:nvPr/>
-        </p:nvSpPr>
-        <p:spPr>
-          <a:xfrm>
-            <a:off x="2290822" y="2326101"/>
-            <a:ext cx="3893100" cy="631425"/>
-          </a:xfrm>
-          <a:prstGeom prst="rect">
-            <a:avLst/>
-          </a:prstGeom>
-          <a:noFill/>
-          <a:ln>
-            <a:noFill/>
-          </a:ln>
-        </p:spPr>
-        <p:txBody>
-          <a:bodyPr spcFirstLastPara="1" wrap="square" lIns="91425" tIns="91425" rIns="91425" bIns="91425" anchor="t" anchorCtr="0">
-            <a:spAutoFit/>
-          </a:bodyPr>
-          <a:lstStyle/>
-          <a:p>
-            <a:pPr marL="0" lvl="0" indent="0" algn="l" rtl="0">
-              <a:lnSpc>
-                <a:spcPct val="90000"/>
-              </a:lnSpc>
-              <a:spcBef>
-                <a:spcPts val="1000"/>
-              </a:spcBef>
-              <a:spcAft>
-                <a:spcPts val="0"/>
-              </a:spcAft>
-              <a:buNone/>
-            </a:pPr>
-            <a:r>
-              <a:rPr lang="ru-RU" sz="2300">
-                <a:latin typeface="Arial" panose="020B0604020202020204" pitchFamily="34" charset="0"/>
-                <a:cs typeface="Arial" panose="020B0604020202020204" pitchFamily="34" charset="0"/>
-              </a:rPr>
-              <a:t>Тростниково-зеленый</a:t>
-            </a:r>
-            <a:endParaRPr>
-              <a:latin typeface="Arial" panose="020B0604020202020204" pitchFamily="34" charset="0"/>
-              <a:cs typeface="Arial" panose="020B0604020202020204" pitchFamily="34" charset="0"/>
-            </a:endParaRPr>
-          </a:p>
-        </p:txBody>
-      </p:sp>
-      <p:sp>
-        <p:nvSpPr>
-          <p:cNvPr id="11" name="Google Shape;153;p10">
-            <a:extLst>
-              <a:ext uri="{FF2B5EF4-FFF2-40B4-BE49-F238E27FC236}">
-                <a16:creationId xmlns:a16="http://schemas.microsoft.com/office/drawing/2014/main" id="{C91832CE-B523-C572-E4E0-A729CA4CBFD1}"/>
-              </a:ext>
-            </a:extLst>
-          </p:cNvPr>
-          <p:cNvSpPr txBox="1"/>
-          <p:nvPr/>
-        </p:nvSpPr>
-        <p:spPr>
-          <a:xfrm>
-            <a:off x="2290822" y="3405114"/>
-            <a:ext cx="3000000" cy="631425"/>
-          </a:xfrm>
-          <a:prstGeom prst="rect">
-            <a:avLst/>
-          </a:prstGeom>
-          <a:noFill/>
-          <a:ln>
-            <a:noFill/>
-          </a:ln>
-        </p:spPr>
-        <p:txBody>
-          <a:bodyPr spcFirstLastPara="1" wrap="square" lIns="91425" tIns="91425" rIns="91425" bIns="91425" anchor="t" anchorCtr="0">
-            <a:spAutoFit/>
-          </a:bodyPr>
-          <a:lstStyle/>
-          <a:p>
-            <a:pPr marL="0" lvl="0" indent="0" algn="l" rtl="0">
-              <a:lnSpc>
-                <a:spcPct val="90000"/>
-              </a:lnSpc>
-              <a:spcBef>
-                <a:spcPts val="1000"/>
-              </a:spcBef>
-              <a:spcAft>
-                <a:spcPts val="0"/>
-              </a:spcAft>
-              <a:buNone/>
-            </a:pPr>
-            <a:r>
-              <a:rPr lang="ru-RU" sz="2300">
-                <a:latin typeface="Arial" panose="020B0604020202020204" pitchFamily="34" charset="0"/>
-                <a:cs typeface="Arial" panose="020B0604020202020204" pitchFamily="34" charset="0"/>
-              </a:rPr>
-              <a:t>Дымчато-белый </a:t>
-            </a:r>
-            <a:endParaRPr>
-              <a:latin typeface="Arial" panose="020B0604020202020204" pitchFamily="34" charset="0"/>
-              <a:cs typeface="Arial" panose="020B0604020202020204" pitchFamily="34" charset="0"/>
-            </a:endParaRPr>
-          </a:p>
-        </p:txBody>
-      </p:sp>
-      <p:sp>
-        <p:nvSpPr>
-          <p:cNvPr id="12" name="Google Shape;154;p10">
-            <a:extLst>
-              <a:ext uri="{FF2B5EF4-FFF2-40B4-BE49-F238E27FC236}">
-                <a16:creationId xmlns:a16="http://schemas.microsoft.com/office/drawing/2014/main" id="{BFAB5665-8454-45E5-0AC0-AB0F00B148A9}"/>
-              </a:ext>
-            </a:extLst>
-          </p:cNvPr>
-          <p:cNvSpPr txBox="1"/>
-          <p:nvPr/>
-        </p:nvSpPr>
-        <p:spPr>
-          <a:xfrm>
-            <a:off x="2290822" y="2865039"/>
-            <a:ext cx="4367700" cy="631425"/>
-          </a:xfrm>
-          <a:prstGeom prst="rect">
-            <a:avLst/>
-          </a:prstGeom>
-          <a:noFill/>
-          <a:ln>
-            <a:noFill/>
-          </a:ln>
-        </p:spPr>
-        <p:txBody>
-          <a:bodyPr spcFirstLastPara="1" wrap="square" lIns="91425" tIns="91425" rIns="91425" bIns="91425" anchor="t" anchorCtr="0">
-            <a:spAutoFit/>
-          </a:bodyPr>
-          <a:lstStyle/>
-          <a:p>
-            <a:pPr marL="0" lvl="0" indent="0" algn="l" rtl="0">
-              <a:lnSpc>
-                <a:spcPct val="90000"/>
-              </a:lnSpc>
-              <a:spcBef>
-                <a:spcPts val="1000"/>
-              </a:spcBef>
-              <a:spcAft>
-                <a:spcPts val="0"/>
-              </a:spcAft>
-              <a:buNone/>
-            </a:pPr>
-            <a:r>
-              <a:rPr lang="ru-RU" sz="2300">
-                <a:latin typeface="Arial" panose="020B0604020202020204" pitchFamily="34" charset="0"/>
-                <a:cs typeface="Arial" panose="020B0604020202020204" pitchFamily="34" charset="0"/>
-              </a:rPr>
-              <a:t>Коричневый Крайола</a:t>
-            </a:r>
-            <a:endParaRPr>
-              <a:latin typeface="Arial" panose="020B0604020202020204" pitchFamily="34" charset="0"/>
-              <a:cs typeface="Arial" panose="020B0604020202020204" pitchFamily="34" charset="0"/>
-            </a:endParaRPr>
-          </a:p>
-        </p:txBody>
-      </p:sp>
-      <p:sp>
-        <p:nvSpPr>
-          <p:cNvPr id="13" name="Google Shape;155;p10">
-            <a:extLst>
-              <a:ext uri="{FF2B5EF4-FFF2-40B4-BE49-F238E27FC236}">
-                <a16:creationId xmlns:a16="http://schemas.microsoft.com/office/drawing/2014/main" id="{782355E7-514B-7C5D-C214-726D8461EFBB}"/>
-              </a:ext>
-            </a:extLst>
-          </p:cNvPr>
-          <p:cNvSpPr txBox="1"/>
-          <p:nvPr/>
-        </p:nvSpPr>
-        <p:spPr>
-          <a:xfrm>
-            <a:off x="2290822" y="3945189"/>
-            <a:ext cx="3000000" cy="631425"/>
-          </a:xfrm>
-          <a:prstGeom prst="rect">
-            <a:avLst/>
-          </a:prstGeom>
-          <a:noFill/>
-          <a:ln>
-            <a:noFill/>
-          </a:ln>
-        </p:spPr>
-        <p:txBody>
-          <a:bodyPr spcFirstLastPara="1" wrap="square" lIns="91425" tIns="91425" rIns="91425" bIns="91425" anchor="t" anchorCtr="0">
-            <a:spAutoFit/>
-          </a:bodyPr>
-          <a:lstStyle/>
-          <a:p>
-            <a:pPr marL="0" lvl="0" indent="0" algn="l" rtl="0">
-              <a:lnSpc>
-                <a:spcPct val="90000"/>
-              </a:lnSpc>
-              <a:spcBef>
-                <a:spcPts val="1000"/>
-              </a:spcBef>
-              <a:spcAft>
-                <a:spcPts val="0"/>
-              </a:spcAft>
-              <a:buNone/>
-            </a:pPr>
-            <a:r>
-              <a:rPr lang="ru-RU" sz="2300">
-                <a:latin typeface="Arial" panose="020B0604020202020204" pitchFamily="34" charset="0"/>
-                <a:cs typeface="Arial" panose="020B0604020202020204" pitchFamily="34" charset="0"/>
-              </a:rPr>
-              <a:t>Белый </a:t>
-            </a:r>
-            <a:endParaRPr>
-              <a:latin typeface="Arial" panose="020B0604020202020204" pitchFamily="34" charset="0"/>
-              <a:cs typeface="Arial" panose="020B0604020202020204" pitchFamily="34" charset="0"/>
-            </a:endParaRPr>
-          </a:p>
-        </p:txBody>
-      </p:sp>
-      <p:pic>
-        <p:nvPicPr>
-          <p:cNvPr id="14" name="Google Shape;156;p10">
-            <a:extLst>
-              <a:ext uri="{FF2B5EF4-FFF2-40B4-BE49-F238E27FC236}">
-                <a16:creationId xmlns:a16="http://schemas.microsoft.com/office/drawing/2014/main" id="{65CC09BE-340C-68EB-5561-B108653E24B0}"/>
-              </a:ext>
-            </a:extLst>
-          </p:cNvPr>
-          <p:cNvPicPr preferRelativeResize="0"/>
-          <p:nvPr/>
-        </p:nvPicPr>
-        <p:blipFill rotWithShape="1">
-          <a:blip r:embed="rId2">
-            <a:alphaModFix/>
-          </a:blip>
-          <a:srcRect l="1620" t="-1100" r="-1620" b="1100"/>
-          <a:stretch/>
-        </p:blipFill>
-        <p:spPr>
-          <a:xfrm>
-            <a:off x="6449875" y="416403"/>
-            <a:ext cx="2590800" cy="5690146"/>
-          </a:xfrm>
-          <a:prstGeom prst="rect">
-            <a:avLst/>
-          </a:prstGeom>
-          <a:noFill/>
-          <a:ln>
-            <a:noFill/>
-          </a:ln>
-        </p:spPr>
-      </p:pic>
     </p:spTree>
     <p:extLst>
       <p:ext uri="{BB962C8B-B14F-4D97-AF65-F5344CB8AC3E}">
-        <p14:creationId xmlns:p14="http://schemas.microsoft.com/office/powerpoint/2010/main" val="2426244533"/>
+        <p14:creationId xmlns:p14="http://schemas.microsoft.com/office/powerpoint/2010/main" val="561711780"/>
       </p:ext>
     </p:extLst>
   </p:cSld>
@@ -8693,70 +9868,6 @@
       </p:grpSpPr>
       <p:sp>
         <p:nvSpPr>
-          <p:cNvPr id="3" name="Google Shape;162;p11">
-            <a:extLst>
-              <a:ext uri="{FF2B5EF4-FFF2-40B4-BE49-F238E27FC236}">
-                <a16:creationId xmlns:a16="http://schemas.microsoft.com/office/drawing/2014/main" id="{9614D6CE-1EB8-4B83-B510-E291395A9325}"/>
-              </a:ext>
-            </a:extLst>
-          </p:cNvPr>
-          <p:cNvSpPr txBox="1">
-            <a:spLocks noGrp="1"/>
-          </p:cNvSpPr>
-          <p:nvPr>
-            <p:ph type="sldNum" idx="12"/>
-          </p:nvPr>
-        </p:nvSpPr>
-        <p:spPr>
-          <a:xfrm>
-            <a:off x="8088205" y="6271576"/>
-            <a:ext cx="3286760" cy="442595"/>
-          </a:xfrm>
-          <a:prstGeom prst="rect">
-            <a:avLst/>
-          </a:prstGeom>
-          <a:noFill/>
-          <a:ln>
-            <a:noFill/>
-          </a:ln>
-        </p:spPr>
-        <p:txBody>
-          <a:bodyPr spcFirstLastPara="1" wrap="square" lIns="91425" tIns="45700" rIns="91425" bIns="45700" anchor="ctr" anchorCtr="0">
-            <a:noAutofit/>
-          </a:bodyPr>
-          <a:lstStyle/>
-          <a:p>
-            <a:pPr marL="0" lvl="0" indent="0" algn="r" rtl="0">
-              <a:spcBef>
-                <a:spcPts val="0"/>
-              </a:spcBef>
-              <a:spcAft>
-                <a:spcPts val="0"/>
-              </a:spcAft>
-              <a:buNone/>
-            </a:pPr>
-            <a:fld id="{00000000-1234-1234-1234-123412341234}" type="slidenum">
-              <a:rPr lang="ru-RU">
-                <a:solidFill>
-                  <a:schemeClr val="tx1"/>
-                </a:solidFill>
-                <a:latin typeface="Arial" panose="020B0604020202020204" pitchFamily="34" charset="0"/>
-                <a:cs typeface="Arial" panose="020B0604020202020204" pitchFamily="34" charset="0"/>
-              </a:rPr>
-              <a:t>9</a:t>
-            </a:fld>
-            <a:endParaRPr dirty="0">
-              <a:solidFill>
-                <a:schemeClr val="tx1"/>
-              </a:solidFill>
-              <a:latin typeface="Arial" panose="020B0604020202020204" pitchFamily="34" charset="0"/>
-              <a:cs typeface="Arial" panose="020B0604020202020204" pitchFamily="34" charset="0"/>
-            </a:endParaRPr>
-          </a:p>
-        </p:txBody>
-      </p:sp>
-      <p:sp>
-        <p:nvSpPr>
           <p:cNvPr id="4" name="Google Shape;163;p11">
             <a:extLst>
               <a:ext uri="{FF2B5EF4-FFF2-40B4-BE49-F238E27FC236}">
@@ -8861,6 +9972,13 @@
           <a:ln>
             <a:noFill/>
           </a:ln>
+          <a:effectLst>
+            <a:outerShdw blurRad="50800" dist="38100" dir="2700000" algn="tl" rotWithShape="0">
+              <a:prstClr val="black">
+                <a:alpha val="40000"/>
+              </a:prstClr>
+            </a:outerShdw>
+          </a:effectLst>
         </p:spPr>
       </p:pic>
       <p:pic>
@@ -8894,6 +10012,13 @@
           <a:ln>
             <a:noFill/>
           </a:ln>
+          <a:effectLst>
+            <a:outerShdw blurRad="50800" dist="38100" dir="2700000" algn="tl" rotWithShape="0">
+              <a:prstClr val="black">
+                <a:alpha val="40000"/>
+              </a:prstClr>
+            </a:outerShdw>
+          </a:effectLst>
         </p:spPr>
       </p:pic>
       <p:pic>
@@ -8927,8 +10052,99 @@
           <a:ln>
             <a:noFill/>
           </a:ln>
+          <a:effectLst>
+            <a:outerShdw blurRad="50800" dist="38100" dir="2700000" algn="tl" rotWithShape="0">
+              <a:prstClr val="black">
+                <a:alpha val="40000"/>
+              </a:prstClr>
+            </a:outerShdw>
+          </a:effectLst>
         </p:spPr>
       </p:pic>
+      <p:sp>
+        <p:nvSpPr>
+          <p:cNvPr id="9" name="Google Shape;71;p5">
+            <a:extLst>
+              <a:ext uri="{FF2B5EF4-FFF2-40B4-BE49-F238E27FC236}">
+                <a16:creationId xmlns:a16="http://schemas.microsoft.com/office/drawing/2014/main" id="{02A235E7-6004-A679-E736-6EDCE2830DCF}"/>
+              </a:ext>
+            </a:extLst>
+          </p:cNvPr>
+          <p:cNvSpPr txBox="1">
+            <a:spLocks noGrp="1"/>
+          </p:cNvSpPr>
+          <p:nvPr>
+            <p:ph type="sldNum" idx="12"/>
+          </p:nvPr>
+        </p:nvSpPr>
+        <p:spPr>
+          <a:xfrm>
+            <a:off x="8610600" y="6308204"/>
+            <a:ext cx="3251106" cy="413272"/>
+          </a:xfrm>
+          <a:prstGeom prst="rect">
+            <a:avLst/>
+          </a:prstGeom>
+          <a:noFill/>
+          <a:ln>
+            <a:noFill/>
+          </a:ln>
+        </p:spPr>
+        <p:txBody>
+          <a:bodyPr spcFirstLastPara="1" wrap="square" lIns="91425" tIns="45700" rIns="91425" bIns="45700" anchor="ctr" anchorCtr="0">
+            <a:noAutofit/>
+          </a:bodyPr>
+          <a:lstStyle/>
+          <a:p>
+            <a:pPr marL="0" lvl="0" indent="0" algn="r" rtl="0">
+              <a:spcBef>
+                <a:spcPts val="0"/>
+              </a:spcBef>
+              <a:spcAft>
+                <a:spcPts val="0"/>
+              </a:spcAft>
+              <a:buNone/>
+            </a:pPr>
+            <a:fld id="{00000000-1234-1234-1234-123412341234}" type="slidenum">
+              <a:rPr lang="ru-RU" sz="1400" smtClean="0">
+                <a:solidFill>
+                  <a:schemeClr val="tx1"/>
+                </a:solidFill>
+                <a:latin typeface="Arial" panose="020B0604020202020204" pitchFamily="34" charset="0"/>
+                <a:cs typeface="Arial" panose="020B0604020202020204" pitchFamily="34" charset="0"/>
+              </a:rPr>
+              <a:t>9</a:t>
+            </a:fld>
+            <a:r>
+              <a:rPr lang="en-US" sz="1400" dirty="0">
+                <a:solidFill>
+                  <a:schemeClr val="tx1"/>
+                </a:solidFill>
+                <a:latin typeface="Arial" panose="020B0604020202020204" pitchFamily="34" charset="0"/>
+                <a:cs typeface="Arial" panose="020B0604020202020204" pitchFamily="34" charset="0"/>
+              </a:rPr>
+              <a:t>/1</a:t>
+            </a:r>
+            <a:r>
+              <a:rPr lang="ru-RU" sz="1400" dirty="0">
+                <a:solidFill>
+                  <a:schemeClr val="tx1"/>
+                </a:solidFill>
+                <a:latin typeface="Arial" panose="020B0604020202020204" pitchFamily="34" charset="0"/>
+                <a:cs typeface="Arial" panose="020B0604020202020204" pitchFamily="34" charset="0"/>
+              </a:rPr>
+              <a:t>3</a:t>
+            </a:r>
+            <a:endParaRPr sz="1400" dirty="0">
+              <a:solidFill>
+                <a:schemeClr val="tx1"/>
+              </a:solidFill>
+              <a:latin typeface="Arial" panose="020B0604020202020204" pitchFamily="34" charset="0"/>
+              <a:cs typeface="Arial" panose="020B0604020202020204" pitchFamily="34" charset="0"/>
+            </a:endParaRPr>
+          </a:p>
+        </p:txBody>
+      </p:sp>
     </p:spTree>
     <p:extLst>
       <p:ext uri="{BB962C8B-B14F-4D97-AF65-F5344CB8AC3E}">
